--- a/downloads/presentations/modules/lesson-59-measuring-ai-value-performance-and-operational-impact.pptx
+++ b/downloads/presentations/modules/lesson-59-measuring-ai-value-performance-and-operational-impact.pptx
@@ -23,9 +23,11 @@
     <p:sldId id="271" r:id="rId17"/>
     <p:sldId id="272" r:id="rId18"/>
     <p:sldId id="273" r:id="rId19"/>
+    <p:sldId id="274" r:id="rId20"/>
+    <p:sldId id="275" r:id="rId21"/>
   </p:sldIdLst>
   <p:notesMasterIdLst>
-    <p:notesMasterId r:id="rId20"/>
+    <p:notesMasterId r:id="rId22"/>
   </p:notesMasterIdLst>
   <p:sldSz cx="12192000" cy="6858000"/>
   <p:notesSz cx="6858000" cy="12192000"/>
@@ -608,10 +610,8 @@
           <a:p>
             <a:r>
               <a:rPr lang="en-US" dirty="0"/>
-              <a:t>Risks, Failure Modes, and Guardrails
-A common failure mode is treating the topic as a technical detail rather than a public health control. When staff do not connect technical decisions to authority, workflow, equity, privacy, security, and accountability, the agency may adopt a tool that appears useful but cannot be sustained or defended.
-Another risk is relying on vendor claims without agency-defined evidence. Vendors may provide demonstrations, dashboards, or summary metrics that do not match the agency workflow or data environment. A guardrail is to require documentation, test results, acceptance criteria, and agency-controlled review.
-A third risk is failing to plan for change. Public health data, policies, systems, and emergencies change. Any technical approach must include monitoring, review, versioning, escalation, and retirement pathways so the agency can respond when assumptions no longer hold.</a:t>
+              <a:t>Public Health Example
+A health department may deploy AI to summarize case reports with the goal of reducing investigator burden. Accuracy alone is not enough to prove value. The agency should also measure review time, editing burden, error types, investigator satisfaction, case completion timeliness, escalation frequency, subgroup performance, and whether staff continue to trust and use the tool appropriately.</a:t>
             </a:r>
             <a:endParaRPr lang="en-US" dirty="0"/>
           </a:p>
@@ -699,9 +699,10 @@
           <a:p>
             <a:r>
               <a:rPr lang="en-US" dirty="0"/>
-              <a:t>Application to AI-Supported Workflows
-Generative AI, predictive analytics, RAG, automation, and agentic workflows all depend on the controls described in this module. The controls should be scaled to the risk of the use case. A tool that drafts internal training text may require lighter review than a tool that updates case records, prioritizes outreach, or supports public communication during an emergency.
-The module should be applied during readiness assessment, procurement, implementation planning, pilot testing, and post-deployment monitoring. Learners should document how the topic affects data, systems, users, safeguards, and decision-making for the selected workflow.</a:t>
+              <a:t>Technical Deep Dive
+Value measurement begins with a theory of change. The team should explain how the AI capability is expected to improve the workflow and which outcomes should change. For example, a summarization tool may reduce review time, improve completeness, and allow staff to focus on complex cases. These assumptions should be tested rather than assumed.
+Measures should include technical, operational, equity, and governance indicators. Technical indicators may include accuracy, error rates, latency, and uptime. Operational indicators may include timeliness, backlog, staff burden, user adoption, and quality. Equity indicators may include subgroup performance, access, language, disability, and community impact. Governance indicators may include documentation completeness, incident reports, and monitoring review completion.
+Agencies should define action thresholds. If the tool produces too many errors, increases burden, performs poorly for a subgroup, or creates trust concerns, the agency should know whether to retrain, revise, restrict, pause, or retire the tool. Value measurement should support decisions, not merely reporting.</a:t>
             </a:r>
             <a:endParaRPr lang="en-US" dirty="0"/>
           </a:p>
@@ -789,10 +790,10 @@
           <a:p>
             <a:r>
               <a:rPr lang="en-US" dirty="0"/>
-              <a:t>Reflection Questions
-Where does this topic appear in one current or proposed AI workflow in your agency?
-What decisions, data sources, users, or partners would be affected if this area is poorly designed?
-What evidence would governance reviewers need before approving the workflow?</a:t>
+              <a:t>Risks, Failure Modes, and Guardrails
+A common failure mode is treating the topic as a technical detail rather than a public health control. When staff do not connect technical decisions to authority, workflow, equity, privacy, security, and accountability, the agency may adopt a tool that appears useful but cannot be sustained or defended.
+Another risk is relying on vendor claims without agency-defined evidence. Vendors may provide demonstrations, dashboards, or summary metrics that do not match the agency workflow or data environment. A guardrail is to require documentation, test results, acceptance criteria, and agency-controlled review.
+A third risk is failing to plan for change. Public health data, policies, systems, and emergencies change. Any technical approach must include monitoring, review, versioning, escalation, and retirement pathways so the agency can respond when assumptions no longer hold.</a:t>
             </a:r>
             <a:endParaRPr lang="en-US" dirty="0"/>
           </a:p>
@@ -880,9 +881,9 @@
           <a:p>
             <a:r>
               <a:rPr lang="en-US" dirty="0"/>
-              <a:t>Reflection Questions
-Which safeguards should be required before pilot testing?
-Who owns ongoing monitoring and review?</a:t>
+              <a:t>Application to AI-Supported Workflows
+Generative AI, predictive analytics, RAG, automation, and agentic workflows all depend on the controls described in this module. The controls should be scaled to the risk of the use case. A tool that drafts internal training text may require lighter review than a tool that updates case records, prioritizes outreach, or supports public communication during an emergency.
+The module should be applied during readiness assessment, procurement, implementation planning, pilot testing, and post-deployment monitoring. Learners should document how the topic affects data, systems, users, safeguards, and decision-making for the selected workflow.</a:t>
             </a:r>
             <a:endParaRPr lang="en-US" dirty="0"/>
           </a:p>
@@ -970,9 +971,10 @@
           <a:p>
             <a:r>
               <a:rPr lang="en-US" dirty="0"/>
-              <a:t>Practical Exercise
-Create a AI value and impact measurement plan for one real or realistic public health AI workflow. The artifact should describe the use case, affected users, data sources, system dependencies, risks, guardrails, review points, and unresolved questions.
-The exercise should produce a work product that could be used in a governance meeting, procurement review, implementation planning session, pilot evaluation, or monitoring review. Learners should document assumptions and identify which staff or partners need to be consulted.</a:t>
+              <a:t>Reflection Questions
+Where does this topic appear in one current or proposed AI workflow in your agency?
+What decisions, data sources, users, or partners would be affected if this area is poorly designed?
+What evidence would governance reviewers need before approving the workflow?</a:t>
             </a:r>
             <a:endParaRPr lang="en-US" dirty="0"/>
           </a:p>
@@ -1060,8 +1062,9 @@
           <a:p>
             <a:r>
               <a:rPr lang="en-US" dirty="0"/>
-              <a:t>Expected Artifact or Evidence
-The expected artifact is a completed AI value and impact measurement plan. It should be specific to a public health workflow and should include technical dependencies, governance questions, human review expectations, monitoring indicators, and unresolved risks.</a:t>
+              <a:t>Reflection Questions
+Which safeguards should be required before pilot testing?
+Who owns ongoing monitoring and review?</a:t>
             </a:r>
             <a:endParaRPr lang="en-US" dirty="0"/>
           </a:p>
@@ -1149,8 +1152,9 @@
           <a:p>
             <a:r>
               <a:rPr lang="en-US" dirty="0"/>
-              <a:t>Expected Assignment
-The expected artifact is a completed AI value and impact measurement plan. It should be specific to a public health workflow and should include technical dependencies, governance questions, human review expectations, monitoring indicators, and unresolved risks.</a:t>
+              <a:t>Practical Exercise
+Create a AI value and impact measurement plan for one real or realistic public health AI workflow. The artifact should describe the use case, affected users, data sources, system dependencies, risks, guardrails, review points, and unresolved questions.
+The exercise should produce a work product that could be used in a governance meeting, procurement review, implementation planning session, pilot evaluation, or monitoring review. Learners should document assumptions and identify which staff or partners need to be consulted.</a:t>
             </a:r>
             <a:endParaRPr lang="en-US" dirty="0"/>
           </a:p>
@@ -1238,12 +1242,8 @@
           <a:p>
             <a:r>
               <a:rPr lang="en-US" dirty="0"/>
-              <a:t>Knowledge Check
-1. What is the best reason to address measuring ai value, performance, and operational impact before deployment?
-2. Which practice best supports responsible implementation?
-3. Which statement best describes a common failure mode?
-4. What should be included in the practical artifact for this module?
-5. When should the issue be escalated for governance or leadership review?</a:t>
+              <a:t>Expected Artifact or Evidence
+The expected artifact is a completed AI value and impact measurement plan. It should be specific to a public health workflow and should include technical dependencies, governance questions, human review expectations, monitoring indicators, and unresolved risks.</a:t>
             </a:r>
             <a:endParaRPr lang="en-US" dirty="0"/>
           </a:p>
@@ -1331,12 +1331,8 @@
           <a:p>
             <a:r>
               <a:rPr lang="en-US" dirty="0"/>
-              <a:t>References and Resources
-CDC Evaluation Framework: https://www.cdc.gov/evaluation/
-CDC Public Health Data Strategy: https://www.cdc.gov/public-health-data-strategy/php/about/index.html
-NIST Artificial Intelligence Risk Management Framework: https://www.nist.gov/itl/ai-risk-management-framework
-NIST AI RMF Generative AI Profile: https://www.nist.gov/publications/artificial-intelligence-risk-management-framework-generative-artificial-intelligence
-Agency performance management, quality improvement, equity, and evaluation policies</a:t>
+              <a:t>Expected Assignment
+The expected artifact is a completed AI value and impact measurement plan. It should be specific to a public health workflow and should include technical dependencies, governance questions, human review expectations, monitoring indicators, and unresolved risks.</a:t>
             </a:r>
             <a:endParaRPr lang="en-US" dirty="0"/>
           </a:p>
@@ -1360,6 +1356,99 @@
             <a:fld id="{F7021451-1387-4CA6-816F-3879F97B5CBC}" type="slidenum">
               <a:rPr lang="en-US"/>
               <a:t>18</a:t>
+            </a:fld>
+            <a:endParaRPr lang="en-US"/>
+          </a:p>
+        </p:txBody>
+      </p:sp>
+    </p:spTree>
+    <p:extLst>
+      <p:ext uri="{BB962C8B-B14F-4D97-AF65-F5344CB8AC3E}">
+        <p14:creationId xmlns:p14="http://schemas.microsoft.com/office/powerpoint/2010/main" val="1024086991"/>
+      </p:ext>
+    </p:extLst>
+  </p:cSld>
+  <p:clrMapOvr>
+    <a:masterClrMapping/>
+  </p:clrMapOvr>
+</p:notes>
+</file>
+
+<file path=ppt/notesSlides/notesSlide19.xml><?xml version="1.0" encoding="utf-8"?>
+<p:notes xmlns:a="http://schemas.openxmlformats.org/drawingml/2006/main" xmlns:r="http://schemas.openxmlformats.org/officeDocument/2006/relationships" xmlns:p="http://schemas.openxmlformats.org/presentationml/2006/main">
+  <p:cSld>
+    <p:spTree>
+      <p:nvGrpSpPr>
+        <p:cNvPr id="1" name=""/>
+        <p:cNvGrpSpPr/>
+        <p:nvPr/>
+      </p:nvGrpSpPr>
+      <p:grpSpPr>
+        <a:xfrm>
+          <a:off x="0" y="0"/>
+          <a:ext cx="0" cy="0"/>
+          <a:chOff x="0" y="0"/>
+          <a:chExt cx="0" cy="0"/>
+        </a:xfrm>
+      </p:grpSpPr>
+      <p:sp>
+        <p:nvSpPr>
+          <p:cNvPr id="2" name="Slide Image Placeholder 1"/>
+          <p:cNvSpPr>
+            <a:spLocks noGrp="1" noRot="1" noChangeAspect="1"/>
+          </p:cNvSpPr>
+          <p:nvPr>
+            <p:ph type="sldImg"/>
+          </p:nvPr>
+        </p:nvSpPr>
+        <p:spPr/>
+      </p:sp>
+      <p:sp>
+        <p:nvSpPr>
+          <p:cNvPr id="3" name="Notes Placeholder 2"/>
+          <p:cNvSpPr>
+            <a:spLocks noGrp="1"/>
+          </p:cNvSpPr>
+          <p:nvPr>
+            <p:ph type="body" idx="1"/>
+          </p:nvPr>
+        </p:nvSpPr>
+        <p:spPr/>
+        <p:txBody>
+          <a:bodyPr/>
+          <a:lstStyle/>
+          <a:p>
+            <a:r>
+              <a:rPr lang="en-US" dirty="0"/>
+              <a:t>Knowledge Check
+1. What is the best reason to address measuring ai value, performance, and operational impact before deployment?
+2. Which practice best supports responsible implementation?
+3. Which statement best describes a common failure mode?
+4. What should be included in the practical artifact for this module?
+5. When should the issue be escalated for governance or leadership review?</a:t>
+            </a:r>
+            <a:endParaRPr lang="en-US" dirty="0"/>
+          </a:p>
+        </p:txBody>
+      </p:sp>
+      <p:sp>
+        <p:nvSpPr>
+          <p:cNvPr id="4" name="Slide Number Placeholder 3"/>
+          <p:cNvSpPr>
+            <a:spLocks noGrp="1"/>
+          </p:cNvSpPr>
+          <p:nvPr>
+            <p:ph type="sldNum" sz="quarter" idx="10"/>
+          </p:nvPr>
+        </p:nvSpPr>
+        <p:spPr/>
+        <p:txBody>
+          <a:bodyPr/>
+          <a:lstStyle/>
+          <a:p>
+            <a:fld id="{F7021451-1387-4CA6-816F-3879F97B5CBC}" type="slidenum">
+              <a:rPr lang="en-US"/>
+              <a:t>19</a:t>
             </a:fld>
             <a:endParaRPr lang="en-US"/>
           </a:p>
@@ -1470,6 +1559,99 @@
 </p:notes>
 </file>
 
+<file path=ppt/notesSlides/notesSlide20.xml><?xml version="1.0" encoding="utf-8"?>
+<p:notes xmlns:a="http://schemas.openxmlformats.org/drawingml/2006/main" xmlns:r="http://schemas.openxmlformats.org/officeDocument/2006/relationships" xmlns:p="http://schemas.openxmlformats.org/presentationml/2006/main">
+  <p:cSld>
+    <p:spTree>
+      <p:nvGrpSpPr>
+        <p:cNvPr id="1" name=""/>
+        <p:cNvGrpSpPr/>
+        <p:nvPr/>
+      </p:nvGrpSpPr>
+      <p:grpSpPr>
+        <a:xfrm>
+          <a:off x="0" y="0"/>
+          <a:ext cx="0" cy="0"/>
+          <a:chOff x="0" y="0"/>
+          <a:chExt cx="0" cy="0"/>
+        </a:xfrm>
+      </p:grpSpPr>
+      <p:sp>
+        <p:nvSpPr>
+          <p:cNvPr id="2" name="Slide Image Placeholder 1"/>
+          <p:cNvSpPr>
+            <a:spLocks noGrp="1" noRot="1" noChangeAspect="1"/>
+          </p:cNvSpPr>
+          <p:nvPr>
+            <p:ph type="sldImg"/>
+          </p:nvPr>
+        </p:nvSpPr>
+        <p:spPr/>
+      </p:sp>
+      <p:sp>
+        <p:nvSpPr>
+          <p:cNvPr id="3" name="Notes Placeholder 2"/>
+          <p:cNvSpPr>
+            <a:spLocks noGrp="1"/>
+          </p:cNvSpPr>
+          <p:nvPr>
+            <p:ph type="body" idx="1"/>
+          </p:nvPr>
+        </p:nvSpPr>
+        <p:spPr/>
+        <p:txBody>
+          <a:bodyPr/>
+          <a:lstStyle/>
+          <a:p>
+            <a:r>
+              <a:rPr lang="en-US" dirty="0"/>
+              <a:t>References and Resources
+CDC Evaluation Framework: https://www.cdc.gov/evaluation/
+CDC Public Health Data Strategy: https://www.cdc.gov/public-health-data-strategy/php/about/index.html
+NIST Artificial Intelligence Risk Management Framework: https://www.nist.gov/itl/ai-risk-management-framework
+NIST AI RMF Generative AI Profile: https://www.nist.gov/publications/artificial-intelligence-risk-management-framework-generative-artificial-intelligence
+Agency performance management, quality improvement, equity, and evaluation policies</a:t>
+            </a:r>
+            <a:endParaRPr lang="en-US" dirty="0"/>
+          </a:p>
+        </p:txBody>
+      </p:sp>
+      <p:sp>
+        <p:nvSpPr>
+          <p:cNvPr id="4" name="Slide Number Placeholder 3"/>
+          <p:cNvSpPr>
+            <a:spLocks noGrp="1"/>
+          </p:cNvSpPr>
+          <p:nvPr>
+            <p:ph type="sldNum" sz="quarter" idx="10"/>
+          </p:nvPr>
+        </p:nvSpPr>
+        <p:spPr/>
+        <p:txBody>
+          <a:bodyPr/>
+          <a:lstStyle/>
+          <a:p>
+            <a:fld id="{F7021451-1387-4CA6-816F-3879F97B5CBC}" type="slidenum">
+              <a:rPr lang="en-US"/>
+              <a:t>20</a:t>
+            </a:fld>
+            <a:endParaRPr lang="en-US"/>
+          </a:p>
+        </p:txBody>
+      </p:sp>
+    </p:spTree>
+    <p:extLst>
+      <p:ext uri="{BB962C8B-B14F-4D97-AF65-F5344CB8AC3E}">
+        <p14:creationId xmlns:p14="http://schemas.microsoft.com/office/powerpoint/2010/main" val="1024086991"/>
+      </p:ext>
+    </p:extLst>
+  </p:cSld>
+  <p:clrMapOvr>
+    <a:masterClrMapping/>
+  </p:clrMapOvr>
+</p:notes>
+</file>
+
 <file path=ppt/notesSlides/notesSlide3.xml><?xml version="1.0" encoding="utf-8"?>
 <p:notes xmlns:a="http://schemas.openxmlformats.org/drawingml/2006/main" xmlns:r="http://schemas.openxmlformats.org/officeDocument/2006/relationships" xmlns:p="http://schemas.openxmlformats.org/presentationml/2006/main">
   <p:cSld>
@@ -1516,12 +1698,11 @@
           <a:p>
             <a:r>
               <a:rPr lang="en-US" dirty="0"/>
-              <a:t>Learning Objectives
-Explain the purpose of measuring ai value, performance, and operational impact in public health AI work.
-Identify the technical, operational, privacy, security, equity, and governance issues associated with the topic.
-Apply the topic to a real or realistic public health workflow, system, or implementation scenario.
-Recognize common failure modes that can affect safety, accuracy, trust, workflow fit, or sustainability.
-Identify practical guardrails that should be documented before implementation.</a:t>
+              <a:t>Related Playbook Plays
+Play 11: Build and Deploy AI Solutions - This lesson informs Play 11 by helping learners connect the lesson topic to build and deploy ai solutions work in the AI Playbook.
+Play 2: Readiness Assessment - This lesson informs Play 2 by helping learners connect the lesson topic to readiness assessment work in the AI Playbook sequence.
+Play 7: Prioritize Use Cases - This lesson informs Play 7 by helping learners connect the lesson topic to prioritize use cases work in the AI Playbook sequence.
+Play 13: Monitor and Evaluate AI Systems - This lesson informs Play 13 by helping learners connect the lesson topic to monitor and evaluate ai systems work in the AI Playbook.</a:t>
             </a:r>
             <a:endParaRPr lang="en-US" dirty="0"/>
           </a:p>
@@ -1609,8 +1790,13 @@
           <a:p>
             <a:r>
               <a:rPr lang="en-US" dirty="0"/>
-              <a:t>Learning Objectives
-Produce a AI value and impact measurement plan that can support readiness assessment, governance review, procurement, implementation, or monitoring.</a:t>
+              <a:t>Related Toolkit Resources
+Tool 4: AI Policy Landscape Scan (Worksheet) - Use AI Policy Landscape Scan to translate this lesson into a documented public health AI planning, governance, implementation,.
+Tool 5: AI Environmental and Resource Impact Review (Checklist) - Use this tool to complete or strengthen the practical exercise for the module using fictional, de-identified, or generalized.
+Tool 6: Human-Centered AI Decision Rule Checklist (Checklist) - Use Human-Centered AI Decision Rule Checklist to translate this lesson into a documented public health AI planning, governance,.
+Tool 8: AI Project Charter (Planning) - Use AI Project Charter to translate this lesson into a documented public health AI planning, governance, implementation, or.
+Tool 9: Data Quality Assessment Checklist (Checklist) - Use this tool to complete or strengthen the practical exercise for the module using fictional, de-identified, or generalized.
+Tool 10: Tiered Data Classification for AI Use (Worksheet) - Use this tool to complete or strengthen the practical exercise for the module using fictional, de-identified, or generalized.</a:t>
             </a:r>
             <a:endParaRPr lang="en-US" dirty="0"/>
           </a:p>
@@ -1698,8 +1884,12 @@
           <a:p>
             <a:r>
               <a:rPr lang="en-US" dirty="0"/>
-              <a:t>Module Overview
-AI tools should be evaluated not only by model accuracy, but also by whether they improve public health operations and outcomes. This module teaches learners to define measures for timeliness, quality, equity, staff burden, cost, user satisfaction, safety, trust, and sustainability. It helps agencies avoid adopting AI because it is novel and instead assess whether it creates measurable public value.</a:t>
+              <a:t>Learning Objectives
+Explain the purpose of measuring ai value, performance, and operational impact in public health AI work.
+Identify the technical, operational, privacy, security, equity, and governance issues associated with the topic.
+Apply the topic to a real or realistic public health workflow, system, or implementation scenario.
+Recognize common failure modes that can affect safety, accuracy, trust, workflow fit, or sustainability.
+Identify practical guardrails that should be documented before implementation.</a:t>
             </a:r>
             <a:endParaRPr lang="en-US" dirty="0"/>
           </a:p>
@@ -1787,9 +1977,8 @@
           <a:p>
             <a:r>
               <a:rPr lang="en-US" dirty="0"/>
-              <a:t>Why This Topic Matters for Public Health AI
-Measuring AI Value, Performance, and Operational Impact matters because AI systems are embedded in public health programs, data systems, and decision processes rather than operating in isolation. The topic affects whether AI outputs are accurate, explainable, safe, equitable, secure, and sustainable. Agencies that ignore this area may create tools that work in a demonstration but fail in actual practice.
-The topic also affects accountability. Public health agencies must be able to explain how data are used, why a tool was approved, what evidence supports the workflow, who reviews outputs, and what happens when the system fails. These responsibilities become more important as AI tools move from experimentation into operational use.</a:t>
+              <a:t>Learning Objectives
+Produce a AI value and impact measurement plan that can support readiness assessment, governance review, procurement, implementation, or monitoring.</a:t>
             </a:r>
             <a:endParaRPr lang="en-US" dirty="0"/>
           </a:p>
@@ -1877,10 +2066,8 @@
           <a:p>
             <a:r>
               <a:rPr lang="en-US" dirty="0"/>
-              <a:t>Core Concepts
-AI value is the benefit created by an AI-supported workflow relative to its costs, risks, and alternatives. Value may include faster response, improved quality, reduced burden, better access, stronger equity, improved documentation, or better use of limited resources.
-Model performance measures how well the AI system performs a technical task. Operational impact measures whether the workflow actually improves public health practice. A model can have strong technical metrics and still fail to reduce burden, improve timeliness, or support equitable outcomes.
-Evaluation should be planned before implementation. Agencies should define baseline measures, target outcomes, data sources, review frequency, and decision rules for continuation, modification, scaling, or retirement.</a:t>
+              <a:t>Module Overview
+AI tools should be evaluated not only by model accuracy, but also by whether they improve public health operations and outcomes. This module teaches learners to define measures for timeliness, quality, equity, staff burden, cost, user satisfaction, safety, trust, and sustainability. It helps agencies avoid adopting AI because it is novel and instead assess whether it creates measurable public value.</a:t>
             </a:r>
             <a:endParaRPr lang="en-US" dirty="0"/>
           </a:p>
@@ -1968,8 +2155,9 @@
           <a:p>
             <a:r>
               <a:rPr lang="en-US" dirty="0"/>
-              <a:t>Public Health Example
-A health department may deploy AI to summarize case reports with the goal of reducing investigator burden. Accuracy alone is not enough to prove value. The agency should also measure review time, editing burden, error types, investigator satisfaction, case completion timeliness, escalation frequency, subgroup performance, and whether staff continue to trust and use the tool appropriately.</a:t>
+              <a:t>Why This Topic Matters for Public Health AI
+Measuring AI Value, Performance, and Operational Impact matters because AI systems are embedded in public health programs, data systems, and decision processes rather than operating in isolation. The topic affects whether AI outputs are accurate, explainable, safe, equitable, secure, and sustainable. Agencies that ignore this area may create tools that work in a demonstration but fail in actual practice.
+The topic also affects accountability. Public health agencies must be able to explain how data are used, why a tool was approved, what evidence supports the workflow, who reviews outputs, and what happens when the system fails. These responsibilities become more important as AI tools move from experimentation into operational use.</a:t>
             </a:r>
             <a:endParaRPr lang="en-US" dirty="0"/>
           </a:p>
@@ -2057,10 +2245,10 @@
           <a:p>
             <a:r>
               <a:rPr lang="en-US" dirty="0"/>
-              <a:t>Technical Deep Dive
-Value measurement begins with a theory of change. The team should explain how the AI capability is expected to improve the workflow and which outcomes should change. For example, a summarization tool may reduce review time, improve completeness, and allow staff to focus on complex cases. These assumptions should be tested rather than assumed.
-Measures should include technical, operational, equity, and governance indicators. Technical indicators may include accuracy, error rates, latency, and uptime. Operational indicators may include timeliness, backlog, staff burden, user adoption, and quality. Equity indicators may include subgroup performance, access, language, disability, and community impact. Governance indicators may include documentation completeness, incident reports, and monitoring review completion.
-Agencies should define action thresholds. If the tool produces too many errors, increases burden, performs poorly for a subgroup, or creates trust concerns, the agency should know whether to retrain, revise, restrict, pause, or retire the tool. Value measurement should support decisions, not merely reporting.</a:t>
+              <a:t>Core Concepts
+AI value is the benefit created by an AI-supported workflow relative to its costs, risks, and alternatives. Value may include faster response, improved quality, reduced burden, better access, stronger equity, improved documentation, or better use of limited resources.
+Model performance measures how well the AI system performs a technical task. Operational impact measures whether the workflow actually improves public health practice. A model can have strong technical metrics and still fail to reduce burden, improve timeliness, or support equitable outcomes.
+Evaluation should be planned before implementation. Agencies should define baseline measures, target outcomes, data sources, review frequency, and decision rules for continuation, modification, scaling, or retirement.</a:t>
             </a:r>
             <a:endParaRPr lang="en-US" dirty="0"/>
           </a:p>
@@ -2683,7 +2871,32 @@
       </p:sp>
       <p:sp>
         <p:nvSpPr>
-          <p:cNvPr id="3" name="Text 1"/>
+          <p:cNvPr id="3" name="Shape 1"/>
+          <p:cNvSpPr/>
+          <p:nvPr/>
+        </p:nvSpPr>
+        <p:spPr>
+          <a:xfrm>
+            <a:off x="0" y="164592"/>
+            <a:ext cx="146304" cy="6693408"/>
+          </a:xfrm>
+          <a:prstGeom prst="rect">
+            <a:avLst/>
+          </a:prstGeom>
+          <a:solidFill>
+            <a:srgbClr val="2F8A28"/>
+          </a:solidFill>
+          <a:ln w="12700">
+            <a:solidFill>
+              <a:srgbClr val="2F8A28"/>
+            </a:solidFill>
+            <a:prstDash val="solid"/>
+          </a:ln>
+        </p:spPr>
+      </p:sp>
+      <p:sp>
+        <p:nvSpPr>
+          <p:cNvPr id="4" name="Text 2"/>
           <p:cNvSpPr/>
           <p:nvPr/>
         </p:nvSpPr>
@@ -2722,7 +2935,7 @@
       </p:sp>
       <p:sp>
         <p:nvSpPr>
-          <p:cNvPr id="4" name="Text 2"/>
+          <p:cNvPr id="5" name="Text 3"/>
           <p:cNvSpPr/>
           <p:nvPr/>
         </p:nvSpPr>
@@ -2761,7 +2974,7 @@
       </p:sp>
       <p:sp>
         <p:nvSpPr>
-          <p:cNvPr id="5" name="Text 3"/>
+          <p:cNvPr id="6" name="Text 4"/>
           <p:cNvSpPr/>
           <p:nvPr/>
         </p:nvSpPr>
@@ -2800,13 +3013,77 @@
       </p:sp>
       <p:sp>
         <p:nvSpPr>
-          <p:cNvPr id="6" name="Text 4"/>
+          <p:cNvPr id="7" name="Shape 5"/>
           <p:cNvSpPr/>
           <p:nvPr/>
         </p:nvSpPr>
         <p:spPr>
           <a:xfrm>
             <a:off x="640080" y="658368"/>
+            <a:ext cx="420624" cy="420624"/>
+          </a:xfrm>
+          <a:prstGeom prst="ellipse">
+            <a:avLst/>
+          </a:prstGeom>
+          <a:solidFill>
+            <a:srgbClr val="0068B7"/>
+          </a:solidFill>
+          <a:ln w="12700">
+            <a:solidFill>
+              <a:srgbClr val="0068B7"/>
+            </a:solidFill>
+            <a:prstDash val="solid"/>
+          </a:ln>
+        </p:spPr>
+      </p:sp>
+      <p:sp>
+        <p:nvSpPr>
+          <p:cNvPr id="8" name="Text 6"/>
+          <p:cNvSpPr/>
+          <p:nvPr/>
+        </p:nvSpPr>
+        <p:spPr>
+          <a:xfrm>
+            <a:off x="640080" y="731520"/>
+            <a:ext cx="420624" cy="164592"/>
+          </a:xfrm>
+          <a:prstGeom prst="rect">
+            <a:avLst/>
+          </a:prstGeom>
+          <a:noFill/>
+          <a:ln/>
+        </p:spPr>
+        <p:txBody>
+          <a:bodyPr wrap="square" lIns="0" tIns="0" rIns="0" bIns="0" rtlCol="0" anchor="ctr"/>
+          <a:lstStyle/>
+          <a:p>
+            <a:pPr algn="ctr" indent="0" marL="0">
+              <a:buNone/>
+            </a:pPr>
+            <a:r>
+              <a:rPr lang="en-US" sz="1100" b="1" dirty="0">
+                <a:solidFill>
+                  <a:srgbClr val="FFFFFF"/>
+                </a:solidFill>
+                <a:latin typeface="Aptos" pitchFamily="34" charset="0"/>
+                <a:ea typeface="Aptos" pitchFamily="34" charset="-122"/>
+                <a:cs typeface="Aptos" pitchFamily="34" charset="-120"/>
+              </a:rPr>
+              <a:t>5</a:t>
+            </a:r>
+            <a:endParaRPr lang="en-US" sz="1100" dirty="0"/>
+          </a:p>
+        </p:txBody>
+      </p:sp>
+      <p:sp>
+        <p:nvSpPr>
+          <p:cNvPr id="9" name="Text 7"/>
+          <p:cNvSpPr/>
+          <p:nvPr/>
+        </p:nvSpPr>
+        <p:spPr>
+          <a:xfrm>
+            <a:off x="640080" y="621792"/>
             <a:ext cx="10881360" cy="566928"/>
           </a:xfrm>
           <a:prstGeom prst="rect">
@@ -2833,7 +3110,7 @@
                 <a:ea typeface="Aptos Display" pitchFamily="34" charset="-122"/>
                 <a:cs typeface="Aptos Display" pitchFamily="34" charset="-120"/>
               </a:rPr>
-              <a:t>Risks, Failure Modes, and Guardrails</a:t>
+              <a:t>Public Health Example</a:t>
             </a:r>
             <a:endParaRPr lang="en-US" sz="2700" dirty="0"/>
           </a:p>
@@ -2841,32 +3118,164 @@
       </p:sp>
       <p:sp>
         <p:nvSpPr>
-          <p:cNvPr id="7" name="Text 5"/>
-          <p:cNvSpPr/>
-          <p:nvPr/>
-        </p:nvSpPr>
-        <p:spPr>
-          <a:xfrm>
-            <a:off x="822960" y="1325880"/>
-            <a:ext cx="10378440" cy="4800600"/>
-          </a:xfrm>
-          <a:prstGeom prst="rect">
-            <a:avLst/>
-          </a:prstGeom>
-          <a:noFill/>
-          <a:ln/>
-        </p:spPr>
-        <p:txBody>
-          <a:bodyPr wrap="square" lIns="1016" tIns="1016" rIns="1016" bIns="1016" rtlCol="0" anchor="t">
+          <p:cNvPr id="10" name="Text 8"/>
+          <p:cNvSpPr/>
+          <p:nvPr/>
+        </p:nvSpPr>
+        <p:spPr>
+          <a:xfrm>
+            <a:off x="868680" y="1417320"/>
+            <a:ext cx="6675120" cy="4434840"/>
+          </a:xfrm>
+          <a:prstGeom prst="rect">
+            <a:avLst/>
+          </a:prstGeom>
+          <a:noFill/>
+          <a:ln/>
+        </p:spPr>
+        <p:txBody>
+          <a:bodyPr wrap="square" lIns="635" tIns="635" rIns="635" bIns="635" rtlCol="0" anchor="t">
             <a:normAutofit/>
           </a:bodyPr>
           <a:lstStyle/>
           <a:p>
+            <a:r>
+              <a:rPr lang="en-US" sz="1700" dirty="0">
+                <a:solidFill>
+                  <a:srgbClr val="17364A"/>
+                </a:solidFill>
+                <a:latin typeface="Aptos" pitchFamily="34" charset="0"/>
+                <a:ea typeface="Aptos" pitchFamily="34" charset="-122"/>
+                <a:cs typeface="Aptos" pitchFamily="34" charset="-120"/>
+              </a:rPr>
+              <a:t>A health department may deploy AI to summarize case reports with the goal of reducing investigator burden.</a:t>
+            </a:r>
+            <a:endParaRPr lang="en-US" sz="1700" dirty="0"/>
+          </a:p>
+          <a:p>
+            <a:r>
+              <a:rPr lang="en-US" sz="1700" dirty="0">
+                <a:solidFill>
+                  <a:srgbClr val="17364A"/>
+                </a:solidFill>
+                <a:latin typeface="Aptos" pitchFamily="34" charset="0"/>
+                <a:ea typeface="Aptos" pitchFamily="34" charset="-122"/>
+                <a:cs typeface="Aptos" pitchFamily="34" charset="-120"/>
+              </a:rPr>
+              <a:t>Accuracy alone is not enough to prove value.</a:t>
+            </a:r>
+            <a:endParaRPr lang="en-US" sz="1700" dirty="0"/>
+          </a:p>
+          <a:p>
+            <a:r>
+              <a:rPr lang="en-US" sz="1700" dirty="0">
+                <a:solidFill>
+                  <a:srgbClr val="17364A"/>
+                </a:solidFill>
+                <a:latin typeface="Aptos" pitchFamily="34" charset="0"/>
+                <a:ea typeface="Aptos" pitchFamily="34" charset="-122"/>
+                <a:cs typeface="Aptos" pitchFamily="34" charset="-120"/>
+              </a:rPr>
+              <a:t>The agency should also measure review time, editing burden, error types, investigator satisfaction, case completion.</a:t>
+            </a:r>
+            <a:endParaRPr lang="en-US" sz="1700" dirty="0"/>
+          </a:p>
+        </p:txBody>
+      </p:sp>
+      <p:sp>
+        <p:nvSpPr>
+          <p:cNvPr id="11" name="Shape 9"/>
+          <p:cNvSpPr/>
+          <p:nvPr/>
+        </p:nvSpPr>
+        <p:spPr>
+          <a:xfrm>
+            <a:off x="7909560" y="1417320"/>
+            <a:ext cx="3154680" cy="1828800"/>
+          </a:xfrm>
+          <a:prstGeom prst="roundRect">
+            <a:avLst>
+              <a:gd name="adj" fmla="val 6000"/>
+            </a:avLst>
+          </a:prstGeom>
+          <a:solidFill>
+            <a:srgbClr val="EEF8ED"/>
+          </a:solidFill>
+          <a:ln w="12700">
+            <a:solidFill>
+              <a:srgbClr val="B9D7E6"/>
+            </a:solidFill>
+            <a:prstDash val="solid"/>
+          </a:ln>
+        </p:spPr>
+      </p:sp>
+      <p:sp>
+        <p:nvSpPr>
+          <p:cNvPr id="12" name="Text 10"/>
+          <p:cNvSpPr/>
+          <p:nvPr/>
+        </p:nvSpPr>
+        <p:spPr>
+          <a:xfrm>
+            <a:off x="8074152" y="1563624"/>
+            <a:ext cx="2825496" cy="201168"/>
+          </a:xfrm>
+          <a:prstGeom prst="rect">
+            <a:avLst/>
+          </a:prstGeom>
+          <a:noFill/>
+          <a:ln/>
+        </p:spPr>
+        <p:txBody>
+          <a:bodyPr wrap="square" lIns="0" tIns="0" rIns="0" bIns="0" rtlCol="0" anchor="ctr"/>
+          <a:lstStyle/>
+          <a:p>
             <a:pPr indent="0" marL="0">
               <a:buNone/>
             </a:pPr>
             <a:r>
-              <a:rPr lang="en-US" sz="1420" dirty="0">
+              <a:rPr lang="en-US" sz="950" b="1" dirty="0">
+                <a:solidFill>
+                  <a:srgbClr val="0068B7"/>
+                </a:solidFill>
+                <a:latin typeface="Aptos" pitchFamily="34" charset="0"/>
+                <a:ea typeface="Aptos" pitchFamily="34" charset="-122"/>
+                <a:cs typeface="Aptos" pitchFamily="34" charset="-120"/>
+              </a:rPr>
+              <a:t>Key idea</a:t>
+            </a:r>
+            <a:endParaRPr lang="en-US" sz="950" dirty="0"/>
+          </a:p>
+        </p:txBody>
+      </p:sp>
+      <p:sp>
+        <p:nvSpPr>
+          <p:cNvPr id="13" name="Text 11"/>
+          <p:cNvSpPr/>
+          <p:nvPr/>
+        </p:nvSpPr>
+        <p:spPr>
+          <a:xfrm>
+            <a:off x="8074152" y="1856232"/>
+            <a:ext cx="2825496" cy="1261872"/>
+          </a:xfrm>
+          <a:prstGeom prst="rect">
+            <a:avLst/>
+          </a:prstGeom>
+          <a:noFill/>
+          <a:ln/>
+        </p:spPr>
+        <p:txBody>
+          <a:bodyPr wrap="square" lIns="0" tIns="0" rIns="0" bIns="0" rtlCol="0" anchor="t">
+            <a:normAutofit/>
+          </a:bodyPr>
+          <a:lstStyle/>
+          <a:p>
+            <a:pPr indent="0" marL="0">
+              <a:buNone/>
+            </a:pPr>
+            <a:r>
+              <a:rPr lang="en-US" sz="1250" dirty="0">
                 <a:solidFill>
                   <a:srgbClr val="17364A"/>
                 </a:solidFill>
@@ -2874,9 +3283,116 @@
                 <a:ea typeface="Aptos" pitchFamily="34" charset="-122"/>
                 <a:cs typeface="Aptos" pitchFamily="34" charset="-120"/>
               </a:rPr>
-              <a:t>A common failure mode is treating the topic as a technical detail rather than a public health control. When staff do not connect technical decisions to authority, workflow, equity, privacy, security, and accountability, the agency may adopt a tool that appears useful but cannot be sustained or defended. Another risk is relying on vendor claims without agency-defined evidence. Vendors may provide demonstrations, dashboards, or summary metrics that do not match the agency workflow or data environment. A guardrail is to require documentation, test results, acceptance criteria, and agency-controlled review. A third risk is failing to plan for change. Public health data, policies, systems, and emergencies change. Any technical approach must include monitoring, review, versioning, escalation, and retirement pathways so the agency can respond when assumptions no longer hold.</a:t>
-            </a:r>
-            <a:endParaRPr lang="en-US" sz="1420" dirty="0"/>
+              <a:t>A health department may deploy AI to summarize case reports with the goal of reducing investigator burden.</a:t>
+            </a:r>
+            <a:endParaRPr lang="en-US" sz="1250" dirty="0"/>
+          </a:p>
+        </p:txBody>
+      </p:sp>
+      <p:sp>
+        <p:nvSpPr>
+          <p:cNvPr id="14" name="Shape 12"/>
+          <p:cNvSpPr/>
+          <p:nvPr/>
+        </p:nvSpPr>
+        <p:spPr>
+          <a:xfrm>
+            <a:off x="7909560" y="3520440"/>
+            <a:ext cx="3154680" cy="1737360"/>
+          </a:xfrm>
+          <a:prstGeom prst="roundRect">
+            <a:avLst>
+              <a:gd name="adj" fmla="val 6316"/>
+            </a:avLst>
+          </a:prstGeom>
+          <a:solidFill>
+            <a:srgbClr val="EAF6F8"/>
+          </a:solidFill>
+          <a:ln w="12700">
+            <a:solidFill>
+              <a:srgbClr val="B9D7E6"/>
+            </a:solidFill>
+            <a:prstDash val="solid"/>
+          </a:ln>
+        </p:spPr>
+      </p:sp>
+      <p:sp>
+        <p:nvSpPr>
+          <p:cNvPr id="15" name="Text 13"/>
+          <p:cNvSpPr/>
+          <p:nvPr/>
+        </p:nvSpPr>
+        <p:spPr>
+          <a:xfrm>
+            <a:off x="8074152" y="3666744"/>
+            <a:ext cx="2825496" cy="201168"/>
+          </a:xfrm>
+          <a:prstGeom prst="rect">
+            <a:avLst/>
+          </a:prstGeom>
+          <a:noFill/>
+          <a:ln/>
+        </p:spPr>
+        <p:txBody>
+          <a:bodyPr wrap="square" lIns="0" tIns="0" rIns="0" bIns="0" rtlCol="0" anchor="ctr"/>
+          <a:lstStyle/>
+          <a:p>
+            <a:pPr indent="0" marL="0">
+              <a:buNone/>
+            </a:pPr>
+            <a:r>
+              <a:rPr lang="en-US" sz="950" b="1" dirty="0">
+                <a:solidFill>
+                  <a:srgbClr val="0068B7"/>
+                </a:solidFill>
+                <a:latin typeface="Aptos" pitchFamily="34" charset="0"/>
+                <a:ea typeface="Aptos" pitchFamily="34" charset="-122"/>
+                <a:cs typeface="Aptos" pitchFamily="34" charset="-120"/>
+              </a:rPr>
+              <a:t>Use this for</a:t>
+            </a:r>
+            <a:endParaRPr lang="en-US" sz="950" dirty="0"/>
+          </a:p>
+        </p:txBody>
+      </p:sp>
+      <p:sp>
+        <p:nvSpPr>
+          <p:cNvPr id="16" name="Text 14"/>
+          <p:cNvSpPr/>
+          <p:nvPr/>
+        </p:nvSpPr>
+        <p:spPr>
+          <a:xfrm>
+            <a:off x="8074152" y="3959352"/>
+            <a:ext cx="2825496" cy="1170432"/>
+          </a:xfrm>
+          <a:prstGeom prst="rect">
+            <a:avLst/>
+          </a:prstGeom>
+          <a:noFill/>
+          <a:ln/>
+        </p:spPr>
+        <p:txBody>
+          <a:bodyPr wrap="square" lIns="0" tIns="0" rIns="0" bIns="0" rtlCol="0" anchor="t">
+            <a:normAutofit/>
+          </a:bodyPr>
+          <a:lstStyle/>
+          <a:p>
+            <a:pPr indent="0" marL="0">
+              <a:buNone/>
+            </a:pPr>
+            <a:r>
+              <a:rPr lang="en-US" sz="1250" dirty="0">
+                <a:solidFill>
+                  <a:srgbClr val="17364A"/>
+                </a:solidFill>
+                <a:latin typeface="Aptos" pitchFamily="34" charset="0"/>
+                <a:ea typeface="Aptos" pitchFamily="34" charset="-122"/>
+                <a:cs typeface="Aptos" pitchFamily="34" charset="-120"/>
+              </a:rPr>
+              <a:t>Connect the concept to public health decisions, safeguards, documentation, or implementation work.</a:t>
+            </a:r>
+            <a:endParaRPr lang="en-US" sz="1250" dirty="0"/>
           </a:p>
         </p:txBody>
       </p:sp>
@@ -2939,7 +3455,32 @@
       </p:sp>
       <p:sp>
         <p:nvSpPr>
-          <p:cNvPr id="3" name="Text 1"/>
+          <p:cNvPr id="3" name="Shape 1"/>
+          <p:cNvSpPr/>
+          <p:nvPr/>
+        </p:nvSpPr>
+        <p:spPr>
+          <a:xfrm>
+            <a:off x="0" y="164592"/>
+            <a:ext cx="146304" cy="6693408"/>
+          </a:xfrm>
+          <a:prstGeom prst="rect">
+            <a:avLst/>
+          </a:prstGeom>
+          <a:solidFill>
+            <a:srgbClr val="2F8A28"/>
+          </a:solidFill>
+          <a:ln w="12700">
+            <a:solidFill>
+              <a:srgbClr val="2F8A28"/>
+            </a:solidFill>
+            <a:prstDash val="solid"/>
+          </a:ln>
+        </p:spPr>
+      </p:sp>
+      <p:sp>
+        <p:nvSpPr>
+          <p:cNvPr id="4" name="Text 2"/>
           <p:cNvSpPr/>
           <p:nvPr/>
         </p:nvSpPr>
@@ -2978,7 +3519,7 @@
       </p:sp>
       <p:sp>
         <p:nvSpPr>
-          <p:cNvPr id="4" name="Text 2"/>
+          <p:cNvPr id="5" name="Text 3"/>
           <p:cNvSpPr/>
           <p:nvPr/>
         </p:nvSpPr>
@@ -3017,7 +3558,7 @@
       </p:sp>
       <p:sp>
         <p:nvSpPr>
-          <p:cNvPr id="5" name="Text 3"/>
+          <p:cNvPr id="6" name="Text 4"/>
           <p:cNvSpPr/>
           <p:nvPr/>
         </p:nvSpPr>
@@ -3056,13 +3597,77 @@
       </p:sp>
       <p:sp>
         <p:nvSpPr>
-          <p:cNvPr id="6" name="Text 4"/>
+          <p:cNvPr id="7" name="Shape 5"/>
           <p:cNvSpPr/>
           <p:nvPr/>
         </p:nvSpPr>
         <p:spPr>
           <a:xfrm>
             <a:off x="640080" y="658368"/>
+            <a:ext cx="420624" cy="420624"/>
+          </a:xfrm>
+          <a:prstGeom prst="ellipse">
+            <a:avLst/>
+          </a:prstGeom>
+          <a:solidFill>
+            <a:srgbClr val="0068B7"/>
+          </a:solidFill>
+          <a:ln w="12700">
+            <a:solidFill>
+              <a:srgbClr val="0068B7"/>
+            </a:solidFill>
+            <a:prstDash val="solid"/>
+          </a:ln>
+        </p:spPr>
+      </p:sp>
+      <p:sp>
+        <p:nvSpPr>
+          <p:cNvPr id="8" name="Text 6"/>
+          <p:cNvSpPr/>
+          <p:nvPr/>
+        </p:nvSpPr>
+        <p:spPr>
+          <a:xfrm>
+            <a:off x="640080" y="731520"/>
+            <a:ext cx="420624" cy="164592"/>
+          </a:xfrm>
+          <a:prstGeom prst="rect">
+            <a:avLst/>
+          </a:prstGeom>
+          <a:noFill/>
+          <a:ln/>
+        </p:spPr>
+        <p:txBody>
+          <a:bodyPr wrap="square" lIns="0" tIns="0" rIns="0" bIns="0" rtlCol="0" anchor="ctr"/>
+          <a:lstStyle/>
+          <a:p>
+            <a:pPr algn="ctr" indent="0" marL="0">
+              <a:buNone/>
+            </a:pPr>
+            <a:r>
+              <a:rPr lang="en-US" sz="1100" b="1" dirty="0">
+                <a:solidFill>
+                  <a:srgbClr val="FFFFFF"/>
+                </a:solidFill>
+                <a:latin typeface="Aptos" pitchFamily="34" charset="0"/>
+                <a:ea typeface="Aptos" pitchFamily="34" charset="-122"/>
+                <a:cs typeface="Aptos" pitchFamily="34" charset="-120"/>
+              </a:rPr>
+              <a:t>6</a:t>
+            </a:r>
+            <a:endParaRPr lang="en-US" sz="1100" dirty="0"/>
+          </a:p>
+        </p:txBody>
+      </p:sp>
+      <p:sp>
+        <p:nvSpPr>
+          <p:cNvPr id="9" name="Text 7"/>
+          <p:cNvSpPr/>
+          <p:nvPr/>
+        </p:nvSpPr>
+        <p:spPr>
+          <a:xfrm>
+            <a:off x="640080" y="621792"/>
             <a:ext cx="10881360" cy="566928"/>
           </a:xfrm>
           <a:prstGeom prst="rect">
@@ -3089,7 +3694,7 @@
                 <a:ea typeface="Aptos Display" pitchFamily="34" charset="-122"/>
                 <a:cs typeface="Aptos Display" pitchFamily="34" charset="-120"/>
               </a:rPr>
-              <a:t>Application to AI-Supported Workflows</a:t>
+              <a:t>Technical Deep Dive</a:t>
             </a:r>
             <a:endParaRPr lang="en-US" sz="2700" dirty="0"/>
           </a:p>
@@ -3097,32 +3702,178 @@
       </p:sp>
       <p:sp>
         <p:nvSpPr>
-          <p:cNvPr id="7" name="Text 5"/>
-          <p:cNvSpPr/>
-          <p:nvPr/>
-        </p:nvSpPr>
-        <p:spPr>
-          <a:xfrm>
-            <a:off x="822960" y="1325880"/>
-            <a:ext cx="10378440" cy="4800600"/>
-          </a:xfrm>
-          <a:prstGeom prst="rect">
-            <a:avLst/>
-          </a:prstGeom>
-          <a:noFill/>
-          <a:ln/>
-        </p:spPr>
-        <p:txBody>
-          <a:bodyPr wrap="square" lIns="1016" tIns="1016" rIns="1016" bIns="1016" rtlCol="0" anchor="t">
+          <p:cNvPr id="10" name="Text 8"/>
+          <p:cNvSpPr/>
+          <p:nvPr/>
+        </p:nvSpPr>
+        <p:spPr>
+          <a:xfrm>
+            <a:off x="868680" y="1417320"/>
+            <a:ext cx="6675120" cy="4434840"/>
+          </a:xfrm>
+          <a:prstGeom prst="rect">
+            <a:avLst/>
+          </a:prstGeom>
+          <a:noFill/>
+          <a:ln/>
+        </p:spPr>
+        <p:txBody>
+          <a:bodyPr wrap="square" lIns="635" tIns="635" rIns="635" bIns="635" rtlCol="0" anchor="t">
             <a:normAutofit/>
           </a:bodyPr>
           <a:lstStyle/>
           <a:p>
+            <a:r>
+              <a:rPr lang="en-US" sz="1700" dirty="0">
+                <a:solidFill>
+                  <a:srgbClr val="17364A"/>
+                </a:solidFill>
+                <a:latin typeface="Aptos" pitchFamily="34" charset="0"/>
+                <a:ea typeface="Aptos" pitchFamily="34" charset="-122"/>
+                <a:cs typeface="Aptos" pitchFamily="34" charset="-120"/>
+              </a:rPr>
+              <a:t>Value measurement begins with a theory of change.</a:t>
+            </a:r>
+            <a:endParaRPr lang="en-US" sz="1700" dirty="0"/>
+          </a:p>
+          <a:p>
+            <a:r>
+              <a:rPr lang="en-US" sz="1700" dirty="0">
+                <a:solidFill>
+                  <a:srgbClr val="17364A"/>
+                </a:solidFill>
+                <a:latin typeface="Aptos" pitchFamily="34" charset="0"/>
+                <a:ea typeface="Aptos" pitchFamily="34" charset="-122"/>
+                <a:cs typeface="Aptos" pitchFamily="34" charset="-120"/>
+              </a:rPr>
+              <a:t>The team should explain how the AI capability is expected to improve the workflow and which outcomes should change.</a:t>
+            </a:r>
+            <a:endParaRPr lang="en-US" sz="1700" dirty="0"/>
+          </a:p>
+          <a:p>
+            <a:r>
+              <a:rPr lang="en-US" sz="1700" dirty="0">
+                <a:solidFill>
+                  <a:srgbClr val="17364A"/>
+                </a:solidFill>
+                <a:latin typeface="Aptos" pitchFamily="34" charset="0"/>
+                <a:ea typeface="Aptos" pitchFamily="34" charset="-122"/>
+                <a:cs typeface="Aptos" pitchFamily="34" charset="-120"/>
+              </a:rPr>
+              <a:t>For example, a summarization tool may reduce review time, improve completeness, and allow staff to focus on complex cases.</a:t>
+            </a:r>
+            <a:endParaRPr lang="en-US" sz="1700" dirty="0"/>
+          </a:p>
+          <a:p>
+            <a:r>
+              <a:rPr lang="en-US" sz="1700" dirty="0">
+                <a:solidFill>
+                  <a:srgbClr val="17364A"/>
+                </a:solidFill>
+                <a:latin typeface="Aptos" pitchFamily="34" charset="0"/>
+                <a:ea typeface="Aptos" pitchFamily="34" charset="-122"/>
+                <a:cs typeface="Aptos" pitchFamily="34" charset="-120"/>
+              </a:rPr>
+              <a:t>These assumptions should be tested rather than assumed.</a:t>
+            </a:r>
+            <a:endParaRPr lang="en-US" sz="1700" dirty="0"/>
+          </a:p>
+        </p:txBody>
+      </p:sp>
+      <p:sp>
+        <p:nvSpPr>
+          <p:cNvPr id="11" name="Shape 9"/>
+          <p:cNvSpPr/>
+          <p:nvPr/>
+        </p:nvSpPr>
+        <p:spPr>
+          <a:xfrm>
+            <a:off x="7909560" y="1417320"/>
+            <a:ext cx="3154680" cy="1828800"/>
+          </a:xfrm>
+          <a:prstGeom prst="roundRect">
+            <a:avLst>
+              <a:gd name="adj" fmla="val 6000"/>
+            </a:avLst>
+          </a:prstGeom>
+          <a:solidFill>
+            <a:srgbClr val="EEF8ED"/>
+          </a:solidFill>
+          <a:ln w="12700">
+            <a:solidFill>
+              <a:srgbClr val="B9D7E6"/>
+            </a:solidFill>
+            <a:prstDash val="solid"/>
+          </a:ln>
+        </p:spPr>
+      </p:sp>
+      <p:sp>
+        <p:nvSpPr>
+          <p:cNvPr id="12" name="Text 10"/>
+          <p:cNvSpPr/>
+          <p:nvPr/>
+        </p:nvSpPr>
+        <p:spPr>
+          <a:xfrm>
+            <a:off x="8074152" y="1563624"/>
+            <a:ext cx="2825496" cy="201168"/>
+          </a:xfrm>
+          <a:prstGeom prst="rect">
+            <a:avLst/>
+          </a:prstGeom>
+          <a:noFill/>
+          <a:ln/>
+        </p:spPr>
+        <p:txBody>
+          <a:bodyPr wrap="square" lIns="0" tIns="0" rIns="0" bIns="0" rtlCol="0" anchor="ctr"/>
+          <a:lstStyle/>
+          <a:p>
             <a:pPr indent="0" marL="0">
               <a:buNone/>
             </a:pPr>
             <a:r>
-              <a:rPr lang="en-US" sz="1420" dirty="0">
+              <a:rPr lang="en-US" sz="950" b="1" dirty="0">
+                <a:solidFill>
+                  <a:srgbClr val="0068B7"/>
+                </a:solidFill>
+                <a:latin typeface="Aptos" pitchFamily="34" charset="0"/>
+                <a:ea typeface="Aptos" pitchFamily="34" charset="-122"/>
+                <a:cs typeface="Aptos" pitchFamily="34" charset="-120"/>
+              </a:rPr>
+              <a:t>Key idea</a:t>
+            </a:r>
+            <a:endParaRPr lang="en-US" sz="950" dirty="0"/>
+          </a:p>
+        </p:txBody>
+      </p:sp>
+      <p:sp>
+        <p:nvSpPr>
+          <p:cNvPr id="13" name="Text 11"/>
+          <p:cNvSpPr/>
+          <p:nvPr/>
+        </p:nvSpPr>
+        <p:spPr>
+          <a:xfrm>
+            <a:off x="8074152" y="1856232"/>
+            <a:ext cx="2825496" cy="1261872"/>
+          </a:xfrm>
+          <a:prstGeom prst="rect">
+            <a:avLst/>
+          </a:prstGeom>
+          <a:noFill/>
+          <a:ln/>
+        </p:spPr>
+        <p:txBody>
+          <a:bodyPr wrap="square" lIns="0" tIns="0" rIns="0" bIns="0" rtlCol="0" anchor="t">
+            <a:normAutofit/>
+          </a:bodyPr>
+          <a:lstStyle/>
+          <a:p>
+            <a:pPr indent="0" marL="0">
+              <a:buNone/>
+            </a:pPr>
+            <a:r>
+              <a:rPr lang="en-US" sz="1250" dirty="0">
                 <a:solidFill>
                   <a:srgbClr val="17364A"/>
                 </a:solidFill>
@@ -3130,9 +3881,116 @@
                 <a:ea typeface="Aptos" pitchFamily="34" charset="-122"/>
                 <a:cs typeface="Aptos" pitchFamily="34" charset="-120"/>
               </a:rPr>
-              <a:t>Generative AI, predictive analytics, RAG, automation, and agentic workflows all depend on the controls described in this module. The controls should be scaled to the risk of the use case. A tool that drafts internal training text may require lighter review than a tool that updates case records, prioritizes outreach, or supports public communication during an emergency. The module should be applied during readiness assessment, procurement, implementation planning, pilot testing, and post-deployment monitoring. Learners should document how the topic affects data, systems, users, safeguards, and decision-making for the selected workflow.</a:t>
-            </a:r>
-            <a:endParaRPr lang="en-US" sz="1420" dirty="0"/>
+              <a:t>Value measurement begins with a theory of change.</a:t>
+            </a:r>
+            <a:endParaRPr lang="en-US" sz="1250" dirty="0"/>
+          </a:p>
+        </p:txBody>
+      </p:sp>
+      <p:sp>
+        <p:nvSpPr>
+          <p:cNvPr id="14" name="Shape 12"/>
+          <p:cNvSpPr/>
+          <p:nvPr/>
+        </p:nvSpPr>
+        <p:spPr>
+          <a:xfrm>
+            <a:off x="7909560" y="3520440"/>
+            <a:ext cx="3154680" cy="1737360"/>
+          </a:xfrm>
+          <a:prstGeom prst="roundRect">
+            <a:avLst>
+              <a:gd name="adj" fmla="val 6316"/>
+            </a:avLst>
+          </a:prstGeom>
+          <a:solidFill>
+            <a:srgbClr val="EAF6F8"/>
+          </a:solidFill>
+          <a:ln w="12700">
+            <a:solidFill>
+              <a:srgbClr val="B9D7E6"/>
+            </a:solidFill>
+            <a:prstDash val="solid"/>
+          </a:ln>
+        </p:spPr>
+      </p:sp>
+      <p:sp>
+        <p:nvSpPr>
+          <p:cNvPr id="15" name="Text 13"/>
+          <p:cNvSpPr/>
+          <p:nvPr/>
+        </p:nvSpPr>
+        <p:spPr>
+          <a:xfrm>
+            <a:off x="8074152" y="3666744"/>
+            <a:ext cx="2825496" cy="201168"/>
+          </a:xfrm>
+          <a:prstGeom prst="rect">
+            <a:avLst/>
+          </a:prstGeom>
+          <a:noFill/>
+          <a:ln/>
+        </p:spPr>
+        <p:txBody>
+          <a:bodyPr wrap="square" lIns="0" tIns="0" rIns="0" bIns="0" rtlCol="0" anchor="ctr"/>
+          <a:lstStyle/>
+          <a:p>
+            <a:pPr indent="0" marL="0">
+              <a:buNone/>
+            </a:pPr>
+            <a:r>
+              <a:rPr lang="en-US" sz="950" b="1" dirty="0">
+                <a:solidFill>
+                  <a:srgbClr val="0068B7"/>
+                </a:solidFill>
+                <a:latin typeface="Aptos" pitchFamily="34" charset="0"/>
+                <a:ea typeface="Aptos" pitchFamily="34" charset="-122"/>
+                <a:cs typeface="Aptos" pitchFamily="34" charset="-120"/>
+              </a:rPr>
+              <a:t>Use this for</a:t>
+            </a:r>
+            <a:endParaRPr lang="en-US" sz="950" dirty="0"/>
+          </a:p>
+        </p:txBody>
+      </p:sp>
+      <p:sp>
+        <p:nvSpPr>
+          <p:cNvPr id="16" name="Text 14"/>
+          <p:cNvSpPr/>
+          <p:nvPr/>
+        </p:nvSpPr>
+        <p:spPr>
+          <a:xfrm>
+            <a:off x="8074152" y="3959352"/>
+            <a:ext cx="2825496" cy="1170432"/>
+          </a:xfrm>
+          <a:prstGeom prst="rect">
+            <a:avLst/>
+          </a:prstGeom>
+          <a:noFill/>
+          <a:ln/>
+        </p:spPr>
+        <p:txBody>
+          <a:bodyPr wrap="square" lIns="0" tIns="0" rIns="0" bIns="0" rtlCol="0" anchor="t">
+            <a:normAutofit/>
+          </a:bodyPr>
+          <a:lstStyle/>
+          <a:p>
+            <a:pPr indent="0" marL="0">
+              <a:buNone/>
+            </a:pPr>
+            <a:r>
+              <a:rPr lang="en-US" sz="1250" dirty="0">
+                <a:solidFill>
+                  <a:srgbClr val="17364A"/>
+                </a:solidFill>
+                <a:latin typeface="Aptos" pitchFamily="34" charset="0"/>
+                <a:ea typeface="Aptos" pitchFamily="34" charset="-122"/>
+                <a:cs typeface="Aptos" pitchFamily="34" charset="-120"/>
+              </a:rPr>
+              <a:t>Connect the concept to public health decisions, safeguards, documentation, or implementation work.</a:t>
+            </a:r>
+            <a:endParaRPr lang="en-US" sz="1250" dirty="0"/>
           </a:p>
         </p:txBody>
       </p:sp>
@@ -3195,7 +4053,32 @@
       </p:sp>
       <p:sp>
         <p:nvSpPr>
-          <p:cNvPr id="3" name="Text 1"/>
+          <p:cNvPr id="3" name="Shape 1"/>
+          <p:cNvSpPr/>
+          <p:nvPr/>
+        </p:nvSpPr>
+        <p:spPr>
+          <a:xfrm>
+            <a:off x="0" y="164592"/>
+            <a:ext cx="146304" cy="6693408"/>
+          </a:xfrm>
+          <a:prstGeom prst="rect">
+            <a:avLst/>
+          </a:prstGeom>
+          <a:solidFill>
+            <a:srgbClr val="2F8A28"/>
+          </a:solidFill>
+          <a:ln w="12700">
+            <a:solidFill>
+              <a:srgbClr val="2F8A28"/>
+            </a:solidFill>
+            <a:prstDash val="solid"/>
+          </a:ln>
+        </p:spPr>
+      </p:sp>
+      <p:sp>
+        <p:nvSpPr>
+          <p:cNvPr id="4" name="Text 2"/>
           <p:cNvSpPr/>
           <p:nvPr/>
         </p:nvSpPr>
@@ -3234,7 +4117,7 @@
       </p:sp>
       <p:sp>
         <p:nvSpPr>
-          <p:cNvPr id="4" name="Text 2"/>
+          <p:cNvPr id="5" name="Text 3"/>
           <p:cNvSpPr/>
           <p:nvPr/>
         </p:nvSpPr>
@@ -3273,7 +4156,7 @@
       </p:sp>
       <p:sp>
         <p:nvSpPr>
-          <p:cNvPr id="5" name="Text 3"/>
+          <p:cNvPr id="6" name="Text 4"/>
           <p:cNvSpPr/>
           <p:nvPr/>
         </p:nvSpPr>
@@ -3312,13 +4195,77 @@
       </p:sp>
       <p:sp>
         <p:nvSpPr>
-          <p:cNvPr id="6" name="Text 4"/>
+          <p:cNvPr id="7" name="Shape 5"/>
           <p:cNvSpPr/>
           <p:nvPr/>
         </p:nvSpPr>
         <p:spPr>
           <a:xfrm>
             <a:off x="640080" y="658368"/>
+            <a:ext cx="420624" cy="420624"/>
+          </a:xfrm>
+          <a:prstGeom prst="ellipse">
+            <a:avLst/>
+          </a:prstGeom>
+          <a:solidFill>
+            <a:srgbClr val="0068B7"/>
+          </a:solidFill>
+          <a:ln w="12700">
+            <a:solidFill>
+              <a:srgbClr val="0068B7"/>
+            </a:solidFill>
+            <a:prstDash val="solid"/>
+          </a:ln>
+        </p:spPr>
+      </p:sp>
+      <p:sp>
+        <p:nvSpPr>
+          <p:cNvPr id="8" name="Text 6"/>
+          <p:cNvSpPr/>
+          <p:nvPr/>
+        </p:nvSpPr>
+        <p:spPr>
+          <a:xfrm>
+            <a:off x="640080" y="731520"/>
+            <a:ext cx="420624" cy="164592"/>
+          </a:xfrm>
+          <a:prstGeom prst="rect">
+            <a:avLst/>
+          </a:prstGeom>
+          <a:noFill/>
+          <a:ln/>
+        </p:spPr>
+        <p:txBody>
+          <a:bodyPr wrap="square" lIns="0" tIns="0" rIns="0" bIns="0" rtlCol="0" anchor="ctr"/>
+          <a:lstStyle/>
+          <a:p>
+            <a:pPr algn="ctr" indent="0" marL="0">
+              <a:buNone/>
+            </a:pPr>
+            <a:r>
+              <a:rPr lang="en-US" sz="1100" b="1" dirty="0">
+                <a:solidFill>
+                  <a:srgbClr val="FFFFFF"/>
+                </a:solidFill>
+                <a:latin typeface="Aptos" pitchFamily="34" charset="0"/>
+                <a:ea typeface="Aptos" pitchFamily="34" charset="-122"/>
+                <a:cs typeface="Aptos" pitchFamily="34" charset="-120"/>
+              </a:rPr>
+              <a:t>7</a:t>
+            </a:r>
+            <a:endParaRPr lang="en-US" sz="1100" dirty="0"/>
+          </a:p>
+        </p:txBody>
+      </p:sp>
+      <p:sp>
+        <p:nvSpPr>
+          <p:cNvPr id="9" name="Text 7"/>
+          <p:cNvSpPr/>
+          <p:nvPr/>
+        </p:nvSpPr>
+        <p:spPr>
+          <a:xfrm>
+            <a:off x="640080" y="621792"/>
             <a:ext cx="10881360" cy="566928"/>
           </a:xfrm>
           <a:prstGeom prst="rect">
@@ -3345,7 +4292,7 @@
                 <a:ea typeface="Aptos Display" pitchFamily="34" charset="-122"/>
                 <a:cs typeface="Aptos Display" pitchFamily="34" charset="-120"/>
               </a:rPr>
-              <a:t>Reflection Questions</a:t>
+              <a:t>Risks, Failure Modes, and Guardrails</a:t>
             </a:r>
             <a:endParaRPr lang="en-US" sz="2700" dirty="0"/>
           </a:p>
@@ -3353,32 +4300,178 @@
       </p:sp>
       <p:sp>
         <p:nvSpPr>
-          <p:cNvPr id="7" name="Text 5"/>
-          <p:cNvSpPr/>
-          <p:nvPr/>
-        </p:nvSpPr>
-        <p:spPr>
-          <a:xfrm>
-            <a:off x="822960" y="1325880"/>
-            <a:ext cx="10378440" cy="4800600"/>
-          </a:xfrm>
-          <a:prstGeom prst="rect">
-            <a:avLst/>
-          </a:prstGeom>
-          <a:noFill/>
-          <a:ln/>
-        </p:spPr>
-        <p:txBody>
-          <a:bodyPr wrap="square" lIns="1016" tIns="1016" rIns="1016" bIns="1016" rtlCol="0" anchor="t">
+          <p:cNvPr id="10" name="Text 8"/>
+          <p:cNvSpPr/>
+          <p:nvPr/>
+        </p:nvSpPr>
+        <p:spPr>
+          <a:xfrm>
+            <a:off x="868680" y="1417320"/>
+            <a:ext cx="6675120" cy="4434840"/>
+          </a:xfrm>
+          <a:prstGeom prst="rect">
+            <a:avLst/>
+          </a:prstGeom>
+          <a:noFill/>
+          <a:ln/>
+        </p:spPr>
+        <p:txBody>
+          <a:bodyPr wrap="square" lIns="635" tIns="635" rIns="635" bIns="635" rtlCol="0" anchor="t">
             <a:normAutofit/>
           </a:bodyPr>
           <a:lstStyle/>
           <a:p>
+            <a:r>
+              <a:rPr lang="en-US" sz="1700" dirty="0">
+                <a:solidFill>
+                  <a:srgbClr val="17364A"/>
+                </a:solidFill>
+                <a:latin typeface="Aptos" pitchFamily="34" charset="0"/>
+                <a:ea typeface="Aptos" pitchFamily="34" charset="-122"/>
+                <a:cs typeface="Aptos" pitchFamily="34" charset="-120"/>
+              </a:rPr>
+              <a:t>A common failure mode is treating the topic as a technical detail rather than a public health control.</a:t>
+            </a:r>
+            <a:endParaRPr lang="en-US" sz="1700" dirty="0"/>
+          </a:p>
+          <a:p>
+            <a:r>
+              <a:rPr lang="en-US" sz="1700" dirty="0">
+                <a:solidFill>
+                  <a:srgbClr val="17364A"/>
+                </a:solidFill>
+                <a:latin typeface="Aptos" pitchFamily="34" charset="0"/>
+                <a:ea typeface="Aptos" pitchFamily="34" charset="-122"/>
+                <a:cs typeface="Aptos" pitchFamily="34" charset="-120"/>
+              </a:rPr>
+              <a:t>When staff do not connect technical decisions to authority, workflow, equity, privacy, security, and accountability, the.</a:t>
+            </a:r>
+            <a:endParaRPr lang="en-US" sz="1700" dirty="0"/>
+          </a:p>
+          <a:p>
+            <a:r>
+              <a:rPr lang="en-US" sz="1700" dirty="0">
+                <a:solidFill>
+                  <a:srgbClr val="17364A"/>
+                </a:solidFill>
+                <a:latin typeface="Aptos" pitchFamily="34" charset="0"/>
+                <a:ea typeface="Aptos" pitchFamily="34" charset="-122"/>
+                <a:cs typeface="Aptos" pitchFamily="34" charset="-120"/>
+              </a:rPr>
+              <a:t>Another risk is relying on vendor claims without agency-defined evidence.</a:t>
+            </a:r>
+            <a:endParaRPr lang="en-US" sz="1700" dirty="0"/>
+          </a:p>
+          <a:p>
+            <a:r>
+              <a:rPr lang="en-US" sz="1700" dirty="0">
+                <a:solidFill>
+                  <a:srgbClr val="17364A"/>
+                </a:solidFill>
+                <a:latin typeface="Aptos" pitchFamily="34" charset="0"/>
+                <a:ea typeface="Aptos" pitchFamily="34" charset="-122"/>
+                <a:cs typeface="Aptos" pitchFamily="34" charset="-120"/>
+              </a:rPr>
+              <a:t>Vendors may provide demonstrations, dashboards, or summary metrics that do not match the agency workflow or data environment.</a:t>
+            </a:r>
+            <a:endParaRPr lang="en-US" sz="1700" dirty="0"/>
+          </a:p>
+        </p:txBody>
+      </p:sp>
+      <p:sp>
+        <p:nvSpPr>
+          <p:cNvPr id="11" name="Shape 9"/>
+          <p:cNvSpPr/>
+          <p:nvPr/>
+        </p:nvSpPr>
+        <p:spPr>
+          <a:xfrm>
+            <a:off x="7909560" y="1417320"/>
+            <a:ext cx="3154680" cy="1828800"/>
+          </a:xfrm>
+          <a:prstGeom prst="roundRect">
+            <a:avLst>
+              <a:gd name="adj" fmla="val 6000"/>
+            </a:avLst>
+          </a:prstGeom>
+          <a:solidFill>
+            <a:srgbClr val="EEF8ED"/>
+          </a:solidFill>
+          <a:ln w="12700">
+            <a:solidFill>
+              <a:srgbClr val="B9D7E6"/>
+            </a:solidFill>
+            <a:prstDash val="solid"/>
+          </a:ln>
+        </p:spPr>
+      </p:sp>
+      <p:sp>
+        <p:nvSpPr>
+          <p:cNvPr id="12" name="Text 10"/>
+          <p:cNvSpPr/>
+          <p:nvPr/>
+        </p:nvSpPr>
+        <p:spPr>
+          <a:xfrm>
+            <a:off x="8074152" y="1563624"/>
+            <a:ext cx="2825496" cy="201168"/>
+          </a:xfrm>
+          <a:prstGeom prst="rect">
+            <a:avLst/>
+          </a:prstGeom>
+          <a:noFill/>
+          <a:ln/>
+        </p:spPr>
+        <p:txBody>
+          <a:bodyPr wrap="square" lIns="0" tIns="0" rIns="0" bIns="0" rtlCol="0" anchor="ctr"/>
+          <a:lstStyle/>
+          <a:p>
             <a:pPr indent="0" marL="0">
               <a:buNone/>
             </a:pPr>
             <a:r>
-              <a:rPr lang="en-US" sz="1420" dirty="0">
+              <a:rPr lang="en-US" sz="950" b="1" dirty="0">
+                <a:solidFill>
+                  <a:srgbClr val="0068B7"/>
+                </a:solidFill>
+                <a:latin typeface="Aptos" pitchFamily="34" charset="0"/>
+                <a:ea typeface="Aptos" pitchFamily="34" charset="-122"/>
+                <a:cs typeface="Aptos" pitchFamily="34" charset="-120"/>
+              </a:rPr>
+              <a:t>Key idea</a:t>
+            </a:r>
+            <a:endParaRPr lang="en-US" sz="950" dirty="0"/>
+          </a:p>
+        </p:txBody>
+      </p:sp>
+      <p:sp>
+        <p:nvSpPr>
+          <p:cNvPr id="13" name="Text 11"/>
+          <p:cNvSpPr/>
+          <p:nvPr/>
+        </p:nvSpPr>
+        <p:spPr>
+          <a:xfrm>
+            <a:off x="8074152" y="1856232"/>
+            <a:ext cx="2825496" cy="1261872"/>
+          </a:xfrm>
+          <a:prstGeom prst="rect">
+            <a:avLst/>
+          </a:prstGeom>
+          <a:noFill/>
+          <a:ln/>
+        </p:spPr>
+        <p:txBody>
+          <a:bodyPr wrap="square" lIns="0" tIns="0" rIns="0" bIns="0" rtlCol="0" anchor="t">
+            <a:normAutofit/>
+          </a:bodyPr>
+          <a:lstStyle/>
+          <a:p>
+            <a:pPr indent="0" marL="0">
+              <a:buNone/>
+            </a:pPr>
+            <a:r>
+              <a:rPr lang="en-US" sz="1250" dirty="0">
                 <a:solidFill>
                   <a:srgbClr val="17364A"/>
                 </a:solidFill>
@@ -3386,9 +4479,116 @@
                 <a:ea typeface="Aptos" pitchFamily="34" charset="-122"/>
                 <a:cs typeface="Aptos" pitchFamily="34" charset="-120"/>
               </a:rPr>
-              <a:t>Where does this topic appear in one current or proposed AI workflow in your agency? What decisions, data sources, users, or partners would be affected if this area is poorly designed? What evidence would governance reviewers need before approving the workflow?</a:t>
-            </a:r>
-            <a:endParaRPr lang="en-US" sz="1420" dirty="0"/>
+              <a:t>A common failure mode is treating the topic as a technical detail rather than a public health control.</a:t>
+            </a:r>
+            <a:endParaRPr lang="en-US" sz="1250" dirty="0"/>
+          </a:p>
+        </p:txBody>
+      </p:sp>
+      <p:sp>
+        <p:nvSpPr>
+          <p:cNvPr id="14" name="Shape 12"/>
+          <p:cNvSpPr/>
+          <p:nvPr/>
+        </p:nvSpPr>
+        <p:spPr>
+          <a:xfrm>
+            <a:off x="7909560" y="3520440"/>
+            <a:ext cx="3154680" cy="1737360"/>
+          </a:xfrm>
+          <a:prstGeom prst="roundRect">
+            <a:avLst>
+              <a:gd name="adj" fmla="val 6316"/>
+            </a:avLst>
+          </a:prstGeom>
+          <a:solidFill>
+            <a:srgbClr val="EAF6F8"/>
+          </a:solidFill>
+          <a:ln w="12700">
+            <a:solidFill>
+              <a:srgbClr val="B9D7E6"/>
+            </a:solidFill>
+            <a:prstDash val="solid"/>
+          </a:ln>
+        </p:spPr>
+      </p:sp>
+      <p:sp>
+        <p:nvSpPr>
+          <p:cNvPr id="15" name="Text 13"/>
+          <p:cNvSpPr/>
+          <p:nvPr/>
+        </p:nvSpPr>
+        <p:spPr>
+          <a:xfrm>
+            <a:off x="8074152" y="3666744"/>
+            <a:ext cx="2825496" cy="201168"/>
+          </a:xfrm>
+          <a:prstGeom prst="rect">
+            <a:avLst/>
+          </a:prstGeom>
+          <a:noFill/>
+          <a:ln/>
+        </p:spPr>
+        <p:txBody>
+          <a:bodyPr wrap="square" lIns="0" tIns="0" rIns="0" bIns="0" rtlCol="0" anchor="ctr"/>
+          <a:lstStyle/>
+          <a:p>
+            <a:pPr indent="0" marL="0">
+              <a:buNone/>
+            </a:pPr>
+            <a:r>
+              <a:rPr lang="en-US" sz="950" b="1" dirty="0">
+                <a:solidFill>
+                  <a:srgbClr val="0068B7"/>
+                </a:solidFill>
+                <a:latin typeface="Aptos" pitchFamily="34" charset="0"/>
+                <a:ea typeface="Aptos" pitchFamily="34" charset="-122"/>
+                <a:cs typeface="Aptos" pitchFamily="34" charset="-120"/>
+              </a:rPr>
+              <a:t>Use this for</a:t>
+            </a:r>
+            <a:endParaRPr lang="en-US" sz="950" dirty="0"/>
+          </a:p>
+        </p:txBody>
+      </p:sp>
+      <p:sp>
+        <p:nvSpPr>
+          <p:cNvPr id="16" name="Text 14"/>
+          <p:cNvSpPr/>
+          <p:nvPr/>
+        </p:nvSpPr>
+        <p:spPr>
+          <a:xfrm>
+            <a:off x="8074152" y="3959352"/>
+            <a:ext cx="2825496" cy="1170432"/>
+          </a:xfrm>
+          <a:prstGeom prst="rect">
+            <a:avLst/>
+          </a:prstGeom>
+          <a:noFill/>
+          <a:ln/>
+        </p:spPr>
+        <p:txBody>
+          <a:bodyPr wrap="square" lIns="0" tIns="0" rIns="0" bIns="0" rtlCol="0" anchor="t">
+            <a:normAutofit/>
+          </a:bodyPr>
+          <a:lstStyle/>
+          <a:p>
+            <a:pPr indent="0" marL="0">
+              <a:buNone/>
+            </a:pPr>
+            <a:r>
+              <a:rPr lang="en-US" sz="1250" dirty="0">
+                <a:solidFill>
+                  <a:srgbClr val="17364A"/>
+                </a:solidFill>
+                <a:latin typeface="Aptos" pitchFamily="34" charset="0"/>
+                <a:ea typeface="Aptos" pitchFamily="34" charset="-122"/>
+                <a:cs typeface="Aptos" pitchFamily="34" charset="-120"/>
+              </a:rPr>
+              <a:t>Connect the concept to public health decisions, safeguards, documentation, or implementation work.</a:t>
+            </a:r>
+            <a:endParaRPr lang="en-US" sz="1250" dirty="0"/>
           </a:p>
         </p:txBody>
       </p:sp>
@@ -3451,7 +4651,32 @@
       </p:sp>
       <p:sp>
         <p:nvSpPr>
-          <p:cNvPr id="3" name="Text 1"/>
+          <p:cNvPr id="3" name="Shape 1"/>
+          <p:cNvSpPr/>
+          <p:nvPr/>
+        </p:nvSpPr>
+        <p:spPr>
+          <a:xfrm>
+            <a:off x="0" y="164592"/>
+            <a:ext cx="146304" cy="6693408"/>
+          </a:xfrm>
+          <a:prstGeom prst="rect">
+            <a:avLst/>
+          </a:prstGeom>
+          <a:solidFill>
+            <a:srgbClr val="2F8A28"/>
+          </a:solidFill>
+          <a:ln w="12700">
+            <a:solidFill>
+              <a:srgbClr val="2F8A28"/>
+            </a:solidFill>
+            <a:prstDash val="solid"/>
+          </a:ln>
+        </p:spPr>
+      </p:sp>
+      <p:sp>
+        <p:nvSpPr>
+          <p:cNvPr id="4" name="Text 2"/>
           <p:cNvSpPr/>
           <p:nvPr/>
         </p:nvSpPr>
@@ -3490,7 +4715,7 @@
       </p:sp>
       <p:sp>
         <p:nvSpPr>
-          <p:cNvPr id="4" name="Text 2"/>
+          <p:cNvPr id="5" name="Text 3"/>
           <p:cNvSpPr/>
           <p:nvPr/>
         </p:nvSpPr>
@@ -3529,7 +4754,7 @@
       </p:sp>
       <p:sp>
         <p:nvSpPr>
-          <p:cNvPr id="5" name="Text 3"/>
+          <p:cNvPr id="6" name="Text 4"/>
           <p:cNvSpPr/>
           <p:nvPr/>
         </p:nvSpPr>
@@ -3568,13 +4793,77 @@
       </p:sp>
       <p:sp>
         <p:nvSpPr>
-          <p:cNvPr id="6" name="Text 4"/>
+          <p:cNvPr id="7" name="Shape 5"/>
           <p:cNvSpPr/>
           <p:nvPr/>
         </p:nvSpPr>
         <p:spPr>
           <a:xfrm>
             <a:off x="640080" y="658368"/>
+            <a:ext cx="420624" cy="420624"/>
+          </a:xfrm>
+          <a:prstGeom prst="ellipse">
+            <a:avLst/>
+          </a:prstGeom>
+          <a:solidFill>
+            <a:srgbClr val="0068B7"/>
+          </a:solidFill>
+          <a:ln w="12700">
+            <a:solidFill>
+              <a:srgbClr val="0068B7"/>
+            </a:solidFill>
+            <a:prstDash val="solid"/>
+          </a:ln>
+        </p:spPr>
+      </p:sp>
+      <p:sp>
+        <p:nvSpPr>
+          <p:cNvPr id="8" name="Text 6"/>
+          <p:cNvSpPr/>
+          <p:nvPr/>
+        </p:nvSpPr>
+        <p:spPr>
+          <a:xfrm>
+            <a:off x="640080" y="731520"/>
+            <a:ext cx="420624" cy="164592"/>
+          </a:xfrm>
+          <a:prstGeom prst="rect">
+            <a:avLst/>
+          </a:prstGeom>
+          <a:noFill/>
+          <a:ln/>
+        </p:spPr>
+        <p:txBody>
+          <a:bodyPr wrap="square" lIns="0" tIns="0" rIns="0" bIns="0" rtlCol="0" anchor="ctr"/>
+          <a:lstStyle/>
+          <a:p>
+            <a:pPr algn="ctr" indent="0" marL="0">
+              <a:buNone/>
+            </a:pPr>
+            <a:r>
+              <a:rPr lang="en-US" sz="1100" b="1" dirty="0">
+                <a:solidFill>
+                  <a:srgbClr val="FFFFFF"/>
+                </a:solidFill>
+                <a:latin typeface="Aptos" pitchFamily="34" charset="0"/>
+                <a:ea typeface="Aptos" pitchFamily="34" charset="-122"/>
+                <a:cs typeface="Aptos" pitchFamily="34" charset="-120"/>
+              </a:rPr>
+              <a:t>8</a:t>
+            </a:r>
+            <a:endParaRPr lang="en-US" sz="1100" dirty="0"/>
+          </a:p>
+        </p:txBody>
+      </p:sp>
+      <p:sp>
+        <p:nvSpPr>
+          <p:cNvPr id="9" name="Text 7"/>
+          <p:cNvSpPr/>
+          <p:nvPr/>
+        </p:nvSpPr>
+        <p:spPr>
+          <a:xfrm>
+            <a:off x="640080" y="621792"/>
             <a:ext cx="10881360" cy="566928"/>
           </a:xfrm>
           <a:prstGeom prst="rect">
@@ -3601,7 +4890,7 @@
                 <a:ea typeface="Aptos Display" pitchFamily="34" charset="-122"/>
                 <a:cs typeface="Aptos Display" pitchFamily="34" charset="-120"/>
               </a:rPr>
-              <a:t>Reflection Questions Continued</a:t>
+              <a:t>Application to AI-Supported Workflows</a:t>
             </a:r>
             <a:endParaRPr lang="en-US" sz="2700" dirty="0"/>
           </a:p>
@@ -3609,32 +4898,178 @@
       </p:sp>
       <p:sp>
         <p:nvSpPr>
-          <p:cNvPr id="7" name="Text 5"/>
-          <p:cNvSpPr/>
-          <p:nvPr/>
-        </p:nvSpPr>
-        <p:spPr>
-          <a:xfrm>
-            <a:off x="822960" y="1325880"/>
-            <a:ext cx="10378440" cy="4800600"/>
-          </a:xfrm>
-          <a:prstGeom prst="rect">
-            <a:avLst/>
-          </a:prstGeom>
-          <a:noFill/>
-          <a:ln/>
-        </p:spPr>
-        <p:txBody>
-          <a:bodyPr wrap="square" lIns="1016" tIns="1016" rIns="1016" bIns="1016" rtlCol="0" anchor="t">
+          <p:cNvPr id="10" name="Text 8"/>
+          <p:cNvSpPr/>
+          <p:nvPr/>
+        </p:nvSpPr>
+        <p:spPr>
+          <a:xfrm>
+            <a:off x="868680" y="1417320"/>
+            <a:ext cx="6675120" cy="4434840"/>
+          </a:xfrm>
+          <a:prstGeom prst="rect">
+            <a:avLst/>
+          </a:prstGeom>
+          <a:noFill/>
+          <a:ln/>
+        </p:spPr>
+        <p:txBody>
+          <a:bodyPr wrap="square" lIns="635" tIns="635" rIns="635" bIns="635" rtlCol="0" anchor="t">
             <a:normAutofit/>
           </a:bodyPr>
           <a:lstStyle/>
           <a:p>
+            <a:r>
+              <a:rPr lang="en-US" sz="1700" dirty="0">
+                <a:solidFill>
+                  <a:srgbClr val="17364A"/>
+                </a:solidFill>
+                <a:latin typeface="Aptos" pitchFamily="34" charset="0"/>
+                <a:ea typeface="Aptos" pitchFamily="34" charset="-122"/>
+                <a:cs typeface="Aptos" pitchFamily="34" charset="-120"/>
+              </a:rPr>
+              <a:t>Generative AI, predictive analytics, RAG, automation, and agentic workflows all depend on the controls described in this.</a:t>
+            </a:r>
+            <a:endParaRPr lang="en-US" sz="1700" dirty="0"/>
+          </a:p>
+          <a:p>
+            <a:r>
+              <a:rPr lang="en-US" sz="1700" dirty="0">
+                <a:solidFill>
+                  <a:srgbClr val="17364A"/>
+                </a:solidFill>
+                <a:latin typeface="Aptos" pitchFamily="34" charset="0"/>
+                <a:ea typeface="Aptos" pitchFamily="34" charset="-122"/>
+                <a:cs typeface="Aptos" pitchFamily="34" charset="-120"/>
+              </a:rPr>
+              <a:t>The controls should be scaled to the risk of the use case.</a:t>
+            </a:r>
+            <a:endParaRPr lang="en-US" sz="1700" dirty="0"/>
+          </a:p>
+          <a:p>
+            <a:r>
+              <a:rPr lang="en-US" sz="1700" dirty="0">
+                <a:solidFill>
+                  <a:srgbClr val="17364A"/>
+                </a:solidFill>
+                <a:latin typeface="Aptos" pitchFamily="34" charset="0"/>
+                <a:ea typeface="Aptos" pitchFamily="34" charset="-122"/>
+                <a:cs typeface="Aptos" pitchFamily="34" charset="-120"/>
+              </a:rPr>
+              <a:t>A tool that drafts internal training text may require lighter review than a tool that updates case records, prioritizes.</a:t>
+            </a:r>
+            <a:endParaRPr lang="en-US" sz="1700" dirty="0"/>
+          </a:p>
+          <a:p>
+            <a:r>
+              <a:rPr lang="en-US" sz="1700" dirty="0">
+                <a:solidFill>
+                  <a:srgbClr val="17364A"/>
+                </a:solidFill>
+                <a:latin typeface="Aptos" pitchFamily="34" charset="0"/>
+                <a:ea typeface="Aptos" pitchFamily="34" charset="-122"/>
+                <a:cs typeface="Aptos" pitchFamily="34" charset="-120"/>
+              </a:rPr>
+              <a:t>The module should be applied during readiness assessment, procurement, implementation planning, pilot testing, and.</a:t>
+            </a:r>
+            <a:endParaRPr lang="en-US" sz="1700" dirty="0"/>
+          </a:p>
+        </p:txBody>
+      </p:sp>
+      <p:sp>
+        <p:nvSpPr>
+          <p:cNvPr id="11" name="Shape 9"/>
+          <p:cNvSpPr/>
+          <p:nvPr/>
+        </p:nvSpPr>
+        <p:spPr>
+          <a:xfrm>
+            <a:off x="7909560" y="1417320"/>
+            <a:ext cx="3154680" cy="1828800"/>
+          </a:xfrm>
+          <a:prstGeom prst="roundRect">
+            <a:avLst>
+              <a:gd name="adj" fmla="val 6000"/>
+            </a:avLst>
+          </a:prstGeom>
+          <a:solidFill>
+            <a:srgbClr val="EEF8ED"/>
+          </a:solidFill>
+          <a:ln w="12700">
+            <a:solidFill>
+              <a:srgbClr val="B9D7E6"/>
+            </a:solidFill>
+            <a:prstDash val="solid"/>
+          </a:ln>
+        </p:spPr>
+      </p:sp>
+      <p:sp>
+        <p:nvSpPr>
+          <p:cNvPr id="12" name="Text 10"/>
+          <p:cNvSpPr/>
+          <p:nvPr/>
+        </p:nvSpPr>
+        <p:spPr>
+          <a:xfrm>
+            <a:off x="8074152" y="1563624"/>
+            <a:ext cx="2825496" cy="201168"/>
+          </a:xfrm>
+          <a:prstGeom prst="rect">
+            <a:avLst/>
+          </a:prstGeom>
+          <a:noFill/>
+          <a:ln/>
+        </p:spPr>
+        <p:txBody>
+          <a:bodyPr wrap="square" lIns="0" tIns="0" rIns="0" bIns="0" rtlCol="0" anchor="ctr"/>
+          <a:lstStyle/>
+          <a:p>
             <a:pPr indent="0" marL="0">
               <a:buNone/>
             </a:pPr>
             <a:r>
-              <a:rPr lang="en-US" sz="1420" dirty="0">
+              <a:rPr lang="en-US" sz="950" b="1" dirty="0">
+                <a:solidFill>
+                  <a:srgbClr val="0068B7"/>
+                </a:solidFill>
+                <a:latin typeface="Aptos" pitchFamily="34" charset="0"/>
+                <a:ea typeface="Aptos" pitchFamily="34" charset="-122"/>
+                <a:cs typeface="Aptos" pitchFamily="34" charset="-120"/>
+              </a:rPr>
+              <a:t>Key idea</a:t>
+            </a:r>
+            <a:endParaRPr lang="en-US" sz="950" dirty="0"/>
+          </a:p>
+        </p:txBody>
+      </p:sp>
+      <p:sp>
+        <p:nvSpPr>
+          <p:cNvPr id="13" name="Text 11"/>
+          <p:cNvSpPr/>
+          <p:nvPr/>
+        </p:nvSpPr>
+        <p:spPr>
+          <a:xfrm>
+            <a:off x="8074152" y="1856232"/>
+            <a:ext cx="2825496" cy="1261872"/>
+          </a:xfrm>
+          <a:prstGeom prst="rect">
+            <a:avLst/>
+          </a:prstGeom>
+          <a:noFill/>
+          <a:ln/>
+        </p:spPr>
+        <p:txBody>
+          <a:bodyPr wrap="square" lIns="0" tIns="0" rIns="0" bIns="0" rtlCol="0" anchor="t">
+            <a:normAutofit/>
+          </a:bodyPr>
+          <a:lstStyle/>
+          <a:p>
+            <a:pPr indent="0" marL="0">
+              <a:buNone/>
+            </a:pPr>
+            <a:r>
+              <a:rPr lang="en-US" sz="1250" dirty="0">
                 <a:solidFill>
                   <a:srgbClr val="17364A"/>
                 </a:solidFill>
@@ -3642,9 +5077,116 @@
                 <a:ea typeface="Aptos" pitchFamily="34" charset="-122"/>
                 <a:cs typeface="Aptos" pitchFamily="34" charset="-120"/>
               </a:rPr>
-              <a:t>Which safeguards should be required before pilot testing? Who owns ongoing monitoring and review?</a:t>
-            </a:r>
-            <a:endParaRPr lang="en-US" sz="1420" dirty="0"/>
+              <a:t>Generative AI, predictive analytics, RAG, automation, and agentic workflows all depend on the controls described in this.</a:t>
+            </a:r>
+            <a:endParaRPr lang="en-US" sz="1250" dirty="0"/>
+          </a:p>
+        </p:txBody>
+      </p:sp>
+      <p:sp>
+        <p:nvSpPr>
+          <p:cNvPr id="14" name="Shape 12"/>
+          <p:cNvSpPr/>
+          <p:nvPr/>
+        </p:nvSpPr>
+        <p:spPr>
+          <a:xfrm>
+            <a:off x="7909560" y="3520440"/>
+            <a:ext cx="3154680" cy="1737360"/>
+          </a:xfrm>
+          <a:prstGeom prst="roundRect">
+            <a:avLst>
+              <a:gd name="adj" fmla="val 6316"/>
+            </a:avLst>
+          </a:prstGeom>
+          <a:solidFill>
+            <a:srgbClr val="EAF6F8"/>
+          </a:solidFill>
+          <a:ln w="12700">
+            <a:solidFill>
+              <a:srgbClr val="B9D7E6"/>
+            </a:solidFill>
+            <a:prstDash val="solid"/>
+          </a:ln>
+        </p:spPr>
+      </p:sp>
+      <p:sp>
+        <p:nvSpPr>
+          <p:cNvPr id="15" name="Text 13"/>
+          <p:cNvSpPr/>
+          <p:nvPr/>
+        </p:nvSpPr>
+        <p:spPr>
+          <a:xfrm>
+            <a:off x="8074152" y="3666744"/>
+            <a:ext cx="2825496" cy="201168"/>
+          </a:xfrm>
+          <a:prstGeom prst="rect">
+            <a:avLst/>
+          </a:prstGeom>
+          <a:noFill/>
+          <a:ln/>
+        </p:spPr>
+        <p:txBody>
+          <a:bodyPr wrap="square" lIns="0" tIns="0" rIns="0" bIns="0" rtlCol="0" anchor="ctr"/>
+          <a:lstStyle/>
+          <a:p>
+            <a:pPr indent="0" marL="0">
+              <a:buNone/>
+            </a:pPr>
+            <a:r>
+              <a:rPr lang="en-US" sz="950" b="1" dirty="0">
+                <a:solidFill>
+                  <a:srgbClr val="0068B7"/>
+                </a:solidFill>
+                <a:latin typeface="Aptos" pitchFamily="34" charset="0"/>
+                <a:ea typeface="Aptos" pitchFamily="34" charset="-122"/>
+                <a:cs typeface="Aptos" pitchFamily="34" charset="-120"/>
+              </a:rPr>
+              <a:t>Use this for</a:t>
+            </a:r>
+            <a:endParaRPr lang="en-US" sz="950" dirty="0"/>
+          </a:p>
+        </p:txBody>
+      </p:sp>
+      <p:sp>
+        <p:nvSpPr>
+          <p:cNvPr id="16" name="Text 14"/>
+          <p:cNvSpPr/>
+          <p:nvPr/>
+        </p:nvSpPr>
+        <p:spPr>
+          <a:xfrm>
+            <a:off x="8074152" y="3959352"/>
+            <a:ext cx="2825496" cy="1170432"/>
+          </a:xfrm>
+          <a:prstGeom prst="rect">
+            <a:avLst/>
+          </a:prstGeom>
+          <a:noFill/>
+          <a:ln/>
+        </p:spPr>
+        <p:txBody>
+          <a:bodyPr wrap="square" lIns="0" tIns="0" rIns="0" bIns="0" rtlCol="0" anchor="t">
+            <a:normAutofit/>
+          </a:bodyPr>
+          <a:lstStyle/>
+          <a:p>
+            <a:pPr indent="0" marL="0">
+              <a:buNone/>
+            </a:pPr>
+            <a:r>
+              <a:rPr lang="en-US" sz="1250" dirty="0">
+                <a:solidFill>
+                  <a:srgbClr val="17364A"/>
+                </a:solidFill>
+                <a:latin typeface="Aptos" pitchFamily="34" charset="0"/>
+                <a:ea typeface="Aptos" pitchFamily="34" charset="-122"/>
+                <a:cs typeface="Aptos" pitchFamily="34" charset="-120"/>
+              </a:rPr>
+              <a:t>Connect the concept to public health decisions, safeguards, documentation, or implementation work.</a:t>
+            </a:r>
+            <a:endParaRPr lang="en-US" sz="1250" dirty="0"/>
           </a:p>
         </p:txBody>
       </p:sp>
@@ -3707,7 +5249,32 @@
       </p:sp>
       <p:sp>
         <p:nvSpPr>
-          <p:cNvPr id="3" name="Text 1"/>
+          <p:cNvPr id="3" name="Shape 1"/>
+          <p:cNvSpPr/>
+          <p:nvPr/>
+        </p:nvSpPr>
+        <p:spPr>
+          <a:xfrm>
+            <a:off x="0" y="164592"/>
+            <a:ext cx="146304" cy="6693408"/>
+          </a:xfrm>
+          <a:prstGeom prst="rect">
+            <a:avLst/>
+          </a:prstGeom>
+          <a:solidFill>
+            <a:srgbClr val="2F8A28"/>
+          </a:solidFill>
+          <a:ln w="12700">
+            <a:solidFill>
+              <a:srgbClr val="2F8A28"/>
+            </a:solidFill>
+            <a:prstDash val="solid"/>
+          </a:ln>
+        </p:spPr>
+      </p:sp>
+      <p:sp>
+        <p:nvSpPr>
+          <p:cNvPr id="4" name="Text 2"/>
           <p:cNvSpPr/>
           <p:nvPr/>
         </p:nvSpPr>
@@ -3746,7 +5313,7 @@
       </p:sp>
       <p:sp>
         <p:nvSpPr>
-          <p:cNvPr id="4" name="Text 2"/>
+          <p:cNvPr id="5" name="Text 3"/>
           <p:cNvSpPr/>
           <p:nvPr/>
         </p:nvSpPr>
@@ -3785,7 +5352,7 @@
       </p:sp>
       <p:sp>
         <p:nvSpPr>
-          <p:cNvPr id="5" name="Text 3"/>
+          <p:cNvPr id="6" name="Text 4"/>
           <p:cNvSpPr/>
           <p:nvPr/>
         </p:nvSpPr>
@@ -3824,13 +5391,77 @@
       </p:sp>
       <p:sp>
         <p:nvSpPr>
-          <p:cNvPr id="6" name="Text 4"/>
+          <p:cNvPr id="7" name="Shape 5"/>
           <p:cNvSpPr/>
           <p:nvPr/>
         </p:nvSpPr>
         <p:spPr>
           <a:xfrm>
             <a:off x="640080" y="658368"/>
+            <a:ext cx="420624" cy="420624"/>
+          </a:xfrm>
+          <a:prstGeom prst="ellipse">
+            <a:avLst/>
+          </a:prstGeom>
+          <a:solidFill>
+            <a:srgbClr val="0068B7"/>
+          </a:solidFill>
+          <a:ln w="12700">
+            <a:solidFill>
+              <a:srgbClr val="0068B7"/>
+            </a:solidFill>
+            <a:prstDash val="solid"/>
+          </a:ln>
+        </p:spPr>
+      </p:sp>
+      <p:sp>
+        <p:nvSpPr>
+          <p:cNvPr id="8" name="Text 6"/>
+          <p:cNvSpPr/>
+          <p:nvPr/>
+        </p:nvSpPr>
+        <p:spPr>
+          <a:xfrm>
+            <a:off x="640080" y="731520"/>
+            <a:ext cx="420624" cy="164592"/>
+          </a:xfrm>
+          <a:prstGeom prst="rect">
+            <a:avLst/>
+          </a:prstGeom>
+          <a:noFill/>
+          <a:ln/>
+        </p:spPr>
+        <p:txBody>
+          <a:bodyPr wrap="square" lIns="0" tIns="0" rIns="0" bIns="0" rtlCol="0" anchor="ctr"/>
+          <a:lstStyle/>
+          <a:p>
+            <a:pPr algn="ctr" indent="0" marL="0">
+              <a:buNone/>
+            </a:pPr>
+            <a:r>
+              <a:rPr lang="en-US" sz="1100" b="1" dirty="0">
+                <a:solidFill>
+                  <a:srgbClr val="FFFFFF"/>
+                </a:solidFill>
+                <a:latin typeface="Aptos" pitchFamily="34" charset="0"/>
+                <a:ea typeface="Aptos" pitchFamily="34" charset="-122"/>
+                <a:cs typeface="Aptos" pitchFamily="34" charset="-120"/>
+              </a:rPr>
+              <a:t>9</a:t>
+            </a:r>
+            <a:endParaRPr lang="en-US" sz="1100" dirty="0"/>
+          </a:p>
+        </p:txBody>
+      </p:sp>
+      <p:sp>
+        <p:nvSpPr>
+          <p:cNvPr id="9" name="Text 7"/>
+          <p:cNvSpPr/>
+          <p:nvPr/>
+        </p:nvSpPr>
+        <p:spPr>
+          <a:xfrm>
+            <a:off x="640080" y="621792"/>
             <a:ext cx="10881360" cy="566928"/>
           </a:xfrm>
           <a:prstGeom prst="rect">
@@ -3857,7 +5488,7 @@
                 <a:ea typeface="Aptos Display" pitchFamily="34" charset="-122"/>
                 <a:cs typeface="Aptos Display" pitchFamily="34" charset="-120"/>
               </a:rPr>
-              <a:t>Practical Exercise</a:t>
+              <a:t>Reflection Questions</a:t>
             </a:r>
             <a:endParaRPr lang="en-US" sz="2700" dirty="0"/>
           </a:p>
@@ -3865,32 +5496,164 @@
       </p:sp>
       <p:sp>
         <p:nvSpPr>
-          <p:cNvPr id="7" name="Text 5"/>
-          <p:cNvSpPr/>
-          <p:nvPr/>
-        </p:nvSpPr>
-        <p:spPr>
-          <a:xfrm>
-            <a:off x="822960" y="1325880"/>
-            <a:ext cx="10378440" cy="4800600"/>
-          </a:xfrm>
-          <a:prstGeom prst="rect">
-            <a:avLst/>
-          </a:prstGeom>
-          <a:noFill/>
-          <a:ln/>
-        </p:spPr>
-        <p:txBody>
-          <a:bodyPr wrap="square" lIns="1016" tIns="1016" rIns="1016" bIns="1016" rtlCol="0" anchor="t">
+          <p:cNvPr id="10" name="Text 8"/>
+          <p:cNvSpPr/>
+          <p:nvPr/>
+        </p:nvSpPr>
+        <p:spPr>
+          <a:xfrm>
+            <a:off x="868680" y="1417320"/>
+            <a:ext cx="6675120" cy="4434840"/>
+          </a:xfrm>
+          <a:prstGeom prst="rect">
+            <a:avLst/>
+          </a:prstGeom>
+          <a:noFill/>
+          <a:ln/>
+        </p:spPr>
+        <p:txBody>
+          <a:bodyPr wrap="square" lIns="635" tIns="635" rIns="635" bIns="635" rtlCol="0" anchor="t">
             <a:normAutofit/>
           </a:bodyPr>
           <a:lstStyle/>
           <a:p>
+            <a:r>
+              <a:rPr lang="en-US" sz="1700" dirty="0">
+                <a:solidFill>
+                  <a:srgbClr val="17364A"/>
+                </a:solidFill>
+                <a:latin typeface="Aptos" pitchFamily="34" charset="0"/>
+                <a:ea typeface="Aptos" pitchFamily="34" charset="-122"/>
+                <a:cs typeface="Aptos" pitchFamily="34" charset="-120"/>
+              </a:rPr>
+              <a:t>Where does this topic appear in one current or proposed AI workflow in your agency?</a:t>
+            </a:r>
+            <a:endParaRPr lang="en-US" sz="1700" dirty="0"/>
+          </a:p>
+          <a:p>
+            <a:r>
+              <a:rPr lang="en-US" sz="1700" dirty="0">
+                <a:solidFill>
+                  <a:srgbClr val="17364A"/>
+                </a:solidFill>
+                <a:latin typeface="Aptos" pitchFamily="34" charset="0"/>
+                <a:ea typeface="Aptos" pitchFamily="34" charset="-122"/>
+                <a:cs typeface="Aptos" pitchFamily="34" charset="-120"/>
+              </a:rPr>
+              <a:t>What decisions, data sources, users, or partners would be affected if this area is poorly designed?</a:t>
+            </a:r>
+            <a:endParaRPr lang="en-US" sz="1700" dirty="0"/>
+          </a:p>
+          <a:p>
+            <a:r>
+              <a:rPr lang="en-US" sz="1700" dirty="0">
+                <a:solidFill>
+                  <a:srgbClr val="17364A"/>
+                </a:solidFill>
+                <a:latin typeface="Aptos" pitchFamily="34" charset="0"/>
+                <a:ea typeface="Aptos" pitchFamily="34" charset="-122"/>
+                <a:cs typeface="Aptos" pitchFamily="34" charset="-120"/>
+              </a:rPr>
+              <a:t>What evidence would governance reviewers need before approving the workflow?</a:t>
+            </a:r>
+            <a:endParaRPr lang="en-US" sz="1700" dirty="0"/>
+          </a:p>
+        </p:txBody>
+      </p:sp>
+      <p:sp>
+        <p:nvSpPr>
+          <p:cNvPr id="11" name="Shape 9"/>
+          <p:cNvSpPr/>
+          <p:nvPr/>
+        </p:nvSpPr>
+        <p:spPr>
+          <a:xfrm>
+            <a:off x="7909560" y="1417320"/>
+            <a:ext cx="3154680" cy="1828800"/>
+          </a:xfrm>
+          <a:prstGeom prst="roundRect">
+            <a:avLst>
+              <a:gd name="adj" fmla="val 6000"/>
+            </a:avLst>
+          </a:prstGeom>
+          <a:solidFill>
+            <a:srgbClr val="EEF8ED"/>
+          </a:solidFill>
+          <a:ln w="12700">
+            <a:solidFill>
+              <a:srgbClr val="B9D7E6"/>
+            </a:solidFill>
+            <a:prstDash val="solid"/>
+          </a:ln>
+        </p:spPr>
+      </p:sp>
+      <p:sp>
+        <p:nvSpPr>
+          <p:cNvPr id="12" name="Text 10"/>
+          <p:cNvSpPr/>
+          <p:nvPr/>
+        </p:nvSpPr>
+        <p:spPr>
+          <a:xfrm>
+            <a:off x="8074152" y="1563624"/>
+            <a:ext cx="2825496" cy="201168"/>
+          </a:xfrm>
+          <a:prstGeom prst="rect">
+            <a:avLst/>
+          </a:prstGeom>
+          <a:noFill/>
+          <a:ln/>
+        </p:spPr>
+        <p:txBody>
+          <a:bodyPr wrap="square" lIns="0" tIns="0" rIns="0" bIns="0" rtlCol="0" anchor="ctr"/>
+          <a:lstStyle/>
+          <a:p>
             <a:pPr indent="0" marL="0">
               <a:buNone/>
             </a:pPr>
             <a:r>
-              <a:rPr lang="en-US" sz="1420" dirty="0">
+              <a:rPr lang="en-US" sz="950" b="1" dirty="0">
+                <a:solidFill>
+                  <a:srgbClr val="0068B7"/>
+                </a:solidFill>
+                <a:latin typeface="Aptos" pitchFamily="34" charset="0"/>
+                <a:ea typeface="Aptos" pitchFamily="34" charset="-122"/>
+                <a:cs typeface="Aptos" pitchFamily="34" charset="-120"/>
+              </a:rPr>
+              <a:t>Key idea</a:t>
+            </a:r>
+            <a:endParaRPr lang="en-US" sz="950" dirty="0"/>
+          </a:p>
+        </p:txBody>
+      </p:sp>
+      <p:sp>
+        <p:nvSpPr>
+          <p:cNvPr id="13" name="Text 11"/>
+          <p:cNvSpPr/>
+          <p:nvPr/>
+        </p:nvSpPr>
+        <p:spPr>
+          <a:xfrm>
+            <a:off x="8074152" y="1856232"/>
+            <a:ext cx="2825496" cy="1261872"/>
+          </a:xfrm>
+          <a:prstGeom prst="rect">
+            <a:avLst/>
+          </a:prstGeom>
+          <a:noFill/>
+          <a:ln/>
+        </p:spPr>
+        <p:txBody>
+          <a:bodyPr wrap="square" lIns="0" tIns="0" rIns="0" bIns="0" rtlCol="0" anchor="t">
+            <a:normAutofit/>
+          </a:bodyPr>
+          <a:lstStyle/>
+          <a:p>
+            <a:pPr indent="0" marL="0">
+              <a:buNone/>
+            </a:pPr>
+            <a:r>
+              <a:rPr lang="en-US" sz="1250" dirty="0">
                 <a:solidFill>
                   <a:srgbClr val="17364A"/>
                 </a:solidFill>
@@ -3898,9 +5661,116 @@
                 <a:ea typeface="Aptos" pitchFamily="34" charset="-122"/>
                 <a:cs typeface="Aptos" pitchFamily="34" charset="-120"/>
               </a:rPr>
-              <a:t>Create a AI value and impact measurement plan for one real or realistic public health AI workflow. The artifact should describe the use case, affected users, data sources, system dependencies, risks, guardrails, review points, and unresolved questions. The exercise should produce a work product that could be used in a governance meeting, procurement review, implementation planning session, pilot evaluation, or monitoring review. Learners should document assumptions and identify which staff or partners need to be consulted.</a:t>
-            </a:r>
-            <a:endParaRPr lang="en-US" sz="1420" dirty="0"/>
+              <a:t>Where does this topic appear in one current or proposed AI workflow in your agency?</a:t>
+            </a:r>
+            <a:endParaRPr lang="en-US" sz="1250" dirty="0"/>
+          </a:p>
+        </p:txBody>
+      </p:sp>
+      <p:sp>
+        <p:nvSpPr>
+          <p:cNvPr id="14" name="Shape 12"/>
+          <p:cNvSpPr/>
+          <p:nvPr/>
+        </p:nvSpPr>
+        <p:spPr>
+          <a:xfrm>
+            <a:off x="7909560" y="3520440"/>
+            <a:ext cx="3154680" cy="1737360"/>
+          </a:xfrm>
+          <a:prstGeom prst="roundRect">
+            <a:avLst>
+              <a:gd name="adj" fmla="val 6316"/>
+            </a:avLst>
+          </a:prstGeom>
+          <a:solidFill>
+            <a:srgbClr val="EAF6F8"/>
+          </a:solidFill>
+          <a:ln w="12700">
+            <a:solidFill>
+              <a:srgbClr val="B9D7E6"/>
+            </a:solidFill>
+            <a:prstDash val="solid"/>
+          </a:ln>
+        </p:spPr>
+      </p:sp>
+      <p:sp>
+        <p:nvSpPr>
+          <p:cNvPr id="15" name="Text 13"/>
+          <p:cNvSpPr/>
+          <p:nvPr/>
+        </p:nvSpPr>
+        <p:spPr>
+          <a:xfrm>
+            <a:off x="8074152" y="3666744"/>
+            <a:ext cx="2825496" cy="201168"/>
+          </a:xfrm>
+          <a:prstGeom prst="rect">
+            <a:avLst/>
+          </a:prstGeom>
+          <a:noFill/>
+          <a:ln/>
+        </p:spPr>
+        <p:txBody>
+          <a:bodyPr wrap="square" lIns="0" tIns="0" rIns="0" bIns="0" rtlCol="0" anchor="ctr"/>
+          <a:lstStyle/>
+          <a:p>
+            <a:pPr indent="0" marL="0">
+              <a:buNone/>
+            </a:pPr>
+            <a:r>
+              <a:rPr lang="en-US" sz="950" b="1" dirty="0">
+                <a:solidFill>
+                  <a:srgbClr val="0068B7"/>
+                </a:solidFill>
+                <a:latin typeface="Aptos" pitchFamily="34" charset="0"/>
+                <a:ea typeface="Aptos" pitchFamily="34" charset="-122"/>
+                <a:cs typeface="Aptos" pitchFamily="34" charset="-120"/>
+              </a:rPr>
+              <a:t>Use this for</a:t>
+            </a:r>
+            <a:endParaRPr lang="en-US" sz="950" dirty="0"/>
+          </a:p>
+        </p:txBody>
+      </p:sp>
+      <p:sp>
+        <p:nvSpPr>
+          <p:cNvPr id="16" name="Text 14"/>
+          <p:cNvSpPr/>
+          <p:nvPr/>
+        </p:nvSpPr>
+        <p:spPr>
+          <a:xfrm>
+            <a:off x="8074152" y="3959352"/>
+            <a:ext cx="2825496" cy="1170432"/>
+          </a:xfrm>
+          <a:prstGeom prst="rect">
+            <a:avLst/>
+          </a:prstGeom>
+          <a:noFill/>
+          <a:ln/>
+        </p:spPr>
+        <p:txBody>
+          <a:bodyPr wrap="square" lIns="0" tIns="0" rIns="0" bIns="0" rtlCol="0" anchor="t">
+            <a:normAutofit/>
+          </a:bodyPr>
+          <a:lstStyle/>
+          <a:p>
+            <a:pPr indent="0" marL="0">
+              <a:buNone/>
+            </a:pPr>
+            <a:r>
+              <a:rPr lang="en-US" sz="1250" dirty="0">
+                <a:solidFill>
+                  <a:srgbClr val="17364A"/>
+                </a:solidFill>
+                <a:latin typeface="Aptos" pitchFamily="34" charset="0"/>
+                <a:ea typeface="Aptos" pitchFamily="34" charset="-122"/>
+                <a:cs typeface="Aptos" pitchFamily="34" charset="-120"/>
+              </a:rPr>
+              <a:t>Connect the concept to public health decisions, safeguards, documentation, or implementation work.</a:t>
+            </a:r>
+            <a:endParaRPr lang="en-US" sz="1250" dirty="0"/>
           </a:p>
         </p:txBody>
       </p:sp>
@@ -3963,7 +5833,32 @@
       </p:sp>
       <p:sp>
         <p:nvSpPr>
-          <p:cNvPr id="3" name="Text 1"/>
+          <p:cNvPr id="3" name="Shape 1"/>
+          <p:cNvSpPr/>
+          <p:nvPr/>
+        </p:nvSpPr>
+        <p:spPr>
+          <a:xfrm>
+            <a:off x="0" y="164592"/>
+            <a:ext cx="146304" cy="6693408"/>
+          </a:xfrm>
+          <a:prstGeom prst="rect">
+            <a:avLst/>
+          </a:prstGeom>
+          <a:solidFill>
+            <a:srgbClr val="2F8A28"/>
+          </a:solidFill>
+          <a:ln w="12700">
+            <a:solidFill>
+              <a:srgbClr val="2F8A28"/>
+            </a:solidFill>
+            <a:prstDash val="solid"/>
+          </a:ln>
+        </p:spPr>
+      </p:sp>
+      <p:sp>
+        <p:nvSpPr>
+          <p:cNvPr id="4" name="Text 2"/>
           <p:cNvSpPr/>
           <p:nvPr/>
         </p:nvSpPr>
@@ -4002,7 +5897,7 @@
       </p:sp>
       <p:sp>
         <p:nvSpPr>
-          <p:cNvPr id="4" name="Text 2"/>
+          <p:cNvPr id="5" name="Text 3"/>
           <p:cNvSpPr/>
           <p:nvPr/>
         </p:nvSpPr>
@@ -4041,7 +5936,7 @@
       </p:sp>
       <p:sp>
         <p:nvSpPr>
-          <p:cNvPr id="5" name="Text 3"/>
+          <p:cNvPr id="6" name="Text 4"/>
           <p:cNvSpPr/>
           <p:nvPr/>
         </p:nvSpPr>
@@ -4080,7 +5975,7 @@
       </p:sp>
       <p:sp>
         <p:nvSpPr>
-          <p:cNvPr id="6" name="Text 4"/>
+          <p:cNvPr id="7" name="Text 5"/>
           <p:cNvSpPr/>
           <p:nvPr/>
         </p:nvSpPr>
@@ -4113,7 +6008,7 @@
                 <a:ea typeface="Aptos Display" pitchFamily="34" charset="-122"/>
                 <a:cs typeface="Aptos Display" pitchFamily="34" charset="-120"/>
               </a:rPr>
-              <a:t>Expected Artifact or Evidence</a:t>
+              <a:t>Reflection Questions Continued</a:t>
             </a:r>
             <a:endParaRPr lang="en-US" sz="2700" dirty="0"/>
           </a:p>
@@ -4121,32 +6016,150 @@
       </p:sp>
       <p:sp>
         <p:nvSpPr>
-          <p:cNvPr id="7" name="Text 5"/>
-          <p:cNvSpPr/>
-          <p:nvPr/>
-        </p:nvSpPr>
-        <p:spPr>
-          <a:xfrm>
-            <a:off x="822960" y="1325880"/>
-            <a:ext cx="10378440" cy="4800600"/>
-          </a:xfrm>
-          <a:prstGeom prst="rect">
-            <a:avLst/>
-          </a:prstGeom>
-          <a:noFill/>
-          <a:ln/>
-        </p:spPr>
-        <p:txBody>
-          <a:bodyPr wrap="square" lIns="1016" tIns="1016" rIns="1016" bIns="1016" rtlCol="0" anchor="t">
+          <p:cNvPr id="8" name="Text 6"/>
+          <p:cNvSpPr/>
+          <p:nvPr/>
+        </p:nvSpPr>
+        <p:spPr>
+          <a:xfrm>
+            <a:off x="868680" y="1417320"/>
+            <a:ext cx="6675120" cy="4434840"/>
+          </a:xfrm>
+          <a:prstGeom prst="rect">
+            <a:avLst/>
+          </a:prstGeom>
+          <a:noFill/>
+          <a:ln/>
+        </p:spPr>
+        <p:txBody>
+          <a:bodyPr wrap="square" lIns="635" tIns="635" rIns="635" bIns="635" rtlCol="0" anchor="t">
             <a:normAutofit/>
           </a:bodyPr>
           <a:lstStyle/>
           <a:p>
+            <a:r>
+              <a:rPr lang="en-US" sz="1700" dirty="0">
+                <a:solidFill>
+                  <a:srgbClr val="17364A"/>
+                </a:solidFill>
+                <a:latin typeface="Aptos" pitchFamily="34" charset="0"/>
+                <a:ea typeface="Aptos" pitchFamily="34" charset="-122"/>
+                <a:cs typeface="Aptos" pitchFamily="34" charset="-120"/>
+              </a:rPr>
+              <a:t>Which safeguards should be required before pilot testing?</a:t>
+            </a:r>
+            <a:endParaRPr lang="en-US" sz="1700" dirty="0"/>
+          </a:p>
+          <a:p>
+            <a:r>
+              <a:rPr lang="en-US" sz="1700" dirty="0">
+                <a:solidFill>
+                  <a:srgbClr val="17364A"/>
+                </a:solidFill>
+                <a:latin typeface="Aptos" pitchFamily="34" charset="0"/>
+                <a:ea typeface="Aptos" pitchFamily="34" charset="-122"/>
+                <a:cs typeface="Aptos" pitchFamily="34" charset="-120"/>
+              </a:rPr>
+              <a:t>Who owns ongoing monitoring and review?</a:t>
+            </a:r>
+            <a:endParaRPr lang="en-US" sz="1700" dirty="0"/>
+          </a:p>
+        </p:txBody>
+      </p:sp>
+      <p:sp>
+        <p:nvSpPr>
+          <p:cNvPr id="9" name="Shape 7"/>
+          <p:cNvSpPr/>
+          <p:nvPr/>
+        </p:nvSpPr>
+        <p:spPr>
+          <a:xfrm>
+            <a:off x="7909560" y="1417320"/>
+            <a:ext cx="3154680" cy="1828800"/>
+          </a:xfrm>
+          <a:prstGeom prst="roundRect">
+            <a:avLst>
+              <a:gd name="adj" fmla="val 6000"/>
+            </a:avLst>
+          </a:prstGeom>
+          <a:solidFill>
+            <a:srgbClr val="EEF8ED"/>
+          </a:solidFill>
+          <a:ln w="12700">
+            <a:solidFill>
+              <a:srgbClr val="B9D7E6"/>
+            </a:solidFill>
+            <a:prstDash val="solid"/>
+          </a:ln>
+        </p:spPr>
+      </p:sp>
+      <p:sp>
+        <p:nvSpPr>
+          <p:cNvPr id="10" name="Text 8"/>
+          <p:cNvSpPr/>
+          <p:nvPr/>
+        </p:nvSpPr>
+        <p:spPr>
+          <a:xfrm>
+            <a:off x="8074152" y="1563624"/>
+            <a:ext cx="2825496" cy="201168"/>
+          </a:xfrm>
+          <a:prstGeom prst="rect">
+            <a:avLst/>
+          </a:prstGeom>
+          <a:noFill/>
+          <a:ln/>
+        </p:spPr>
+        <p:txBody>
+          <a:bodyPr wrap="square" lIns="0" tIns="0" rIns="0" bIns="0" rtlCol="0" anchor="ctr"/>
+          <a:lstStyle/>
+          <a:p>
             <a:pPr indent="0" marL="0">
               <a:buNone/>
             </a:pPr>
             <a:r>
-              <a:rPr lang="en-US" sz="1420" dirty="0">
+              <a:rPr lang="en-US" sz="950" b="1" dirty="0">
+                <a:solidFill>
+                  <a:srgbClr val="0068B7"/>
+                </a:solidFill>
+                <a:latin typeface="Aptos" pitchFamily="34" charset="0"/>
+                <a:ea typeface="Aptos" pitchFamily="34" charset="-122"/>
+                <a:cs typeface="Aptos" pitchFamily="34" charset="-120"/>
+              </a:rPr>
+              <a:t>Key idea</a:t>
+            </a:r>
+            <a:endParaRPr lang="en-US" sz="950" dirty="0"/>
+          </a:p>
+        </p:txBody>
+      </p:sp>
+      <p:sp>
+        <p:nvSpPr>
+          <p:cNvPr id="11" name="Text 9"/>
+          <p:cNvSpPr/>
+          <p:nvPr/>
+        </p:nvSpPr>
+        <p:spPr>
+          <a:xfrm>
+            <a:off x="8074152" y="1856232"/>
+            <a:ext cx="2825496" cy="1261872"/>
+          </a:xfrm>
+          <a:prstGeom prst="rect">
+            <a:avLst/>
+          </a:prstGeom>
+          <a:noFill/>
+          <a:ln/>
+        </p:spPr>
+        <p:txBody>
+          <a:bodyPr wrap="square" lIns="0" tIns="0" rIns="0" bIns="0" rtlCol="0" anchor="t">
+            <a:normAutofit/>
+          </a:bodyPr>
+          <a:lstStyle/>
+          <a:p>
+            <a:pPr indent="0" marL="0">
+              <a:buNone/>
+            </a:pPr>
+            <a:r>
+              <a:rPr lang="en-US" sz="1250" dirty="0">
                 <a:solidFill>
                   <a:srgbClr val="17364A"/>
                 </a:solidFill>
@@ -4154,9 +6167,116 @@
                 <a:ea typeface="Aptos" pitchFamily="34" charset="-122"/>
                 <a:cs typeface="Aptos" pitchFamily="34" charset="-120"/>
               </a:rPr>
-              <a:t>The expected artifact is a completed AI value and impact measurement plan. It should be specific to a public health workflow and should include technical dependencies, governance questions, human review expectations, monitoring indicators, and unresolved risks.</a:t>
-            </a:r>
-            <a:endParaRPr lang="en-US" sz="1420" dirty="0"/>
+              <a:t>Which safeguards should be required before pilot testing?</a:t>
+            </a:r>
+            <a:endParaRPr lang="en-US" sz="1250" dirty="0"/>
+          </a:p>
+        </p:txBody>
+      </p:sp>
+      <p:sp>
+        <p:nvSpPr>
+          <p:cNvPr id="12" name="Shape 10"/>
+          <p:cNvSpPr/>
+          <p:nvPr/>
+        </p:nvSpPr>
+        <p:spPr>
+          <a:xfrm>
+            <a:off x="7909560" y="3520440"/>
+            <a:ext cx="3154680" cy="1737360"/>
+          </a:xfrm>
+          <a:prstGeom prst="roundRect">
+            <a:avLst>
+              <a:gd name="adj" fmla="val 6316"/>
+            </a:avLst>
+          </a:prstGeom>
+          <a:solidFill>
+            <a:srgbClr val="EAF6F8"/>
+          </a:solidFill>
+          <a:ln w="12700">
+            <a:solidFill>
+              <a:srgbClr val="B9D7E6"/>
+            </a:solidFill>
+            <a:prstDash val="solid"/>
+          </a:ln>
+        </p:spPr>
+      </p:sp>
+      <p:sp>
+        <p:nvSpPr>
+          <p:cNvPr id="13" name="Text 11"/>
+          <p:cNvSpPr/>
+          <p:nvPr/>
+        </p:nvSpPr>
+        <p:spPr>
+          <a:xfrm>
+            <a:off x="8074152" y="3666744"/>
+            <a:ext cx="2825496" cy="201168"/>
+          </a:xfrm>
+          <a:prstGeom prst="rect">
+            <a:avLst/>
+          </a:prstGeom>
+          <a:noFill/>
+          <a:ln/>
+        </p:spPr>
+        <p:txBody>
+          <a:bodyPr wrap="square" lIns="0" tIns="0" rIns="0" bIns="0" rtlCol="0" anchor="ctr"/>
+          <a:lstStyle/>
+          <a:p>
+            <a:pPr indent="0" marL="0">
+              <a:buNone/>
+            </a:pPr>
+            <a:r>
+              <a:rPr lang="en-US" sz="950" b="1" dirty="0">
+                <a:solidFill>
+                  <a:srgbClr val="0068B7"/>
+                </a:solidFill>
+                <a:latin typeface="Aptos" pitchFamily="34" charset="0"/>
+                <a:ea typeface="Aptos" pitchFamily="34" charset="-122"/>
+                <a:cs typeface="Aptos" pitchFamily="34" charset="-120"/>
+              </a:rPr>
+              <a:t>Use this for</a:t>
+            </a:r>
+            <a:endParaRPr lang="en-US" sz="950" dirty="0"/>
+          </a:p>
+        </p:txBody>
+      </p:sp>
+      <p:sp>
+        <p:nvSpPr>
+          <p:cNvPr id="14" name="Text 12"/>
+          <p:cNvSpPr/>
+          <p:nvPr/>
+        </p:nvSpPr>
+        <p:spPr>
+          <a:xfrm>
+            <a:off x="8074152" y="3959352"/>
+            <a:ext cx="2825496" cy="1170432"/>
+          </a:xfrm>
+          <a:prstGeom prst="rect">
+            <a:avLst/>
+          </a:prstGeom>
+          <a:noFill/>
+          <a:ln/>
+        </p:spPr>
+        <p:txBody>
+          <a:bodyPr wrap="square" lIns="0" tIns="0" rIns="0" bIns="0" rtlCol="0" anchor="t">
+            <a:normAutofit/>
+          </a:bodyPr>
+          <a:lstStyle/>
+          <a:p>
+            <a:pPr indent="0" marL="0">
+              <a:buNone/>
+            </a:pPr>
+            <a:r>
+              <a:rPr lang="en-US" sz="1250" dirty="0">
+                <a:solidFill>
+                  <a:srgbClr val="17364A"/>
+                </a:solidFill>
+                <a:latin typeface="Aptos" pitchFamily="34" charset="0"/>
+                <a:ea typeface="Aptos" pitchFamily="34" charset="-122"/>
+                <a:cs typeface="Aptos" pitchFamily="34" charset="-120"/>
+              </a:rPr>
+              <a:t>Connect the concept to public health decisions, safeguards, documentation, or implementation work.</a:t>
+            </a:r>
+            <a:endParaRPr lang="en-US" sz="1250" dirty="0"/>
           </a:p>
         </p:txBody>
       </p:sp>
@@ -4219,7 +6339,32 @@
       </p:sp>
       <p:sp>
         <p:nvSpPr>
-          <p:cNvPr id="3" name="Text 1"/>
+          <p:cNvPr id="3" name="Shape 1"/>
+          <p:cNvSpPr/>
+          <p:nvPr/>
+        </p:nvSpPr>
+        <p:spPr>
+          <a:xfrm>
+            <a:off x="0" y="164592"/>
+            <a:ext cx="146304" cy="6693408"/>
+          </a:xfrm>
+          <a:prstGeom prst="rect">
+            <a:avLst/>
+          </a:prstGeom>
+          <a:solidFill>
+            <a:srgbClr val="2F8A28"/>
+          </a:solidFill>
+          <a:ln w="12700">
+            <a:solidFill>
+              <a:srgbClr val="2F8A28"/>
+            </a:solidFill>
+            <a:prstDash val="solid"/>
+          </a:ln>
+        </p:spPr>
+      </p:sp>
+      <p:sp>
+        <p:nvSpPr>
+          <p:cNvPr id="4" name="Text 2"/>
           <p:cNvSpPr/>
           <p:nvPr/>
         </p:nvSpPr>
@@ -4258,7 +6403,7 @@
       </p:sp>
       <p:sp>
         <p:nvSpPr>
-          <p:cNvPr id="4" name="Text 2"/>
+          <p:cNvPr id="5" name="Text 3"/>
           <p:cNvSpPr/>
           <p:nvPr/>
         </p:nvSpPr>
@@ -4297,7 +6442,7 @@
       </p:sp>
       <p:sp>
         <p:nvSpPr>
-          <p:cNvPr id="5" name="Text 3"/>
+          <p:cNvPr id="6" name="Text 4"/>
           <p:cNvSpPr/>
           <p:nvPr/>
         </p:nvSpPr>
@@ -4336,13 +6481,77 @@
       </p:sp>
       <p:sp>
         <p:nvSpPr>
-          <p:cNvPr id="6" name="Text 4"/>
+          <p:cNvPr id="7" name="Shape 5"/>
           <p:cNvSpPr/>
           <p:nvPr/>
         </p:nvSpPr>
         <p:spPr>
           <a:xfrm>
             <a:off x="640080" y="658368"/>
+            <a:ext cx="420624" cy="420624"/>
+          </a:xfrm>
+          <a:prstGeom prst="ellipse">
+            <a:avLst/>
+          </a:prstGeom>
+          <a:solidFill>
+            <a:srgbClr val="0068B7"/>
+          </a:solidFill>
+          <a:ln w="12700">
+            <a:solidFill>
+              <a:srgbClr val="0068B7"/>
+            </a:solidFill>
+            <a:prstDash val="solid"/>
+          </a:ln>
+        </p:spPr>
+      </p:sp>
+      <p:sp>
+        <p:nvSpPr>
+          <p:cNvPr id="8" name="Text 6"/>
+          <p:cNvSpPr/>
+          <p:nvPr/>
+        </p:nvSpPr>
+        <p:spPr>
+          <a:xfrm>
+            <a:off x="640080" y="731520"/>
+            <a:ext cx="420624" cy="164592"/>
+          </a:xfrm>
+          <a:prstGeom prst="rect">
+            <a:avLst/>
+          </a:prstGeom>
+          <a:noFill/>
+          <a:ln/>
+        </p:spPr>
+        <p:txBody>
+          <a:bodyPr wrap="square" lIns="0" tIns="0" rIns="0" bIns="0" rtlCol="0" anchor="ctr"/>
+          <a:lstStyle/>
+          <a:p>
+            <a:pPr algn="ctr" indent="0" marL="0">
+              <a:buNone/>
+            </a:pPr>
+            <a:r>
+              <a:rPr lang="en-US" sz="1100" b="1" dirty="0">
+                <a:solidFill>
+                  <a:srgbClr val="FFFFFF"/>
+                </a:solidFill>
+                <a:latin typeface="Aptos" pitchFamily="34" charset="0"/>
+                <a:ea typeface="Aptos" pitchFamily="34" charset="-122"/>
+                <a:cs typeface="Aptos" pitchFamily="34" charset="-120"/>
+              </a:rPr>
+              <a:t>10</a:t>
+            </a:r>
+            <a:endParaRPr lang="en-US" sz="1100" dirty="0"/>
+          </a:p>
+        </p:txBody>
+      </p:sp>
+      <p:sp>
+        <p:nvSpPr>
+          <p:cNvPr id="9" name="Text 7"/>
+          <p:cNvSpPr/>
+          <p:nvPr/>
+        </p:nvSpPr>
+        <p:spPr>
+          <a:xfrm>
+            <a:off x="640080" y="621792"/>
             <a:ext cx="10881360" cy="566928"/>
           </a:xfrm>
           <a:prstGeom prst="rect">
@@ -4369,7 +6578,7 @@
                 <a:ea typeface="Aptos Display" pitchFamily="34" charset="-122"/>
                 <a:cs typeface="Aptos Display" pitchFamily="34" charset="-120"/>
               </a:rPr>
-              <a:t>Expected Assignment</a:t>
+              <a:t>Practical Exercise</a:t>
             </a:r>
             <a:endParaRPr lang="en-US" sz="2700" dirty="0"/>
           </a:p>
@@ -4377,14 +6586,14 @@
       </p:sp>
       <p:sp>
         <p:nvSpPr>
-          <p:cNvPr id="7" name="Text 5"/>
-          <p:cNvSpPr/>
-          <p:nvPr/>
-        </p:nvSpPr>
-        <p:spPr>
-          <a:xfrm>
-            <a:off x="822960" y="1325880"/>
-            <a:ext cx="10378440" cy="4800600"/>
+          <p:cNvPr id="10" name="Text 8"/>
+          <p:cNvSpPr/>
+          <p:nvPr/>
+        </p:nvSpPr>
+        <p:spPr>
+          <a:xfrm>
+            <a:off x="868680" y="1417320"/>
+            <a:ext cx="6675120" cy="4434840"/>
           </a:xfrm>
           <a:prstGeom prst="rect">
             <a:avLst/>
@@ -4399,7 +6608,7 @@
           <a:lstStyle/>
           <a:p>
             <a:r>
-              <a:rPr lang="en-US" sz="1450" dirty="0">
+              <a:rPr lang="en-US" sz="1700" dirty="0">
                 <a:solidFill>
                   <a:srgbClr val="17364A"/>
                 </a:solidFill>
@@ -4407,9 +6616,265 @@
                 <a:ea typeface="Aptos" pitchFamily="34" charset="-122"/>
                 <a:cs typeface="Aptos" pitchFamily="34" charset="-120"/>
               </a:rPr>
-              <a:t>The expected artifact is a completed AI value and impact measurement plan. It should be specific to a public health workflow and should include technical dependencies, governance questions, human review expectations, monitoring indicators, and.</a:t>
-            </a:r>
-            <a:endParaRPr lang="en-US" sz="1450" dirty="0"/>
+              <a:t>Create a AI value and impact measurement plan for one real or realistic public health AI workflow.</a:t>
+            </a:r>
+            <a:endParaRPr lang="en-US" sz="1700" dirty="0"/>
+          </a:p>
+          <a:p>
+            <a:r>
+              <a:rPr lang="en-US" sz="1700" dirty="0">
+                <a:solidFill>
+                  <a:srgbClr val="17364A"/>
+                </a:solidFill>
+                <a:latin typeface="Aptos" pitchFamily="34" charset="0"/>
+                <a:ea typeface="Aptos" pitchFamily="34" charset="-122"/>
+                <a:cs typeface="Aptos" pitchFamily="34" charset="-120"/>
+              </a:rPr>
+              <a:t>The artifact should describe the use case, affected users, data sources, system dependencies, risks, guardrails, review.</a:t>
+            </a:r>
+            <a:endParaRPr lang="en-US" sz="1700" dirty="0"/>
+          </a:p>
+          <a:p>
+            <a:r>
+              <a:rPr lang="en-US" sz="1700" dirty="0">
+                <a:solidFill>
+                  <a:srgbClr val="17364A"/>
+                </a:solidFill>
+                <a:latin typeface="Aptos" pitchFamily="34" charset="0"/>
+                <a:ea typeface="Aptos" pitchFamily="34" charset="-122"/>
+                <a:cs typeface="Aptos" pitchFamily="34" charset="-120"/>
+              </a:rPr>
+              <a:t>The exercise should produce a work product that could be used in a governance meeting, procurement review, implementation.</a:t>
+            </a:r>
+            <a:endParaRPr lang="en-US" sz="1700" dirty="0"/>
+          </a:p>
+          <a:p>
+            <a:r>
+              <a:rPr lang="en-US" sz="1700" dirty="0">
+                <a:solidFill>
+                  <a:srgbClr val="17364A"/>
+                </a:solidFill>
+                <a:latin typeface="Aptos" pitchFamily="34" charset="0"/>
+                <a:ea typeface="Aptos" pitchFamily="34" charset="-122"/>
+                <a:cs typeface="Aptos" pitchFamily="34" charset="-120"/>
+              </a:rPr>
+              <a:t>Learners should document assumptions and identify which staff or partners need to be consulted.</a:t>
+            </a:r>
+            <a:endParaRPr lang="en-US" sz="1700" dirty="0"/>
+          </a:p>
+        </p:txBody>
+      </p:sp>
+      <p:sp>
+        <p:nvSpPr>
+          <p:cNvPr id="11" name="Shape 9"/>
+          <p:cNvSpPr/>
+          <p:nvPr/>
+        </p:nvSpPr>
+        <p:spPr>
+          <a:xfrm>
+            <a:off x="7909560" y="1417320"/>
+            <a:ext cx="3154680" cy="1828800"/>
+          </a:xfrm>
+          <a:prstGeom prst="roundRect">
+            <a:avLst>
+              <a:gd name="adj" fmla="val 6000"/>
+            </a:avLst>
+          </a:prstGeom>
+          <a:solidFill>
+            <a:srgbClr val="EEF8ED"/>
+          </a:solidFill>
+          <a:ln w="12700">
+            <a:solidFill>
+              <a:srgbClr val="B9D7E6"/>
+            </a:solidFill>
+            <a:prstDash val="solid"/>
+          </a:ln>
+        </p:spPr>
+      </p:sp>
+      <p:sp>
+        <p:nvSpPr>
+          <p:cNvPr id="12" name="Text 10"/>
+          <p:cNvSpPr/>
+          <p:nvPr/>
+        </p:nvSpPr>
+        <p:spPr>
+          <a:xfrm>
+            <a:off x="8074152" y="1563624"/>
+            <a:ext cx="2825496" cy="201168"/>
+          </a:xfrm>
+          <a:prstGeom prst="rect">
+            <a:avLst/>
+          </a:prstGeom>
+          <a:noFill/>
+          <a:ln/>
+        </p:spPr>
+        <p:txBody>
+          <a:bodyPr wrap="square" lIns="0" tIns="0" rIns="0" bIns="0" rtlCol="0" anchor="ctr"/>
+          <a:lstStyle/>
+          <a:p>
+            <a:pPr indent="0" marL="0">
+              <a:buNone/>
+            </a:pPr>
+            <a:r>
+              <a:rPr lang="en-US" sz="950" b="1" dirty="0">
+                <a:solidFill>
+                  <a:srgbClr val="0068B7"/>
+                </a:solidFill>
+                <a:latin typeface="Aptos" pitchFamily="34" charset="0"/>
+                <a:ea typeface="Aptos" pitchFamily="34" charset="-122"/>
+                <a:cs typeface="Aptos" pitchFamily="34" charset="-120"/>
+              </a:rPr>
+              <a:t>Key idea</a:t>
+            </a:r>
+            <a:endParaRPr lang="en-US" sz="950" dirty="0"/>
+          </a:p>
+        </p:txBody>
+      </p:sp>
+      <p:sp>
+        <p:nvSpPr>
+          <p:cNvPr id="13" name="Text 11"/>
+          <p:cNvSpPr/>
+          <p:nvPr/>
+        </p:nvSpPr>
+        <p:spPr>
+          <a:xfrm>
+            <a:off x="8074152" y="1856232"/>
+            <a:ext cx="2825496" cy="1261872"/>
+          </a:xfrm>
+          <a:prstGeom prst="rect">
+            <a:avLst/>
+          </a:prstGeom>
+          <a:noFill/>
+          <a:ln/>
+        </p:spPr>
+        <p:txBody>
+          <a:bodyPr wrap="square" lIns="0" tIns="0" rIns="0" bIns="0" rtlCol="0" anchor="t">
+            <a:normAutofit/>
+          </a:bodyPr>
+          <a:lstStyle/>
+          <a:p>
+            <a:pPr indent="0" marL="0">
+              <a:buNone/>
+            </a:pPr>
+            <a:r>
+              <a:rPr lang="en-US" sz="1250" dirty="0">
+                <a:solidFill>
+                  <a:srgbClr val="17364A"/>
+                </a:solidFill>
+                <a:latin typeface="Aptos" pitchFamily="34" charset="0"/>
+                <a:ea typeface="Aptos" pitchFamily="34" charset="-122"/>
+                <a:cs typeface="Aptos" pitchFamily="34" charset="-120"/>
+              </a:rPr>
+              <a:t>Create a AI value and impact measurement plan for one real or realistic public health AI workflow.</a:t>
+            </a:r>
+            <a:endParaRPr lang="en-US" sz="1250" dirty="0"/>
+          </a:p>
+        </p:txBody>
+      </p:sp>
+      <p:sp>
+        <p:nvSpPr>
+          <p:cNvPr id="14" name="Shape 12"/>
+          <p:cNvSpPr/>
+          <p:nvPr/>
+        </p:nvSpPr>
+        <p:spPr>
+          <a:xfrm>
+            <a:off x="7909560" y="3520440"/>
+            <a:ext cx="3154680" cy="1737360"/>
+          </a:xfrm>
+          <a:prstGeom prst="roundRect">
+            <a:avLst>
+              <a:gd name="adj" fmla="val 6316"/>
+            </a:avLst>
+          </a:prstGeom>
+          <a:solidFill>
+            <a:srgbClr val="EAF6F8"/>
+          </a:solidFill>
+          <a:ln w="12700">
+            <a:solidFill>
+              <a:srgbClr val="B9D7E6"/>
+            </a:solidFill>
+            <a:prstDash val="solid"/>
+          </a:ln>
+        </p:spPr>
+      </p:sp>
+      <p:sp>
+        <p:nvSpPr>
+          <p:cNvPr id="15" name="Text 13"/>
+          <p:cNvSpPr/>
+          <p:nvPr/>
+        </p:nvSpPr>
+        <p:spPr>
+          <a:xfrm>
+            <a:off x="8074152" y="3666744"/>
+            <a:ext cx="2825496" cy="201168"/>
+          </a:xfrm>
+          <a:prstGeom prst="rect">
+            <a:avLst/>
+          </a:prstGeom>
+          <a:noFill/>
+          <a:ln/>
+        </p:spPr>
+        <p:txBody>
+          <a:bodyPr wrap="square" lIns="0" tIns="0" rIns="0" bIns="0" rtlCol="0" anchor="ctr"/>
+          <a:lstStyle/>
+          <a:p>
+            <a:pPr indent="0" marL="0">
+              <a:buNone/>
+            </a:pPr>
+            <a:r>
+              <a:rPr lang="en-US" sz="950" b="1" dirty="0">
+                <a:solidFill>
+                  <a:srgbClr val="0068B7"/>
+                </a:solidFill>
+                <a:latin typeface="Aptos" pitchFamily="34" charset="0"/>
+                <a:ea typeface="Aptos" pitchFamily="34" charset="-122"/>
+                <a:cs typeface="Aptos" pitchFamily="34" charset="-120"/>
+              </a:rPr>
+              <a:t>Use this for</a:t>
+            </a:r>
+            <a:endParaRPr lang="en-US" sz="950" dirty="0"/>
+          </a:p>
+        </p:txBody>
+      </p:sp>
+      <p:sp>
+        <p:nvSpPr>
+          <p:cNvPr id="16" name="Text 14"/>
+          <p:cNvSpPr/>
+          <p:nvPr/>
+        </p:nvSpPr>
+        <p:spPr>
+          <a:xfrm>
+            <a:off x="8074152" y="3959352"/>
+            <a:ext cx="2825496" cy="1170432"/>
+          </a:xfrm>
+          <a:prstGeom prst="rect">
+            <a:avLst/>
+          </a:prstGeom>
+          <a:noFill/>
+          <a:ln/>
+        </p:spPr>
+        <p:txBody>
+          <a:bodyPr wrap="square" lIns="0" tIns="0" rIns="0" bIns="0" rtlCol="0" anchor="t">
+            <a:normAutofit/>
+          </a:bodyPr>
+          <a:lstStyle/>
+          <a:p>
+            <a:pPr indent="0" marL="0">
+              <a:buNone/>
+            </a:pPr>
+            <a:r>
+              <a:rPr lang="en-US" sz="1250" dirty="0">
+                <a:solidFill>
+                  <a:srgbClr val="17364A"/>
+                </a:solidFill>
+                <a:latin typeface="Aptos" pitchFamily="34" charset="0"/>
+                <a:ea typeface="Aptos" pitchFamily="34" charset="-122"/>
+                <a:cs typeface="Aptos" pitchFamily="34" charset="-120"/>
+              </a:rPr>
+              <a:t>Connect the concept to public health decisions, safeguards, documentation, or implementation work.</a:t>
+            </a:r>
+            <a:endParaRPr lang="en-US" sz="1250" dirty="0"/>
           </a:p>
         </p:txBody>
       </p:sp>
@@ -4472,7 +6937,32 @@
       </p:sp>
       <p:sp>
         <p:nvSpPr>
-          <p:cNvPr id="3" name="Text 1"/>
+          <p:cNvPr id="3" name="Shape 1"/>
+          <p:cNvSpPr/>
+          <p:nvPr/>
+        </p:nvSpPr>
+        <p:spPr>
+          <a:xfrm>
+            <a:off x="0" y="164592"/>
+            <a:ext cx="146304" cy="6693408"/>
+          </a:xfrm>
+          <a:prstGeom prst="rect">
+            <a:avLst/>
+          </a:prstGeom>
+          <a:solidFill>
+            <a:srgbClr val="2F8A28"/>
+          </a:solidFill>
+          <a:ln w="12700">
+            <a:solidFill>
+              <a:srgbClr val="2F8A28"/>
+            </a:solidFill>
+            <a:prstDash val="solid"/>
+          </a:ln>
+        </p:spPr>
+      </p:sp>
+      <p:sp>
+        <p:nvSpPr>
+          <p:cNvPr id="4" name="Text 2"/>
           <p:cNvSpPr/>
           <p:nvPr/>
         </p:nvSpPr>
@@ -4511,7 +7001,7 @@
       </p:sp>
       <p:sp>
         <p:nvSpPr>
-          <p:cNvPr id="4" name="Text 2"/>
+          <p:cNvPr id="5" name="Text 3"/>
           <p:cNvSpPr/>
           <p:nvPr/>
         </p:nvSpPr>
@@ -4550,7 +7040,7 @@
       </p:sp>
       <p:sp>
         <p:nvSpPr>
-          <p:cNvPr id="5" name="Text 3"/>
+          <p:cNvPr id="6" name="Text 4"/>
           <p:cNvSpPr/>
           <p:nvPr/>
         </p:nvSpPr>
@@ -4589,13 +7079,77 @@
       </p:sp>
       <p:sp>
         <p:nvSpPr>
-          <p:cNvPr id="6" name="Text 4"/>
+          <p:cNvPr id="7" name="Shape 5"/>
           <p:cNvSpPr/>
           <p:nvPr/>
         </p:nvSpPr>
         <p:spPr>
           <a:xfrm>
             <a:off x="640080" y="658368"/>
+            <a:ext cx="420624" cy="420624"/>
+          </a:xfrm>
+          <a:prstGeom prst="ellipse">
+            <a:avLst/>
+          </a:prstGeom>
+          <a:solidFill>
+            <a:srgbClr val="0068B7"/>
+          </a:solidFill>
+          <a:ln w="12700">
+            <a:solidFill>
+              <a:srgbClr val="0068B7"/>
+            </a:solidFill>
+            <a:prstDash val="solid"/>
+          </a:ln>
+        </p:spPr>
+      </p:sp>
+      <p:sp>
+        <p:nvSpPr>
+          <p:cNvPr id="8" name="Text 6"/>
+          <p:cNvSpPr/>
+          <p:nvPr/>
+        </p:nvSpPr>
+        <p:spPr>
+          <a:xfrm>
+            <a:off x="640080" y="731520"/>
+            <a:ext cx="420624" cy="164592"/>
+          </a:xfrm>
+          <a:prstGeom prst="rect">
+            <a:avLst/>
+          </a:prstGeom>
+          <a:noFill/>
+          <a:ln/>
+        </p:spPr>
+        <p:txBody>
+          <a:bodyPr wrap="square" lIns="0" tIns="0" rIns="0" bIns="0" rtlCol="0" anchor="ctr"/>
+          <a:lstStyle/>
+          <a:p>
+            <a:pPr algn="ctr" indent="0" marL="0">
+              <a:buNone/>
+            </a:pPr>
+            <a:r>
+              <a:rPr lang="en-US" sz="1100" b="1" dirty="0">
+                <a:solidFill>
+                  <a:srgbClr val="FFFFFF"/>
+                </a:solidFill>
+                <a:latin typeface="Aptos" pitchFamily="34" charset="0"/>
+                <a:ea typeface="Aptos" pitchFamily="34" charset="-122"/>
+                <a:cs typeface="Aptos" pitchFamily="34" charset="-120"/>
+              </a:rPr>
+              <a:t>11</a:t>
+            </a:r>
+            <a:endParaRPr lang="en-US" sz="1100" dirty="0"/>
+          </a:p>
+        </p:txBody>
+      </p:sp>
+      <p:sp>
+        <p:nvSpPr>
+          <p:cNvPr id="9" name="Text 7"/>
+          <p:cNvSpPr/>
+          <p:nvPr/>
+        </p:nvSpPr>
+        <p:spPr>
+          <a:xfrm>
+            <a:off x="640080" y="621792"/>
             <a:ext cx="10881360" cy="566928"/>
           </a:xfrm>
           <a:prstGeom prst="rect">
@@ -4622,7 +7176,7 @@
                 <a:ea typeface="Aptos Display" pitchFamily="34" charset="-122"/>
                 <a:cs typeface="Aptos Display" pitchFamily="34" charset="-120"/>
               </a:rPr>
-              <a:t>Knowledge Check</a:t>
+              <a:t>Expected Artifact or Evidence</a:t>
             </a:r>
             <a:endParaRPr lang="en-US" sz="2700" dirty="0"/>
           </a:p>
@@ -4630,14 +7184,14 @@
       </p:sp>
       <p:sp>
         <p:nvSpPr>
-          <p:cNvPr id="7" name="Text 5"/>
-          <p:cNvSpPr/>
-          <p:nvPr/>
-        </p:nvSpPr>
-        <p:spPr>
-          <a:xfrm>
-            <a:off x="822960" y="1325880"/>
-            <a:ext cx="10378440" cy="4800600"/>
+          <p:cNvPr id="10" name="Text 8"/>
+          <p:cNvSpPr/>
+          <p:nvPr/>
+        </p:nvSpPr>
+        <p:spPr>
+          <a:xfrm>
+            <a:off x="868680" y="1417320"/>
+            <a:ext cx="6675120" cy="4434840"/>
           </a:xfrm>
           <a:prstGeom prst="rect">
             <a:avLst/>
@@ -4652,7 +7206,7 @@
           <a:lstStyle/>
           <a:p>
             <a:r>
-              <a:rPr lang="en-US" sz="1450" dirty="0">
+              <a:rPr lang="en-US" sz="1700" dirty="0">
                 <a:solidFill>
                   <a:srgbClr val="17364A"/>
                 </a:solidFill>
@@ -4660,13 +7214,13 @@
                 <a:ea typeface="Aptos" pitchFamily="34" charset="-122"/>
                 <a:cs typeface="Aptos" pitchFamily="34" charset="-120"/>
               </a:rPr>
-              <a:t>1. What is the best reason to address measuring ai value, performance, and operational impact before deployment?</a:t>
-            </a:r>
-            <a:endParaRPr lang="en-US" sz="1450" dirty="0"/>
-          </a:p>
-          <a:p>
-            <a:r>
-              <a:rPr lang="en-US" sz="1450" dirty="0">
+              <a:t>The expected artifact is a completed AI value and impact measurement plan.</a:t>
+            </a:r>
+            <a:endParaRPr lang="en-US" sz="1700" dirty="0"/>
+          </a:p>
+          <a:p>
+            <a:r>
+              <a:rPr lang="en-US" sz="1700" dirty="0">
                 <a:solidFill>
                   <a:srgbClr val="17364A"/>
                 </a:solidFill>
@@ -4674,13 +7228,106 @@
                 <a:ea typeface="Aptos" pitchFamily="34" charset="-122"/>
                 <a:cs typeface="Aptos" pitchFamily="34" charset="-120"/>
               </a:rPr>
-              <a:t>2. Which practice best supports responsible implementation?</a:t>
-            </a:r>
-            <a:endParaRPr lang="en-US" sz="1450" dirty="0"/>
-          </a:p>
-          <a:p>
-            <a:r>
-              <a:rPr lang="en-US" sz="1450" dirty="0">
+              <a:t>It should be specific to a public health workflow and should include technical dependencies, governance questions, human.</a:t>
+            </a:r>
+            <a:endParaRPr lang="en-US" sz="1700" dirty="0"/>
+          </a:p>
+        </p:txBody>
+      </p:sp>
+      <p:sp>
+        <p:nvSpPr>
+          <p:cNvPr id="11" name="Shape 9"/>
+          <p:cNvSpPr/>
+          <p:nvPr/>
+        </p:nvSpPr>
+        <p:spPr>
+          <a:xfrm>
+            <a:off x="7909560" y="1417320"/>
+            <a:ext cx="3154680" cy="1828800"/>
+          </a:xfrm>
+          <a:prstGeom prst="roundRect">
+            <a:avLst>
+              <a:gd name="adj" fmla="val 6000"/>
+            </a:avLst>
+          </a:prstGeom>
+          <a:solidFill>
+            <a:srgbClr val="EEF8ED"/>
+          </a:solidFill>
+          <a:ln w="12700">
+            <a:solidFill>
+              <a:srgbClr val="B9D7E6"/>
+            </a:solidFill>
+            <a:prstDash val="solid"/>
+          </a:ln>
+        </p:spPr>
+      </p:sp>
+      <p:sp>
+        <p:nvSpPr>
+          <p:cNvPr id="12" name="Text 10"/>
+          <p:cNvSpPr/>
+          <p:nvPr/>
+        </p:nvSpPr>
+        <p:spPr>
+          <a:xfrm>
+            <a:off x="8074152" y="1563624"/>
+            <a:ext cx="2825496" cy="201168"/>
+          </a:xfrm>
+          <a:prstGeom prst="rect">
+            <a:avLst/>
+          </a:prstGeom>
+          <a:noFill/>
+          <a:ln/>
+        </p:spPr>
+        <p:txBody>
+          <a:bodyPr wrap="square" lIns="0" tIns="0" rIns="0" bIns="0" rtlCol="0" anchor="ctr"/>
+          <a:lstStyle/>
+          <a:p>
+            <a:pPr indent="0" marL="0">
+              <a:buNone/>
+            </a:pPr>
+            <a:r>
+              <a:rPr lang="en-US" sz="950" b="1" dirty="0">
+                <a:solidFill>
+                  <a:srgbClr val="0068B7"/>
+                </a:solidFill>
+                <a:latin typeface="Aptos" pitchFamily="34" charset="0"/>
+                <a:ea typeface="Aptos" pitchFamily="34" charset="-122"/>
+                <a:cs typeface="Aptos" pitchFamily="34" charset="-120"/>
+              </a:rPr>
+              <a:t>Key idea</a:t>
+            </a:r>
+            <a:endParaRPr lang="en-US" sz="950" dirty="0"/>
+          </a:p>
+        </p:txBody>
+      </p:sp>
+      <p:sp>
+        <p:nvSpPr>
+          <p:cNvPr id="13" name="Text 11"/>
+          <p:cNvSpPr/>
+          <p:nvPr/>
+        </p:nvSpPr>
+        <p:spPr>
+          <a:xfrm>
+            <a:off x="8074152" y="1856232"/>
+            <a:ext cx="2825496" cy="1261872"/>
+          </a:xfrm>
+          <a:prstGeom prst="rect">
+            <a:avLst/>
+          </a:prstGeom>
+          <a:noFill/>
+          <a:ln/>
+        </p:spPr>
+        <p:txBody>
+          <a:bodyPr wrap="square" lIns="0" tIns="0" rIns="0" bIns="0" rtlCol="0" anchor="t">
+            <a:normAutofit/>
+          </a:bodyPr>
+          <a:lstStyle/>
+          <a:p>
+            <a:pPr indent="0" marL="0">
+              <a:buNone/>
+            </a:pPr>
+            <a:r>
+              <a:rPr lang="en-US" sz="1250" dirty="0">
                 <a:solidFill>
                   <a:srgbClr val="17364A"/>
                 </a:solidFill>
@@ -4688,13 +7335,106 @@
                 <a:ea typeface="Aptos" pitchFamily="34" charset="-122"/>
                 <a:cs typeface="Aptos" pitchFamily="34" charset="-120"/>
               </a:rPr>
-              <a:t>3. Which statement best describes a common failure mode?</a:t>
-            </a:r>
-            <a:endParaRPr lang="en-US" sz="1450" dirty="0"/>
-          </a:p>
-          <a:p>
-            <a:r>
-              <a:rPr lang="en-US" sz="1450" dirty="0">
+              <a:t>The expected artifact is a completed AI value and impact measurement plan.</a:t>
+            </a:r>
+            <a:endParaRPr lang="en-US" sz="1250" dirty="0"/>
+          </a:p>
+        </p:txBody>
+      </p:sp>
+      <p:sp>
+        <p:nvSpPr>
+          <p:cNvPr id="14" name="Shape 12"/>
+          <p:cNvSpPr/>
+          <p:nvPr/>
+        </p:nvSpPr>
+        <p:spPr>
+          <a:xfrm>
+            <a:off x="7909560" y="3520440"/>
+            <a:ext cx="3154680" cy="1737360"/>
+          </a:xfrm>
+          <a:prstGeom prst="roundRect">
+            <a:avLst>
+              <a:gd name="adj" fmla="val 6316"/>
+            </a:avLst>
+          </a:prstGeom>
+          <a:solidFill>
+            <a:srgbClr val="EAF6F8"/>
+          </a:solidFill>
+          <a:ln w="12700">
+            <a:solidFill>
+              <a:srgbClr val="B9D7E6"/>
+            </a:solidFill>
+            <a:prstDash val="solid"/>
+          </a:ln>
+        </p:spPr>
+      </p:sp>
+      <p:sp>
+        <p:nvSpPr>
+          <p:cNvPr id="15" name="Text 13"/>
+          <p:cNvSpPr/>
+          <p:nvPr/>
+        </p:nvSpPr>
+        <p:spPr>
+          <a:xfrm>
+            <a:off x="8074152" y="3666744"/>
+            <a:ext cx="2825496" cy="201168"/>
+          </a:xfrm>
+          <a:prstGeom prst="rect">
+            <a:avLst/>
+          </a:prstGeom>
+          <a:noFill/>
+          <a:ln/>
+        </p:spPr>
+        <p:txBody>
+          <a:bodyPr wrap="square" lIns="0" tIns="0" rIns="0" bIns="0" rtlCol="0" anchor="ctr"/>
+          <a:lstStyle/>
+          <a:p>
+            <a:pPr indent="0" marL="0">
+              <a:buNone/>
+            </a:pPr>
+            <a:r>
+              <a:rPr lang="en-US" sz="950" b="1" dirty="0">
+                <a:solidFill>
+                  <a:srgbClr val="0068B7"/>
+                </a:solidFill>
+                <a:latin typeface="Aptos" pitchFamily="34" charset="0"/>
+                <a:ea typeface="Aptos" pitchFamily="34" charset="-122"/>
+                <a:cs typeface="Aptos" pitchFamily="34" charset="-120"/>
+              </a:rPr>
+              <a:t>Use this for</a:t>
+            </a:r>
+            <a:endParaRPr lang="en-US" sz="950" dirty="0"/>
+          </a:p>
+        </p:txBody>
+      </p:sp>
+      <p:sp>
+        <p:nvSpPr>
+          <p:cNvPr id="16" name="Text 14"/>
+          <p:cNvSpPr/>
+          <p:nvPr/>
+        </p:nvSpPr>
+        <p:spPr>
+          <a:xfrm>
+            <a:off x="8074152" y="3959352"/>
+            <a:ext cx="2825496" cy="1170432"/>
+          </a:xfrm>
+          <a:prstGeom prst="rect">
+            <a:avLst/>
+          </a:prstGeom>
+          <a:noFill/>
+          <a:ln/>
+        </p:spPr>
+        <p:txBody>
+          <a:bodyPr wrap="square" lIns="0" tIns="0" rIns="0" bIns="0" rtlCol="0" anchor="t">
+            <a:normAutofit/>
+          </a:bodyPr>
+          <a:lstStyle/>
+          <a:p>
+            <a:pPr indent="0" marL="0">
+              <a:buNone/>
+            </a:pPr>
+            <a:r>
+              <a:rPr lang="en-US" sz="1250" dirty="0">
                 <a:solidFill>
                   <a:srgbClr val="17364A"/>
                 </a:solidFill>
@@ -4702,23 +7442,9 @@
                 <a:ea typeface="Aptos" pitchFamily="34" charset="-122"/>
                 <a:cs typeface="Aptos" pitchFamily="34" charset="-120"/>
               </a:rPr>
-              <a:t>4. What should be included in the practical artifact for this module?</a:t>
-            </a:r>
-            <a:endParaRPr lang="en-US" sz="1450" dirty="0"/>
-          </a:p>
-          <a:p>
-            <a:r>
-              <a:rPr lang="en-US" sz="1450" dirty="0">
-                <a:solidFill>
-                  <a:srgbClr val="17364A"/>
-                </a:solidFill>
-                <a:latin typeface="Aptos" pitchFamily="34" charset="0"/>
-                <a:ea typeface="Aptos" pitchFamily="34" charset="-122"/>
-                <a:cs typeface="Aptos" pitchFamily="34" charset="-120"/>
-              </a:rPr>
-              <a:t>5. When should the issue be escalated for governance or leadership review?</a:t>
-            </a:r>
-            <a:endParaRPr lang="en-US" sz="1450" dirty="0"/>
+              <a:t>Connect the concept to public health decisions, safeguards, documentation, or implementation work.</a:t>
+            </a:r>
+            <a:endParaRPr lang="en-US" sz="1250" dirty="0"/>
           </a:p>
         </p:txBody>
       </p:sp>
@@ -4781,7 +7507,32 @@
       </p:sp>
       <p:sp>
         <p:nvSpPr>
-          <p:cNvPr id="3" name="Text 1"/>
+          <p:cNvPr id="3" name="Shape 1"/>
+          <p:cNvSpPr/>
+          <p:nvPr/>
+        </p:nvSpPr>
+        <p:spPr>
+          <a:xfrm>
+            <a:off x="0" y="164592"/>
+            <a:ext cx="146304" cy="6693408"/>
+          </a:xfrm>
+          <a:prstGeom prst="rect">
+            <a:avLst/>
+          </a:prstGeom>
+          <a:solidFill>
+            <a:srgbClr val="2F8A28"/>
+          </a:solidFill>
+          <a:ln w="12700">
+            <a:solidFill>
+              <a:srgbClr val="2F8A28"/>
+            </a:solidFill>
+            <a:prstDash val="solid"/>
+          </a:ln>
+        </p:spPr>
+      </p:sp>
+      <p:sp>
+        <p:nvSpPr>
+          <p:cNvPr id="4" name="Text 2"/>
           <p:cNvSpPr/>
           <p:nvPr/>
         </p:nvSpPr>
@@ -4820,7 +7571,7 @@
       </p:sp>
       <p:sp>
         <p:nvSpPr>
-          <p:cNvPr id="4" name="Text 2"/>
+          <p:cNvPr id="5" name="Text 3"/>
           <p:cNvSpPr/>
           <p:nvPr/>
         </p:nvSpPr>
@@ -4859,7 +7610,7 @@
       </p:sp>
       <p:sp>
         <p:nvSpPr>
-          <p:cNvPr id="5" name="Text 3"/>
+          <p:cNvPr id="6" name="Text 4"/>
           <p:cNvSpPr/>
           <p:nvPr/>
         </p:nvSpPr>
@@ -4898,13 +7649,77 @@
       </p:sp>
       <p:sp>
         <p:nvSpPr>
-          <p:cNvPr id="6" name="Text 4"/>
+          <p:cNvPr id="7" name="Shape 5"/>
           <p:cNvSpPr/>
           <p:nvPr/>
         </p:nvSpPr>
         <p:spPr>
           <a:xfrm>
             <a:off x="640080" y="658368"/>
+            <a:ext cx="420624" cy="420624"/>
+          </a:xfrm>
+          <a:prstGeom prst="ellipse">
+            <a:avLst/>
+          </a:prstGeom>
+          <a:solidFill>
+            <a:srgbClr val="0068B7"/>
+          </a:solidFill>
+          <a:ln w="12700">
+            <a:solidFill>
+              <a:srgbClr val="0068B7"/>
+            </a:solidFill>
+            <a:prstDash val="solid"/>
+          </a:ln>
+        </p:spPr>
+      </p:sp>
+      <p:sp>
+        <p:nvSpPr>
+          <p:cNvPr id="8" name="Text 6"/>
+          <p:cNvSpPr/>
+          <p:nvPr/>
+        </p:nvSpPr>
+        <p:spPr>
+          <a:xfrm>
+            <a:off x="640080" y="731520"/>
+            <a:ext cx="420624" cy="164592"/>
+          </a:xfrm>
+          <a:prstGeom prst="rect">
+            <a:avLst/>
+          </a:prstGeom>
+          <a:noFill/>
+          <a:ln/>
+        </p:spPr>
+        <p:txBody>
+          <a:bodyPr wrap="square" lIns="0" tIns="0" rIns="0" bIns="0" rtlCol="0" anchor="ctr"/>
+          <a:lstStyle/>
+          <a:p>
+            <a:pPr algn="ctr" indent="0" marL="0">
+              <a:buNone/>
+            </a:pPr>
+            <a:r>
+              <a:rPr lang="en-US" sz="1100" b="1" dirty="0">
+                <a:solidFill>
+                  <a:srgbClr val="FFFFFF"/>
+                </a:solidFill>
+                <a:latin typeface="Aptos" pitchFamily="34" charset="0"/>
+                <a:ea typeface="Aptos" pitchFamily="34" charset="-122"/>
+                <a:cs typeface="Aptos" pitchFamily="34" charset="-120"/>
+              </a:rPr>
+              <a:t>12</a:t>
+            </a:r>
+            <a:endParaRPr lang="en-US" sz="1100" dirty="0"/>
+          </a:p>
+        </p:txBody>
+      </p:sp>
+      <p:sp>
+        <p:nvSpPr>
+          <p:cNvPr id="9" name="Text 7"/>
+          <p:cNvSpPr/>
+          <p:nvPr/>
+        </p:nvSpPr>
+        <p:spPr>
+          <a:xfrm>
+            <a:off x="640080" y="621792"/>
             <a:ext cx="10881360" cy="566928"/>
           </a:xfrm>
           <a:prstGeom prst="rect">
@@ -4931,7 +7746,7 @@
                 <a:ea typeface="Aptos Display" pitchFamily="34" charset="-122"/>
                 <a:cs typeface="Aptos Display" pitchFamily="34" charset="-120"/>
               </a:rPr>
-              <a:t>References and Resources</a:t>
+              <a:t>Expected Assignment</a:t>
             </a:r>
             <a:endParaRPr lang="en-US" sz="2700" dirty="0"/>
           </a:p>
@@ -4939,14 +7754,14 @@
       </p:sp>
       <p:sp>
         <p:nvSpPr>
-          <p:cNvPr id="7" name="Text 5"/>
-          <p:cNvSpPr/>
-          <p:nvPr/>
-        </p:nvSpPr>
-        <p:spPr>
-          <a:xfrm>
-            <a:off x="822960" y="1325880"/>
-            <a:ext cx="10378440" cy="4800600"/>
+          <p:cNvPr id="10" name="Text 8"/>
+          <p:cNvSpPr/>
+          <p:nvPr/>
+        </p:nvSpPr>
+        <p:spPr>
+          <a:xfrm>
+            <a:off x="868680" y="1417320"/>
+            <a:ext cx="6675120" cy="4434840"/>
           </a:xfrm>
           <a:prstGeom prst="rect">
             <a:avLst/>
@@ -4961,7 +7776,7 @@
           <a:lstStyle/>
           <a:p>
             <a:r>
-              <a:rPr lang="en-US" sz="1450" dirty="0">
+              <a:rPr lang="en-US" sz="1700" dirty="0">
                 <a:solidFill>
                   <a:srgbClr val="17364A"/>
                 </a:solidFill>
@@ -4969,13 +7784,106 @@
                 <a:ea typeface="Aptos" pitchFamily="34" charset="-122"/>
                 <a:cs typeface="Aptos" pitchFamily="34" charset="-120"/>
               </a:rPr>
-              <a:t>CDC Evaluation Framework: https://www.cdc.gov/evaluation/</a:t>
-            </a:r>
-            <a:endParaRPr lang="en-US" sz="1450" dirty="0"/>
-          </a:p>
-          <a:p>
-            <a:r>
-              <a:rPr lang="en-US" sz="1450" dirty="0">
+              <a:t>The expected artifact is a completed AI value and impact measurement plan. It should be specific to a public health workflow.</a:t>
+            </a:r>
+            <a:endParaRPr lang="en-US" sz="1700" dirty="0"/>
+          </a:p>
+        </p:txBody>
+      </p:sp>
+      <p:sp>
+        <p:nvSpPr>
+          <p:cNvPr id="11" name="Shape 9"/>
+          <p:cNvSpPr/>
+          <p:nvPr/>
+        </p:nvSpPr>
+        <p:spPr>
+          <a:xfrm>
+            <a:off x="7909560" y="1417320"/>
+            <a:ext cx="3154680" cy="1828800"/>
+          </a:xfrm>
+          <a:prstGeom prst="roundRect">
+            <a:avLst>
+              <a:gd name="adj" fmla="val 6000"/>
+            </a:avLst>
+          </a:prstGeom>
+          <a:solidFill>
+            <a:srgbClr val="EEF8ED"/>
+          </a:solidFill>
+          <a:ln w="12700">
+            <a:solidFill>
+              <a:srgbClr val="B9D7E6"/>
+            </a:solidFill>
+            <a:prstDash val="solid"/>
+          </a:ln>
+        </p:spPr>
+      </p:sp>
+      <p:sp>
+        <p:nvSpPr>
+          <p:cNvPr id="12" name="Text 10"/>
+          <p:cNvSpPr/>
+          <p:nvPr/>
+        </p:nvSpPr>
+        <p:spPr>
+          <a:xfrm>
+            <a:off x="8074152" y="1563624"/>
+            <a:ext cx="2825496" cy="201168"/>
+          </a:xfrm>
+          <a:prstGeom prst="rect">
+            <a:avLst/>
+          </a:prstGeom>
+          <a:noFill/>
+          <a:ln/>
+        </p:spPr>
+        <p:txBody>
+          <a:bodyPr wrap="square" lIns="0" tIns="0" rIns="0" bIns="0" rtlCol="0" anchor="ctr"/>
+          <a:lstStyle/>
+          <a:p>
+            <a:pPr indent="0" marL="0">
+              <a:buNone/>
+            </a:pPr>
+            <a:r>
+              <a:rPr lang="en-US" sz="950" b="1" dirty="0">
+                <a:solidFill>
+                  <a:srgbClr val="0068B7"/>
+                </a:solidFill>
+                <a:latin typeface="Aptos" pitchFamily="34" charset="0"/>
+                <a:ea typeface="Aptos" pitchFamily="34" charset="-122"/>
+                <a:cs typeface="Aptos" pitchFamily="34" charset="-120"/>
+              </a:rPr>
+              <a:t>Key idea</a:t>
+            </a:r>
+            <a:endParaRPr lang="en-US" sz="950" dirty="0"/>
+          </a:p>
+        </p:txBody>
+      </p:sp>
+      <p:sp>
+        <p:nvSpPr>
+          <p:cNvPr id="13" name="Text 11"/>
+          <p:cNvSpPr/>
+          <p:nvPr/>
+        </p:nvSpPr>
+        <p:spPr>
+          <a:xfrm>
+            <a:off x="8074152" y="1856232"/>
+            <a:ext cx="2825496" cy="1261872"/>
+          </a:xfrm>
+          <a:prstGeom prst="rect">
+            <a:avLst/>
+          </a:prstGeom>
+          <a:noFill/>
+          <a:ln/>
+        </p:spPr>
+        <p:txBody>
+          <a:bodyPr wrap="square" lIns="0" tIns="0" rIns="0" bIns="0" rtlCol="0" anchor="t">
+            <a:normAutofit/>
+          </a:bodyPr>
+          <a:lstStyle/>
+          <a:p>
+            <a:pPr indent="0" marL="0">
+              <a:buNone/>
+            </a:pPr>
+            <a:r>
+              <a:rPr lang="en-US" sz="1250" dirty="0">
                 <a:solidFill>
                   <a:srgbClr val="17364A"/>
                 </a:solidFill>
@@ -4983,13 +7891,106 @@
                 <a:ea typeface="Aptos" pitchFamily="34" charset="-122"/>
                 <a:cs typeface="Aptos" pitchFamily="34" charset="-120"/>
               </a:rPr>
-              <a:t>CDC Public Health Data Strategy: https://www.cdc.gov/public-health-data-strategy/php/about/index.html</a:t>
-            </a:r>
-            <a:endParaRPr lang="en-US" sz="1450" dirty="0"/>
-          </a:p>
-          <a:p>
-            <a:r>
-              <a:rPr lang="en-US" sz="1450" dirty="0">
+              <a:t>The expected artifact is a completed AI value and impact measurement plan. It should be specific to a public health workflow.</a:t>
+            </a:r>
+            <a:endParaRPr lang="en-US" sz="1250" dirty="0"/>
+          </a:p>
+        </p:txBody>
+      </p:sp>
+      <p:sp>
+        <p:nvSpPr>
+          <p:cNvPr id="14" name="Shape 12"/>
+          <p:cNvSpPr/>
+          <p:nvPr/>
+        </p:nvSpPr>
+        <p:spPr>
+          <a:xfrm>
+            <a:off x="7909560" y="3520440"/>
+            <a:ext cx="3154680" cy="1737360"/>
+          </a:xfrm>
+          <a:prstGeom prst="roundRect">
+            <a:avLst>
+              <a:gd name="adj" fmla="val 6316"/>
+            </a:avLst>
+          </a:prstGeom>
+          <a:solidFill>
+            <a:srgbClr val="EAF6F8"/>
+          </a:solidFill>
+          <a:ln w="12700">
+            <a:solidFill>
+              <a:srgbClr val="B9D7E6"/>
+            </a:solidFill>
+            <a:prstDash val="solid"/>
+          </a:ln>
+        </p:spPr>
+      </p:sp>
+      <p:sp>
+        <p:nvSpPr>
+          <p:cNvPr id="15" name="Text 13"/>
+          <p:cNvSpPr/>
+          <p:nvPr/>
+        </p:nvSpPr>
+        <p:spPr>
+          <a:xfrm>
+            <a:off x="8074152" y="3666744"/>
+            <a:ext cx="2825496" cy="201168"/>
+          </a:xfrm>
+          <a:prstGeom prst="rect">
+            <a:avLst/>
+          </a:prstGeom>
+          <a:noFill/>
+          <a:ln/>
+        </p:spPr>
+        <p:txBody>
+          <a:bodyPr wrap="square" lIns="0" tIns="0" rIns="0" bIns="0" rtlCol="0" anchor="ctr"/>
+          <a:lstStyle/>
+          <a:p>
+            <a:pPr indent="0" marL="0">
+              <a:buNone/>
+            </a:pPr>
+            <a:r>
+              <a:rPr lang="en-US" sz="950" b="1" dirty="0">
+                <a:solidFill>
+                  <a:srgbClr val="0068B7"/>
+                </a:solidFill>
+                <a:latin typeface="Aptos" pitchFamily="34" charset="0"/>
+                <a:ea typeface="Aptos" pitchFamily="34" charset="-122"/>
+                <a:cs typeface="Aptos" pitchFamily="34" charset="-120"/>
+              </a:rPr>
+              <a:t>Use this for</a:t>
+            </a:r>
+            <a:endParaRPr lang="en-US" sz="950" dirty="0"/>
+          </a:p>
+        </p:txBody>
+      </p:sp>
+      <p:sp>
+        <p:nvSpPr>
+          <p:cNvPr id="16" name="Text 14"/>
+          <p:cNvSpPr/>
+          <p:nvPr/>
+        </p:nvSpPr>
+        <p:spPr>
+          <a:xfrm>
+            <a:off x="8074152" y="3959352"/>
+            <a:ext cx="2825496" cy="1170432"/>
+          </a:xfrm>
+          <a:prstGeom prst="rect">
+            <a:avLst/>
+          </a:prstGeom>
+          <a:noFill/>
+          <a:ln/>
+        </p:spPr>
+        <p:txBody>
+          <a:bodyPr wrap="square" lIns="0" tIns="0" rIns="0" bIns="0" rtlCol="0" anchor="t">
+            <a:normAutofit/>
+          </a:bodyPr>
+          <a:lstStyle/>
+          <a:p>
+            <a:pPr indent="0" marL="0">
+              <a:buNone/>
+            </a:pPr>
+            <a:r>
+              <a:rPr lang="en-US" sz="1250" dirty="0">
                 <a:solidFill>
                   <a:srgbClr val="17364A"/>
                 </a:solidFill>
@@ -4997,13 +7998,341 @@
                 <a:ea typeface="Aptos" pitchFamily="34" charset="-122"/>
                 <a:cs typeface="Aptos" pitchFamily="34" charset="-120"/>
               </a:rPr>
-              <a:t>NIST Artificial Intelligence Risk Management Framework: https://www.nist.gov/itl/ai-risk-management-framework</a:t>
-            </a:r>
-            <a:endParaRPr lang="en-US" sz="1450" dirty="0"/>
-          </a:p>
-          <a:p>
-            <a:r>
-              <a:rPr lang="en-US" sz="1450" dirty="0">
+              <a:t>Connect the concept to public health decisions, safeguards, documentation, or implementation work.</a:t>
+            </a:r>
+            <a:endParaRPr lang="en-US" sz="1250" dirty="0"/>
+          </a:p>
+        </p:txBody>
+      </p:sp>
+    </p:spTree>
+  </p:cSld>
+  <p:clrMapOvr>
+    <a:masterClrMapping/>
+  </p:clrMapOvr>
+</p:sld>
+</file>
+
+<file path=ppt/slides/slide19.xml><?xml version="1.0" encoding="utf-8"?>
+<p:sld xmlns:a="http://schemas.openxmlformats.org/drawingml/2006/main" xmlns:r="http://schemas.openxmlformats.org/officeDocument/2006/relationships" xmlns:p="http://schemas.openxmlformats.org/presentationml/2006/main">
+  <p:cSld name="Slide 19">
+    <p:bg>
+      <p:bgPr>
+        <a:solidFill>
+          <a:srgbClr val="F7FBFD"/>
+        </a:solidFill>
+      </p:bgPr>
+    </p:bg>
+    <p:spTree>
+      <p:nvGrpSpPr>
+        <p:cNvPr id="1" name=""/>
+        <p:cNvGrpSpPr/>
+        <p:nvPr/>
+      </p:nvGrpSpPr>
+      <p:grpSpPr>
+        <a:xfrm>
+          <a:off x="0" y="0"/>
+          <a:ext cx="0" cy="0"/>
+          <a:chOff x="0" y="0"/>
+          <a:chExt cx="0" cy="0"/>
+        </a:xfrm>
+      </p:grpSpPr>
+      <p:sp>
+        <p:nvSpPr>
+          <p:cNvPr id="2" name="Shape 0"/>
+          <p:cNvSpPr/>
+          <p:nvPr/>
+        </p:nvSpPr>
+        <p:spPr>
+          <a:xfrm>
+            <a:off x="0" y="0"/>
+            <a:ext cx="12191695" cy="164592"/>
+          </a:xfrm>
+          <a:prstGeom prst="rect">
+            <a:avLst/>
+          </a:prstGeom>
+          <a:solidFill>
+            <a:srgbClr val="0068B7"/>
+          </a:solidFill>
+          <a:ln w="12700">
+            <a:solidFill>
+              <a:srgbClr val="0068B7"/>
+            </a:solidFill>
+            <a:prstDash val="solid"/>
+          </a:ln>
+        </p:spPr>
+      </p:sp>
+      <p:sp>
+        <p:nvSpPr>
+          <p:cNvPr id="3" name="Shape 1"/>
+          <p:cNvSpPr/>
+          <p:nvPr/>
+        </p:nvSpPr>
+        <p:spPr>
+          <a:xfrm>
+            <a:off x="0" y="164592"/>
+            <a:ext cx="146304" cy="6693408"/>
+          </a:xfrm>
+          <a:prstGeom prst="rect">
+            <a:avLst/>
+          </a:prstGeom>
+          <a:solidFill>
+            <a:srgbClr val="2F8A28"/>
+          </a:solidFill>
+          <a:ln w="12700">
+            <a:solidFill>
+              <a:srgbClr val="2F8A28"/>
+            </a:solidFill>
+            <a:prstDash val="solid"/>
+          </a:ln>
+        </p:spPr>
+      </p:sp>
+      <p:sp>
+        <p:nvSpPr>
+          <p:cNvPr id="4" name="Text 2"/>
+          <p:cNvSpPr/>
+          <p:nvPr/>
+        </p:nvSpPr>
+        <p:spPr>
+          <a:xfrm>
+            <a:off x="502920" y="292608"/>
+            <a:ext cx="10149840" cy="256032"/>
+          </a:xfrm>
+          <a:prstGeom prst="rect">
+            <a:avLst/>
+          </a:prstGeom>
+          <a:noFill/>
+          <a:ln/>
+        </p:spPr>
+        <p:txBody>
+          <a:bodyPr wrap="square" lIns="0" tIns="0" rIns="0" bIns="0" rtlCol="0" anchor="ctr"/>
+          <a:lstStyle/>
+          <a:p>
+            <a:pPr indent="0" marL="0">
+              <a:buNone/>
+            </a:pPr>
+            <a:r>
+              <a:rPr lang="en-US" sz="900" b="1" dirty="0">
+                <a:solidFill>
+                  <a:srgbClr val="5F7181"/>
+                </a:solidFill>
+                <a:latin typeface="Aptos" pitchFamily="34" charset="0"/>
+                <a:ea typeface="Aptos" pitchFamily="34" charset="-122"/>
+                <a:cs typeface="Aptos" pitchFamily="34" charset="-120"/>
+              </a:rPr>
+              <a:t>Measuring AI Value, Performance, and Operational Impact</a:t>
+            </a:r>
+            <a:endParaRPr lang="en-US" sz="900" dirty="0"/>
+          </a:p>
+        </p:txBody>
+      </p:sp>
+      <p:sp>
+        <p:nvSpPr>
+          <p:cNvPr id="5" name="Text 3"/>
+          <p:cNvSpPr/>
+          <p:nvPr/>
+        </p:nvSpPr>
+        <p:spPr>
+          <a:xfrm>
+            <a:off x="502920" y="6537960"/>
+            <a:ext cx="7772400" cy="201168"/>
+          </a:xfrm>
+          <a:prstGeom prst="rect">
+            <a:avLst/>
+          </a:prstGeom>
+          <a:noFill/>
+          <a:ln/>
+        </p:spPr>
+        <p:txBody>
+          <a:bodyPr wrap="square" lIns="0" tIns="0" rIns="0" bIns="0" rtlCol="0" anchor="ctr"/>
+          <a:lstStyle/>
+          <a:p>
+            <a:pPr indent="0" marL="0">
+              <a:buNone/>
+            </a:pPr>
+            <a:r>
+              <a:rPr lang="en-US" sz="800" dirty="0">
+                <a:solidFill>
+                  <a:srgbClr val="5F7181"/>
+                </a:solidFill>
+                <a:latin typeface="Aptos" pitchFamily="34" charset="0"/>
+                <a:ea typeface="Aptos" pitchFamily="34" charset="-122"/>
+                <a:cs typeface="Aptos" pitchFamily="34" charset="-120"/>
+              </a:rPr>
+              <a:t>AI Playbook and Toolkit for Public Health Departments</a:t>
+            </a:r>
+            <a:endParaRPr lang="en-US" sz="800" dirty="0"/>
+          </a:p>
+        </p:txBody>
+      </p:sp>
+      <p:sp>
+        <p:nvSpPr>
+          <p:cNvPr id="6" name="Text 4"/>
+          <p:cNvSpPr/>
+          <p:nvPr/>
+        </p:nvSpPr>
+        <p:spPr>
+          <a:xfrm>
+            <a:off x="9966960" y="6537960"/>
+            <a:ext cx="1645920" cy="201168"/>
+          </a:xfrm>
+          <a:prstGeom prst="rect">
+            <a:avLst/>
+          </a:prstGeom>
+          <a:noFill/>
+          <a:ln/>
+        </p:spPr>
+        <p:txBody>
+          <a:bodyPr wrap="square" lIns="0" tIns="0" rIns="0" bIns="0" rtlCol="0" anchor="ctr"/>
+          <a:lstStyle/>
+          <a:p>
+            <a:pPr algn="r" indent="0" marL="0">
+              <a:buNone/>
+            </a:pPr>
+            <a:r>
+              <a:rPr lang="en-US" sz="800" dirty="0">
+                <a:solidFill>
+                  <a:srgbClr val="5F7181"/>
+                </a:solidFill>
+                <a:latin typeface="Aptos" pitchFamily="34" charset="0"/>
+                <a:ea typeface="Aptos" pitchFamily="34" charset="-122"/>
+                <a:cs typeface="Aptos" pitchFamily="34" charset="-120"/>
+              </a:rPr>
+              <a:t>© Paula Soper</a:t>
+            </a:r>
+            <a:endParaRPr lang="en-US" sz="800" dirty="0"/>
+          </a:p>
+        </p:txBody>
+      </p:sp>
+      <p:sp>
+        <p:nvSpPr>
+          <p:cNvPr id="7" name="Shape 5"/>
+          <p:cNvSpPr/>
+          <p:nvPr/>
+        </p:nvSpPr>
+        <p:spPr>
+          <a:xfrm>
+            <a:off x="640080" y="658368"/>
+            <a:ext cx="420624" cy="420624"/>
+          </a:xfrm>
+          <a:prstGeom prst="ellipse">
+            <a:avLst/>
+          </a:prstGeom>
+          <a:solidFill>
+            <a:srgbClr val="0068B7"/>
+          </a:solidFill>
+          <a:ln w="12700">
+            <a:solidFill>
+              <a:srgbClr val="0068B7"/>
+            </a:solidFill>
+            <a:prstDash val="solid"/>
+          </a:ln>
+        </p:spPr>
+      </p:sp>
+      <p:sp>
+        <p:nvSpPr>
+          <p:cNvPr id="8" name="Text 6"/>
+          <p:cNvSpPr/>
+          <p:nvPr/>
+        </p:nvSpPr>
+        <p:spPr>
+          <a:xfrm>
+            <a:off x="640080" y="731520"/>
+            <a:ext cx="420624" cy="164592"/>
+          </a:xfrm>
+          <a:prstGeom prst="rect">
+            <a:avLst/>
+          </a:prstGeom>
+          <a:noFill/>
+          <a:ln/>
+        </p:spPr>
+        <p:txBody>
+          <a:bodyPr wrap="square" lIns="0" tIns="0" rIns="0" bIns="0" rtlCol="0" anchor="ctr"/>
+          <a:lstStyle/>
+          <a:p>
+            <a:pPr algn="ctr" indent="0" marL="0">
+              <a:buNone/>
+            </a:pPr>
+            <a:r>
+              <a:rPr lang="en-US" sz="1100" b="1" dirty="0">
+                <a:solidFill>
+                  <a:srgbClr val="FFFFFF"/>
+                </a:solidFill>
+                <a:latin typeface="Aptos" pitchFamily="34" charset="0"/>
+                <a:ea typeface="Aptos" pitchFamily="34" charset="-122"/>
+                <a:cs typeface="Aptos" pitchFamily="34" charset="-120"/>
+              </a:rPr>
+              <a:t>13</a:t>
+            </a:r>
+            <a:endParaRPr lang="en-US" sz="1100" dirty="0"/>
+          </a:p>
+        </p:txBody>
+      </p:sp>
+      <p:sp>
+        <p:nvSpPr>
+          <p:cNvPr id="9" name="Text 7"/>
+          <p:cNvSpPr/>
+          <p:nvPr/>
+        </p:nvSpPr>
+        <p:spPr>
+          <a:xfrm>
+            <a:off x="640080" y="621792"/>
+            <a:ext cx="10881360" cy="566928"/>
+          </a:xfrm>
+          <a:prstGeom prst="rect">
+            <a:avLst/>
+          </a:prstGeom>
+          <a:noFill/>
+          <a:ln/>
+        </p:spPr>
+        <p:txBody>
+          <a:bodyPr wrap="square" lIns="0" tIns="0" rIns="0" bIns="0" rtlCol="0" anchor="ctr">
+            <a:normAutofit/>
+          </a:bodyPr>
+          <a:lstStyle/>
+          <a:p>
+            <a:pPr indent="0" marL="0">
+              <a:buNone/>
+            </a:pPr>
+            <a:r>
+              <a:rPr lang="en-US" sz="2700" b="1" dirty="0">
+                <a:solidFill>
+                  <a:srgbClr val="003A63"/>
+                </a:solidFill>
+                <a:latin typeface="Aptos Display" pitchFamily="34" charset="0"/>
+                <a:ea typeface="Aptos Display" pitchFamily="34" charset="-122"/>
+                <a:cs typeface="Aptos Display" pitchFamily="34" charset="-120"/>
+              </a:rPr>
+              <a:t>Knowledge Check</a:t>
+            </a:r>
+            <a:endParaRPr lang="en-US" sz="2700" dirty="0"/>
+          </a:p>
+        </p:txBody>
+      </p:sp>
+      <p:sp>
+        <p:nvSpPr>
+          <p:cNvPr id="10" name="Text 8"/>
+          <p:cNvSpPr/>
+          <p:nvPr/>
+        </p:nvSpPr>
+        <p:spPr>
+          <a:xfrm>
+            <a:off x="868680" y="1417320"/>
+            <a:ext cx="6675120" cy="4434840"/>
+          </a:xfrm>
+          <a:prstGeom prst="rect">
+            <a:avLst/>
+          </a:prstGeom>
+          <a:noFill/>
+          <a:ln/>
+        </p:spPr>
+        <p:txBody>
+          <a:bodyPr wrap="square" lIns="635" tIns="635" rIns="635" bIns="635" rtlCol="0" anchor="t">
+            <a:normAutofit/>
+          </a:bodyPr>
+          <a:lstStyle/>
+          <a:p>
+            <a:r>
+              <a:rPr lang="en-US" sz="1700" dirty="0">
                 <a:solidFill>
                   <a:srgbClr val="17364A"/>
                 </a:solidFill>
@@ -5011,13 +8340,13 @@
                 <a:ea typeface="Aptos" pitchFamily="34" charset="-122"/>
                 <a:cs typeface="Aptos" pitchFamily="34" charset="-120"/>
               </a:rPr>
-              <a:t>NIST AI RMF Generative AI Profile: https://www.nist.gov/publications/artificial-intelligence-risk-management-framework-generative-artificial-intelligence</a:t>
-            </a:r>
-            <a:endParaRPr lang="en-US" sz="1450" dirty="0"/>
-          </a:p>
-          <a:p>
-            <a:r>
-              <a:rPr lang="en-US" sz="1450" dirty="0">
+              <a:t>1. What is the best reason to address measuring ai value, performance, and operational impact before deployment?</a:t>
+            </a:r>
+            <a:endParaRPr lang="en-US" sz="1700" dirty="0"/>
+          </a:p>
+          <a:p>
+            <a:r>
+              <a:rPr lang="en-US" sz="1700" dirty="0">
                 <a:solidFill>
                   <a:srgbClr val="17364A"/>
                 </a:solidFill>
@@ -5025,9 +8354,251 @@
                 <a:ea typeface="Aptos" pitchFamily="34" charset="-122"/>
                 <a:cs typeface="Aptos" pitchFamily="34" charset="-120"/>
               </a:rPr>
-              <a:t>Agency performance management, quality improvement, equity, and evaluation policies</a:t>
-            </a:r>
-            <a:endParaRPr lang="en-US" sz="1450" dirty="0"/>
+              <a:t>2. Which practice best supports responsible implementation?</a:t>
+            </a:r>
+            <a:endParaRPr lang="en-US" sz="1700" dirty="0"/>
+          </a:p>
+          <a:p>
+            <a:r>
+              <a:rPr lang="en-US" sz="1700" dirty="0">
+                <a:solidFill>
+                  <a:srgbClr val="17364A"/>
+                </a:solidFill>
+                <a:latin typeface="Aptos" pitchFamily="34" charset="0"/>
+                <a:ea typeface="Aptos" pitchFamily="34" charset="-122"/>
+                <a:cs typeface="Aptos" pitchFamily="34" charset="-120"/>
+              </a:rPr>
+              <a:t>3. Which statement best describes a common failure mode?</a:t>
+            </a:r>
+            <a:endParaRPr lang="en-US" sz="1700" dirty="0"/>
+          </a:p>
+          <a:p>
+            <a:r>
+              <a:rPr lang="en-US" sz="1700" dirty="0">
+                <a:solidFill>
+                  <a:srgbClr val="17364A"/>
+                </a:solidFill>
+                <a:latin typeface="Aptos" pitchFamily="34" charset="0"/>
+                <a:ea typeface="Aptos" pitchFamily="34" charset="-122"/>
+                <a:cs typeface="Aptos" pitchFamily="34" charset="-120"/>
+              </a:rPr>
+              <a:t>4. What should be included in the practical artifact for this module?</a:t>
+            </a:r>
+            <a:endParaRPr lang="en-US" sz="1700" dirty="0"/>
+          </a:p>
+        </p:txBody>
+      </p:sp>
+      <p:sp>
+        <p:nvSpPr>
+          <p:cNvPr id="11" name="Shape 9"/>
+          <p:cNvSpPr/>
+          <p:nvPr/>
+        </p:nvSpPr>
+        <p:spPr>
+          <a:xfrm>
+            <a:off x="7909560" y="1417320"/>
+            <a:ext cx="3154680" cy="1828800"/>
+          </a:xfrm>
+          <a:prstGeom prst="roundRect">
+            <a:avLst>
+              <a:gd name="adj" fmla="val 6000"/>
+            </a:avLst>
+          </a:prstGeom>
+          <a:solidFill>
+            <a:srgbClr val="EEF8ED"/>
+          </a:solidFill>
+          <a:ln w="12700">
+            <a:solidFill>
+              <a:srgbClr val="B9D7E6"/>
+            </a:solidFill>
+            <a:prstDash val="solid"/>
+          </a:ln>
+        </p:spPr>
+      </p:sp>
+      <p:sp>
+        <p:nvSpPr>
+          <p:cNvPr id="12" name="Text 10"/>
+          <p:cNvSpPr/>
+          <p:nvPr/>
+        </p:nvSpPr>
+        <p:spPr>
+          <a:xfrm>
+            <a:off x="8074152" y="1563624"/>
+            <a:ext cx="2825496" cy="201168"/>
+          </a:xfrm>
+          <a:prstGeom prst="rect">
+            <a:avLst/>
+          </a:prstGeom>
+          <a:noFill/>
+          <a:ln/>
+        </p:spPr>
+        <p:txBody>
+          <a:bodyPr wrap="square" lIns="0" tIns="0" rIns="0" bIns="0" rtlCol="0" anchor="ctr"/>
+          <a:lstStyle/>
+          <a:p>
+            <a:pPr indent="0" marL="0">
+              <a:buNone/>
+            </a:pPr>
+            <a:r>
+              <a:rPr lang="en-US" sz="950" b="1" dirty="0">
+                <a:solidFill>
+                  <a:srgbClr val="0068B7"/>
+                </a:solidFill>
+                <a:latin typeface="Aptos" pitchFamily="34" charset="0"/>
+                <a:ea typeface="Aptos" pitchFamily="34" charset="-122"/>
+                <a:cs typeface="Aptos" pitchFamily="34" charset="-120"/>
+              </a:rPr>
+              <a:t>Key idea</a:t>
+            </a:r>
+            <a:endParaRPr lang="en-US" sz="950" dirty="0"/>
+          </a:p>
+        </p:txBody>
+      </p:sp>
+      <p:sp>
+        <p:nvSpPr>
+          <p:cNvPr id="13" name="Text 11"/>
+          <p:cNvSpPr/>
+          <p:nvPr/>
+        </p:nvSpPr>
+        <p:spPr>
+          <a:xfrm>
+            <a:off x="8074152" y="1856232"/>
+            <a:ext cx="2825496" cy="1261872"/>
+          </a:xfrm>
+          <a:prstGeom prst="rect">
+            <a:avLst/>
+          </a:prstGeom>
+          <a:noFill/>
+          <a:ln/>
+        </p:spPr>
+        <p:txBody>
+          <a:bodyPr wrap="square" lIns="0" tIns="0" rIns="0" bIns="0" rtlCol="0" anchor="t">
+            <a:normAutofit/>
+          </a:bodyPr>
+          <a:lstStyle/>
+          <a:p>
+            <a:pPr indent="0" marL="0">
+              <a:buNone/>
+            </a:pPr>
+            <a:r>
+              <a:rPr lang="en-US" sz="1250" dirty="0">
+                <a:solidFill>
+                  <a:srgbClr val="17364A"/>
+                </a:solidFill>
+                <a:latin typeface="Aptos" pitchFamily="34" charset="0"/>
+                <a:ea typeface="Aptos" pitchFamily="34" charset="-122"/>
+                <a:cs typeface="Aptos" pitchFamily="34" charset="-120"/>
+              </a:rPr>
+              <a:t>1. What is the best reason to address measuring ai value, performance, and operational impact before deployment?</a:t>
+            </a:r>
+            <a:endParaRPr lang="en-US" sz="1250" dirty="0"/>
+          </a:p>
+        </p:txBody>
+      </p:sp>
+      <p:sp>
+        <p:nvSpPr>
+          <p:cNvPr id="14" name="Shape 12"/>
+          <p:cNvSpPr/>
+          <p:nvPr/>
+        </p:nvSpPr>
+        <p:spPr>
+          <a:xfrm>
+            <a:off x="7909560" y="3520440"/>
+            <a:ext cx="3154680" cy="1737360"/>
+          </a:xfrm>
+          <a:prstGeom prst="roundRect">
+            <a:avLst>
+              <a:gd name="adj" fmla="val 6316"/>
+            </a:avLst>
+          </a:prstGeom>
+          <a:solidFill>
+            <a:srgbClr val="EAF6F8"/>
+          </a:solidFill>
+          <a:ln w="12700">
+            <a:solidFill>
+              <a:srgbClr val="B9D7E6"/>
+            </a:solidFill>
+            <a:prstDash val="solid"/>
+          </a:ln>
+        </p:spPr>
+      </p:sp>
+      <p:sp>
+        <p:nvSpPr>
+          <p:cNvPr id="15" name="Text 13"/>
+          <p:cNvSpPr/>
+          <p:nvPr/>
+        </p:nvSpPr>
+        <p:spPr>
+          <a:xfrm>
+            <a:off x="8074152" y="3666744"/>
+            <a:ext cx="2825496" cy="201168"/>
+          </a:xfrm>
+          <a:prstGeom prst="rect">
+            <a:avLst/>
+          </a:prstGeom>
+          <a:noFill/>
+          <a:ln/>
+        </p:spPr>
+        <p:txBody>
+          <a:bodyPr wrap="square" lIns="0" tIns="0" rIns="0" bIns="0" rtlCol="0" anchor="ctr"/>
+          <a:lstStyle/>
+          <a:p>
+            <a:pPr indent="0" marL="0">
+              <a:buNone/>
+            </a:pPr>
+            <a:r>
+              <a:rPr lang="en-US" sz="950" b="1" dirty="0">
+                <a:solidFill>
+                  <a:srgbClr val="0068B7"/>
+                </a:solidFill>
+                <a:latin typeface="Aptos" pitchFamily="34" charset="0"/>
+                <a:ea typeface="Aptos" pitchFamily="34" charset="-122"/>
+                <a:cs typeface="Aptos" pitchFamily="34" charset="-120"/>
+              </a:rPr>
+              <a:t>Use this for</a:t>
+            </a:r>
+            <a:endParaRPr lang="en-US" sz="950" dirty="0"/>
+          </a:p>
+        </p:txBody>
+      </p:sp>
+      <p:sp>
+        <p:nvSpPr>
+          <p:cNvPr id="16" name="Text 14"/>
+          <p:cNvSpPr/>
+          <p:nvPr/>
+        </p:nvSpPr>
+        <p:spPr>
+          <a:xfrm>
+            <a:off x="8074152" y="3959352"/>
+            <a:ext cx="2825496" cy="1170432"/>
+          </a:xfrm>
+          <a:prstGeom prst="rect">
+            <a:avLst/>
+          </a:prstGeom>
+          <a:noFill/>
+          <a:ln/>
+        </p:spPr>
+        <p:txBody>
+          <a:bodyPr wrap="square" lIns="0" tIns="0" rIns="0" bIns="0" rtlCol="0" anchor="t">
+            <a:normAutofit/>
+          </a:bodyPr>
+          <a:lstStyle/>
+          <a:p>
+            <a:pPr indent="0" marL="0">
+              <a:buNone/>
+            </a:pPr>
+            <a:r>
+              <a:rPr lang="en-US" sz="1250" dirty="0">
+                <a:solidFill>
+                  <a:srgbClr val="17364A"/>
+                </a:solidFill>
+                <a:latin typeface="Aptos" pitchFamily="34" charset="0"/>
+                <a:ea typeface="Aptos" pitchFamily="34" charset="-122"/>
+                <a:cs typeface="Aptos" pitchFamily="34" charset="-120"/>
+              </a:rPr>
+              <a:t>Connect the concept to public health decisions, safeguards, documentation, or implementation work.</a:t>
+            </a:r>
+            <a:endParaRPr lang="en-US" sz="1250" dirty="0"/>
           </a:p>
         </p:txBody>
       </p:sp>
@@ -5090,7 +8661,32 @@
       </p:sp>
       <p:sp>
         <p:nvSpPr>
-          <p:cNvPr id="3" name="Text 1"/>
+          <p:cNvPr id="3" name="Shape 1"/>
+          <p:cNvSpPr/>
+          <p:nvPr/>
+        </p:nvSpPr>
+        <p:spPr>
+          <a:xfrm>
+            <a:off x="0" y="164592"/>
+            <a:ext cx="146304" cy="6693408"/>
+          </a:xfrm>
+          <a:prstGeom prst="rect">
+            <a:avLst/>
+          </a:prstGeom>
+          <a:solidFill>
+            <a:srgbClr val="2F8A28"/>
+          </a:solidFill>
+          <a:ln w="12700">
+            <a:solidFill>
+              <a:srgbClr val="2F8A28"/>
+            </a:solidFill>
+            <a:prstDash val="solid"/>
+          </a:ln>
+        </p:spPr>
+      </p:sp>
+      <p:sp>
+        <p:nvSpPr>
+          <p:cNvPr id="4" name="Text 2"/>
           <p:cNvSpPr/>
           <p:nvPr/>
         </p:nvSpPr>
@@ -5129,7 +8725,7 @@
       </p:sp>
       <p:sp>
         <p:nvSpPr>
-          <p:cNvPr id="4" name="Text 2"/>
+          <p:cNvPr id="5" name="Text 3"/>
           <p:cNvSpPr/>
           <p:nvPr/>
         </p:nvSpPr>
@@ -5168,7 +8764,7 @@
       </p:sp>
       <p:sp>
         <p:nvSpPr>
-          <p:cNvPr id="5" name="Text 3"/>
+          <p:cNvPr id="6" name="Text 4"/>
           <p:cNvSpPr/>
           <p:nvPr/>
         </p:nvSpPr>
@@ -5207,7 +8803,7 @@
       </p:sp>
       <p:sp>
         <p:nvSpPr>
-          <p:cNvPr id="6" name="Text 4"/>
+          <p:cNvPr id="7" name="Text 5"/>
           <p:cNvSpPr/>
           <p:nvPr/>
         </p:nvSpPr>
@@ -5240,7 +8836,7 @@
                 <a:ea typeface="Aptos Display" pitchFamily="34" charset="-122"/>
                 <a:cs typeface="Aptos Display" pitchFamily="34" charset="-120"/>
               </a:rPr>
-              <a:t>Module Context</a:t>
+              <a:t>What this module helps you do</a:t>
             </a:r>
             <a:endParaRPr lang="en-US" sz="2700" dirty="0"/>
           </a:p>
@@ -5248,14 +8844,14 @@
       </p:sp>
       <p:sp>
         <p:nvSpPr>
-          <p:cNvPr id="7" name="Text 5"/>
-          <p:cNvSpPr/>
-          <p:nvPr/>
-        </p:nvSpPr>
-        <p:spPr>
-          <a:xfrm>
-            <a:off x="822960" y="1325880"/>
-            <a:ext cx="10378440" cy="1371600"/>
+          <p:cNvPr id="8" name="Text 6"/>
+          <p:cNvSpPr/>
+          <p:nvPr/>
+        </p:nvSpPr>
+        <p:spPr>
+          <a:xfrm>
+            <a:off x="868680" y="1417320"/>
+            <a:ext cx="6675120" cy="3291840"/>
           </a:xfrm>
           <a:prstGeom prst="rect">
             <a:avLst/>
@@ -5270,7 +8866,7 @@
           <a:lstStyle/>
           <a:p>
             <a:r>
-              <a:rPr lang="en-US" sz="1600" dirty="0">
+              <a:rPr lang="en-US" sz="1700" dirty="0">
                 <a:solidFill>
                   <a:srgbClr val="17364A"/>
                 </a:solidFill>
@@ -5278,13 +8874,13 @@
                 <a:ea typeface="Aptos" pitchFamily="34" charset="-122"/>
                 <a:cs typeface="Aptos" pitchFamily="34" charset="-120"/>
               </a:rPr>
-              <a:t>Level: intermediate/practitioner</a:t>
-            </a:r>
-            <a:endParaRPr lang="en-US" sz="1600" dirty="0"/>
-          </a:p>
-          <a:p>
-            <a:r>
-              <a:rPr lang="en-US" sz="1600" dirty="0">
+              <a:t>AI tools should be evaluated not only by model accuracy, but also by whether they improve public health operations and outcomes.</a:t>
+            </a:r>
+            <a:endParaRPr lang="en-US" sz="1700" dirty="0"/>
+          </a:p>
+          <a:p>
+            <a:r>
+              <a:rPr lang="en-US" sz="1700" dirty="0">
                 <a:solidFill>
                   <a:srgbClr val="17364A"/>
                 </a:solidFill>
@@ -5292,13 +8888,13 @@
                 <a:ea typeface="Aptos" pitchFamily="34" charset="-122"/>
                 <a:cs typeface="Aptos" pitchFamily="34" charset="-120"/>
               </a:rPr>
-              <a:t>Primary track: Operations and Data Quality Track</a:t>
-            </a:r>
-            <a:endParaRPr lang="en-US" sz="1600" dirty="0"/>
-          </a:p>
-          <a:p>
-            <a:r>
-              <a:rPr lang="en-US" sz="1600" dirty="0">
+              <a:t>This module teaches learners to define measures for timeliness, quality, equity, staff burden, cost, user satisfaction, safety, trust, and.</a:t>
+            </a:r>
+            <a:endParaRPr lang="en-US" sz="1700" dirty="0"/>
+          </a:p>
+          <a:p>
+            <a:r>
+              <a:rPr lang="en-US" sz="1700" dirty="0">
                 <a:solidFill>
                   <a:srgbClr val="17364A"/>
                 </a:solidFill>
@@ -5306,31 +8902,97 @@
                 <a:ea typeface="Aptos" pitchFamily="34" charset="-122"/>
                 <a:cs typeface="Aptos" pitchFamily="34" charset="-120"/>
               </a:rPr>
-              <a:t>Appears in tracks: operations-data-quality</a:t>
-            </a:r>
-            <a:endParaRPr lang="en-US" sz="1600" dirty="0"/>
-          </a:p>
-        </p:txBody>
-      </p:sp>
-      <p:sp>
-        <p:nvSpPr>
-          <p:cNvPr id="8" name="Text 6"/>
-          <p:cNvSpPr/>
-          <p:nvPr/>
-        </p:nvSpPr>
-        <p:spPr>
-          <a:xfrm>
-            <a:off x="822960" y="2743200"/>
-            <a:ext cx="10378440" cy="2834640"/>
-          </a:xfrm>
-          <a:prstGeom prst="rect">
-            <a:avLst/>
-          </a:prstGeom>
-          <a:noFill/>
-          <a:ln/>
-        </p:spPr>
-        <p:txBody>
-          <a:bodyPr wrap="square" lIns="1016" tIns="1016" rIns="1016" bIns="1016" rtlCol="0" anchor="t">
+              <a:t>It helps agencies avoid adopting AI because it is novel and instead assess whether it creates measurable public value.</a:t>
+            </a:r>
+            <a:endParaRPr lang="en-US" sz="1700" dirty="0"/>
+          </a:p>
+        </p:txBody>
+      </p:sp>
+      <p:sp>
+        <p:nvSpPr>
+          <p:cNvPr id="9" name="Shape 7"/>
+          <p:cNvSpPr/>
+          <p:nvPr/>
+        </p:nvSpPr>
+        <p:spPr>
+          <a:xfrm>
+            <a:off x="7909560" y="1417320"/>
+            <a:ext cx="3154680" cy="1920240"/>
+          </a:xfrm>
+          <a:prstGeom prst="roundRect">
+            <a:avLst>
+              <a:gd name="adj" fmla="val 5714"/>
+            </a:avLst>
+          </a:prstGeom>
+          <a:solidFill>
+            <a:srgbClr val="EAF6F8"/>
+          </a:solidFill>
+          <a:ln w="12700">
+            <a:solidFill>
+              <a:srgbClr val="B9D7E6"/>
+            </a:solidFill>
+            <a:prstDash val="solid"/>
+          </a:ln>
+        </p:spPr>
+      </p:sp>
+      <p:sp>
+        <p:nvSpPr>
+          <p:cNvPr id="10" name="Text 8"/>
+          <p:cNvSpPr/>
+          <p:nvPr/>
+        </p:nvSpPr>
+        <p:spPr>
+          <a:xfrm>
+            <a:off x="8074152" y="1563624"/>
+            <a:ext cx="2825496" cy="201168"/>
+          </a:xfrm>
+          <a:prstGeom prst="rect">
+            <a:avLst/>
+          </a:prstGeom>
+          <a:noFill/>
+          <a:ln/>
+        </p:spPr>
+        <p:txBody>
+          <a:bodyPr wrap="square" lIns="0" tIns="0" rIns="0" bIns="0" rtlCol="0" anchor="ctr"/>
+          <a:lstStyle/>
+          <a:p>
+            <a:pPr indent="0" marL="0">
+              <a:buNone/>
+            </a:pPr>
+            <a:r>
+              <a:rPr lang="en-US" sz="950" b="1" dirty="0">
+                <a:solidFill>
+                  <a:srgbClr val="0068B7"/>
+                </a:solidFill>
+                <a:latin typeface="Aptos" pitchFamily="34" charset="0"/>
+                <a:ea typeface="Aptos" pitchFamily="34" charset="-122"/>
+                <a:cs typeface="Aptos" pitchFamily="34" charset="-120"/>
+              </a:rPr>
+              <a:t>Module details</a:t>
+            </a:r>
+            <a:endParaRPr lang="en-US" sz="950" dirty="0"/>
+          </a:p>
+        </p:txBody>
+      </p:sp>
+      <p:sp>
+        <p:nvSpPr>
+          <p:cNvPr id="11" name="Text 9"/>
+          <p:cNvSpPr/>
+          <p:nvPr/>
+        </p:nvSpPr>
+        <p:spPr>
+          <a:xfrm>
+            <a:off x="8074152" y="1856232"/>
+            <a:ext cx="2825496" cy="1353312"/>
+          </a:xfrm>
+          <a:prstGeom prst="rect">
+            <a:avLst/>
+          </a:prstGeom>
+          <a:noFill/>
+          <a:ln/>
+        </p:spPr>
+        <p:txBody>
+          <a:bodyPr wrap="square" lIns="0" tIns="0" rIns="0" bIns="0" rtlCol="0" anchor="t">
             <a:normAutofit/>
           </a:bodyPr>
           <a:lstStyle/>
@@ -5339,7 +9001,7 @@
               <a:buNone/>
             </a:pPr>
             <a:r>
-              <a:rPr lang="en-US" sz="1400" dirty="0">
+              <a:rPr lang="en-US" sz="1250" dirty="0">
                 <a:solidFill>
                   <a:srgbClr val="17364A"/>
                 </a:solidFill>
@@ -5347,9 +9009,748 @@
                 <a:ea typeface="Aptos" pitchFamily="34" charset="-122"/>
                 <a:cs typeface="Aptos" pitchFamily="34" charset="-120"/>
               </a:rPr>
-              <a:t>AI tools should be evaluated not only by model accuracy, but also by whether they improve public health operations and outcomes. This module teaches learners to define measures for timeliness, quality, equity, staff burden, cost, user satisfaction, safety, trust, and sustainability. It helps agencies avoid adopting AI because it is novel and instead assess whether it creates measurable public value.</a:t>
-            </a:r>
-            <a:endParaRPr lang="en-US" sz="1400" dirty="0"/>
+              <a:t>Level: intermediate/practitioner</a:t>
+            </a:r>
+            <a:endParaRPr lang="en-US" sz="1250" dirty="0"/>
+          </a:p>
+          <a:p>
+            <a:pPr indent="0" marL="0">
+              <a:buNone/>
+            </a:pPr>
+            <a:r>
+              <a:rPr lang="en-US" sz="1250" dirty="0">
+                <a:solidFill>
+                  <a:srgbClr val="17364A"/>
+                </a:solidFill>
+                <a:latin typeface="Aptos" pitchFamily="34" charset="0"/>
+                <a:ea typeface="Aptos" pitchFamily="34" charset="-122"/>
+                <a:cs typeface="Aptos" pitchFamily="34" charset="-120"/>
+              </a:rPr>
+              <a:t>Primary track: Operations and Data Quality Track</a:t>
+            </a:r>
+            <a:endParaRPr lang="en-US" sz="1250" dirty="0"/>
+          </a:p>
+          <a:p>
+            <a:pPr indent="0" marL="0">
+              <a:buNone/>
+            </a:pPr>
+            <a:r>
+              <a:rPr lang="en-US" sz="1250" dirty="0">
+                <a:solidFill>
+                  <a:srgbClr val="17364A"/>
+                </a:solidFill>
+                <a:latin typeface="Aptos" pitchFamily="34" charset="0"/>
+                <a:ea typeface="Aptos" pitchFamily="34" charset="-122"/>
+                <a:cs typeface="Aptos" pitchFamily="34" charset="-120"/>
+              </a:rPr>
+              <a:t>Appears in tracks: operations-data-quality</a:t>
+            </a:r>
+            <a:endParaRPr lang="en-US" sz="1250" dirty="0"/>
+          </a:p>
+        </p:txBody>
+      </p:sp>
+      <p:sp>
+        <p:nvSpPr>
+          <p:cNvPr id="12" name="Shape 10"/>
+          <p:cNvSpPr/>
+          <p:nvPr/>
+        </p:nvSpPr>
+        <p:spPr>
+          <a:xfrm>
+            <a:off x="7909560" y="3611880"/>
+            <a:ext cx="3154680" cy="1783080"/>
+          </a:xfrm>
+          <a:prstGeom prst="roundRect">
+            <a:avLst>
+              <a:gd name="adj" fmla="val 6154"/>
+            </a:avLst>
+          </a:prstGeom>
+          <a:solidFill>
+            <a:srgbClr val="EEF8ED"/>
+          </a:solidFill>
+          <a:ln w="12700">
+            <a:solidFill>
+              <a:srgbClr val="B9D7E6"/>
+            </a:solidFill>
+            <a:prstDash val="solid"/>
+          </a:ln>
+        </p:spPr>
+      </p:sp>
+      <p:sp>
+        <p:nvSpPr>
+          <p:cNvPr id="13" name="Text 11"/>
+          <p:cNvSpPr/>
+          <p:nvPr/>
+        </p:nvSpPr>
+        <p:spPr>
+          <a:xfrm>
+            <a:off x="8074152" y="3758184"/>
+            <a:ext cx="2825496" cy="201168"/>
+          </a:xfrm>
+          <a:prstGeom prst="rect">
+            <a:avLst/>
+          </a:prstGeom>
+          <a:noFill/>
+          <a:ln/>
+        </p:spPr>
+        <p:txBody>
+          <a:bodyPr wrap="square" lIns="0" tIns="0" rIns="0" bIns="0" rtlCol="0" anchor="ctr"/>
+          <a:lstStyle/>
+          <a:p>
+            <a:pPr indent="0" marL="0">
+              <a:buNone/>
+            </a:pPr>
+            <a:r>
+              <a:rPr lang="en-US" sz="950" b="1" dirty="0">
+                <a:solidFill>
+                  <a:srgbClr val="0068B7"/>
+                </a:solidFill>
+                <a:latin typeface="Aptos" pitchFamily="34" charset="0"/>
+                <a:ea typeface="Aptos" pitchFamily="34" charset="-122"/>
+                <a:cs typeface="Aptos" pitchFamily="34" charset="-120"/>
+              </a:rPr>
+              <a:t>Learning approach</a:t>
+            </a:r>
+            <a:endParaRPr lang="en-US" sz="950" dirty="0"/>
+          </a:p>
+        </p:txBody>
+      </p:sp>
+      <p:sp>
+        <p:nvSpPr>
+          <p:cNvPr id="14" name="Text 12"/>
+          <p:cNvSpPr/>
+          <p:nvPr/>
+        </p:nvSpPr>
+        <p:spPr>
+          <a:xfrm>
+            <a:off x="8074152" y="4050792"/>
+            <a:ext cx="2825496" cy="1216152"/>
+          </a:xfrm>
+          <a:prstGeom prst="rect">
+            <a:avLst/>
+          </a:prstGeom>
+          <a:noFill/>
+          <a:ln/>
+        </p:spPr>
+        <p:txBody>
+          <a:bodyPr wrap="square" lIns="0" tIns="0" rIns="0" bIns="0" rtlCol="0" anchor="t">
+            <a:normAutofit/>
+          </a:bodyPr>
+          <a:lstStyle/>
+          <a:p>
+            <a:pPr indent="0" marL="0">
+              <a:buNone/>
+            </a:pPr>
+            <a:r>
+              <a:rPr lang="en-US" sz="1250" dirty="0">
+                <a:solidFill>
+                  <a:srgbClr val="17364A"/>
+                </a:solidFill>
+                <a:latin typeface="Aptos" pitchFamily="34" charset="0"/>
+                <a:ea typeface="Aptos" pitchFamily="34" charset="-122"/>
+                <a:cs typeface="Aptos" pitchFamily="34" charset="-120"/>
+              </a:rPr>
+              <a:t>Review the core ideas, complete the practical exercise, check your understanding, and use the related plays and tools to apply the lesson.</a:t>
+            </a:r>
+            <a:endParaRPr lang="en-US" sz="1250" dirty="0"/>
+          </a:p>
+        </p:txBody>
+      </p:sp>
+    </p:spTree>
+  </p:cSld>
+  <p:clrMapOvr>
+    <a:masterClrMapping/>
+  </p:clrMapOvr>
+</p:sld>
+</file>
+
+<file path=ppt/slides/slide20.xml><?xml version="1.0" encoding="utf-8"?>
+<p:sld xmlns:a="http://schemas.openxmlformats.org/drawingml/2006/main" xmlns:r="http://schemas.openxmlformats.org/officeDocument/2006/relationships" xmlns:p="http://schemas.openxmlformats.org/presentationml/2006/main">
+  <p:cSld name="Slide 20">
+    <p:bg>
+      <p:bgPr>
+        <a:solidFill>
+          <a:srgbClr val="F7FBFD"/>
+        </a:solidFill>
+      </p:bgPr>
+    </p:bg>
+    <p:spTree>
+      <p:nvGrpSpPr>
+        <p:cNvPr id="1" name=""/>
+        <p:cNvGrpSpPr/>
+        <p:nvPr/>
+      </p:nvGrpSpPr>
+      <p:grpSpPr>
+        <a:xfrm>
+          <a:off x="0" y="0"/>
+          <a:ext cx="0" cy="0"/>
+          <a:chOff x="0" y="0"/>
+          <a:chExt cx="0" cy="0"/>
+        </a:xfrm>
+      </p:grpSpPr>
+      <p:sp>
+        <p:nvSpPr>
+          <p:cNvPr id="2" name="Shape 0"/>
+          <p:cNvSpPr/>
+          <p:nvPr/>
+        </p:nvSpPr>
+        <p:spPr>
+          <a:xfrm>
+            <a:off x="0" y="0"/>
+            <a:ext cx="12191695" cy="164592"/>
+          </a:xfrm>
+          <a:prstGeom prst="rect">
+            <a:avLst/>
+          </a:prstGeom>
+          <a:solidFill>
+            <a:srgbClr val="0068B7"/>
+          </a:solidFill>
+          <a:ln w="12700">
+            <a:solidFill>
+              <a:srgbClr val="0068B7"/>
+            </a:solidFill>
+            <a:prstDash val="solid"/>
+          </a:ln>
+        </p:spPr>
+      </p:sp>
+      <p:sp>
+        <p:nvSpPr>
+          <p:cNvPr id="3" name="Shape 1"/>
+          <p:cNvSpPr/>
+          <p:nvPr/>
+        </p:nvSpPr>
+        <p:spPr>
+          <a:xfrm>
+            <a:off x="0" y="164592"/>
+            <a:ext cx="146304" cy="6693408"/>
+          </a:xfrm>
+          <a:prstGeom prst="rect">
+            <a:avLst/>
+          </a:prstGeom>
+          <a:solidFill>
+            <a:srgbClr val="2F8A28"/>
+          </a:solidFill>
+          <a:ln w="12700">
+            <a:solidFill>
+              <a:srgbClr val="2F8A28"/>
+            </a:solidFill>
+            <a:prstDash val="solid"/>
+          </a:ln>
+        </p:spPr>
+      </p:sp>
+      <p:sp>
+        <p:nvSpPr>
+          <p:cNvPr id="4" name="Text 2"/>
+          <p:cNvSpPr/>
+          <p:nvPr/>
+        </p:nvSpPr>
+        <p:spPr>
+          <a:xfrm>
+            <a:off x="502920" y="292608"/>
+            <a:ext cx="10149840" cy="256032"/>
+          </a:xfrm>
+          <a:prstGeom prst="rect">
+            <a:avLst/>
+          </a:prstGeom>
+          <a:noFill/>
+          <a:ln/>
+        </p:spPr>
+        <p:txBody>
+          <a:bodyPr wrap="square" lIns="0" tIns="0" rIns="0" bIns="0" rtlCol="0" anchor="ctr"/>
+          <a:lstStyle/>
+          <a:p>
+            <a:pPr indent="0" marL="0">
+              <a:buNone/>
+            </a:pPr>
+            <a:r>
+              <a:rPr lang="en-US" sz="900" b="1" dirty="0">
+                <a:solidFill>
+                  <a:srgbClr val="5F7181"/>
+                </a:solidFill>
+                <a:latin typeface="Aptos" pitchFamily="34" charset="0"/>
+                <a:ea typeface="Aptos" pitchFamily="34" charset="-122"/>
+                <a:cs typeface="Aptos" pitchFamily="34" charset="-120"/>
+              </a:rPr>
+              <a:t>Measuring AI Value, Performance, and Operational Impact</a:t>
+            </a:r>
+            <a:endParaRPr lang="en-US" sz="900" dirty="0"/>
+          </a:p>
+        </p:txBody>
+      </p:sp>
+      <p:sp>
+        <p:nvSpPr>
+          <p:cNvPr id="5" name="Text 3"/>
+          <p:cNvSpPr/>
+          <p:nvPr/>
+        </p:nvSpPr>
+        <p:spPr>
+          <a:xfrm>
+            <a:off x="502920" y="6537960"/>
+            <a:ext cx="7772400" cy="201168"/>
+          </a:xfrm>
+          <a:prstGeom prst="rect">
+            <a:avLst/>
+          </a:prstGeom>
+          <a:noFill/>
+          <a:ln/>
+        </p:spPr>
+        <p:txBody>
+          <a:bodyPr wrap="square" lIns="0" tIns="0" rIns="0" bIns="0" rtlCol="0" anchor="ctr"/>
+          <a:lstStyle/>
+          <a:p>
+            <a:pPr indent="0" marL="0">
+              <a:buNone/>
+            </a:pPr>
+            <a:r>
+              <a:rPr lang="en-US" sz="800" dirty="0">
+                <a:solidFill>
+                  <a:srgbClr val="5F7181"/>
+                </a:solidFill>
+                <a:latin typeface="Aptos" pitchFamily="34" charset="0"/>
+                <a:ea typeface="Aptos" pitchFamily="34" charset="-122"/>
+                <a:cs typeface="Aptos" pitchFamily="34" charset="-120"/>
+              </a:rPr>
+              <a:t>AI Playbook and Toolkit for Public Health Departments</a:t>
+            </a:r>
+            <a:endParaRPr lang="en-US" sz="800" dirty="0"/>
+          </a:p>
+        </p:txBody>
+      </p:sp>
+      <p:sp>
+        <p:nvSpPr>
+          <p:cNvPr id="6" name="Text 4"/>
+          <p:cNvSpPr/>
+          <p:nvPr/>
+        </p:nvSpPr>
+        <p:spPr>
+          <a:xfrm>
+            <a:off x="9966960" y="6537960"/>
+            <a:ext cx="1645920" cy="201168"/>
+          </a:xfrm>
+          <a:prstGeom prst="rect">
+            <a:avLst/>
+          </a:prstGeom>
+          <a:noFill/>
+          <a:ln/>
+        </p:spPr>
+        <p:txBody>
+          <a:bodyPr wrap="square" lIns="0" tIns="0" rIns="0" bIns="0" rtlCol="0" anchor="ctr"/>
+          <a:lstStyle/>
+          <a:p>
+            <a:pPr algn="r" indent="0" marL="0">
+              <a:buNone/>
+            </a:pPr>
+            <a:r>
+              <a:rPr lang="en-US" sz="800" dirty="0">
+                <a:solidFill>
+                  <a:srgbClr val="5F7181"/>
+                </a:solidFill>
+                <a:latin typeface="Aptos" pitchFamily="34" charset="0"/>
+                <a:ea typeface="Aptos" pitchFamily="34" charset="-122"/>
+                <a:cs typeface="Aptos" pitchFamily="34" charset="-120"/>
+              </a:rPr>
+              <a:t>© Paula Soper</a:t>
+            </a:r>
+            <a:endParaRPr lang="en-US" sz="800" dirty="0"/>
+          </a:p>
+        </p:txBody>
+      </p:sp>
+      <p:sp>
+        <p:nvSpPr>
+          <p:cNvPr id="7" name="Shape 5"/>
+          <p:cNvSpPr/>
+          <p:nvPr/>
+        </p:nvSpPr>
+        <p:spPr>
+          <a:xfrm>
+            <a:off x="640080" y="658368"/>
+            <a:ext cx="420624" cy="420624"/>
+          </a:xfrm>
+          <a:prstGeom prst="ellipse">
+            <a:avLst/>
+          </a:prstGeom>
+          <a:solidFill>
+            <a:srgbClr val="0068B7"/>
+          </a:solidFill>
+          <a:ln w="12700">
+            <a:solidFill>
+              <a:srgbClr val="0068B7"/>
+            </a:solidFill>
+            <a:prstDash val="solid"/>
+          </a:ln>
+        </p:spPr>
+      </p:sp>
+      <p:sp>
+        <p:nvSpPr>
+          <p:cNvPr id="8" name="Text 6"/>
+          <p:cNvSpPr/>
+          <p:nvPr/>
+        </p:nvSpPr>
+        <p:spPr>
+          <a:xfrm>
+            <a:off x="640080" y="731520"/>
+            <a:ext cx="420624" cy="164592"/>
+          </a:xfrm>
+          <a:prstGeom prst="rect">
+            <a:avLst/>
+          </a:prstGeom>
+          <a:noFill/>
+          <a:ln/>
+        </p:spPr>
+        <p:txBody>
+          <a:bodyPr wrap="square" lIns="0" tIns="0" rIns="0" bIns="0" rtlCol="0" anchor="ctr"/>
+          <a:lstStyle/>
+          <a:p>
+            <a:pPr algn="ctr" indent="0" marL="0">
+              <a:buNone/>
+            </a:pPr>
+            <a:r>
+              <a:rPr lang="en-US" sz="1100" b="1" dirty="0">
+                <a:solidFill>
+                  <a:srgbClr val="FFFFFF"/>
+                </a:solidFill>
+                <a:latin typeface="Aptos" pitchFamily="34" charset="0"/>
+                <a:ea typeface="Aptos" pitchFamily="34" charset="-122"/>
+                <a:cs typeface="Aptos" pitchFamily="34" charset="-120"/>
+              </a:rPr>
+              <a:t>14</a:t>
+            </a:r>
+            <a:endParaRPr lang="en-US" sz="1100" dirty="0"/>
+          </a:p>
+        </p:txBody>
+      </p:sp>
+      <p:sp>
+        <p:nvSpPr>
+          <p:cNvPr id="9" name="Text 7"/>
+          <p:cNvSpPr/>
+          <p:nvPr/>
+        </p:nvSpPr>
+        <p:spPr>
+          <a:xfrm>
+            <a:off x="640080" y="621792"/>
+            <a:ext cx="10881360" cy="566928"/>
+          </a:xfrm>
+          <a:prstGeom prst="rect">
+            <a:avLst/>
+          </a:prstGeom>
+          <a:noFill/>
+          <a:ln/>
+        </p:spPr>
+        <p:txBody>
+          <a:bodyPr wrap="square" lIns="0" tIns="0" rIns="0" bIns="0" rtlCol="0" anchor="ctr">
+            <a:normAutofit/>
+          </a:bodyPr>
+          <a:lstStyle/>
+          <a:p>
+            <a:pPr indent="0" marL="0">
+              <a:buNone/>
+            </a:pPr>
+            <a:r>
+              <a:rPr lang="en-US" sz="2700" b="1" dirty="0">
+                <a:solidFill>
+                  <a:srgbClr val="003A63"/>
+                </a:solidFill>
+                <a:latin typeface="Aptos Display" pitchFamily="34" charset="0"/>
+                <a:ea typeface="Aptos Display" pitchFamily="34" charset="-122"/>
+                <a:cs typeface="Aptos Display" pitchFamily="34" charset="-120"/>
+              </a:rPr>
+              <a:t>References and Resources</a:t>
+            </a:r>
+            <a:endParaRPr lang="en-US" sz="2700" dirty="0"/>
+          </a:p>
+        </p:txBody>
+      </p:sp>
+      <p:sp>
+        <p:nvSpPr>
+          <p:cNvPr id="10" name="Text 8"/>
+          <p:cNvSpPr/>
+          <p:nvPr/>
+        </p:nvSpPr>
+        <p:spPr>
+          <a:xfrm>
+            <a:off x="868680" y="1417320"/>
+            <a:ext cx="6675120" cy="4434840"/>
+          </a:xfrm>
+          <a:prstGeom prst="rect">
+            <a:avLst/>
+          </a:prstGeom>
+          <a:noFill/>
+          <a:ln/>
+        </p:spPr>
+        <p:txBody>
+          <a:bodyPr wrap="square" lIns="635" tIns="635" rIns="635" bIns="635" rtlCol="0" anchor="t">
+            <a:normAutofit/>
+          </a:bodyPr>
+          <a:lstStyle/>
+          <a:p>
+            <a:r>
+              <a:rPr lang="en-US" sz="1700" dirty="0">
+                <a:solidFill>
+                  <a:srgbClr val="17364A"/>
+                </a:solidFill>
+                <a:latin typeface="Aptos" pitchFamily="34" charset="0"/>
+                <a:ea typeface="Aptos" pitchFamily="34" charset="-122"/>
+                <a:cs typeface="Aptos" pitchFamily="34" charset="-120"/>
+              </a:rPr>
+              <a:t>CDC Evaluation Framework: https://www.cdc.gov/evaluation/</a:t>
+            </a:r>
+            <a:endParaRPr lang="en-US" sz="1700" dirty="0"/>
+          </a:p>
+          <a:p>
+            <a:r>
+              <a:rPr lang="en-US" sz="1700" dirty="0">
+                <a:solidFill>
+                  <a:srgbClr val="17364A"/>
+                </a:solidFill>
+                <a:latin typeface="Aptos" pitchFamily="34" charset="0"/>
+                <a:ea typeface="Aptos" pitchFamily="34" charset="-122"/>
+                <a:cs typeface="Aptos" pitchFamily="34" charset="-120"/>
+              </a:rPr>
+              <a:t>CDC Public Health Data Strategy: https://www.cdc.gov/public-health-data-strategy/php/about/index.html</a:t>
+            </a:r>
+            <a:endParaRPr lang="en-US" sz="1700" dirty="0"/>
+          </a:p>
+          <a:p>
+            <a:r>
+              <a:rPr lang="en-US" sz="1700" dirty="0">
+                <a:solidFill>
+                  <a:srgbClr val="17364A"/>
+                </a:solidFill>
+                <a:latin typeface="Aptos" pitchFamily="34" charset="0"/>
+                <a:ea typeface="Aptos" pitchFamily="34" charset="-122"/>
+                <a:cs typeface="Aptos" pitchFamily="34" charset="-120"/>
+              </a:rPr>
+              <a:t>NIST Artificial Intelligence Risk Management Framework: https://www.nist.gov/itl/ai-risk-management-framework</a:t>
+            </a:r>
+            <a:endParaRPr lang="en-US" sz="1700" dirty="0"/>
+          </a:p>
+          <a:p>
+            <a:r>
+              <a:rPr lang="en-US" sz="1700" dirty="0">
+                <a:solidFill>
+                  <a:srgbClr val="17364A"/>
+                </a:solidFill>
+                <a:latin typeface="Aptos" pitchFamily="34" charset="0"/>
+                <a:ea typeface="Aptos" pitchFamily="34" charset="-122"/>
+                <a:cs typeface="Aptos" pitchFamily="34" charset="-120"/>
+              </a:rPr>
+              <a:t>NIST AI RMF Generative AI Profile:.</a:t>
+            </a:r>
+            <a:endParaRPr lang="en-US" sz="1700" dirty="0"/>
+          </a:p>
+        </p:txBody>
+      </p:sp>
+      <p:sp>
+        <p:nvSpPr>
+          <p:cNvPr id="11" name="Shape 9"/>
+          <p:cNvSpPr/>
+          <p:nvPr/>
+        </p:nvSpPr>
+        <p:spPr>
+          <a:xfrm>
+            <a:off x="7909560" y="1417320"/>
+            <a:ext cx="3154680" cy="1828800"/>
+          </a:xfrm>
+          <a:prstGeom prst="roundRect">
+            <a:avLst>
+              <a:gd name="adj" fmla="val 6000"/>
+            </a:avLst>
+          </a:prstGeom>
+          <a:solidFill>
+            <a:srgbClr val="EEF8ED"/>
+          </a:solidFill>
+          <a:ln w="12700">
+            <a:solidFill>
+              <a:srgbClr val="B9D7E6"/>
+            </a:solidFill>
+            <a:prstDash val="solid"/>
+          </a:ln>
+        </p:spPr>
+      </p:sp>
+      <p:sp>
+        <p:nvSpPr>
+          <p:cNvPr id="12" name="Text 10"/>
+          <p:cNvSpPr/>
+          <p:nvPr/>
+        </p:nvSpPr>
+        <p:spPr>
+          <a:xfrm>
+            <a:off x="8074152" y="1563624"/>
+            <a:ext cx="2825496" cy="201168"/>
+          </a:xfrm>
+          <a:prstGeom prst="rect">
+            <a:avLst/>
+          </a:prstGeom>
+          <a:noFill/>
+          <a:ln/>
+        </p:spPr>
+        <p:txBody>
+          <a:bodyPr wrap="square" lIns="0" tIns="0" rIns="0" bIns="0" rtlCol="0" anchor="ctr"/>
+          <a:lstStyle/>
+          <a:p>
+            <a:pPr indent="0" marL="0">
+              <a:buNone/>
+            </a:pPr>
+            <a:r>
+              <a:rPr lang="en-US" sz="950" b="1" dirty="0">
+                <a:solidFill>
+                  <a:srgbClr val="0068B7"/>
+                </a:solidFill>
+                <a:latin typeface="Aptos" pitchFamily="34" charset="0"/>
+                <a:ea typeface="Aptos" pitchFamily="34" charset="-122"/>
+                <a:cs typeface="Aptos" pitchFamily="34" charset="-120"/>
+              </a:rPr>
+              <a:t>Key idea</a:t>
+            </a:r>
+            <a:endParaRPr lang="en-US" sz="950" dirty="0"/>
+          </a:p>
+        </p:txBody>
+      </p:sp>
+      <p:sp>
+        <p:nvSpPr>
+          <p:cNvPr id="13" name="Text 11"/>
+          <p:cNvSpPr/>
+          <p:nvPr/>
+        </p:nvSpPr>
+        <p:spPr>
+          <a:xfrm>
+            <a:off x="8074152" y="1856232"/>
+            <a:ext cx="2825496" cy="1261872"/>
+          </a:xfrm>
+          <a:prstGeom prst="rect">
+            <a:avLst/>
+          </a:prstGeom>
+          <a:noFill/>
+          <a:ln/>
+        </p:spPr>
+        <p:txBody>
+          <a:bodyPr wrap="square" lIns="0" tIns="0" rIns="0" bIns="0" rtlCol="0" anchor="t">
+            <a:normAutofit/>
+          </a:bodyPr>
+          <a:lstStyle/>
+          <a:p>
+            <a:pPr indent="0" marL="0">
+              <a:buNone/>
+            </a:pPr>
+            <a:r>
+              <a:rPr lang="en-US" sz="1250" dirty="0">
+                <a:solidFill>
+                  <a:srgbClr val="17364A"/>
+                </a:solidFill>
+                <a:latin typeface="Aptos" pitchFamily="34" charset="0"/>
+                <a:ea typeface="Aptos" pitchFamily="34" charset="-122"/>
+                <a:cs typeface="Aptos" pitchFamily="34" charset="-120"/>
+              </a:rPr>
+              <a:t>CDC Evaluation Framework: https://www.cdc.gov/evaluation/</a:t>
+            </a:r>
+            <a:endParaRPr lang="en-US" sz="1250" dirty="0"/>
+          </a:p>
+        </p:txBody>
+      </p:sp>
+      <p:sp>
+        <p:nvSpPr>
+          <p:cNvPr id="14" name="Shape 12"/>
+          <p:cNvSpPr/>
+          <p:nvPr/>
+        </p:nvSpPr>
+        <p:spPr>
+          <a:xfrm>
+            <a:off x="7909560" y="3520440"/>
+            <a:ext cx="3154680" cy="1737360"/>
+          </a:xfrm>
+          <a:prstGeom prst="roundRect">
+            <a:avLst>
+              <a:gd name="adj" fmla="val 6316"/>
+            </a:avLst>
+          </a:prstGeom>
+          <a:solidFill>
+            <a:srgbClr val="EAF6F8"/>
+          </a:solidFill>
+          <a:ln w="12700">
+            <a:solidFill>
+              <a:srgbClr val="B9D7E6"/>
+            </a:solidFill>
+            <a:prstDash val="solid"/>
+          </a:ln>
+        </p:spPr>
+      </p:sp>
+      <p:sp>
+        <p:nvSpPr>
+          <p:cNvPr id="15" name="Text 13"/>
+          <p:cNvSpPr/>
+          <p:nvPr/>
+        </p:nvSpPr>
+        <p:spPr>
+          <a:xfrm>
+            <a:off x="8074152" y="3666744"/>
+            <a:ext cx="2825496" cy="201168"/>
+          </a:xfrm>
+          <a:prstGeom prst="rect">
+            <a:avLst/>
+          </a:prstGeom>
+          <a:noFill/>
+          <a:ln/>
+        </p:spPr>
+        <p:txBody>
+          <a:bodyPr wrap="square" lIns="0" tIns="0" rIns="0" bIns="0" rtlCol="0" anchor="ctr"/>
+          <a:lstStyle/>
+          <a:p>
+            <a:pPr indent="0" marL="0">
+              <a:buNone/>
+            </a:pPr>
+            <a:r>
+              <a:rPr lang="en-US" sz="950" b="1" dirty="0">
+                <a:solidFill>
+                  <a:srgbClr val="0068B7"/>
+                </a:solidFill>
+                <a:latin typeface="Aptos" pitchFamily="34" charset="0"/>
+                <a:ea typeface="Aptos" pitchFamily="34" charset="-122"/>
+                <a:cs typeface="Aptos" pitchFamily="34" charset="-120"/>
+              </a:rPr>
+              <a:t>Use this for</a:t>
+            </a:r>
+            <a:endParaRPr lang="en-US" sz="950" dirty="0"/>
+          </a:p>
+        </p:txBody>
+      </p:sp>
+      <p:sp>
+        <p:nvSpPr>
+          <p:cNvPr id="16" name="Text 14"/>
+          <p:cNvSpPr/>
+          <p:nvPr/>
+        </p:nvSpPr>
+        <p:spPr>
+          <a:xfrm>
+            <a:off x="8074152" y="3959352"/>
+            <a:ext cx="2825496" cy="1170432"/>
+          </a:xfrm>
+          <a:prstGeom prst="rect">
+            <a:avLst/>
+          </a:prstGeom>
+          <a:noFill/>
+          <a:ln/>
+        </p:spPr>
+        <p:txBody>
+          <a:bodyPr wrap="square" lIns="0" tIns="0" rIns="0" bIns="0" rtlCol="0" anchor="t">
+            <a:normAutofit/>
+          </a:bodyPr>
+          <a:lstStyle/>
+          <a:p>
+            <a:pPr indent="0" marL="0">
+              <a:buNone/>
+            </a:pPr>
+            <a:r>
+              <a:rPr lang="en-US" sz="1250" dirty="0">
+                <a:solidFill>
+                  <a:srgbClr val="17364A"/>
+                </a:solidFill>
+                <a:latin typeface="Aptos" pitchFamily="34" charset="0"/>
+                <a:ea typeface="Aptos" pitchFamily="34" charset="-122"/>
+                <a:cs typeface="Aptos" pitchFamily="34" charset="-120"/>
+              </a:rPr>
+              <a:t>Connect the concept to public health decisions, safeguards, documentation, or implementation work.</a:t>
+            </a:r>
+            <a:endParaRPr lang="en-US" sz="1250" dirty="0"/>
           </a:p>
         </p:txBody>
       </p:sp>
@@ -5412,7 +9813,32 @@
       </p:sp>
       <p:sp>
         <p:nvSpPr>
-          <p:cNvPr id="3" name="Text 1"/>
+          <p:cNvPr id="3" name="Shape 1"/>
+          <p:cNvSpPr/>
+          <p:nvPr/>
+        </p:nvSpPr>
+        <p:spPr>
+          <a:xfrm>
+            <a:off x="0" y="164592"/>
+            <a:ext cx="146304" cy="6693408"/>
+          </a:xfrm>
+          <a:prstGeom prst="rect">
+            <a:avLst/>
+          </a:prstGeom>
+          <a:solidFill>
+            <a:srgbClr val="2F8A28"/>
+          </a:solidFill>
+          <a:ln w="12700">
+            <a:solidFill>
+              <a:srgbClr val="2F8A28"/>
+            </a:solidFill>
+            <a:prstDash val="solid"/>
+          </a:ln>
+        </p:spPr>
+      </p:sp>
+      <p:sp>
+        <p:nvSpPr>
+          <p:cNvPr id="4" name="Text 2"/>
           <p:cNvSpPr/>
           <p:nvPr/>
         </p:nvSpPr>
@@ -5451,7 +9877,7 @@
       </p:sp>
       <p:sp>
         <p:nvSpPr>
-          <p:cNvPr id="4" name="Text 2"/>
+          <p:cNvPr id="5" name="Text 3"/>
           <p:cNvSpPr/>
           <p:nvPr/>
         </p:nvSpPr>
@@ -5490,7 +9916,7 @@
       </p:sp>
       <p:sp>
         <p:nvSpPr>
-          <p:cNvPr id="5" name="Text 3"/>
+          <p:cNvPr id="6" name="Text 4"/>
           <p:cNvSpPr/>
           <p:nvPr/>
         </p:nvSpPr>
@@ -5529,7 +9955,7 @@
       </p:sp>
       <p:sp>
         <p:nvSpPr>
-          <p:cNvPr id="6" name="Text 4"/>
+          <p:cNvPr id="7" name="Text 5"/>
           <p:cNvSpPr/>
           <p:nvPr/>
         </p:nvSpPr>
@@ -5562,7 +9988,7 @@
                 <a:ea typeface="Aptos Display" pitchFamily="34" charset="-122"/>
                 <a:cs typeface="Aptos Display" pitchFamily="34" charset="-120"/>
               </a:rPr>
-              <a:t>Learning Objectives</a:t>
+              <a:t>How this module connects to the playbook</a:t>
             </a:r>
             <a:endParaRPr lang="en-US" sz="2700" dirty="0"/>
           </a:p>
@@ -5570,14 +9996,14 @@
       </p:sp>
       <p:sp>
         <p:nvSpPr>
-          <p:cNvPr id="7" name="Text 5"/>
-          <p:cNvSpPr/>
-          <p:nvPr/>
-        </p:nvSpPr>
-        <p:spPr>
-          <a:xfrm>
-            <a:off x="822960" y="1325880"/>
-            <a:ext cx="10378440" cy="4800600"/>
+          <p:cNvPr id="8" name="Text 6"/>
+          <p:cNvSpPr/>
+          <p:nvPr/>
+        </p:nvSpPr>
+        <p:spPr>
+          <a:xfrm>
+            <a:off x="868680" y="1417320"/>
+            <a:ext cx="6903720" cy="4480560"/>
           </a:xfrm>
           <a:prstGeom prst="rect">
             <a:avLst/>
@@ -5592,7 +10018,7 @@
           <a:lstStyle/>
           <a:p>
             <a:r>
-              <a:rPr lang="en-US" sz="1450" dirty="0">
+              <a:rPr lang="en-US" sz="1540" dirty="0">
                 <a:solidFill>
                   <a:srgbClr val="17364A"/>
                 </a:solidFill>
@@ -5600,13 +10026,13 @@
                 <a:ea typeface="Aptos" pitchFamily="34" charset="-122"/>
                 <a:cs typeface="Aptos" pitchFamily="34" charset="-120"/>
               </a:rPr>
-              <a:t>Explain the purpose of measuring ai value, performance, and operational impact in public health AI work.</a:t>
-            </a:r>
-            <a:endParaRPr lang="en-US" sz="1450" dirty="0"/>
-          </a:p>
-          <a:p>
-            <a:r>
-              <a:rPr lang="en-US" sz="1450" dirty="0">
+              <a:t>Play 11: Build and Deploy AI Solutions - This lesson informs Play 11 by helping learners connect the lesson topic to build and deploy.</a:t>
+            </a:r>
+            <a:endParaRPr lang="en-US" sz="1540" dirty="0"/>
+          </a:p>
+          <a:p>
+            <a:r>
+              <a:rPr lang="en-US" sz="1540" dirty="0">
                 <a:solidFill>
                   <a:srgbClr val="17364A"/>
                 </a:solidFill>
@@ -5614,13 +10040,13 @@
                 <a:ea typeface="Aptos" pitchFamily="34" charset="-122"/>
                 <a:cs typeface="Aptos" pitchFamily="34" charset="-120"/>
               </a:rPr>
-              <a:t>Identify the technical, operational, privacy, security, equity, and governance issues associated with the topic.</a:t>
-            </a:r>
-            <a:endParaRPr lang="en-US" sz="1450" dirty="0"/>
-          </a:p>
-          <a:p>
-            <a:r>
-              <a:rPr lang="en-US" sz="1450" dirty="0">
+              <a:t>Play 2: Readiness Assessment - This lesson informs Play 2 by helping learners connect the lesson topic to readiness assessment work.</a:t>
+            </a:r>
+            <a:endParaRPr lang="en-US" sz="1540" dirty="0"/>
+          </a:p>
+          <a:p>
+            <a:r>
+              <a:rPr lang="en-US" sz="1540" dirty="0">
                 <a:solidFill>
                   <a:srgbClr val="17364A"/>
                 </a:solidFill>
@@ -5628,13 +10054,13 @@
                 <a:ea typeface="Aptos" pitchFamily="34" charset="-122"/>
                 <a:cs typeface="Aptos" pitchFamily="34" charset="-120"/>
               </a:rPr>
-              <a:t>Apply the topic to a real or realistic public health workflow, system, or implementation scenario.</a:t>
-            </a:r>
-            <a:endParaRPr lang="en-US" sz="1450" dirty="0"/>
-          </a:p>
-          <a:p>
-            <a:r>
-              <a:rPr lang="en-US" sz="1450" dirty="0">
+              <a:t>Play 7: Prioritize Use Cases - This lesson informs Play 7 by helping learners connect the lesson topic to prioritize use cases work.</a:t>
+            </a:r>
+            <a:endParaRPr lang="en-US" sz="1540" dirty="0"/>
+          </a:p>
+          <a:p>
+            <a:r>
+              <a:rPr lang="en-US" sz="1540" dirty="0">
                 <a:solidFill>
                   <a:srgbClr val="17364A"/>
                 </a:solidFill>
@@ -5642,13 +10068,106 @@
                 <a:ea typeface="Aptos" pitchFamily="34" charset="-122"/>
                 <a:cs typeface="Aptos" pitchFamily="34" charset="-120"/>
               </a:rPr>
-              <a:t>Recognize common failure modes that can affect safety, accuracy, trust, workflow fit, or sustainability.</a:t>
-            </a:r>
-            <a:endParaRPr lang="en-US" sz="1450" dirty="0"/>
-          </a:p>
-          <a:p>
-            <a:r>
-              <a:rPr lang="en-US" sz="1450" dirty="0">
+              <a:t>Play 13: Monitor and Evaluate AI Systems - This lesson informs Play 13 by helping learners connect the lesson topic to monitor and.</a:t>
+            </a:r>
+            <a:endParaRPr lang="en-US" sz="1540" dirty="0"/>
+          </a:p>
+        </p:txBody>
+      </p:sp>
+      <p:sp>
+        <p:nvSpPr>
+          <p:cNvPr id="9" name="Shape 7"/>
+          <p:cNvSpPr/>
+          <p:nvPr/>
+        </p:nvSpPr>
+        <p:spPr>
+          <a:xfrm>
+            <a:off x="8046720" y="1417320"/>
+            <a:ext cx="3063240" cy="2103120"/>
+          </a:xfrm>
+          <a:prstGeom prst="roundRect">
+            <a:avLst>
+              <a:gd name="adj" fmla="val 5217"/>
+            </a:avLst>
+          </a:prstGeom>
+          <a:solidFill>
+            <a:srgbClr val="EEF8ED"/>
+          </a:solidFill>
+          <a:ln w="12700">
+            <a:solidFill>
+              <a:srgbClr val="B9D7E6"/>
+            </a:solidFill>
+            <a:prstDash val="solid"/>
+          </a:ln>
+        </p:spPr>
+      </p:sp>
+      <p:sp>
+        <p:nvSpPr>
+          <p:cNvPr id="10" name="Text 8"/>
+          <p:cNvSpPr/>
+          <p:nvPr/>
+        </p:nvSpPr>
+        <p:spPr>
+          <a:xfrm>
+            <a:off x="8211312" y="1563624"/>
+            <a:ext cx="2734056" cy="201168"/>
+          </a:xfrm>
+          <a:prstGeom prst="rect">
+            <a:avLst/>
+          </a:prstGeom>
+          <a:noFill/>
+          <a:ln/>
+        </p:spPr>
+        <p:txBody>
+          <a:bodyPr wrap="square" lIns="0" tIns="0" rIns="0" bIns="0" rtlCol="0" anchor="ctr"/>
+          <a:lstStyle/>
+          <a:p>
+            <a:pPr indent="0" marL="0">
+              <a:buNone/>
+            </a:pPr>
+            <a:r>
+              <a:rPr lang="en-US" sz="950" b="1" dirty="0">
+                <a:solidFill>
+                  <a:srgbClr val="0068B7"/>
+                </a:solidFill>
+                <a:latin typeface="Aptos" pitchFamily="34" charset="0"/>
+                <a:ea typeface="Aptos" pitchFamily="34" charset="-122"/>
+                <a:cs typeface="Aptos" pitchFamily="34" charset="-120"/>
+              </a:rPr>
+              <a:t>Apply the lesson</a:t>
+            </a:r>
+            <a:endParaRPr lang="en-US" sz="950" dirty="0"/>
+          </a:p>
+        </p:txBody>
+      </p:sp>
+      <p:sp>
+        <p:nvSpPr>
+          <p:cNvPr id="11" name="Text 9"/>
+          <p:cNvSpPr/>
+          <p:nvPr/>
+        </p:nvSpPr>
+        <p:spPr>
+          <a:xfrm>
+            <a:off x="8211312" y="1856232"/>
+            <a:ext cx="2734056" cy="1536192"/>
+          </a:xfrm>
+          <a:prstGeom prst="rect">
+            <a:avLst/>
+          </a:prstGeom>
+          <a:noFill/>
+          <a:ln/>
+        </p:spPr>
+        <p:txBody>
+          <a:bodyPr wrap="square" lIns="0" tIns="0" rIns="0" bIns="0" rtlCol="0" anchor="t">
+            <a:normAutofit/>
+          </a:bodyPr>
+          <a:lstStyle/>
+          <a:p>
+            <a:pPr indent="0" marL="0">
+              <a:buNone/>
+            </a:pPr>
+            <a:r>
+              <a:rPr lang="en-US" sz="1250" dirty="0">
                 <a:solidFill>
                   <a:srgbClr val="17364A"/>
                 </a:solidFill>
@@ -5656,9 +10175,116 @@
                 <a:ea typeface="Aptos" pitchFamily="34" charset="-122"/>
                 <a:cs typeface="Aptos" pitchFamily="34" charset="-120"/>
               </a:rPr>
-              <a:t>Identify practical guardrails that should be documented before implementation.</a:t>
-            </a:r>
-            <a:endParaRPr lang="en-US" sz="1450" dirty="0"/>
+              <a:t>Use the related plays to identify decisions, participants, timing, approvals, and documentation needed for responsible implementation.</a:t>
+            </a:r>
+            <a:endParaRPr lang="en-US" sz="1250" dirty="0"/>
+          </a:p>
+        </p:txBody>
+      </p:sp>
+      <p:sp>
+        <p:nvSpPr>
+          <p:cNvPr id="12" name="Shape 10"/>
+          <p:cNvSpPr/>
+          <p:nvPr/>
+        </p:nvSpPr>
+        <p:spPr>
+          <a:xfrm>
+            <a:off x="8046720" y="3794760"/>
+            <a:ext cx="3063240" cy="1508760"/>
+          </a:xfrm>
+          <a:prstGeom prst="roundRect">
+            <a:avLst>
+              <a:gd name="adj" fmla="val 7273"/>
+            </a:avLst>
+          </a:prstGeom>
+          <a:solidFill>
+            <a:srgbClr val="FFF4D9"/>
+          </a:solidFill>
+          <a:ln w="12700">
+            <a:solidFill>
+              <a:srgbClr val="B9D7E6"/>
+            </a:solidFill>
+            <a:prstDash val="solid"/>
+          </a:ln>
+        </p:spPr>
+      </p:sp>
+      <p:sp>
+        <p:nvSpPr>
+          <p:cNvPr id="13" name="Text 11"/>
+          <p:cNvSpPr/>
+          <p:nvPr/>
+        </p:nvSpPr>
+        <p:spPr>
+          <a:xfrm>
+            <a:off x="8211312" y="3941064"/>
+            <a:ext cx="2734056" cy="201168"/>
+          </a:xfrm>
+          <a:prstGeom prst="rect">
+            <a:avLst/>
+          </a:prstGeom>
+          <a:noFill/>
+          <a:ln/>
+        </p:spPr>
+        <p:txBody>
+          <a:bodyPr wrap="square" lIns="0" tIns="0" rIns="0" bIns="0" rtlCol="0" anchor="ctr"/>
+          <a:lstStyle/>
+          <a:p>
+            <a:pPr indent="0" marL="0">
+              <a:buNone/>
+            </a:pPr>
+            <a:r>
+              <a:rPr lang="en-US" sz="950" b="1" dirty="0">
+                <a:solidFill>
+                  <a:srgbClr val="0068B7"/>
+                </a:solidFill>
+                <a:latin typeface="Aptos" pitchFamily="34" charset="0"/>
+                <a:ea typeface="Aptos" pitchFamily="34" charset="-122"/>
+                <a:cs typeface="Aptos" pitchFamily="34" charset="-120"/>
+              </a:rPr>
+              <a:t>Keep in mind</a:t>
+            </a:r>
+            <a:endParaRPr lang="en-US" sz="950" dirty="0"/>
+          </a:p>
+        </p:txBody>
+      </p:sp>
+      <p:sp>
+        <p:nvSpPr>
+          <p:cNvPr id="14" name="Text 12"/>
+          <p:cNvSpPr/>
+          <p:nvPr/>
+        </p:nvSpPr>
+        <p:spPr>
+          <a:xfrm>
+            <a:off x="8211312" y="4233672"/>
+            <a:ext cx="2734056" cy="941832"/>
+          </a:xfrm>
+          <a:prstGeom prst="rect">
+            <a:avLst/>
+          </a:prstGeom>
+          <a:noFill/>
+          <a:ln/>
+        </p:spPr>
+        <p:txBody>
+          <a:bodyPr wrap="square" lIns="0" tIns="0" rIns="0" bIns="0" rtlCol="0" anchor="t">
+            <a:normAutofit/>
+          </a:bodyPr>
+          <a:lstStyle/>
+          <a:p>
+            <a:pPr indent="0" marL="0">
+              <a:buNone/>
+            </a:pPr>
+            <a:r>
+              <a:rPr lang="en-US" sz="1250" dirty="0">
+                <a:solidFill>
+                  <a:srgbClr val="17364A"/>
+                </a:solidFill>
+                <a:latin typeface="Aptos" pitchFamily="34" charset="0"/>
+                <a:ea typeface="Aptos" pitchFamily="34" charset="-122"/>
+                <a:cs typeface="Aptos" pitchFamily="34" charset="-120"/>
+              </a:rPr>
+              <a:t>The playbook connection helps turn training into agency work, not just individual knowledge.</a:t>
+            </a:r>
+            <a:endParaRPr lang="en-US" sz="1250" dirty="0"/>
           </a:p>
         </p:txBody>
       </p:sp>
@@ -5721,7 +10347,32 @@
       </p:sp>
       <p:sp>
         <p:nvSpPr>
-          <p:cNvPr id="3" name="Text 1"/>
+          <p:cNvPr id="3" name="Shape 1"/>
+          <p:cNvSpPr/>
+          <p:nvPr/>
+        </p:nvSpPr>
+        <p:spPr>
+          <a:xfrm>
+            <a:off x="0" y="164592"/>
+            <a:ext cx="146304" cy="6693408"/>
+          </a:xfrm>
+          <a:prstGeom prst="rect">
+            <a:avLst/>
+          </a:prstGeom>
+          <a:solidFill>
+            <a:srgbClr val="2F8A28"/>
+          </a:solidFill>
+          <a:ln w="12700">
+            <a:solidFill>
+              <a:srgbClr val="2F8A28"/>
+            </a:solidFill>
+            <a:prstDash val="solid"/>
+          </a:ln>
+        </p:spPr>
+      </p:sp>
+      <p:sp>
+        <p:nvSpPr>
+          <p:cNvPr id="4" name="Text 2"/>
           <p:cNvSpPr/>
           <p:nvPr/>
         </p:nvSpPr>
@@ -5760,7 +10411,7 @@
       </p:sp>
       <p:sp>
         <p:nvSpPr>
-          <p:cNvPr id="4" name="Text 2"/>
+          <p:cNvPr id="5" name="Text 3"/>
           <p:cNvSpPr/>
           <p:nvPr/>
         </p:nvSpPr>
@@ -5799,7 +10450,7 @@
       </p:sp>
       <p:sp>
         <p:nvSpPr>
-          <p:cNvPr id="5" name="Text 3"/>
+          <p:cNvPr id="6" name="Text 4"/>
           <p:cNvSpPr/>
           <p:nvPr/>
         </p:nvSpPr>
@@ -5838,7 +10489,7 @@
       </p:sp>
       <p:sp>
         <p:nvSpPr>
-          <p:cNvPr id="6" name="Text 4"/>
+          <p:cNvPr id="7" name="Text 5"/>
           <p:cNvSpPr/>
           <p:nvPr/>
         </p:nvSpPr>
@@ -5871,7 +10522,7 @@
                 <a:ea typeface="Aptos Display" pitchFamily="34" charset="-122"/>
                 <a:cs typeface="Aptos Display" pitchFamily="34" charset="-120"/>
               </a:rPr>
-              <a:t>Learning Objectives Continued</a:t>
+              <a:t>Related toolkit resources</a:t>
             </a:r>
             <a:endParaRPr lang="en-US" sz="2700" dirty="0"/>
           </a:p>
@@ -5879,14 +10530,14 @@
       </p:sp>
       <p:sp>
         <p:nvSpPr>
-          <p:cNvPr id="7" name="Text 5"/>
-          <p:cNvSpPr/>
-          <p:nvPr/>
-        </p:nvSpPr>
-        <p:spPr>
-          <a:xfrm>
-            <a:off x="822960" y="1325880"/>
-            <a:ext cx="10378440" cy="4800600"/>
+          <p:cNvPr id="8" name="Text 6"/>
+          <p:cNvSpPr/>
+          <p:nvPr/>
+        </p:nvSpPr>
+        <p:spPr>
+          <a:xfrm>
+            <a:off x="868680" y="1417320"/>
+            <a:ext cx="6903720" cy="4480560"/>
           </a:xfrm>
           <a:prstGeom prst="rect">
             <a:avLst/>
@@ -5901,7 +10552,7 @@
           <a:lstStyle/>
           <a:p>
             <a:r>
-              <a:rPr lang="en-US" sz="1450" dirty="0">
+              <a:rPr lang="en-US" sz="1460" dirty="0">
                 <a:solidFill>
                   <a:srgbClr val="17364A"/>
                 </a:solidFill>
@@ -5909,9 +10560,279 @@
                 <a:ea typeface="Aptos" pitchFamily="34" charset="-122"/>
                 <a:cs typeface="Aptos" pitchFamily="34" charset="-120"/>
               </a:rPr>
-              <a:t>Produce a AI value and impact measurement plan that can support readiness assessment, governance review, procurement, implementation, or monitoring.</a:t>
-            </a:r>
-            <a:endParaRPr lang="en-US" sz="1450" dirty="0"/>
+              <a:t>Tool 4: AI Policy Landscape Scan (Worksheet) - Use AI Policy Landscape Scan to translate this lesson into a documented public health.</a:t>
+            </a:r>
+            <a:endParaRPr lang="en-US" sz="1460" dirty="0"/>
+          </a:p>
+          <a:p>
+            <a:r>
+              <a:rPr lang="en-US" sz="1460" dirty="0">
+                <a:solidFill>
+                  <a:srgbClr val="17364A"/>
+                </a:solidFill>
+                <a:latin typeface="Aptos" pitchFamily="34" charset="0"/>
+                <a:ea typeface="Aptos" pitchFamily="34" charset="-122"/>
+                <a:cs typeface="Aptos" pitchFamily="34" charset="-120"/>
+              </a:rPr>
+              <a:t>Tool 5: AI Environmental and Resource Impact Review (Checklist) - Use this tool to complete or strengthen the practical exercise for.</a:t>
+            </a:r>
+            <a:endParaRPr lang="en-US" sz="1460" dirty="0"/>
+          </a:p>
+          <a:p>
+            <a:r>
+              <a:rPr lang="en-US" sz="1460" dirty="0">
+                <a:solidFill>
+                  <a:srgbClr val="17364A"/>
+                </a:solidFill>
+                <a:latin typeface="Aptos" pitchFamily="34" charset="0"/>
+                <a:ea typeface="Aptos" pitchFamily="34" charset="-122"/>
+                <a:cs typeface="Aptos" pitchFamily="34" charset="-120"/>
+              </a:rPr>
+              <a:t>Tool 6: Human-Centered AI Decision Rule Checklist (Checklist) - Use Human-Centered AI Decision Rule Checklist to translate this.</a:t>
+            </a:r>
+            <a:endParaRPr lang="en-US" sz="1460" dirty="0"/>
+          </a:p>
+          <a:p>
+            <a:r>
+              <a:rPr lang="en-US" sz="1460" dirty="0">
+                <a:solidFill>
+                  <a:srgbClr val="17364A"/>
+                </a:solidFill>
+                <a:latin typeface="Aptos" pitchFamily="34" charset="0"/>
+                <a:ea typeface="Aptos" pitchFamily="34" charset="-122"/>
+                <a:cs typeface="Aptos" pitchFamily="34" charset="-120"/>
+              </a:rPr>
+              <a:t>Tool 8: AI Project Charter (Planning) - Use AI Project Charter to translate this lesson into a documented public health AI planning,.</a:t>
+            </a:r>
+            <a:endParaRPr lang="en-US" sz="1460" dirty="0"/>
+          </a:p>
+          <a:p>
+            <a:r>
+              <a:rPr lang="en-US" sz="1460" dirty="0">
+                <a:solidFill>
+                  <a:srgbClr val="17364A"/>
+                </a:solidFill>
+                <a:latin typeface="Aptos" pitchFamily="34" charset="0"/>
+                <a:ea typeface="Aptos" pitchFamily="34" charset="-122"/>
+                <a:cs typeface="Aptos" pitchFamily="34" charset="-120"/>
+              </a:rPr>
+              <a:t>Tool 9: Data Quality Assessment Checklist (Checklist) - Use this tool to complete or strengthen the practical exercise for the module.</a:t>
+            </a:r>
+            <a:endParaRPr lang="en-US" sz="1460" dirty="0"/>
+          </a:p>
+        </p:txBody>
+      </p:sp>
+      <p:sp>
+        <p:nvSpPr>
+          <p:cNvPr id="9" name="Shape 7"/>
+          <p:cNvSpPr/>
+          <p:nvPr/>
+        </p:nvSpPr>
+        <p:spPr>
+          <a:xfrm>
+            <a:off x="8046720" y="1417320"/>
+            <a:ext cx="3063240" cy="2103120"/>
+          </a:xfrm>
+          <a:prstGeom prst="roundRect">
+            <a:avLst>
+              <a:gd name="adj" fmla="val 5217"/>
+            </a:avLst>
+          </a:prstGeom>
+          <a:solidFill>
+            <a:srgbClr val="EAF6F8"/>
+          </a:solidFill>
+          <a:ln w="12700">
+            <a:solidFill>
+              <a:srgbClr val="B9D7E6"/>
+            </a:solidFill>
+            <a:prstDash val="solid"/>
+          </a:ln>
+        </p:spPr>
+      </p:sp>
+      <p:sp>
+        <p:nvSpPr>
+          <p:cNvPr id="10" name="Text 8"/>
+          <p:cNvSpPr/>
+          <p:nvPr/>
+        </p:nvSpPr>
+        <p:spPr>
+          <a:xfrm>
+            <a:off x="8211312" y="1563624"/>
+            <a:ext cx="2734056" cy="201168"/>
+          </a:xfrm>
+          <a:prstGeom prst="rect">
+            <a:avLst/>
+          </a:prstGeom>
+          <a:noFill/>
+          <a:ln/>
+        </p:spPr>
+        <p:txBody>
+          <a:bodyPr wrap="square" lIns="0" tIns="0" rIns="0" bIns="0" rtlCol="0" anchor="ctr"/>
+          <a:lstStyle/>
+          <a:p>
+            <a:pPr indent="0" marL="0">
+              <a:buNone/>
+            </a:pPr>
+            <a:r>
+              <a:rPr lang="en-US" sz="950" b="1" dirty="0">
+                <a:solidFill>
+                  <a:srgbClr val="0068B7"/>
+                </a:solidFill>
+                <a:latin typeface="Aptos" pitchFamily="34" charset="0"/>
+                <a:ea typeface="Aptos" pitchFamily="34" charset="-122"/>
+                <a:cs typeface="Aptos" pitchFamily="34" charset="-120"/>
+              </a:rPr>
+              <a:t>Use the tools</a:t>
+            </a:r>
+            <a:endParaRPr lang="en-US" sz="950" dirty="0"/>
+          </a:p>
+        </p:txBody>
+      </p:sp>
+      <p:sp>
+        <p:nvSpPr>
+          <p:cNvPr id="11" name="Text 9"/>
+          <p:cNvSpPr/>
+          <p:nvPr/>
+        </p:nvSpPr>
+        <p:spPr>
+          <a:xfrm>
+            <a:off x="8211312" y="1856232"/>
+            <a:ext cx="2734056" cy="1536192"/>
+          </a:xfrm>
+          <a:prstGeom prst="rect">
+            <a:avLst/>
+          </a:prstGeom>
+          <a:noFill/>
+          <a:ln/>
+        </p:spPr>
+        <p:txBody>
+          <a:bodyPr wrap="square" lIns="0" tIns="0" rIns="0" bIns="0" rtlCol="0" anchor="t">
+            <a:normAutofit/>
+          </a:bodyPr>
+          <a:lstStyle/>
+          <a:p>
+            <a:pPr indent="0" marL="0">
+              <a:buNone/>
+            </a:pPr>
+            <a:r>
+              <a:rPr lang="en-US" sz="1250" dirty="0">
+                <a:solidFill>
+                  <a:srgbClr val="17364A"/>
+                </a:solidFill>
+                <a:latin typeface="Aptos" pitchFamily="34" charset="0"/>
+                <a:ea typeface="Aptos" pitchFamily="34" charset="-122"/>
+                <a:cs typeface="Aptos" pitchFamily="34" charset="-120"/>
+              </a:rPr>
+              <a:t>Use linked tools when your department needs a structured worksheet, template, checklist, review process, or documentation artifact.</a:t>
+            </a:r>
+            <a:endParaRPr lang="en-US" sz="1250" dirty="0"/>
+          </a:p>
+        </p:txBody>
+      </p:sp>
+      <p:sp>
+        <p:nvSpPr>
+          <p:cNvPr id="12" name="Shape 10"/>
+          <p:cNvSpPr/>
+          <p:nvPr/>
+        </p:nvSpPr>
+        <p:spPr>
+          <a:xfrm>
+            <a:off x="8046720" y="3794760"/>
+            <a:ext cx="3063240" cy="1508760"/>
+          </a:xfrm>
+          <a:prstGeom prst="roundRect">
+            <a:avLst>
+              <a:gd name="adj" fmla="val 7273"/>
+            </a:avLst>
+          </a:prstGeom>
+          <a:solidFill>
+            <a:srgbClr val="EEF8ED"/>
+          </a:solidFill>
+          <a:ln w="12700">
+            <a:solidFill>
+              <a:srgbClr val="B9D7E6"/>
+            </a:solidFill>
+            <a:prstDash val="solid"/>
+          </a:ln>
+        </p:spPr>
+      </p:sp>
+      <p:sp>
+        <p:nvSpPr>
+          <p:cNvPr id="13" name="Text 11"/>
+          <p:cNvSpPr/>
+          <p:nvPr/>
+        </p:nvSpPr>
+        <p:spPr>
+          <a:xfrm>
+            <a:off x="8211312" y="3941064"/>
+            <a:ext cx="2734056" cy="201168"/>
+          </a:xfrm>
+          <a:prstGeom prst="rect">
+            <a:avLst/>
+          </a:prstGeom>
+          <a:noFill/>
+          <a:ln/>
+        </p:spPr>
+        <p:txBody>
+          <a:bodyPr wrap="square" lIns="0" tIns="0" rIns="0" bIns="0" rtlCol="0" anchor="ctr"/>
+          <a:lstStyle/>
+          <a:p>
+            <a:pPr indent="0" marL="0">
+              <a:buNone/>
+            </a:pPr>
+            <a:r>
+              <a:rPr lang="en-US" sz="950" b="1" dirty="0">
+                <a:solidFill>
+                  <a:srgbClr val="0068B7"/>
+                </a:solidFill>
+                <a:latin typeface="Aptos" pitchFamily="34" charset="0"/>
+                <a:ea typeface="Aptos" pitchFamily="34" charset="-122"/>
+                <a:cs typeface="Aptos" pitchFamily="34" charset="-120"/>
+              </a:rPr>
+              <a:t>Avoid duplication</a:t>
+            </a:r>
+            <a:endParaRPr lang="en-US" sz="950" dirty="0"/>
+          </a:p>
+        </p:txBody>
+      </p:sp>
+      <p:sp>
+        <p:nvSpPr>
+          <p:cNvPr id="14" name="Text 12"/>
+          <p:cNvSpPr/>
+          <p:nvPr/>
+        </p:nvSpPr>
+        <p:spPr>
+          <a:xfrm>
+            <a:off x="8211312" y="4233672"/>
+            <a:ext cx="2734056" cy="941832"/>
+          </a:xfrm>
+          <a:prstGeom prst="rect">
+            <a:avLst/>
+          </a:prstGeom>
+          <a:noFill/>
+          <a:ln/>
+        </p:spPr>
+        <p:txBody>
+          <a:bodyPr wrap="square" lIns="0" tIns="0" rIns="0" bIns="0" rtlCol="0" anchor="t">
+            <a:normAutofit/>
+          </a:bodyPr>
+          <a:lstStyle/>
+          <a:p>
+            <a:pPr indent="0" marL="0">
+              <a:buNone/>
+            </a:pPr>
+            <a:r>
+              <a:rPr lang="en-US" sz="1250" dirty="0">
+                <a:solidFill>
+                  <a:srgbClr val="17364A"/>
+                </a:solidFill>
+                <a:latin typeface="Aptos" pitchFamily="34" charset="0"/>
+                <a:ea typeface="Aptos" pitchFamily="34" charset="-122"/>
+                <a:cs typeface="Aptos" pitchFamily="34" charset="-120"/>
+              </a:rPr>
+              <a:t>If your department already has a strong equivalent tool, adapt or use the existing process instead of recreating it.</a:t>
+            </a:r>
+            <a:endParaRPr lang="en-US" sz="1250" dirty="0"/>
           </a:p>
         </p:txBody>
       </p:sp>
@@ -5974,7 +10895,32 @@
       </p:sp>
       <p:sp>
         <p:nvSpPr>
-          <p:cNvPr id="3" name="Text 1"/>
+          <p:cNvPr id="3" name="Shape 1"/>
+          <p:cNvSpPr/>
+          <p:nvPr/>
+        </p:nvSpPr>
+        <p:spPr>
+          <a:xfrm>
+            <a:off x="0" y="164592"/>
+            <a:ext cx="146304" cy="6693408"/>
+          </a:xfrm>
+          <a:prstGeom prst="rect">
+            <a:avLst/>
+          </a:prstGeom>
+          <a:solidFill>
+            <a:srgbClr val="2F8A28"/>
+          </a:solidFill>
+          <a:ln w="12700">
+            <a:solidFill>
+              <a:srgbClr val="2F8A28"/>
+            </a:solidFill>
+            <a:prstDash val="solid"/>
+          </a:ln>
+        </p:spPr>
+      </p:sp>
+      <p:sp>
+        <p:nvSpPr>
+          <p:cNvPr id="4" name="Text 2"/>
           <p:cNvSpPr/>
           <p:nvPr/>
         </p:nvSpPr>
@@ -6013,7 +10959,7 @@
       </p:sp>
       <p:sp>
         <p:nvSpPr>
-          <p:cNvPr id="4" name="Text 2"/>
+          <p:cNvPr id="5" name="Text 3"/>
           <p:cNvSpPr/>
           <p:nvPr/>
         </p:nvSpPr>
@@ -6052,7 +10998,7 @@
       </p:sp>
       <p:sp>
         <p:nvSpPr>
-          <p:cNvPr id="5" name="Text 3"/>
+          <p:cNvPr id="6" name="Text 4"/>
           <p:cNvSpPr/>
           <p:nvPr/>
         </p:nvSpPr>
@@ -6091,13 +11037,77 @@
       </p:sp>
       <p:sp>
         <p:nvSpPr>
-          <p:cNvPr id="6" name="Text 4"/>
+          <p:cNvPr id="7" name="Shape 5"/>
           <p:cNvSpPr/>
           <p:nvPr/>
         </p:nvSpPr>
         <p:spPr>
           <a:xfrm>
             <a:off x="640080" y="658368"/>
+            <a:ext cx="420624" cy="420624"/>
+          </a:xfrm>
+          <a:prstGeom prst="ellipse">
+            <a:avLst/>
+          </a:prstGeom>
+          <a:solidFill>
+            <a:srgbClr val="0068B7"/>
+          </a:solidFill>
+          <a:ln w="12700">
+            <a:solidFill>
+              <a:srgbClr val="0068B7"/>
+            </a:solidFill>
+            <a:prstDash val="solid"/>
+          </a:ln>
+        </p:spPr>
+      </p:sp>
+      <p:sp>
+        <p:nvSpPr>
+          <p:cNvPr id="8" name="Text 6"/>
+          <p:cNvSpPr/>
+          <p:nvPr/>
+        </p:nvSpPr>
+        <p:spPr>
+          <a:xfrm>
+            <a:off x="640080" y="731520"/>
+            <a:ext cx="420624" cy="164592"/>
+          </a:xfrm>
+          <a:prstGeom prst="rect">
+            <a:avLst/>
+          </a:prstGeom>
+          <a:noFill/>
+          <a:ln/>
+        </p:spPr>
+        <p:txBody>
+          <a:bodyPr wrap="square" lIns="0" tIns="0" rIns="0" bIns="0" rtlCol="0" anchor="ctr"/>
+          <a:lstStyle/>
+          <a:p>
+            <a:pPr algn="ctr" indent="0" marL="0">
+              <a:buNone/>
+            </a:pPr>
+            <a:r>
+              <a:rPr lang="en-US" sz="1100" b="1" dirty="0">
+                <a:solidFill>
+                  <a:srgbClr val="FFFFFF"/>
+                </a:solidFill>
+                <a:latin typeface="Aptos" pitchFamily="34" charset="0"/>
+                <a:ea typeface="Aptos" pitchFamily="34" charset="-122"/>
+                <a:cs typeface="Aptos" pitchFamily="34" charset="-120"/>
+              </a:rPr>
+              <a:t>1</a:t>
+            </a:r>
+            <a:endParaRPr lang="en-US" sz="1100" dirty="0"/>
+          </a:p>
+        </p:txBody>
+      </p:sp>
+      <p:sp>
+        <p:nvSpPr>
+          <p:cNvPr id="9" name="Text 7"/>
+          <p:cNvSpPr/>
+          <p:nvPr/>
+        </p:nvSpPr>
+        <p:spPr>
+          <a:xfrm>
+            <a:off x="640080" y="621792"/>
             <a:ext cx="10881360" cy="566928"/>
           </a:xfrm>
           <a:prstGeom prst="rect">
@@ -6124,7 +11134,7 @@
                 <a:ea typeface="Aptos Display" pitchFamily="34" charset="-122"/>
                 <a:cs typeface="Aptos Display" pitchFamily="34" charset="-120"/>
               </a:rPr>
-              <a:t>Module Overview</a:t>
+              <a:t>Learning Objectives</a:t>
             </a:r>
             <a:endParaRPr lang="en-US" sz="2700" dirty="0"/>
           </a:p>
@@ -6132,32 +11142,178 @@
       </p:sp>
       <p:sp>
         <p:nvSpPr>
-          <p:cNvPr id="7" name="Text 5"/>
-          <p:cNvSpPr/>
-          <p:nvPr/>
-        </p:nvSpPr>
-        <p:spPr>
-          <a:xfrm>
-            <a:off x="822960" y="1325880"/>
-            <a:ext cx="10378440" cy="4800600"/>
-          </a:xfrm>
-          <a:prstGeom prst="rect">
-            <a:avLst/>
-          </a:prstGeom>
-          <a:noFill/>
-          <a:ln/>
-        </p:spPr>
-        <p:txBody>
-          <a:bodyPr wrap="square" lIns="1016" tIns="1016" rIns="1016" bIns="1016" rtlCol="0" anchor="t">
+          <p:cNvPr id="10" name="Text 8"/>
+          <p:cNvSpPr/>
+          <p:nvPr/>
+        </p:nvSpPr>
+        <p:spPr>
+          <a:xfrm>
+            <a:off x="868680" y="1417320"/>
+            <a:ext cx="6675120" cy="4434840"/>
+          </a:xfrm>
+          <a:prstGeom prst="rect">
+            <a:avLst/>
+          </a:prstGeom>
+          <a:noFill/>
+          <a:ln/>
+        </p:spPr>
+        <p:txBody>
+          <a:bodyPr wrap="square" lIns="635" tIns="635" rIns="635" bIns="635" rtlCol="0" anchor="t">
             <a:normAutofit/>
           </a:bodyPr>
           <a:lstStyle/>
           <a:p>
+            <a:r>
+              <a:rPr lang="en-US" sz="1700" dirty="0">
+                <a:solidFill>
+                  <a:srgbClr val="17364A"/>
+                </a:solidFill>
+                <a:latin typeface="Aptos" pitchFamily="34" charset="0"/>
+                <a:ea typeface="Aptos" pitchFamily="34" charset="-122"/>
+                <a:cs typeface="Aptos" pitchFamily="34" charset="-120"/>
+              </a:rPr>
+              <a:t>Explain the purpose of measuring ai value, performance, and operational impact in public health AI work.</a:t>
+            </a:r>
+            <a:endParaRPr lang="en-US" sz="1700" dirty="0"/>
+          </a:p>
+          <a:p>
+            <a:r>
+              <a:rPr lang="en-US" sz="1700" dirty="0">
+                <a:solidFill>
+                  <a:srgbClr val="17364A"/>
+                </a:solidFill>
+                <a:latin typeface="Aptos" pitchFamily="34" charset="0"/>
+                <a:ea typeface="Aptos" pitchFamily="34" charset="-122"/>
+                <a:cs typeface="Aptos" pitchFamily="34" charset="-120"/>
+              </a:rPr>
+              <a:t>Identify the technical, operational, privacy, security, equity, and governance issues associated with the topic.</a:t>
+            </a:r>
+            <a:endParaRPr lang="en-US" sz="1700" dirty="0"/>
+          </a:p>
+          <a:p>
+            <a:r>
+              <a:rPr lang="en-US" sz="1700" dirty="0">
+                <a:solidFill>
+                  <a:srgbClr val="17364A"/>
+                </a:solidFill>
+                <a:latin typeface="Aptos" pitchFamily="34" charset="0"/>
+                <a:ea typeface="Aptos" pitchFamily="34" charset="-122"/>
+                <a:cs typeface="Aptos" pitchFamily="34" charset="-120"/>
+              </a:rPr>
+              <a:t>Apply the topic to a real or realistic public health workflow, system, or implementation scenario.</a:t>
+            </a:r>
+            <a:endParaRPr lang="en-US" sz="1700" dirty="0"/>
+          </a:p>
+          <a:p>
+            <a:r>
+              <a:rPr lang="en-US" sz="1700" dirty="0">
+                <a:solidFill>
+                  <a:srgbClr val="17364A"/>
+                </a:solidFill>
+                <a:latin typeface="Aptos" pitchFamily="34" charset="0"/>
+                <a:ea typeface="Aptos" pitchFamily="34" charset="-122"/>
+                <a:cs typeface="Aptos" pitchFamily="34" charset="-120"/>
+              </a:rPr>
+              <a:t>Recognize common failure modes that can affect safety, accuracy, trust, workflow fit, or sustainability.</a:t>
+            </a:r>
+            <a:endParaRPr lang="en-US" sz="1700" dirty="0"/>
+          </a:p>
+        </p:txBody>
+      </p:sp>
+      <p:sp>
+        <p:nvSpPr>
+          <p:cNvPr id="11" name="Shape 9"/>
+          <p:cNvSpPr/>
+          <p:nvPr/>
+        </p:nvSpPr>
+        <p:spPr>
+          <a:xfrm>
+            <a:off x="7909560" y="1417320"/>
+            <a:ext cx="3154680" cy="1828800"/>
+          </a:xfrm>
+          <a:prstGeom prst="roundRect">
+            <a:avLst>
+              <a:gd name="adj" fmla="val 6000"/>
+            </a:avLst>
+          </a:prstGeom>
+          <a:solidFill>
+            <a:srgbClr val="EEF8ED"/>
+          </a:solidFill>
+          <a:ln w="12700">
+            <a:solidFill>
+              <a:srgbClr val="B9D7E6"/>
+            </a:solidFill>
+            <a:prstDash val="solid"/>
+          </a:ln>
+        </p:spPr>
+      </p:sp>
+      <p:sp>
+        <p:nvSpPr>
+          <p:cNvPr id="12" name="Text 10"/>
+          <p:cNvSpPr/>
+          <p:nvPr/>
+        </p:nvSpPr>
+        <p:spPr>
+          <a:xfrm>
+            <a:off x="8074152" y="1563624"/>
+            <a:ext cx="2825496" cy="201168"/>
+          </a:xfrm>
+          <a:prstGeom prst="rect">
+            <a:avLst/>
+          </a:prstGeom>
+          <a:noFill/>
+          <a:ln/>
+        </p:spPr>
+        <p:txBody>
+          <a:bodyPr wrap="square" lIns="0" tIns="0" rIns="0" bIns="0" rtlCol="0" anchor="ctr"/>
+          <a:lstStyle/>
+          <a:p>
             <a:pPr indent="0" marL="0">
               <a:buNone/>
             </a:pPr>
             <a:r>
-              <a:rPr lang="en-US" sz="1420" dirty="0">
+              <a:rPr lang="en-US" sz="950" b="1" dirty="0">
+                <a:solidFill>
+                  <a:srgbClr val="0068B7"/>
+                </a:solidFill>
+                <a:latin typeface="Aptos" pitchFamily="34" charset="0"/>
+                <a:ea typeface="Aptos" pitchFamily="34" charset="-122"/>
+                <a:cs typeface="Aptos" pitchFamily="34" charset="-120"/>
+              </a:rPr>
+              <a:t>Key idea</a:t>
+            </a:r>
+            <a:endParaRPr lang="en-US" sz="950" dirty="0"/>
+          </a:p>
+        </p:txBody>
+      </p:sp>
+      <p:sp>
+        <p:nvSpPr>
+          <p:cNvPr id="13" name="Text 11"/>
+          <p:cNvSpPr/>
+          <p:nvPr/>
+        </p:nvSpPr>
+        <p:spPr>
+          <a:xfrm>
+            <a:off x="8074152" y="1856232"/>
+            <a:ext cx="2825496" cy="1261872"/>
+          </a:xfrm>
+          <a:prstGeom prst="rect">
+            <a:avLst/>
+          </a:prstGeom>
+          <a:noFill/>
+          <a:ln/>
+        </p:spPr>
+        <p:txBody>
+          <a:bodyPr wrap="square" lIns="0" tIns="0" rIns="0" bIns="0" rtlCol="0" anchor="t">
+            <a:normAutofit/>
+          </a:bodyPr>
+          <a:lstStyle/>
+          <a:p>
+            <a:pPr indent="0" marL="0">
+              <a:buNone/>
+            </a:pPr>
+            <a:r>
+              <a:rPr lang="en-US" sz="1250" dirty="0">
                 <a:solidFill>
                   <a:srgbClr val="17364A"/>
                 </a:solidFill>
@@ -6165,9 +11321,116 @@
                 <a:ea typeface="Aptos" pitchFamily="34" charset="-122"/>
                 <a:cs typeface="Aptos" pitchFamily="34" charset="-120"/>
               </a:rPr>
-              <a:t>AI tools should be evaluated not only by model accuracy, but also by whether they improve public health operations and outcomes. This module teaches learners to define measures for timeliness, quality, equity, staff burden, cost, user satisfaction, safety, trust, and sustainability. It helps agencies avoid adopting AI because it is novel and instead assess whether it creates measurable public value.</a:t>
-            </a:r>
-            <a:endParaRPr lang="en-US" sz="1420" dirty="0"/>
+              <a:t>Explain the purpose of measuring ai value, performance, and operational impact in public health AI work.</a:t>
+            </a:r>
+            <a:endParaRPr lang="en-US" sz="1250" dirty="0"/>
+          </a:p>
+        </p:txBody>
+      </p:sp>
+      <p:sp>
+        <p:nvSpPr>
+          <p:cNvPr id="14" name="Shape 12"/>
+          <p:cNvSpPr/>
+          <p:nvPr/>
+        </p:nvSpPr>
+        <p:spPr>
+          <a:xfrm>
+            <a:off x="7909560" y="3520440"/>
+            <a:ext cx="3154680" cy="1737360"/>
+          </a:xfrm>
+          <a:prstGeom prst="roundRect">
+            <a:avLst>
+              <a:gd name="adj" fmla="val 6316"/>
+            </a:avLst>
+          </a:prstGeom>
+          <a:solidFill>
+            <a:srgbClr val="EAF6F8"/>
+          </a:solidFill>
+          <a:ln w="12700">
+            <a:solidFill>
+              <a:srgbClr val="B9D7E6"/>
+            </a:solidFill>
+            <a:prstDash val="solid"/>
+          </a:ln>
+        </p:spPr>
+      </p:sp>
+      <p:sp>
+        <p:nvSpPr>
+          <p:cNvPr id="15" name="Text 13"/>
+          <p:cNvSpPr/>
+          <p:nvPr/>
+        </p:nvSpPr>
+        <p:spPr>
+          <a:xfrm>
+            <a:off x="8074152" y="3666744"/>
+            <a:ext cx="2825496" cy="201168"/>
+          </a:xfrm>
+          <a:prstGeom prst="rect">
+            <a:avLst/>
+          </a:prstGeom>
+          <a:noFill/>
+          <a:ln/>
+        </p:spPr>
+        <p:txBody>
+          <a:bodyPr wrap="square" lIns="0" tIns="0" rIns="0" bIns="0" rtlCol="0" anchor="ctr"/>
+          <a:lstStyle/>
+          <a:p>
+            <a:pPr indent="0" marL="0">
+              <a:buNone/>
+            </a:pPr>
+            <a:r>
+              <a:rPr lang="en-US" sz="950" b="1" dirty="0">
+                <a:solidFill>
+                  <a:srgbClr val="0068B7"/>
+                </a:solidFill>
+                <a:latin typeface="Aptos" pitchFamily="34" charset="0"/>
+                <a:ea typeface="Aptos" pitchFamily="34" charset="-122"/>
+                <a:cs typeface="Aptos" pitchFamily="34" charset="-120"/>
+              </a:rPr>
+              <a:t>Use this for</a:t>
+            </a:r>
+            <a:endParaRPr lang="en-US" sz="950" dirty="0"/>
+          </a:p>
+        </p:txBody>
+      </p:sp>
+      <p:sp>
+        <p:nvSpPr>
+          <p:cNvPr id="16" name="Text 14"/>
+          <p:cNvSpPr/>
+          <p:nvPr/>
+        </p:nvSpPr>
+        <p:spPr>
+          <a:xfrm>
+            <a:off x="8074152" y="3959352"/>
+            <a:ext cx="2825496" cy="1170432"/>
+          </a:xfrm>
+          <a:prstGeom prst="rect">
+            <a:avLst/>
+          </a:prstGeom>
+          <a:noFill/>
+          <a:ln/>
+        </p:spPr>
+        <p:txBody>
+          <a:bodyPr wrap="square" lIns="0" tIns="0" rIns="0" bIns="0" rtlCol="0" anchor="t">
+            <a:normAutofit/>
+          </a:bodyPr>
+          <a:lstStyle/>
+          <a:p>
+            <a:pPr indent="0" marL="0">
+              <a:buNone/>
+            </a:pPr>
+            <a:r>
+              <a:rPr lang="en-US" sz="1250" dirty="0">
+                <a:solidFill>
+                  <a:srgbClr val="17364A"/>
+                </a:solidFill>
+                <a:latin typeface="Aptos" pitchFamily="34" charset="0"/>
+                <a:ea typeface="Aptos" pitchFamily="34" charset="-122"/>
+                <a:cs typeface="Aptos" pitchFamily="34" charset="-120"/>
+              </a:rPr>
+              <a:t>Connect the concept to public health decisions, safeguards, documentation, or implementation work.</a:t>
+            </a:r>
+            <a:endParaRPr lang="en-US" sz="1250" dirty="0"/>
           </a:p>
         </p:txBody>
       </p:sp>
@@ -6230,7 +11493,32 @@
       </p:sp>
       <p:sp>
         <p:nvSpPr>
-          <p:cNvPr id="3" name="Text 1"/>
+          <p:cNvPr id="3" name="Shape 1"/>
+          <p:cNvSpPr/>
+          <p:nvPr/>
+        </p:nvSpPr>
+        <p:spPr>
+          <a:xfrm>
+            <a:off x="0" y="164592"/>
+            <a:ext cx="146304" cy="6693408"/>
+          </a:xfrm>
+          <a:prstGeom prst="rect">
+            <a:avLst/>
+          </a:prstGeom>
+          <a:solidFill>
+            <a:srgbClr val="2F8A28"/>
+          </a:solidFill>
+          <a:ln w="12700">
+            <a:solidFill>
+              <a:srgbClr val="2F8A28"/>
+            </a:solidFill>
+            <a:prstDash val="solid"/>
+          </a:ln>
+        </p:spPr>
+      </p:sp>
+      <p:sp>
+        <p:nvSpPr>
+          <p:cNvPr id="4" name="Text 2"/>
           <p:cNvSpPr/>
           <p:nvPr/>
         </p:nvSpPr>
@@ -6269,7 +11557,7 @@
       </p:sp>
       <p:sp>
         <p:nvSpPr>
-          <p:cNvPr id="4" name="Text 2"/>
+          <p:cNvPr id="5" name="Text 3"/>
           <p:cNvSpPr/>
           <p:nvPr/>
         </p:nvSpPr>
@@ -6308,7 +11596,7 @@
       </p:sp>
       <p:sp>
         <p:nvSpPr>
-          <p:cNvPr id="5" name="Text 3"/>
+          <p:cNvPr id="6" name="Text 4"/>
           <p:cNvSpPr/>
           <p:nvPr/>
         </p:nvSpPr>
@@ -6347,7 +11635,7 @@
       </p:sp>
       <p:sp>
         <p:nvSpPr>
-          <p:cNvPr id="6" name="Text 4"/>
+          <p:cNvPr id="7" name="Text 5"/>
           <p:cNvSpPr/>
           <p:nvPr/>
         </p:nvSpPr>
@@ -6380,7 +11668,7 @@
                 <a:ea typeface="Aptos Display" pitchFamily="34" charset="-122"/>
                 <a:cs typeface="Aptos Display" pitchFamily="34" charset="-120"/>
               </a:rPr>
-              <a:t>Why This Topic Matters for Public Health AI</a:t>
+              <a:t>Learning Objectives Continued</a:t>
             </a:r>
             <a:endParaRPr lang="en-US" sz="2700" dirty="0"/>
           </a:p>
@@ -6388,32 +11676,136 @@
       </p:sp>
       <p:sp>
         <p:nvSpPr>
-          <p:cNvPr id="7" name="Text 5"/>
-          <p:cNvSpPr/>
-          <p:nvPr/>
-        </p:nvSpPr>
-        <p:spPr>
-          <a:xfrm>
-            <a:off x="822960" y="1325880"/>
-            <a:ext cx="10378440" cy="4800600"/>
-          </a:xfrm>
-          <a:prstGeom prst="rect">
-            <a:avLst/>
-          </a:prstGeom>
-          <a:noFill/>
-          <a:ln/>
-        </p:spPr>
-        <p:txBody>
-          <a:bodyPr wrap="square" lIns="1016" tIns="1016" rIns="1016" bIns="1016" rtlCol="0" anchor="t">
+          <p:cNvPr id="8" name="Text 6"/>
+          <p:cNvSpPr/>
+          <p:nvPr/>
+        </p:nvSpPr>
+        <p:spPr>
+          <a:xfrm>
+            <a:off x="868680" y="1417320"/>
+            <a:ext cx="6675120" cy="4434840"/>
+          </a:xfrm>
+          <a:prstGeom prst="rect">
+            <a:avLst/>
+          </a:prstGeom>
+          <a:noFill/>
+          <a:ln/>
+        </p:spPr>
+        <p:txBody>
+          <a:bodyPr wrap="square" lIns="635" tIns="635" rIns="635" bIns="635" rtlCol="0" anchor="t">
             <a:normAutofit/>
           </a:bodyPr>
           <a:lstStyle/>
           <a:p>
+            <a:r>
+              <a:rPr lang="en-US" sz="1700" dirty="0">
+                <a:solidFill>
+                  <a:srgbClr val="17364A"/>
+                </a:solidFill>
+                <a:latin typeface="Aptos" pitchFamily="34" charset="0"/>
+                <a:ea typeface="Aptos" pitchFamily="34" charset="-122"/>
+                <a:cs typeface="Aptos" pitchFamily="34" charset="-120"/>
+              </a:rPr>
+              <a:t>Produce a AI value and impact measurement plan that can support readiness assessment, governance review, procurement,.</a:t>
+            </a:r>
+            <a:endParaRPr lang="en-US" sz="1700" dirty="0"/>
+          </a:p>
+        </p:txBody>
+      </p:sp>
+      <p:sp>
+        <p:nvSpPr>
+          <p:cNvPr id="9" name="Shape 7"/>
+          <p:cNvSpPr/>
+          <p:nvPr/>
+        </p:nvSpPr>
+        <p:spPr>
+          <a:xfrm>
+            <a:off x="7909560" y="1417320"/>
+            <a:ext cx="3154680" cy="1828800"/>
+          </a:xfrm>
+          <a:prstGeom prst="roundRect">
+            <a:avLst>
+              <a:gd name="adj" fmla="val 6000"/>
+            </a:avLst>
+          </a:prstGeom>
+          <a:solidFill>
+            <a:srgbClr val="EEF8ED"/>
+          </a:solidFill>
+          <a:ln w="12700">
+            <a:solidFill>
+              <a:srgbClr val="B9D7E6"/>
+            </a:solidFill>
+            <a:prstDash val="solid"/>
+          </a:ln>
+        </p:spPr>
+      </p:sp>
+      <p:sp>
+        <p:nvSpPr>
+          <p:cNvPr id="10" name="Text 8"/>
+          <p:cNvSpPr/>
+          <p:nvPr/>
+        </p:nvSpPr>
+        <p:spPr>
+          <a:xfrm>
+            <a:off x="8074152" y="1563624"/>
+            <a:ext cx="2825496" cy="201168"/>
+          </a:xfrm>
+          <a:prstGeom prst="rect">
+            <a:avLst/>
+          </a:prstGeom>
+          <a:noFill/>
+          <a:ln/>
+        </p:spPr>
+        <p:txBody>
+          <a:bodyPr wrap="square" lIns="0" tIns="0" rIns="0" bIns="0" rtlCol="0" anchor="ctr"/>
+          <a:lstStyle/>
+          <a:p>
             <a:pPr indent="0" marL="0">
               <a:buNone/>
             </a:pPr>
             <a:r>
-              <a:rPr lang="en-US" sz="1420" dirty="0">
+              <a:rPr lang="en-US" sz="950" b="1" dirty="0">
+                <a:solidFill>
+                  <a:srgbClr val="0068B7"/>
+                </a:solidFill>
+                <a:latin typeface="Aptos" pitchFamily="34" charset="0"/>
+                <a:ea typeface="Aptos" pitchFamily="34" charset="-122"/>
+                <a:cs typeface="Aptos" pitchFamily="34" charset="-120"/>
+              </a:rPr>
+              <a:t>Key idea</a:t>
+            </a:r>
+            <a:endParaRPr lang="en-US" sz="950" dirty="0"/>
+          </a:p>
+        </p:txBody>
+      </p:sp>
+      <p:sp>
+        <p:nvSpPr>
+          <p:cNvPr id="11" name="Text 9"/>
+          <p:cNvSpPr/>
+          <p:nvPr/>
+        </p:nvSpPr>
+        <p:spPr>
+          <a:xfrm>
+            <a:off x="8074152" y="1856232"/>
+            <a:ext cx="2825496" cy="1261872"/>
+          </a:xfrm>
+          <a:prstGeom prst="rect">
+            <a:avLst/>
+          </a:prstGeom>
+          <a:noFill/>
+          <a:ln/>
+        </p:spPr>
+        <p:txBody>
+          <a:bodyPr wrap="square" lIns="0" tIns="0" rIns="0" bIns="0" rtlCol="0" anchor="t">
+            <a:normAutofit/>
+          </a:bodyPr>
+          <a:lstStyle/>
+          <a:p>
+            <a:pPr indent="0" marL="0">
+              <a:buNone/>
+            </a:pPr>
+            <a:r>
+              <a:rPr lang="en-US" sz="1250" dirty="0">
                 <a:solidFill>
                   <a:srgbClr val="17364A"/>
                 </a:solidFill>
@@ -6421,9 +11813,116 @@
                 <a:ea typeface="Aptos" pitchFamily="34" charset="-122"/>
                 <a:cs typeface="Aptos" pitchFamily="34" charset="-120"/>
               </a:rPr>
-              <a:t>Measuring AI Value, Performance, and Operational Impact matters because AI systems are embedded in public health programs, data systems, and decision processes rather than operating in isolation. The topic affects whether AI outputs are accurate, explainable, safe, equitable, secure, and sustainable. Agencies that ignore this area may create tools that work in a demonstration but fail in actual practice. The topic also affects accountability. Public health agencies must be able to explain how data are used, why a tool was approved, what evidence supports the workflow, who reviews outputs, and what happens when the system fails. These responsibilities become more important as AI tools move from experimentation into operational use.</a:t>
-            </a:r>
-            <a:endParaRPr lang="en-US" sz="1420" dirty="0"/>
+              <a:t>Produce a AI value and impact measurement plan that can support readiness assessment, governance review, procurement,.</a:t>
+            </a:r>
+            <a:endParaRPr lang="en-US" sz="1250" dirty="0"/>
+          </a:p>
+        </p:txBody>
+      </p:sp>
+      <p:sp>
+        <p:nvSpPr>
+          <p:cNvPr id="12" name="Shape 10"/>
+          <p:cNvSpPr/>
+          <p:nvPr/>
+        </p:nvSpPr>
+        <p:spPr>
+          <a:xfrm>
+            <a:off x="7909560" y="3520440"/>
+            <a:ext cx="3154680" cy="1737360"/>
+          </a:xfrm>
+          <a:prstGeom prst="roundRect">
+            <a:avLst>
+              <a:gd name="adj" fmla="val 6316"/>
+            </a:avLst>
+          </a:prstGeom>
+          <a:solidFill>
+            <a:srgbClr val="EAF6F8"/>
+          </a:solidFill>
+          <a:ln w="12700">
+            <a:solidFill>
+              <a:srgbClr val="B9D7E6"/>
+            </a:solidFill>
+            <a:prstDash val="solid"/>
+          </a:ln>
+        </p:spPr>
+      </p:sp>
+      <p:sp>
+        <p:nvSpPr>
+          <p:cNvPr id="13" name="Text 11"/>
+          <p:cNvSpPr/>
+          <p:nvPr/>
+        </p:nvSpPr>
+        <p:spPr>
+          <a:xfrm>
+            <a:off x="8074152" y="3666744"/>
+            <a:ext cx="2825496" cy="201168"/>
+          </a:xfrm>
+          <a:prstGeom prst="rect">
+            <a:avLst/>
+          </a:prstGeom>
+          <a:noFill/>
+          <a:ln/>
+        </p:spPr>
+        <p:txBody>
+          <a:bodyPr wrap="square" lIns="0" tIns="0" rIns="0" bIns="0" rtlCol="0" anchor="ctr"/>
+          <a:lstStyle/>
+          <a:p>
+            <a:pPr indent="0" marL="0">
+              <a:buNone/>
+            </a:pPr>
+            <a:r>
+              <a:rPr lang="en-US" sz="950" b="1" dirty="0">
+                <a:solidFill>
+                  <a:srgbClr val="0068B7"/>
+                </a:solidFill>
+                <a:latin typeface="Aptos" pitchFamily="34" charset="0"/>
+                <a:ea typeface="Aptos" pitchFamily="34" charset="-122"/>
+                <a:cs typeface="Aptos" pitchFamily="34" charset="-120"/>
+              </a:rPr>
+              <a:t>Use this for</a:t>
+            </a:r>
+            <a:endParaRPr lang="en-US" sz="950" dirty="0"/>
+          </a:p>
+        </p:txBody>
+      </p:sp>
+      <p:sp>
+        <p:nvSpPr>
+          <p:cNvPr id="14" name="Text 12"/>
+          <p:cNvSpPr/>
+          <p:nvPr/>
+        </p:nvSpPr>
+        <p:spPr>
+          <a:xfrm>
+            <a:off x="8074152" y="3959352"/>
+            <a:ext cx="2825496" cy="1170432"/>
+          </a:xfrm>
+          <a:prstGeom prst="rect">
+            <a:avLst/>
+          </a:prstGeom>
+          <a:noFill/>
+          <a:ln/>
+        </p:spPr>
+        <p:txBody>
+          <a:bodyPr wrap="square" lIns="0" tIns="0" rIns="0" bIns="0" rtlCol="0" anchor="t">
+            <a:normAutofit/>
+          </a:bodyPr>
+          <a:lstStyle/>
+          <a:p>
+            <a:pPr indent="0" marL="0">
+              <a:buNone/>
+            </a:pPr>
+            <a:r>
+              <a:rPr lang="en-US" sz="1250" dirty="0">
+                <a:solidFill>
+                  <a:srgbClr val="17364A"/>
+                </a:solidFill>
+                <a:latin typeface="Aptos" pitchFamily="34" charset="0"/>
+                <a:ea typeface="Aptos" pitchFamily="34" charset="-122"/>
+                <a:cs typeface="Aptos" pitchFamily="34" charset="-120"/>
+              </a:rPr>
+              <a:t>Connect the concept to public health decisions, safeguards, documentation, or implementation work.</a:t>
+            </a:r>
+            <a:endParaRPr lang="en-US" sz="1250" dirty="0"/>
           </a:p>
         </p:txBody>
       </p:sp>
@@ -6486,7 +11985,32 @@
       </p:sp>
       <p:sp>
         <p:nvSpPr>
-          <p:cNvPr id="3" name="Text 1"/>
+          <p:cNvPr id="3" name="Shape 1"/>
+          <p:cNvSpPr/>
+          <p:nvPr/>
+        </p:nvSpPr>
+        <p:spPr>
+          <a:xfrm>
+            <a:off x="0" y="164592"/>
+            <a:ext cx="146304" cy="6693408"/>
+          </a:xfrm>
+          <a:prstGeom prst="rect">
+            <a:avLst/>
+          </a:prstGeom>
+          <a:solidFill>
+            <a:srgbClr val="2F8A28"/>
+          </a:solidFill>
+          <a:ln w="12700">
+            <a:solidFill>
+              <a:srgbClr val="2F8A28"/>
+            </a:solidFill>
+            <a:prstDash val="solid"/>
+          </a:ln>
+        </p:spPr>
+      </p:sp>
+      <p:sp>
+        <p:nvSpPr>
+          <p:cNvPr id="4" name="Text 2"/>
           <p:cNvSpPr/>
           <p:nvPr/>
         </p:nvSpPr>
@@ -6525,7 +12049,7 @@
       </p:sp>
       <p:sp>
         <p:nvSpPr>
-          <p:cNvPr id="4" name="Text 2"/>
+          <p:cNvPr id="5" name="Text 3"/>
           <p:cNvSpPr/>
           <p:nvPr/>
         </p:nvSpPr>
@@ -6564,7 +12088,7 @@
       </p:sp>
       <p:sp>
         <p:nvSpPr>
-          <p:cNvPr id="5" name="Text 3"/>
+          <p:cNvPr id="6" name="Text 4"/>
           <p:cNvSpPr/>
           <p:nvPr/>
         </p:nvSpPr>
@@ -6603,13 +12127,77 @@
       </p:sp>
       <p:sp>
         <p:nvSpPr>
-          <p:cNvPr id="6" name="Text 4"/>
+          <p:cNvPr id="7" name="Shape 5"/>
           <p:cNvSpPr/>
           <p:nvPr/>
         </p:nvSpPr>
         <p:spPr>
           <a:xfrm>
             <a:off x="640080" y="658368"/>
+            <a:ext cx="420624" cy="420624"/>
+          </a:xfrm>
+          <a:prstGeom prst="ellipse">
+            <a:avLst/>
+          </a:prstGeom>
+          <a:solidFill>
+            <a:srgbClr val="0068B7"/>
+          </a:solidFill>
+          <a:ln w="12700">
+            <a:solidFill>
+              <a:srgbClr val="0068B7"/>
+            </a:solidFill>
+            <a:prstDash val="solid"/>
+          </a:ln>
+        </p:spPr>
+      </p:sp>
+      <p:sp>
+        <p:nvSpPr>
+          <p:cNvPr id="8" name="Text 6"/>
+          <p:cNvSpPr/>
+          <p:nvPr/>
+        </p:nvSpPr>
+        <p:spPr>
+          <a:xfrm>
+            <a:off x="640080" y="731520"/>
+            <a:ext cx="420624" cy="164592"/>
+          </a:xfrm>
+          <a:prstGeom prst="rect">
+            <a:avLst/>
+          </a:prstGeom>
+          <a:noFill/>
+          <a:ln/>
+        </p:spPr>
+        <p:txBody>
+          <a:bodyPr wrap="square" lIns="0" tIns="0" rIns="0" bIns="0" rtlCol="0" anchor="ctr"/>
+          <a:lstStyle/>
+          <a:p>
+            <a:pPr algn="ctr" indent="0" marL="0">
+              <a:buNone/>
+            </a:pPr>
+            <a:r>
+              <a:rPr lang="en-US" sz="1100" b="1" dirty="0">
+                <a:solidFill>
+                  <a:srgbClr val="FFFFFF"/>
+                </a:solidFill>
+                <a:latin typeface="Aptos" pitchFamily="34" charset="0"/>
+                <a:ea typeface="Aptos" pitchFamily="34" charset="-122"/>
+                <a:cs typeface="Aptos" pitchFamily="34" charset="-120"/>
+              </a:rPr>
+              <a:t>2</a:t>
+            </a:r>
+            <a:endParaRPr lang="en-US" sz="1100" dirty="0"/>
+          </a:p>
+        </p:txBody>
+      </p:sp>
+      <p:sp>
+        <p:nvSpPr>
+          <p:cNvPr id="9" name="Text 7"/>
+          <p:cNvSpPr/>
+          <p:nvPr/>
+        </p:nvSpPr>
+        <p:spPr>
+          <a:xfrm>
+            <a:off x="640080" y="621792"/>
             <a:ext cx="10881360" cy="566928"/>
           </a:xfrm>
           <a:prstGeom prst="rect">
@@ -6636,7 +12224,7 @@
                 <a:ea typeface="Aptos Display" pitchFamily="34" charset="-122"/>
                 <a:cs typeface="Aptos Display" pitchFamily="34" charset="-120"/>
               </a:rPr>
-              <a:t>Core Concepts</a:t>
+              <a:t>Module Overview</a:t>
             </a:r>
             <a:endParaRPr lang="en-US" sz="2700" dirty="0"/>
           </a:p>
@@ -6644,32 +12232,164 @@
       </p:sp>
       <p:sp>
         <p:nvSpPr>
-          <p:cNvPr id="7" name="Text 5"/>
-          <p:cNvSpPr/>
-          <p:nvPr/>
-        </p:nvSpPr>
-        <p:spPr>
-          <a:xfrm>
-            <a:off x="822960" y="1325880"/>
-            <a:ext cx="10378440" cy="4800600"/>
-          </a:xfrm>
-          <a:prstGeom prst="rect">
-            <a:avLst/>
-          </a:prstGeom>
-          <a:noFill/>
-          <a:ln/>
-        </p:spPr>
-        <p:txBody>
-          <a:bodyPr wrap="square" lIns="1016" tIns="1016" rIns="1016" bIns="1016" rtlCol="0" anchor="t">
+          <p:cNvPr id="10" name="Text 8"/>
+          <p:cNvSpPr/>
+          <p:nvPr/>
+        </p:nvSpPr>
+        <p:spPr>
+          <a:xfrm>
+            <a:off x="868680" y="1417320"/>
+            <a:ext cx="6675120" cy="4434840"/>
+          </a:xfrm>
+          <a:prstGeom prst="rect">
+            <a:avLst/>
+          </a:prstGeom>
+          <a:noFill/>
+          <a:ln/>
+        </p:spPr>
+        <p:txBody>
+          <a:bodyPr wrap="square" lIns="635" tIns="635" rIns="635" bIns="635" rtlCol="0" anchor="t">
             <a:normAutofit/>
           </a:bodyPr>
           <a:lstStyle/>
           <a:p>
+            <a:r>
+              <a:rPr lang="en-US" sz="1700" dirty="0">
+                <a:solidFill>
+                  <a:srgbClr val="17364A"/>
+                </a:solidFill>
+                <a:latin typeface="Aptos" pitchFamily="34" charset="0"/>
+                <a:ea typeface="Aptos" pitchFamily="34" charset="-122"/>
+                <a:cs typeface="Aptos" pitchFamily="34" charset="-120"/>
+              </a:rPr>
+              <a:t>AI tools should be evaluated not only by model accuracy, but also by whether they improve public health operations and.</a:t>
+            </a:r>
+            <a:endParaRPr lang="en-US" sz="1700" dirty="0"/>
+          </a:p>
+          <a:p>
+            <a:r>
+              <a:rPr lang="en-US" sz="1700" dirty="0">
+                <a:solidFill>
+                  <a:srgbClr val="17364A"/>
+                </a:solidFill>
+                <a:latin typeface="Aptos" pitchFamily="34" charset="0"/>
+                <a:ea typeface="Aptos" pitchFamily="34" charset="-122"/>
+                <a:cs typeface="Aptos" pitchFamily="34" charset="-120"/>
+              </a:rPr>
+              <a:t>This module teaches learners to define measures for timeliness, quality, equity, staff burden, cost, user satisfaction,.</a:t>
+            </a:r>
+            <a:endParaRPr lang="en-US" sz="1700" dirty="0"/>
+          </a:p>
+          <a:p>
+            <a:r>
+              <a:rPr lang="en-US" sz="1700" dirty="0">
+                <a:solidFill>
+                  <a:srgbClr val="17364A"/>
+                </a:solidFill>
+                <a:latin typeface="Aptos" pitchFamily="34" charset="0"/>
+                <a:ea typeface="Aptos" pitchFamily="34" charset="-122"/>
+                <a:cs typeface="Aptos" pitchFamily="34" charset="-120"/>
+              </a:rPr>
+              <a:t>It helps agencies avoid adopting AI because it is novel and instead assess whether it creates measurable public value.</a:t>
+            </a:r>
+            <a:endParaRPr lang="en-US" sz="1700" dirty="0"/>
+          </a:p>
+        </p:txBody>
+      </p:sp>
+      <p:sp>
+        <p:nvSpPr>
+          <p:cNvPr id="11" name="Shape 9"/>
+          <p:cNvSpPr/>
+          <p:nvPr/>
+        </p:nvSpPr>
+        <p:spPr>
+          <a:xfrm>
+            <a:off x="7909560" y="1417320"/>
+            <a:ext cx="3154680" cy="1828800"/>
+          </a:xfrm>
+          <a:prstGeom prst="roundRect">
+            <a:avLst>
+              <a:gd name="adj" fmla="val 6000"/>
+            </a:avLst>
+          </a:prstGeom>
+          <a:solidFill>
+            <a:srgbClr val="EEF8ED"/>
+          </a:solidFill>
+          <a:ln w="12700">
+            <a:solidFill>
+              <a:srgbClr val="B9D7E6"/>
+            </a:solidFill>
+            <a:prstDash val="solid"/>
+          </a:ln>
+        </p:spPr>
+      </p:sp>
+      <p:sp>
+        <p:nvSpPr>
+          <p:cNvPr id="12" name="Text 10"/>
+          <p:cNvSpPr/>
+          <p:nvPr/>
+        </p:nvSpPr>
+        <p:spPr>
+          <a:xfrm>
+            <a:off x="8074152" y="1563624"/>
+            <a:ext cx="2825496" cy="201168"/>
+          </a:xfrm>
+          <a:prstGeom prst="rect">
+            <a:avLst/>
+          </a:prstGeom>
+          <a:noFill/>
+          <a:ln/>
+        </p:spPr>
+        <p:txBody>
+          <a:bodyPr wrap="square" lIns="0" tIns="0" rIns="0" bIns="0" rtlCol="0" anchor="ctr"/>
+          <a:lstStyle/>
+          <a:p>
             <a:pPr indent="0" marL="0">
               <a:buNone/>
             </a:pPr>
             <a:r>
-              <a:rPr lang="en-US" sz="1420" dirty="0">
+              <a:rPr lang="en-US" sz="950" b="1" dirty="0">
+                <a:solidFill>
+                  <a:srgbClr val="0068B7"/>
+                </a:solidFill>
+                <a:latin typeface="Aptos" pitchFamily="34" charset="0"/>
+                <a:ea typeface="Aptos" pitchFamily="34" charset="-122"/>
+                <a:cs typeface="Aptos" pitchFamily="34" charset="-120"/>
+              </a:rPr>
+              <a:t>Key idea</a:t>
+            </a:r>
+            <a:endParaRPr lang="en-US" sz="950" dirty="0"/>
+          </a:p>
+        </p:txBody>
+      </p:sp>
+      <p:sp>
+        <p:nvSpPr>
+          <p:cNvPr id="13" name="Text 11"/>
+          <p:cNvSpPr/>
+          <p:nvPr/>
+        </p:nvSpPr>
+        <p:spPr>
+          <a:xfrm>
+            <a:off x="8074152" y="1856232"/>
+            <a:ext cx="2825496" cy="1261872"/>
+          </a:xfrm>
+          <a:prstGeom prst="rect">
+            <a:avLst/>
+          </a:prstGeom>
+          <a:noFill/>
+          <a:ln/>
+        </p:spPr>
+        <p:txBody>
+          <a:bodyPr wrap="square" lIns="0" tIns="0" rIns="0" bIns="0" rtlCol="0" anchor="t">
+            <a:normAutofit/>
+          </a:bodyPr>
+          <a:lstStyle/>
+          <a:p>
+            <a:pPr indent="0" marL="0">
+              <a:buNone/>
+            </a:pPr>
+            <a:r>
+              <a:rPr lang="en-US" sz="1250" dirty="0">
                 <a:solidFill>
                   <a:srgbClr val="17364A"/>
                 </a:solidFill>
@@ -6677,9 +12397,116 @@
                 <a:ea typeface="Aptos" pitchFamily="34" charset="-122"/>
                 <a:cs typeface="Aptos" pitchFamily="34" charset="-120"/>
               </a:rPr>
-              <a:t>AI value is the benefit created by an AI-supported workflow relative to its costs, risks, and alternatives. Value may include faster response, improved quality, reduced burden, better access, stronger equity, improved documentation, or better use of limited resources. Model performance measures how well the AI system performs a technical task. Operational impact measures whether the workflow actually improves public health practice. A model can have strong technical metrics and still fail to reduce burden, improve timeliness, or support equitable outcomes. Evaluation should be planned before implementation. Agencies should define baseline measures, target outcomes, data sources, review frequency, and decision rules for continuation, modification, scaling, or retirement.</a:t>
-            </a:r>
-            <a:endParaRPr lang="en-US" sz="1420" dirty="0"/>
+              <a:t>AI tools should be evaluated not only by model accuracy, but also by whether they improve public health operations and.</a:t>
+            </a:r>
+            <a:endParaRPr lang="en-US" sz="1250" dirty="0"/>
+          </a:p>
+        </p:txBody>
+      </p:sp>
+      <p:sp>
+        <p:nvSpPr>
+          <p:cNvPr id="14" name="Shape 12"/>
+          <p:cNvSpPr/>
+          <p:nvPr/>
+        </p:nvSpPr>
+        <p:spPr>
+          <a:xfrm>
+            <a:off x="7909560" y="3520440"/>
+            <a:ext cx="3154680" cy="1737360"/>
+          </a:xfrm>
+          <a:prstGeom prst="roundRect">
+            <a:avLst>
+              <a:gd name="adj" fmla="val 6316"/>
+            </a:avLst>
+          </a:prstGeom>
+          <a:solidFill>
+            <a:srgbClr val="EAF6F8"/>
+          </a:solidFill>
+          <a:ln w="12700">
+            <a:solidFill>
+              <a:srgbClr val="B9D7E6"/>
+            </a:solidFill>
+            <a:prstDash val="solid"/>
+          </a:ln>
+        </p:spPr>
+      </p:sp>
+      <p:sp>
+        <p:nvSpPr>
+          <p:cNvPr id="15" name="Text 13"/>
+          <p:cNvSpPr/>
+          <p:nvPr/>
+        </p:nvSpPr>
+        <p:spPr>
+          <a:xfrm>
+            <a:off x="8074152" y="3666744"/>
+            <a:ext cx="2825496" cy="201168"/>
+          </a:xfrm>
+          <a:prstGeom prst="rect">
+            <a:avLst/>
+          </a:prstGeom>
+          <a:noFill/>
+          <a:ln/>
+        </p:spPr>
+        <p:txBody>
+          <a:bodyPr wrap="square" lIns="0" tIns="0" rIns="0" bIns="0" rtlCol="0" anchor="ctr"/>
+          <a:lstStyle/>
+          <a:p>
+            <a:pPr indent="0" marL="0">
+              <a:buNone/>
+            </a:pPr>
+            <a:r>
+              <a:rPr lang="en-US" sz="950" b="1" dirty="0">
+                <a:solidFill>
+                  <a:srgbClr val="0068B7"/>
+                </a:solidFill>
+                <a:latin typeface="Aptos" pitchFamily="34" charset="0"/>
+                <a:ea typeface="Aptos" pitchFamily="34" charset="-122"/>
+                <a:cs typeface="Aptos" pitchFamily="34" charset="-120"/>
+              </a:rPr>
+              <a:t>Use this for</a:t>
+            </a:r>
+            <a:endParaRPr lang="en-US" sz="950" dirty="0"/>
+          </a:p>
+        </p:txBody>
+      </p:sp>
+      <p:sp>
+        <p:nvSpPr>
+          <p:cNvPr id="16" name="Text 14"/>
+          <p:cNvSpPr/>
+          <p:nvPr/>
+        </p:nvSpPr>
+        <p:spPr>
+          <a:xfrm>
+            <a:off x="8074152" y="3959352"/>
+            <a:ext cx="2825496" cy="1170432"/>
+          </a:xfrm>
+          <a:prstGeom prst="rect">
+            <a:avLst/>
+          </a:prstGeom>
+          <a:noFill/>
+          <a:ln/>
+        </p:spPr>
+        <p:txBody>
+          <a:bodyPr wrap="square" lIns="0" tIns="0" rIns="0" bIns="0" rtlCol="0" anchor="t">
+            <a:normAutofit/>
+          </a:bodyPr>
+          <a:lstStyle/>
+          <a:p>
+            <a:pPr indent="0" marL="0">
+              <a:buNone/>
+            </a:pPr>
+            <a:r>
+              <a:rPr lang="en-US" sz="1250" dirty="0">
+                <a:solidFill>
+                  <a:srgbClr val="17364A"/>
+                </a:solidFill>
+                <a:latin typeface="Aptos" pitchFamily="34" charset="0"/>
+                <a:ea typeface="Aptos" pitchFamily="34" charset="-122"/>
+                <a:cs typeface="Aptos" pitchFamily="34" charset="-120"/>
+              </a:rPr>
+              <a:t>Connect the concept to public health decisions, safeguards, documentation, or implementation work.</a:t>
+            </a:r>
+            <a:endParaRPr lang="en-US" sz="1250" dirty="0"/>
           </a:p>
         </p:txBody>
       </p:sp>
@@ -6742,7 +12569,32 @@
       </p:sp>
       <p:sp>
         <p:nvSpPr>
-          <p:cNvPr id="3" name="Text 1"/>
+          <p:cNvPr id="3" name="Shape 1"/>
+          <p:cNvSpPr/>
+          <p:nvPr/>
+        </p:nvSpPr>
+        <p:spPr>
+          <a:xfrm>
+            <a:off x="0" y="164592"/>
+            <a:ext cx="146304" cy="6693408"/>
+          </a:xfrm>
+          <a:prstGeom prst="rect">
+            <a:avLst/>
+          </a:prstGeom>
+          <a:solidFill>
+            <a:srgbClr val="2F8A28"/>
+          </a:solidFill>
+          <a:ln w="12700">
+            <a:solidFill>
+              <a:srgbClr val="2F8A28"/>
+            </a:solidFill>
+            <a:prstDash val="solid"/>
+          </a:ln>
+        </p:spPr>
+      </p:sp>
+      <p:sp>
+        <p:nvSpPr>
+          <p:cNvPr id="4" name="Text 2"/>
           <p:cNvSpPr/>
           <p:nvPr/>
         </p:nvSpPr>
@@ -6781,7 +12633,7 @@
       </p:sp>
       <p:sp>
         <p:nvSpPr>
-          <p:cNvPr id="4" name="Text 2"/>
+          <p:cNvPr id="5" name="Text 3"/>
           <p:cNvSpPr/>
           <p:nvPr/>
         </p:nvSpPr>
@@ -6820,7 +12672,7 @@
       </p:sp>
       <p:sp>
         <p:nvSpPr>
-          <p:cNvPr id="5" name="Text 3"/>
+          <p:cNvPr id="6" name="Text 4"/>
           <p:cNvSpPr/>
           <p:nvPr/>
         </p:nvSpPr>
@@ -6859,13 +12711,77 @@
       </p:sp>
       <p:sp>
         <p:nvSpPr>
-          <p:cNvPr id="6" name="Text 4"/>
+          <p:cNvPr id="7" name="Shape 5"/>
           <p:cNvSpPr/>
           <p:nvPr/>
         </p:nvSpPr>
         <p:spPr>
           <a:xfrm>
             <a:off x="640080" y="658368"/>
+            <a:ext cx="420624" cy="420624"/>
+          </a:xfrm>
+          <a:prstGeom prst="ellipse">
+            <a:avLst/>
+          </a:prstGeom>
+          <a:solidFill>
+            <a:srgbClr val="0068B7"/>
+          </a:solidFill>
+          <a:ln w="12700">
+            <a:solidFill>
+              <a:srgbClr val="0068B7"/>
+            </a:solidFill>
+            <a:prstDash val="solid"/>
+          </a:ln>
+        </p:spPr>
+      </p:sp>
+      <p:sp>
+        <p:nvSpPr>
+          <p:cNvPr id="8" name="Text 6"/>
+          <p:cNvSpPr/>
+          <p:nvPr/>
+        </p:nvSpPr>
+        <p:spPr>
+          <a:xfrm>
+            <a:off x="640080" y="731520"/>
+            <a:ext cx="420624" cy="164592"/>
+          </a:xfrm>
+          <a:prstGeom prst="rect">
+            <a:avLst/>
+          </a:prstGeom>
+          <a:noFill/>
+          <a:ln/>
+        </p:spPr>
+        <p:txBody>
+          <a:bodyPr wrap="square" lIns="0" tIns="0" rIns="0" bIns="0" rtlCol="0" anchor="ctr"/>
+          <a:lstStyle/>
+          <a:p>
+            <a:pPr algn="ctr" indent="0" marL="0">
+              <a:buNone/>
+            </a:pPr>
+            <a:r>
+              <a:rPr lang="en-US" sz="1100" b="1" dirty="0">
+                <a:solidFill>
+                  <a:srgbClr val="FFFFFF"/>
+                </a:solidFill>
+                <a:latin typeface="Aptos" pitchFamily="34" charset="0"/>
+                <a:ea typeface="Aptos" pitchFamily="34" charset="-122"/>
+                <a:cs typeface="Aptos" pitchFamily="34" charset="-120"/>
+              </a:rPr>
+              <a:t>3</a:t>
+            </a:r>
+            <a:endParaRPr lang="en-US" sz="1100" dirty="0"/>
+          </a:p>
+        </p:txBody>
+      </p:sp>
+      <p:sp>
+        <p:nvSpPr>
+          <p:cNvPr id="9" name="Text 7"/>
+          <p:cNvSpPr/>
+          <p:nvPr/>
+        </p:nvSpPr>
+        <p:spPr>
+          <a:xfrm>
+            <a:off x="640080" y="621792"/>
             <a:ext cx="10881360" cy="566928"/>
           </a:xfrm>
           <a:prstGeom prst="rect">
@@ -6892,7 +12808,7 @@
                 <a:ea typeface="Aptos Display" pitchFamily="34" charset="-122"/>
                 <a:cs typeface="Aptos Display" pitchFamily="34" charset="-120"/>
               </a:rPr>
-              <a:t>Public Health Example</a:t>
+              <a:t>Why This Topic Matters for Public Health AI</a:t>
             </a:r>
             <a:endParaRPr lang="en-US" sz="2700" dirty="0"/>
           </a:p>
@@ -6900,32 +12816,178 @@
       </p:sp>
       <p:sp>
         <p:nvSpPr>
-          <p:cNvPr id="7" name="Text 5"/>
-          <p:cNvSpPr/>
-          <p:nvPr/>
-        </p:nvSpPr>
-        <p:spPr>
-          <a:xfrm>
-            <a:off x="822960" y="1325880"/>
-            <a:ext cx="10378440" cy="4800600"/>
-          </a:xfrm>
-          <a:prstGeom prst="rect">
-            <a:avLst/>
-          </a:prstGeom>
-          <a:noFill/>
-          <a:ln/>
-        </p:spPr>
-        <p:txBody>
-          <a:bodyPr wrap="square" lIns="1016" tIns="1016" rIns="1016" bIns="1016" rtlCol="0" anchor="t">
+          <p:cNvPr id="10" name="Text 8"/>
+          <p:cNvSpPr/>
+          <p:nvPr/>
+        </p:nvSpPr>
+        <p:spPr>
+          <a:xfrm>
+            <a:off x="868680" y="1417320"/>
+            <a:ext cx="6675120" cy="4434840"/>
+          </a:xfrm>
+          <a:prstGeom prst="rect">
+            <a:avLst/>
+          </a:prstGeom>
+          <a:noFill/>
+          <a:ln/>
+        </p:spPr>
+        <p:txBody>
+          <a:bodyPr wrap="square" lIns="635" tIns="635" rIns="635" bIns="635" rtlCol="0" anchor="t">
             <a:normAutofit/>
           </a:bodyPr>
           <a:lstStyle/>
           <a:p>
+            <a:r>
+              <a:rPr lang="en-US" sz="1700" dirty="0">
+                <a:solidFill>
+                  <a:srgbClr val="17364A"/>
+                </a:solidFill>
+                <a:latin typeface="Aptos" pitchFamily="34" charset="0"/>
+                <a:ea typeface="Aptos" pitchFamily="34" charset="-122"/>
+                <a:cs typeface="Aptos" pitchFamily="34" charset="-120"/>
+              </a:rPr>
+              <a:t>Measuring AI Value, Performance, and Operational Impact matters because AI systems are embedded in public health programs,.</a:t>
+            </a:r>
+            <a:endParaRPr lang="en-US" sz="1700" dirty="0"/>
+          </a:p>
+          <a:p>
+            <a:r>
+              <a:rPr lang="en-US" sz="1700" dirty="0">
+                <a:solidFill>
+                  <a:srgbClr val="17364A"/>
+                </a:solidFill>
+                <a:latin typeface="Aptos" pitchFamily="34" charset="0"/>
+                <a:ea typeface="Aptos" pitchFamily="34" charset="-122"/>
+                <a:cs typeface="Aptos" pitchFamily="34" charset="-120"/>
+              </a:rPr>
+              <a:t>The topic affects whether AI outputs are accurate, explainable, safe, equitable, secure, and sustainable.</a:t>
+            </a:r>
+            <a:endParaRPr lang="en-US" sz="1700" dirty="0"/>
+          </a:p>
+          <a:p>
+            <a:r>
+              <a:rPr lang="en-US" sz="1700" dirty="0">
+                <a:solidFill>
+                  <a:srgbClr val="17364A"/>
+                </a:solidFill>
+                <a:latin typeface="Aptos" pitchFamily="34" charset="0"/>
+                <a:ea typeface="Aptos" pitchFamily="34" charset="-122"/>
+                <a:cs typeface="Aptos" pitchFamily="34" charset="-120"/>
+              </a:rPr>
+              <a:t>Agencies that ignore this area may create tools that work in a demonstration but fail in actual practice.</a:t>
+            </a:r>
+            <a:endParaRPr lang="en-US" sz="1700" dirty="0"/>
+          </a:p>
+          <a:p>
+            <a:r>
+              <a:rPr lang="en-US" sz="1700" dirty="0">
+                <a:solidFill>
+                  <a:srgbClr val="17364A"/>
+                </a:solidFill>
+                <a:latin typeface="Aptos" pitchFamily="34" charset="0"/>
+                <a:ea typeface="Aptos" pitchFamily="34" charset="-122"/>
+                <a:cs typeface="Aptos" pitchFamily="34" charset="-120"/>
+              </a:rPr>
+              <a:t>The topic also affects accountability.</a:t>
+            </a:r>
+            <a:endParaRPr lang="en-US" sz="1700" dirty="0"/>
+          </a:p>
+        </p:txBody>
+      </p:sp>
+      <p:sp>
+        <p:nvSpPr>
+          <p:cNvPr id="11" name="Shape 9"/>
+          <p:cNvSpPr/>
+          <p:nvPr/>
+        </p:nvSpPr>
+        <p:spPr>
+          <a:xfrm>
+            <a:off x="7909560" y="1417320"/>
+            <a:ext cx="3154680" cy="1828800"/>
+          </a:xfrm>
+          <a:prstGeom prst="roundRect">
+            <a:avLst>
+              <a:gd name="adj" fmla="val 6000"/>
+            </a:avLst>
+          </a:prstGeom>
+          <a:solidFill>
+            <a:srgbClr val="EEF8ED"/>
+          </a:solidFill>
+          <a:ln w="12700">
+            <a:solidFill>
+              <a:srgbClr val="B9D7E6"/>
+            </a:solidFill>
+            <a:prstDash val="solid"/>
+          </a:ln>
+        </p:spPr>
+      </p:sp>
+      <p:sp>
+        <p:nvSpPr>
+          <p:cNvPr id="12" name="Text 10"/>
+          <p:cNvSpPr/>
+          <p:nvPr/>
+        </p:nvSpPr>
+        <p:spPr>
+          <a:xfrm>
+            <a:off x="8074152" y="1563624"/>
+            <a:ext cx="2825496" cy="201168"/>
+          </a:xfrm>
+          <a:prstGeom prst="rect">
+            <a:avLst/>
+          </a:prstGeom>
+          <a:noFill/>
+          <a:ln/>
+        </p:spPr>
+        <p:txBody>
+          <a:bodyPr wrap="square" lIns="0" tIns="0" rIns="0" bIns="0" rtlCol="0" anchor="ctr"/>
+          <a:lstStyle/>
+          <a:p>
             <a:pPr indent="0" marL="0">
               <a:buNone/>
             </a:pPr>
             <a:r>
-              <a:rPr lang="en-US" sz="1420" dirty="0">
+              <a:rPr lang="en-US" sz="950" b="1" dirty="0">
+                <a:solidFill>
+                  <a:srgbClr val="0068B7"/>
+                </a:solidFill>
+                <a:latin typeface="Aptos" pitchFamily="34" charset="0"/>
+                <a:ea typeface="Aptos" pitchFamily="34" charset="-122"/>
+                <a:cs typeface="Aptos" pitchFamily="34" charset="-120"/>
+              </a:rPr>
+              <a:t>Key idea</a:t>
+            </a:r>
+            <a:endParaRPr lang="en-US" sz="950" dirty="0"/>
+          </a:p>
+        </p:txBody>
+      </p:sp>
+      <p:sp>
+        <p:nvSpPr>
+          <p:cNvPr id="13" name="Text 11"/>
+          <p:cNvSpPr/>
+          <p:nvPr/>
+        </p:nvSpPr>
+        <p:spPr>
+          <a:xfrm>
+            <a:off x="8074152" y="1856232"/>
+            <a:ext cx="2825496" cy="1261872"/>
+          </a:xfrm>
+          <a:prstGeom prst="rect">
+            <a:avLst/>
+          </a:prstGeom>
+          <a:noFill/>
+          <a:ln/>
+        </p:spPr>
+        <p:txBody>
+          <a:bodyPr wrap="square" lIns="0" tIns="0" rIns="0" bIns="0" rtlCol="0" anchor="t">
+            <a:normAutofit/>
+          </a:bodyPr>
+          <a:lstStyle/>
+          <a:p>
+            <a:pPr indent="0" marL="0">
+              <a:buNone/>
+            </a:pPr>
+            <a:r>
+              <a:rPr lang="en-US" sz="1250" dirty="0">
                 <a:solidFill>
                   <a:srgbClr val="17364A"/>
                 </a:solidFill>
@@ -6933,9 +12995,116 @@
                 <a:ea typeface="Aptos" pitchFamily="34" charset="-122"/>
                 <a:cs typeface="Aptos" pitchFamily="34" charset="-120"/>
               </a:rPr>
-              <a:t>A health department may deploy AI to summarize case reports with the goal of reducing investigator burden. Accuracy alone is not enough to prove value. The agency should also measure review time, editing burden, error types, investigator satisfaction, case completion timeliness, escalation frequency, subgroup performance, and whether staff continue to trust and use the tool appropriately.</a:t>
-            </a:r>
-            <a:endParaRPr lang="en-US" sz="1420" dirty="0"/>
+              <a:t>Measuring AI Value, Performance, and Operational Impact matters because AI systems are embedded in public health programs,.</a:t>
+            </a:r>
+            <a:endParaRPr lang="en-US" sz="1250" dirty="0"/>
+          </a:p>
+        </p:txBody>
+      </p:sp>
+      <p:sp>
+        <p:nvSpPr>
+          <p:cNvPr id="14" name="Shape 12"/>
+          <p:cNvSpPr/>
+          <p:nvPr/>
+        </p:nvSpPr>
+        <p:spPr>
+          <a:xfrm>
+            <a:off x="7909560" y="3520440"/>
+            <a:ext cx="3154680" cy="1737360"/>
+          </a:xfrm>
+          <a:prstGeom prst="roundRect">
+            <a:avLst>
+              <a:gd name="adj" fmla="val 6316"/>
+            </a:avLst>
+          </a:prstGeom>
+          <a:solidFill>
+            <a:srgbClr val="EAF6F8"/>
+          </a:solidFill>
+          <a:ln w="12700">
+            <a:solidFill>
+              <a:srgbClr val="B9D7E6"/>
+            </a:solidFill>
+            <a:prstDash val="solid"/>
+          </a:ln>
+        </p:spPr>
+      </p:sp>
+      <p:sp>
+        <p:nvSpPr>
+          <p:cNvPr id="15" name="Text 13"/>
+          <p:cNvSpPr/>
+          <p:nvPr/>
+        </p:nvSpPr>
+        <p:spPr>
+          <a:xfrm>
+            <a:off x="8074152" y="3666744"/>
+            <a:ext cx="2825496" cy="201168"/>
+          </a:xfrm>
+          <a:prstGeom prst="rect">
+            <a:avLst/>
+          </a:prstGeom>
+          <a:noFill/>
+          <a:ln/>
+        </p:spPr>
+        <p:txBody>
+          <a:bodyPr wrap="square" lIns="0" tIns="0" rIns="0" bIns="0" rtlCol="0" anchor="ctr"/>
+          <a:lstStyle/>
+          <a:p>
+            <a:pPr indent="0" marL="0">
+              <a:buNone/>
+            </a:pPr>
+            <a:r>
+              <a:rPr lang="en-US" sz="950" b="1" dirty="0">
+                <a:solidFill>
+                  <a:srgbClr val="0068B7"/>
+                </a:solidFill>
+                <a:latin typeface="Aptos" pitchFamily="34" charset="0"/>
+                <a:ea typeface="Aptos" pitchFamily="34" charset="-122"/>
+                <a:cs typeface="Aptos" pitchFamily="34" charset="-120"/>
+              </a:rPr>
+              <a:t>Use this for</a:t>
+            </a:r>
+            <a:endParaRPr lang="en-US" sz="950" dirty="0"/>
+          </a:p>
+        </p:txBody>
+      </p:sp>
+      <p:sp>
+        <p:nvSpPr>
+          <p:cNvPr id="16" name="Text 14"/>
+          <p:cNvSpPr/>
+          <p:nvPr/>
+        </p:nvSpPr>
+        <p:spPr>
+          <a:xfrm>
+            <a:off x="8074152" y="3959352"/>
+            <a:ext cx="2825496" cy="1170432"/>
+          </a:xfrm>
+          <a:prstGeom prst="rect">
+            <a:avLst/>
+          </a:prstGeom>
+          <a:noFill/>
+          <a:ln/>
+        </p:spPr>
+        <p:txBody>
+          <a:bodyPr wrap="square" lIns="0" tIns="0" rIns="0" bIns="0" rtlCol="0" anchor="t">
+            <a:normAutofit/>
+          </a:bodyPr>
+          <a:lstStyle/>
+          <a:p>
+            <a:pPr indent="0" marL="0">
+              <a:buNone/>
+            </a:pPr>
+            <a:r>
+              <a:rPr lang="en-US" sz="1250" dirty="0">
+                <a:solidFill>
+                  <a:srgbClr val="17364A"/>
+                </a:solidFill>
+                <a:latin typeface="Aptos" pitchFamily="34" charset="0"/>
+                <a:ea typeface="Aptos" pitchFamily="34" charset="-122"/>
+                <a:cs typeface="Aptos" pitchFamily="34" charset="-120"/>
+              </a:rPr>
+              <a:t>Connect the concept to public health decisions, safeguards, documentation, or implementation work.</a:t>
+            </a:r>
+            <a:endParaRPr lang="en-US" sz="1250" dirty="0"/>
           </a:p>
         </p:txBody>
       </p:sp>
@@ -6998,7 +13167,32 @@
       </p:sp>
       <p:sp>
         <p:nvSpPr>
-          <p:cNvPr id="3" name="Text 1"/>
+          <p:cNvPr id="3" name="Shape 1"/>
+          <p:cNvSpPr/>
+          <p:nvPr/>
+        </p:nvSpPr>
+        <p:spPr>
+          <a:xfrm>
+            <a:off x="0" y="164592"/>
+            <a:ext cx="146304" cy="6693408"/>
+          </a:xfrm>
+          <a:prstGeom prst="rect">
+            <a:avLst/>
+          </a:prstGeom>
+          <a:solidFill>
+            <a:srgbClr val="2F8A28"/>
+          </a:solidFill>
+          <a:ln w="12700">
+            <a:solidFill>
+              <a:srgbClr val="2F8A28"/>
+            </a:solidFill>
+            <a:prstDash val="solid"/>
+          </a:ln>
+        </p:spPr>
+      </p:sp>
+      <p:sp>
+        <p:nvSpPr>
+          <p:cNvPr id="4" name="Text 2"/>
           <p:cNvSpPr/>
           <p:nvPr/>
         </p:nvSpPr>
@@ -7037,7 +13231,7 @@
       </p:sp>
       <p:sp>
         <p:nvSpPr>
-          <p:cNvPr id="4" name="Text 2"/>
+          <p:cNvPr id="5" name="Text 3"/>
           <p:cNvSpPr/>
           <p:nvPr/>
         </p:nvSpPr>
@@ -7076,7 +13270,7 @@
       </p:sp>
       <p:sp>
         <p:nvSpPr>
-          <p:cNvPr id="5" name="Text 3"/>
+          <p:cNvPr id="6" name="Text 4"/>
           <p:cNvSpPr/>
           <p:nvPr/>
         </p:nvSpPr>
@@ -7115,13 +13309,77 @@
       </p:sp>
       <p:sp>
         <p:nvSpPr>
-          <p:cNvPr id="6" name="Text 4"/>
+          <p:cNvPr id="7" name="Shape 5"/>
           <p:cNvSpPr/>
           <p:nvPr/>
         </p:nvSpPr>
         <p:spPr>
           <a:xfrm>
             <a:off x="640080" y="658368"/>
+            <a:ext cx="420624" cy="420624"/>
+          </a:xfrm>
+          <a:prstGeom prst="ellipse">
+            <a:avLst/>
+          </a:prstGeom>
+          <a:solidFill>
+            <a:srgbClr val="0068B7"/>
+          </a:solidFill>
+          <a:ln w="12700">
+            <a:solidFill>
+              <a:srgbClr val="0068B7"/>
+            </a:solidFill>
+            <a:prstDash val="solid"/>
+          </a:ln>
+        </p:spPr>
+      </p:sp>
+      <p:sp>
+        <p:nvSpPr>
+          <p:cNvPr id="8" name="Text 6"/>
+          <p:cNvSpPr/>
+          <p:nvPr/>
+        </p:nvSpPr>
+        <p:spPr>
+          <a:xfrm>
+            <a:off x="640080" y="731520"/>
+            <a:ext cx="420624" cy="164592"/>
+          </a:xfrm>
+          <a:prstGeom prst="rect">
+            <a:avLst/>
+          </a:prstGeom>
+          <a:noFill/>
+          <a:ln/>
+        </p:spPr>
+        <p:txBody>
+          <a:bodyPr wrap="square" lIns="0" tIns="0" rIns="0" bIns="0" rtlCol="0" anchor="ctr"/>
+          <a:lstStyle/>
+          <a:p>
+            <a:pPr algn="ctr" indent="0" marL="0">
+              <a:buNone/>
+            </a:pPr>
+            <a:r>
+              <a:rPr lang="en-US" sz="1100" b="1" dirty="0">
+                <a:solidFill>
+                  <a:srgbClr val="FFFFFF"/>
+                </a:solidFill>
+                <a:latin typeface="Aptos" pitchFamily="34" charset="0"/>
+                <a:ea typeface="Aptos" pitchFamily="34" charset="-122"/>
+                <a:cs typeface="Aptos" pitchFamily="34" charset="-120"/>
+              </a:rPr>
+              <a:t>4</a:t>
+            </a:r>
+            <a:endParaRPr lang="en-US" sz="1100" dirty="0"/>
+          </a:p>
+        </p:txBody>
+      </p:sp>
+      <p:sp>
+        <p:nvSpPr>
+          <p:cNvPr id="9" name="Text 7"/>
+          <p:cNvSpPr/>
+          <p:nvPr/>
+        </p:nvSpPr>
+        <p:spPr>
+          <a:xfrm>
+            <a:off x="640080" y="621792"/>
             <a:ext cx="10881360" cy="566928"/>
           </a:xfrm>
           <a:prstGeom prst="rect">
@@ -7148,7 +13406,7 @@
                 <a:ea typeface="Aptos Display" pitchFamily="34" charset="-122"/>
                 <a:cs typeface="Aptos Display" pitchFamily="34" charset="-120"/>
               </a:rPr>
-              <a:t>Technical Deep Dive</a:t>
+              <a:t>Core Concepts</a:t>
             </a:r>
             <a:endParaRPr lang="en-US" sz="2700" dirty="0"/>
           </a:p>
@@ -7156,32 +13414,178 @@
       </p:sp>
       <p:sp>
         <p:nvSpPr>
-          <p:cNvPr id="7" name="Text 5"/>
-          <p:cNvSpPr/>
-          <p:nvPr/>
-        </p:nvSpPr>
-        <p:spPr>
-          <a:xfrm>
-            <a:off x="822960" y="1325880"/>
-            <a:ext cx="10378440" cy="4800600"/>
-          </a:xfrm>
-          <a:prstGeom prst="rect">
-            <a:avLst/>
-          </a:prstGeom>
-          <a:noFill/>
-          <a:ln/>
-        </p:spPr>
-        <p:txBody>
-          <a:bodyPr wrap="square" lIns="1016" tIns="1016" rIns="1016" bIns="1016" rtlCol="0" anchor="t">
+          <p:cNvPr id="10" name="Text 8"/>
+          <p:cNvSpPr/>
+          <p:nvPr/>
+        </p:nvSpPr>
+        <p:spPr>
+          <a:xfrm>
+            <a:off x="868680" y="1417320"/>
+            <a:ext cx="6675120" cy="4434840"/>
+          </a:xfrm>
+          <a:prstGeom prst="rect">
+            <a:avLst/>
+          </a:prstGeom>
+          <a:noFill/>
+          <a:ln/>
+        </p:spPr>
+        <p:txBody>
+          <a:bodyPr wrap="square" lIns="635" tIns="635" rIns="635" bIns="635" rtlCol="0" anchor="t">
             <a:normAutofit/>
           </a:bodyPr>
           <a:lstStyle/>
           <a:p>
+            <a:r>
+              <a:rPr lang="en-US" sz="1700" dirty="0">
+                <a:solidFill>
+                  <a:srgbClr val="17364A"/>
+                </a:solidFill>
+                <a:latin typeface="Aptos" pitchFamily="34" charset="0"/>
+                <a:ea typeface="Aptos" pitchFamily="34" charset="-122"/>
+                <a:cs typeface="Aptos" pitchFamily="34" charset="-120"/>
+              </a:rPr>
+              <a:t>AI value is the benefit created by an AI-supported workflow relative to its costs, risks, and alternatives.</a:t>
+            </a:r>
+            <a:endParaRPr lang="en-US" sz="1700" dirty="0"/>
+          </a:p>
+          <a:p>
+            <a:r>
+              <a:rPr lang="en-US" sz="1700" dirty="0">
+                <a:solidFill>
+                  <a:srgbClr val="17364A"/>
+                </a:solidFill>
+                <a:latin typeface="Aptos" pitchFamily="34" charset="0"/>
+                <a:ea typeface="Aptos" pitchFamily="34" charset="-122"/>
+                <a:cs typeface="Aptos" pitchFamily="34" charset="-120"/>
+              </a:rPr>
+              <a:t>Value may include faster response, improved quality, reduced burden, better access, stronger equity, improved.</a:t>
+            </a:r>
+            <a:endParaRPr lang="en-US" sz="1700" dirty="0"/>
+          </a:p>
+          <a:p>
+            <a:r>
+              <a:rPr lang="en-US" sz="1700" dirty="0">
+                <a:solidFill>
+                  <a:srgbClr val="17364A"/>
+                </a:solidFill>
+                <a:latin typeface="Aptos" pitchFamily="34" charset="0"/>
+                <a:ea typeface="Aptos" pitchFamily="34" charset="-122"/>
+                <a:cs typeface="Aptos" pitchFamily="34" charset="-120"/>
+              </a:rPr>
+              <a:t>Model performance measures how well the AI system performs a technical task.</a:t>
+            </a:r>
+            <a:endParaRPr lang="en-US" sz="1700" dirty="0"/>
+          </a:p>
+          <a:p>
+            <a:r>
+              <a:rPr lang="en-US" sz="1700" dirty="0">
+                <a:solidFill>
+                  <a:srgbClr val="17364A"/>
+                </a:solidFill>
+                <a:latin typeface="Aptos" pitchFamily="34" charset="0"/>
+                <a:ea typeface="Aptos" pitchFamily="34" charset="-122"/>
+                <a:cs typeface="Aptos" pitchFamily="34" charset="-120"/>
+              </a:rPr>
+              <a:t>Operational impact measures whether the workflow actually improves public health practice.</a:t>
+            </a:r>
+            <a:endParaRPr lang="en-US" sz="1700" dirty="0"/>
+          </a:p>
+        </p:txBody>
+      </p:sp>
+      <p:sp>
+        <p:nvSpPr>
+          <p:cNvPr id="11" name="Shape 9"/>
+          <p:cNvSpPr/>
+          <p:nvPr/>
+        </p:nvSpPr>
+        <p:spPr>
+          <a:xfrm>
+            <a:off x="7909560" y="1417320"/>
+            <a:ext cx="3154680" cy="1828800"/>
+          </a:xfrm>
+          <a:prstGeom prst="roundRect">
+            <a:avLst>
+              <a:gd name="adj" fmla="val 6000"/>
+            </a:avLst>
+          </a:prstGeom>
+          <a:solidFill>
+            <a:srgbClr val="EEF8ED"/>
+          </a:solidFill>
+          <a:ln w="12700">
+            <a:solidFill>
+              <a:srgbClr val="B9D7E6"/>
+            </a:solidFill>
+            <a:prstDash val="solid"/>
+          </a:ln>
+        </p:spPr>
+      </p:sp>
+      <p:sp>
+        <p:nvSpPr>
+          <p:cNvPr id="12" name="Text 10"/>
+          <p:cNvSpPr/>
+          <p:nvPr/>
+        </p:nvSpPr>
+        <p:spPr>
+          <a:xfrm>
+            <a:off x="8074152" y="1563624"/>
+            <a:ext cx="2825496" cy="201168"/>
+          </a:xfrm>
+          <a:prstGeom prst="rect">
+            <a:avLst/>
+          </a:prstGeom>
+          <a:noFill/>
+          <a:ln/>
+        </p:spPr>
+        <p:txBody>
+          <a:bodyPr wrap="square" lIns="0" tIns="0" rIns="0" bIns="0" rtlCol="0" anchor="ctr"/>
+          <a:lstStyle/>
+          <a:p>
             <a:pPr indent="0" marL="0">
               <a:buNone/>
             </a:pPr>
             <a:r>
-              <a:rPr lang="en-US" sz="1420" dirty="0">
+              <a:rPr lang="en-US" sz="950" b="1" dirty="0">
+                <a:solidFill>
+                  <a:srgbClr val="0068B7"/>
+                </a:solidFill>
+                <a:latin typeface="Aptos" pitchFamily="34" charset="0"/>
+                <a:ea typeface="Aptos" pitchFamily="34" charset="-122"/>
+                <a:cs typeface="Aptos" pitchFamily="34" charset="-120"/>
+              </a:rPr>
+              <a:t>Key idea</a:t>
+            </a:r>
+            <a:endParaRPr lang="en-US" sz="950" dirty="0"/>
+          </a:p>
+        </p:txBody>
+      </p:sp>
+      <p:sp>
+        <p:nvSpPr>
+          <p:cNvPr id="13" name="Text 11"/>
+          <p:cNvSpPr/>
+          <p:nvPr/>
+        </p:nvSpPr>
+        <p:spPr>
+          <a:xfrm>
+            <a:off x="8074152" y="1856232"/>
+            <a:ext cx="2825496" cy="1261872"/>
+          </a:xfrm>
+          <a:prstGeom prst="rect">
+            <a:avLst/>
+          </a:prstGeom>
+          <a:noFill/>
+          <a:ln/>
+        </p:spPr>
+        <p:txBody>
+          <a:bodyPr wrap="square" lIns="0" tIns="0" rIns="0" bIns="0" rtlCol="0" anchor="t">
+            <a:normAutofit/>
+          </a:bodyPr>
+          <a:lstStyle/>
+          <a:p>
+            <a:pPr indent="0" marL="0">
+              <a:buNone/>
+            </a:pPr>
+            <a:r>
+              <a:rPr lang="en-US" sz="1250" dirty="0">
                 <a:solidFill>
                   <a:srgbClr val="17364A"/>
                 </a:solidFill>
@@ -7189,9 +13593,116 @@
                 <a:ea typeface="Aptos" pitchFamily="34" charset="-122"/>
                 <a:cs typeface="Aptos" pitchFamily="34" charset="-120"/>
               </a:rPr>
-              <a:t>Value measurement begins with a theory of change. The team should explain how the AI capability is expected to improve the workflow and which outcomes should change. For example, a summarization tool may reduce review time, improve completeness, and allow staff to focus on complex cases. These assumptions should be tested rather than assumed. Measures should include technical, operational, equity, and governance indicators. Technical indicators may include accuracy, error rates, latency, and uptime. Operational indicators may include timeliness, backlog, staff burden, user adoption, and quality. Equity indicators may include subgroup performance, access, language, disability, and community impact. Governance indicators may include documentation completeness, incident reports, and monitoring review completion. Agencies should define action thresholds. If the tool produces too many errors, increases burden, performs poorly for a subgroup, or creates trust concerns, the agency should know whether to retrain, revise, restrict, pause, or retire the tool. Value measurement should support decisions, not merely reporting.</a:t>
-            </a:r>
-            <a:endParaRPr lang="en-US" sz="1420" dirty="0"/>
+              <a:t>AI value is the benefit created by an AI-supported workflow relative to its costs, risks, and alternatives.</a:t>
+            </a:r>
+            <a:endParaRPr lang="en-US" sz="1250" dirty="0"/>
+          </a:p>
+        </p:txBody>
+      </p:sp>
+      <p:sp>
+        <p:nvSpPr>
+          <p:cNvPr id="14" name="Shape 12"/>
+          <p:cNvSpPr/>
+          <p:nvPr/>
+        </p:nvSpPr>
+        <p:spPr>
+          <a:xfrm>
+            <a:off x="7909560" y="3520440"/>
+            <a:ext cx="3154680" cy="1737360"/>
+          </a:xfrm>
+          <a:prstGeom prst="roundRect">
+            <a:avLst>
+              <a:gd name="adj" fmla="val 6316"/>
+            </a:avLst>
+          </a:prstGeom>
+          <a:solidFill>
+            <a:srgbClr val="EAF6F8"/>
+          </a:solidFill>
+          <a:ln w="12700">
+            <a:solidFill>
+              <a:srgbClr val="B9D7E6"/>
+            </a:solidFill>
+            <a:prstDash val="solid"/>
+          </a:ln>
+        </p:spPr>
+      </p:sp>
+      <p:sp>
+        <p:nvSpPr>
+          <p:cNvPr id="15" name="Text 13"/>
+          <p:cNvSpPr/>
+          <p:nvPr/>
+        </p:nvSpPr>
+        <p:spPr>
+          <a:xfrm>
+            <a:off x="8074152" y="3666744"/>
+            <a:ext cx="2825496" cy="201168"/>
+          </a:xfrm>
+          <a:prstGeom prst="rect">
+            <a:avLst/>
+          </a:prstGeom>
+          <a:noFill/>
+          <a:ln/>
+        </p:spPr>
+        <p:txBody>
+          <a:bodyPr wrap="square" lIns="0" tIns="0" rIns="0" bIns="0" rtlCol="0" anchor="ctr"/>
+          <a:lstStyle/>
+          <a:p>
+            <a:pPr indent="0" marL="0">
+              <a:buNone/>
+            </a:pPr>
+            <a:r>
+              <a:rPr lang="en-US" sz="950" b="1" dirty="0">
+                <a:solidFill>
+                  <a:srgbClr val="0068B7"/>
+                </a:solidFill>
+                <a:latin typeface="Aptos" pitchFamily="34" charset="0"/>
+                <a:ea typeface="Aptos" pitchFamily="34" charset="-122"/>
+                <a:cs typeface="Aptos" pitchFamily="34" charset="-120"/>
+              </a:rPr>
+              <a:t>Use this for</a:t>
+            </a:r>
+            <a:endParaRPr lang="en-US" sz="950" dirty="0"/>
+          </a:p>
+        </p:txBody>
+      </p:sp>
+      <p:sp>
+        <p:nvSpPr>
+          <p:cNvPr id="16" name="Text 14"/>
+          <p:cNvSpPr/>
+          <p:nvPr/>
+        </p:nvSpPr>
+        <p:spPr>
+          <a:xfrm>
+            <a:off x="8074152" y="3959352"/>
+            <a:ext cx="2825496" cy="1170432"/>
+          </a:xfrm>
+          <a:prstGeom prst="rect">
+            <a:avLst/>
+          </a:prstGeom>
+          <a:noFill/>
+          <a:ln/>
+        </p:spPr>
+        <p:txBody>
+          <a:bodyPr wrap="square" lIns="0" tIns="0" rIns="0" bIns="0" rtlCol="0" anchor="t">
+            <a:normAutofit/>
+          </a:bodyPr>
+          <a:lstStyle/>
+          <a:p>
+            <a:pPr indent="0" marL="0">
+              <a:buNone/>
+            </a:pPr>
+            <a:r>
+              <a:rPr lang="en-US" sz="1250" dirty="0">
+                <a:solidFill>
+                  <a:srgbClr val="17364A"/>
+                </a:solidFill>
+                <a:latin typeface="Aptos" pitchFamily="34" charset="0"/>
+                <a:ea typeface="Aptos" pitchFamily="34" charset="-122"/>
+                <a:cs typeface="Aptos" pitchFamily="34" charset="-120"/>
+              </a:rPr>
+              <a:t>Connect the concept to public health decisions, safeguards, documentation, or implementation work.</a:t>
+            </a:r>
+            <a:endParaRPr lang="en-US" sz="1250" dirty="0"/>
           </a:p>
         </p:txBody>
       </p:sp>

--- a/downloads/presentations/modules/lesson-59-measuring-ai-value-performance-and-operational-impact.pptx
+++ b/downloads/presentations/modules/lesson-59-measuring-ai-value-performance-and-operational-impact.pptx
@@ -2812,6 +2812,45 @@
           </a:p>
         </p:txBody>
       </p:sp>
+      <p:sp>
+        <p:nvSpPr>
+          <p:cNvPr id="8" name="Text 5"/>
+          <p:cNvSpPr/>
+          <p:nvPr/>
+        </p:nvSpPr>
+        <p:spPr>
+          <a:xfrm>
+            <a:off x="11137392" y="6510528"/>
+            <a:ext cx="411480" cy="201168"/>
+          </a:xfrm>
+          <a:prstGeom prst="rect">
+            <a:avLst/>
+          </a:prstGeom>
+          <a:noFill/>
+          <a:ln/>
+        </p:spPr>
+        <p:txBody>
+          <a:bodyPr wrap="square" lIns="0" tIns="0" rIns="0" bIns="0" rtlCol="0" anchor="ctr"/>
+          <a:lstStyle/>
+          <a:p>
+            <a:pPr algn="r" indent="0" marL="0">
+              <a:buNone/>
+            </a:pPr>
+            <a:r>
+              <a:rPr lang="en-US" sz="900" dirty="0">
+                <a:solidFill>
+                  <a:srgbClr val="5F7181"/>
+                </a:solidFill>
+                <a:latin typeface="Aptos" pitchFamily="34" charset="0"/>
+                <a:ea typeface="Aptos" pitchFamily="34" charset="-122"/>
+                <a:cs typeface="Aptos" pitchFamily="34" charset="-120"/>
+              </a:rPr>
+              <a:t>1</a:t>
+            </a:r>
+            <a:endParaRPr lang="en-US" sz="900" dirty="0"/>
+          </a:p>
+        </p:txBody>
+      </p:sp>
     </p:spTree>
   </p:cSld>
   <p:clrMapOvr>
@@ -3005,7 +3044,7 @@
                 <a:ea typeface="Aptos" pitchFamily="34" charset="-122"/>
                 <a:cs typeface="Aptos" pitchFamily="34" charset="-120"/>
               </a:rPr>
-              <a:t>© Paula Soper</a:t>
+              <a:t>Â© Paula Soper</a:t>
             </a:r>
             <a:endParaRPr lang="en-US" sz="800" dirty="0"/>
           </a:p>
@@ -3013,7 +3052,46 @@
       </p:sp>
       <p:sp>
         <p:nvSpPr>
-          <p:cNvPr id="7" name="Shape 5"/>
+          <p:cNvPr id="7" name="Text 5"/>
+          <p:cNvSpPr/>
+          <p:nvPr/>
+        </p:nvSpPr>
+        <p:spPr>
+          <a:xfrm>
+            <a:off x="11137392" y="6510528"/>
+            <a:ext cx="411480" cy="201168"/>
+          </a:xfrm>
+          <a:prstGeom prst="rect">
+            <a:avLst/>
+          </a:prstGeom>
+          <a:noFill/>
+          <a:ln/>
+        </p:spPr>
+        <p:txBody>
+          <a:bodyPr wrap="square" lIns="0" tIns="0" rIns="0" bIns="0" rtlCol="0" anchor="ctr"/>
+          <a:lstStyle/>
+          <a:p>
+            <a:pPr algn="r" indent="0" marL="0">
+              <a:buNone/>
+            </a:pPr>
+            <a:r>
+              <a:rPr lang="en-US" sz="900" dirty="0">
+                <a:solidFill>
+                  <a:srgbClr val="5F7181"/>
+                </a:solidFill>
+                <a:latin typeface="Aptos" pitchFamily="34" charset="0"/>
+                <a:ea typeface="Aptos" pitchFamily="34" charset="-122"/>
+                <a:cs typeface="Aptos" pitchFamily="34" charset="-120"/>
+              </a:rPr>
+              <a:t>10</a:t>
+            </a:r>
+            <a:endParaRPr lang="en-US" sz="900" dirty="0"/>
+          </a:p>
+        </p:txBody>
+      </p:sp>
+      <p:sp>
+        <p:nvSpPr>
+          <p:cNvPr id="8" name="Shape 6"/>
           <p:cNvSpPr/>
           <p:nvPr/>
         </p:nvSpPr>
@@ -3038,7 +3116,7 @@
       </p:sp>
       <p:sp>
         <p:nvSpPr>
-          <p:cNvPr id="8" name="Text 6"/>
+          <p:cNvPr id="9" name="Text 7"/>
           <p:cNvSpPr/>
           <p:nvPr/>
         </p:nvSpPr>
@@ -3077,14 +3155,14 @@
       </p:sp>
       <p:sp>
         <p:nvSpPr>
-          <p:cNvPr id="9" name="Text 7"/>
+          <p:cNvPr id="10" name="Text 8"/>
           <p:cNvSpPr/>
           <p:nvPr/>
         </p:nvSpPr>
         <p:spPr>
           <a:xfrm>
             <a:off x="640080" y="621792"/>
-            <a:ext cx="10881360" cy="566928"/>
+            <a:ext cx="10881360" cy="713232"/>
           </a:xfrm>
           <a:prstGeom prst="rect">
             <a:avLst/>
@@ -3102,7 +3180,7 @@
               <a:buNone/>
             </a:pPr>
             <a:r>
-              <a:rPr lang="en-US" sz="2700" b="1" dirty="0">
+              <a:rPr lang="en-US" sz="3400" b="1" dirty="0">
                 <a:solidFill>
                   <a:srgbClr val="003A63"/>
                 </a:solidFill>
@@ -3112,20 +3190,20 @@
               </a:rPr>
               <a:t>Public Health Example</a:t>
             </a:r>
-            <a:endParaRPr lang="en-US" sz="2700" dirty="0"/>
-          </a:p>
-        </p:txBody>
-      </p:sp>
-      <p:sp>
-        <p:nvSpPr>
-          <p:cNvPr id="10" name="Text 8"/>
-          <p:cNvSpPr/>
-          <p:nvPr/>
-        </p:nvSpPr>
-        <p:spPr>
-          <a:xfrm>
-            <a:off x="868680" y="1417320"/>
-            <a:ext cx="6675120" cy="4434840"/>
+            <a:endParaRPr lang="en-US" sz="3400" dirty="0"/>
+          </a:p>
+        </p:txBody>
+      </p:sp>
+      <p:sp>
+        <p:nvSpPr>
+          <p:cNvPr id="11" name="Text 9"/>
+          <p:cNvSpPr/>
+          <p:nvPr/>
+        </p:nvSpPr>
+        <p:spPr>
+          <a:xfrm>
+            <a:off x="868680" y="1508760"/>
+            <a:ext cx="6537960" cy="4160520"/>
           </a:xfrm>
           <a:prstGeom prst="rect">
             <a:avLst/>
@@ -3140,7 +3218,7 @@
           <a:lstStyle/>
           <a:p>
             <a:r>
-              <a:rPr lang="en-US" sz="1700" dirty="0">
+              <a:rPr lang="en-US" sz="2100" dirty="0">
                 <a:solidFill>
                   <a:srgbClr val="17364A"/>
                 </a:solidFill>
@@ -3148,13 +3226,13 @@
                 <a:ea typeface="Aptos" pitchFamily="34" charset="-122"/>
                 <a:cs typeface="Aptos" pitchFamily="34" charset="-120"/>
               </a:rPr>
-              <a:t>A health department may deploy AI to summarize case reports with the goal of reducing investigator burden.</a:t>
-            </a:r>
-            <a:endParaRPr lang="en-US" sz="1700" dirty="0"/>
-          </a:p>
-          <a:p>
-            <a:r>
-              <a:rPr lang="en-US" sz="1700" dirty="0">
+              <a:t>A health department may deploy AI to summarize case reports with the goal of reducing investigator.</a:t>
+            </a:r>
+            <a:endParaRPr lang="en-US" sz="2100" dirty="0"/>
+          </a:p>
+          <a:p>
+            <a:r>
+              <a:rPr lang="en-US" sz="2100" dirty="0">
                 <a:solidFill>
                   <a:srgbClr val="17364A"/>
                 </a:solidFill>
@@ -3164,11 +3242,11 @@
               </a:rPr>
               <a:t>Accuracy alone is not enough to prove value.</a:t>
             </a:r>
-            <a:endParaRPr lang="en-US" sz="1700" dirty="0"/>
-          </a:p>
-          <a:p>
-            <a:r>
-              <a:rPr lang="en-US" sz="1700" dirty="0">
+            <a:endParaRPr lang="en-US" sz="2100" dirty="0"/>
+          </a:p>
+          <a:p>
+            <a:r>
+              <a:rPr lang="en-US" sz="2100" dirty="0">
                 <a:solidFill>
                   <a:srgbClr val="17364A"/>
                 </a:solidFill>
@@ -3176,15 +3254,15 @@
                 <a:ea typeface="Aptos" pitchFamily="34" charset="-122"/>
                 <a:cs typeface="Aptos" pitchFamily="34" charset="-120"/>
               </a:rPr>
-              <a:t>The agency should also measure review time, editing burden, error types, investigator satisfaction, case completion.</a:t>
-            </a:r>
-            <a:endParaRPr lang="en-US" sz="1700" dirty="0"/>
-          </a:p>
-        </p:txBody>
-      </p:sp>
-      <p:sp>
-        <p:nvSpPr>
-          <p:cNvPr id="11" name="Shape 9"/>
+              <a:t>The agency should also measure review time, editing burden, error types, investigator satisfaction,.</a:t>
+            </a:r>
+            <a:endParaRPr lang="en-US" sz="2100" dirty="0"/>
+          </a:p>
+        </p:txBody>
+      </p:sp>
+      <p:sp>
+        <p:nvSpPr>
+          <p:cNvPr id="12" name="Shape 10"/>
           <p:cNvSpPr/>
           <p:nvPr/>
         </p:nvSpPr>
@@ -3211,14 +3289,14 @@
       </p:sp>
       <p:sp>
         <p:nvSpPr>
-          <p:cNvPr id="12" name="Text 10"/>
+          <p:cNvPr id="13" name="Text 11"/>
           <p:cNvSpPr/>
           <p:nvPr/>
         </p:nvSpPr>
         <p:spPr>
           <a:xfrm>
             <a:off x="8074152" y="1563624"/>
-            <a:ext cx="2825496" cy="201168"/>
+            <a:ext cx="2825496" cy="256032"/>
           </a:xfrm>
           <a:prstGeom prst="rect">
             <a:avLst/>
@@ -3234,7 +3312,7 @@
               <a:buNone/>
             </a:pPr>
             <a:r>
-              <a:rPr lang="en-US" sz="950" b="1" dirty="0">
+              <a:rPr lang="en-US" sz="1300" b="1" dirty="0">
                 <a:solidFill>
                   <a:srgbClr val="0068B7"/>
                 </a:solidFill>
@@ -3244,20 +3322,20 @@
               </a:rPr>
               <a:t>Key idea</a:t>
             </a:r>
-            <a:endParaRPr lang="en-US" sz="950" dirty="0"/>
-          </a:p>
-        </p:txBody>
-      </p:sp>
-      <p:sp>
-        <p:nvSpPr>
-          <p:cNvPr id="13" name="Text 11"/>
-          <p:cNvSpPr/>
-          <p:nvPr/>
-        </p:nvSpPr>
-        <p:spPr>
-          <a:xfrm>
-            <a:off x="8074152" y="1856232"/>
-            <a:ext cx="2825496" cy="1261872"/>
+            <a:endParaRPr lang="en-US" sz="1300" dirty="0"/>
+          </a:p>
+        </p:txBody>
+      </p:sp>
+      <p:sp>
+        <p:nvSpPr>
+          <p:cNvPr id="14" name="Text 12"/>
+          <p:cNvSpPr/>
+          <p:nvPr/>
+        </p:nvSpPr>
+        <p:spPr>
+          <a:xfrm>
+            <a:off x="8074152" y="1920240"/>
+            <a:ext cx="2825496" cy="1188720"/>
           </a:xfrm>
           <a:prstGeom prst="rect">
             <a:avLst/>
@@ -3275,7 +3353,7 @@
               <a:buNone/>
             </a:pPr>
             <a:r>
-              <a:rPr lang="en-US" sz="1250" dirty="0">
+              <a:rPr lang="en-US" sz="1550" dirty="0">
                 <a:solidFill>
                   <a:srgbClr val="17364A"/>
                 </a:solidFill>
@@ -3283,15 +3361,15 @@
                 <a:ea typeface="Aptos" pitchFamily="34" charset="-122"/>
                 <a:cs typeface="Aptos" pitchFamily="34" charset="-120"/>
               </a:rPr>
-              <a:t>A health department may deploy AI to summarize case reports with the goal of reducing investigator burden.</a:t>
-            </a:r>
-            <a:endParaRPr lang="en-US" sz="1250" dirty="0"/>
-          </a:p>
-        </p:txBody>
-      </p:sp>
-      <p:sp>
-        <p:nvSpPr>
-          <p:cNvPr id="14" name="Shape 12"/>
+              <a:t>A health department may deploy AI to summarize case reports with the goal of reducing investigator.</a:t>
+            </a:r>
+            <a:endParaRPr lang="en-US" sz="1550" dirty="0"/>
+          </a:p>
+        </p:txBody>
+      </p:sp>
+      <p:sp>
+        <p:nvSpPr>
+          <p:cNvPr id="15" name="Shape 13"/>
           <p:cNvSpPr/>
           <p:nvPr/>
         </p:nvSpPr>
@@ -3318,14 +3396,14 @@
       </p:sp>
       <p:sp>
         <p:nvSpPr>
-          <p:cNvPr id="15" name="Text 13"/>
+          <p:cNvPr id="16" name="Text 14"/>
           <p:cNvSpPr/>
           <p:nvPr/>
         </p:nvSpPr>
         <p:spPr>
           <a:xfrm>
             <a:off x="8074152" y="3666744"/>
-            <a:ext cx="2825496" cy="201168"/>
+            <a:ext cx="2825496" cy="256032"/>
           </a:xfrm>
           <a:prstGeom prst="rect">
             <a:avLst/>
@@ -3341,7 +3419,7 @@
               <a:buNone/>
             </a:pPr>
             <a:r>
-              <a:rPr lang="en-US" sz="950" b="1" dirty="0">
+              <a:rPr lang="en-US" sz="1300" b="1" dirty="0">
                 <a:solidFill>
                   <a:srgbClr val="0068B7"/>
                 </a:solidFill>
@@ -3351,20 +3429,20 @@
               </a:rPr>
               <a:t>Use this for</a:t>
             </a:r>
-            <a:endParaRPr lang="en-US" sz="950" dirty="0"/>
-          </a:p>
-        </p:txBody>
-      </p:sp>
-      <p:sp>
-        <p:nvSpPr>
-          <p:cNvPr id="16" name="Text 14"/>
-          <p:cNvSpPr/>
-          <p:nvPr/>
-        </p:nvSpPr>
-        <p:spPr>
-          <a:xfrm>
-            <a:off x="8074152" y="3959352"/>
-            <a:ext cx="2825496" cy="1170432"/>
+            <a:endParaRPr lang="en-US" sz="1300" dirty="0"/>
+          </a:p>
+        </p:txBody>
+      </p:sp>
+      <p:sp>
+        <p:nvSpPr>
+          <p:cNvPr id="17" name="Text 15"/>
+          <p:cNvSpPr/>
+          <p:nvPr/>
+        </p:nvSpPr>
+        <p:spPr>
+          <a:xfrm>
+            <a:off x="8074152" y="4023360"/>
+            <a:ext cx="2825496" cy="1097280"/>
           </a:xfrm>
           <a:prstGeom prst="rect">
             <a:avLst/>
@@ -3382,7 +3460,7 @@
               <a:buNone/>
             </a:pPr>
             <a:r>
-              <a:rPr lang="en-US" sz="1250" dirty="0">
+              <a:rPr lang="en-US" sz="1550" dirty="0">
                 <a:solidFill>
                   <a:srgbClr val="17364A"/>
                 </a:solidFill>
@@ -3392,7 +3470,7 @@
               </a:rPr>
               <a:t>Connect the concept to public health decisions, safeguards, documentation, or implementation work.</a:t>
             </a:r>
-            <a:endParaRPr lang="en-US" sz="1250" dirty="0"/>
+            <a:endParaRPr lang="en-US" sz="1550" dirty="0"/>
           </a:p>
         </p:txBody>
       </p:sp>
@@ -3589,7 +3667,7 @@
                 <a:ea typeface="Aptos" pitchFamily="34" charset="-122"/>
                 <a:cs typeface="Aptos" pitchFamily="34" charset="-120"/>
               </a:rPr>
-              <a:t>© Paula Soper</a:t>
+              <a:t>Â© Paula Soper</a:t>
             </a:r>
             <a:endParaRPr lang="en-US" sz="800" dirty="0"/>
           </a:p>
@@ -3597,7 +3675,46 @@
       </p:sp>
       <p:sp>
         <p:nvSpPr>
-          <p:cNvPr id="7" name="Shape 5"/>
+          <p:cNvPr id="7" name="Text 5"/>
+          <p:cNvSpPr/>
+          <p:nvPr/>
+        </p:nvSpPr>
+        <p:spPr>
+          <a:xfrm>
+            <a:off x="11137392" y="6510528"/>
+            <a:ext cx="411480" cy="201168"/>
+          </a:xfrm>
+          <a:prstGeom prst="rect">
+            <a:avLst/>
+          </a:prstGeom>
+          <a:noFill/>
+          <a:ln/>
+        </p:spPr>
+        <p:txBody>
+          <a:bodyPr wrap="square" lIns="0" tIns="0" rIns="0" bIns="0" rtlCol="0" anchor="ctr"/>
+          <a:lstStyle/>
+          <a:p>
+            <a:pPr algn="r" indent="0" marL="0">
+              <a:buNone/>
+            </a:pPr>
+            <a:r>
+              <a:rPr lang="en-US" sz="900" dirty="0">
+                <a:solidFill>
+                  <a:srgbClr val="5F7181"/>
+                </a:solidFill>
+                <a:latin typeface="Aptos" pitchFamily="34" charset="0"/>
+                <a:ea typeface="Aptos" pitchFamily="34" charset="-122"/>
+                <a:cs typeface="Aptos" pitchFamily="34" charset="-120"/>
+              </a:rPr>
+              <a:t>11</a:t>
+            </a:r>
+            <a:endParaRPr lang="en-US" sz="900" dirty="0"/>
+          </a:p>
+        </p:txBody>
+      </p:sp>
+      <p:sp>
+        <p:nvSpPr>
+          <p:cNvPr id="8" name="Shape 6"/>
           <p:cNvSpPr/>
           <p:nvPr/>
         </p:nvSpPr>
@@ -3622,7 +3739,7 @@
       </p:sp>
       <p:sp>
         <p:nvSpPr>
-          <p:cNvPr id="8" name="Text 6"/>
+          <p:cNvPr id="9" name="Text 7"/>
           <p:cNvSpPr/>
           <p:nvPr/>
         </p:nvSpPr>
@@ -3661,14 +3778,14 @@
       </p:sp>
       <p:sp>
         <p:nvSpPr>
-          <p:cNvPr id="9" name="Text 7"/>
+          <p:cNvPr id="10" name="Text 8"/>
           <p:cNvSpPr/>
           <p:nvPr/>
         </p:nvSpPr>
         <p:spPr>
           <a:xfrm>
             <a:off x="640080" y="621792"/>
-            <a:ext cx="10881360" cy="566928"/>
+            <a:ext cx="10881360" cy="713232"/>
           </a:xfrm>
           <a:prstGeom prst="rect">
             <a:avLst/>
@@ -3686,7 +3803,7 @@
               <a:buNone/>
             </a:pPr>
             <a:r>
-              <a:rPr lang="en-US" sz="2700" b="1" dirty="0">
+              <a:rPr lang="en-US" sz="3400" b="1" dirty="0">
                 <a:solidFill>
                   <a:srgbClr val="003A63"/>
                 </a:solidFill>
@@ -3696,20 +3813,20 @@
               </a:rPr>
               <a:t>Technical Deep Dive</a:t>
             </a:r>
-            <a:endParaRPr lang="en-US" sz="2700" dirty="0"/>
-          </a:p>
-        </p:txBody>
-      </p:sp>
-      <p:sp>
-        <p:nvSpPr>
-          <p:cNvPr id="10" name="Text 8"/>
-          <p:cNvSpPr/>
-          <p:nvPr/>
-        </p:nvSpPr>
-        <p:spPr>
-          <a:xfrm>
-            <a:off x="868680" y="1417320"/>
-            <a:ext cx="6675120" cy="4434840"/>
+            <a:endParaRPr lang="en-US" sz="3400" dirty="0"/>
+          </a:p>
+        </p:txBody>
+      </p:sp>
+      <p:sp>
+        <p:nvSpPr>
+          <p:cNvPr id="11" name="Text 9"/>
+          <p:cNvSpPr/>
+          <p:nvPr/>
+        </p:nvSpPr>
+        <p:spPr>
+          <a:xfrm>
+            <a:off x="868680" y="1508760"/>
+            <a:ext cx="6537960" cy="4160520"/>
           </a:xfrm>
           <a:prstGeom prst="rect">
             <a:avLst/>
@@ -3724,7 +3841,7 @@
           <a:lstStyle/>
           <a:p>
             <a:r>
-              <a:rPr lang="en-US" sz="1700" dirty="0">
+              <a:rPr lang="en-US" sz="2100" dirty="0">
                 <a:solidFill>
                   <a:srgbClr val="17364A"/>
                 </a:solidFill>
@@ -3734,11 +3851,11 @@
               </a:rPr>
               <a:t>Value measurement begins with a theory of change.</a:t>
             </a:r>
-            <a:endParaRPr lang="en-US" sz="1700" dirty="0"/>
-          </a:p>
-          <a:p>
-            <a:r>
-              <a:rPr lang="en-US" sz="1700" dirty="0">
+            <a:endParaRPr lang="en-US" sz="2100" dirty="0"/>
+          </a:p>
+          <a:p>
+            <a:r>
+              <a:rPr lang="en-US" sz="2100" dirty="0">
                 <a:solidFill>
                   <a:srgbClr val="17364A"/>
                 </a:solidFill>
@@ -3746,13 +3863,13 @@
                 <a:ea typeface="Aptos" pitchFamily="34" charset="-122"/>
                 <a:cs typeface="Aptos" pitchFamily="34" charset="-120"/>
               </a:rPr>
-              <a:t>The team should explain how the AI capability is expected to improve the workflow and which outcomes should change.</a:t>
-            </a:r>
-            <a:endParaRPr lang="en-US" sz="1700" dirty="0"/>
-          </a:p>
-          <a:p>
-            <a:r>
-              <a:rPr lang="en-US" sz="1700" dirty="0">
+              <a:t>The team should explain how the AI capability is expected to improve the workflow and which outcomes.</a:t>
+            </a:r>
+            <a:endParaRPr lang="en-US" sz="2100" dirty="0"/>
+          </a:p>
+          <a:p>
+            <a:r>
+              <a:rPr lang="en-US" sz="2100" dirty="0">
                 <a:solidFill>
                   <a:srgbClr val="17364A"/>
                 </a:solidFill>
@@ -3760,29 +3877,15 @@
                 <a:ea typeface="Aptos" pitchFamily="34" charset="-122"/>
                 <a:cs typeface="Aptos" pitchFamily="34" charset="-120"/>
               </a:rPr>
-              <a:t>For example, a summarization tool may reduce review time, improve completeness, and allow staff to focus on complex cases.</a:t>
-            </a:r>
-            <a:endParaRPr lang="en-US" sz="1700" dirty="0"/>
-          </a:p>
-          <a:p>
-            <a:r>
-              <a:rPr lang="en-US" sz="1700" dirty="0">
-                <a:solidFill>
-                  <a:srgbClr val="17364A"/>
-                </a:solidFill>
-                <a:latin typeface="Aptos" pitchFamily="34" charset="0"/>
-                <a:ea typeface="Aptos" pitchFamily="34" charset="-122"/>
-                <a:cs typeface="Aptos" pitchFamily="34" charset="-120"/>
-              </a:rPr>
-              <a:t>These assumptions should be tested rather than assumed.</a:t>
-            </a:r>
-            <a:endParaRPr lang="en-US" sz="1700" dirty="0"/>
-          </a:p>
-        </p:txBody>
-      </p:sp>
-      <p:sp>
-        <p:nvSpPr>
-          <p:cNvPr id="11" name="Shape 9"/>
+              <a:t>For example, a summarization tool may reduce review time, improve completeness, and allow staff to.</a:t>
+            </a:r>
+            <a:endParaRPr lang="en-US" sz="2100" dirty="0"/>
+          </a:p>
+        </p:txBody>
+      </p:sp>
+      <p:sp>
+        <p:nvSpPr>
+          <p:cNvPr id="12" name="Shape 10"/>
           <p:cNvSpPr/>
           <p:nvPr/>
         </p:nvSpPr>
@@ -3809,14 +3912,14 @@
       </p:sp>
       <p:sp>
         <p:nvSpPr>
-          <p:cNvPr id="12" name="Text 10"/>
+          <p:cNvPr id="13" name="Text 11"/>
           <p:cNvSpPr/>
           <p:nvPr/>
         </p:nvSpPr>
         <p:spPr>
           <a:xfrm>
             <a:off x="8074152" y="1563624"/>
-            <a:ext cx="2825496" cy="201168"/>
+            <a:ext cx="2825496" cy="256032"/>
           </a:xfrm>
           <a:prstGeom prst="rect">
             <a:avLst/>
@@ -3832,7 +3935,7 @@
               <a:buNone/>
             </a:pPr>
             <a:r>
-              <a:rPr lang="en-US" sz="950" b="1" dirty="0">
+              <a:rPr lang="en-US" sz="1300" b="1" dirty="0">
                 <a:solidFill>
                   <a:srgbClr val="0068B7"/>
                 </a:solidFill>
@@ -3842,20 +3945,20 @@
               </a:rPr>
               <a:t>Key idea</a:t>
             </a:r>
-            <a:endParaRPr lang="en-US" sz="950" dirty="0"/>
-          </a:p>
-        </p:txBody>
-      </p:sp>
-      <p:sp>
-        <p:nvSpPr>
-          <p:cNvPr id="13" name="Text 11"/>
-          <p:cNvSpPr/>
-          <p:nvPr/>
-        </p:nvSpPr>
-        <p:spPr>
-          <a:xfrm>
-            <a:off x="8074152" y="1856232"/>
-            <a:ext cx="2825496" cy="1261872"/>
+            <a:endParaRPr lang="en-US" sz="1300" dirty="0"/>
+          </a:p>
+        </p:txBody>
+      </p:sp>
+      <p:sp>
+        <p:nvSpPr>
+          <p:cNvPr id="14" name="Text 12"/>
+          <p:cNvSpPr/>
+          <p:nvPr/>
+        </p:nvSpPr>
+        <p:spPr>
+          <a:xfrm>
+            <a:off x="8074152" y="1920240"/>
+            <a:ext cx="2825496" cy="1188720"/>
           </a:xfrm>
           <a:prstGeom prst="rect">
             <a:avLst/>
@@ -3873,7 +3976,7 @@
               <a:buNone/>
             </a:pPr>
             <a:r>
-              <a:rPr lang="en-US" sz="1250" dirty="0">
+              <a:rPr lang="en-US" sz="1550" dirty="0">
                 <a:solidFill>
                   <a:srgbClr val="17364A"/>
                 </a:solidFill>
@@ -3883,13 +3986,13 @@
               </a:rPr>
               <a:t>Value measurement begins with a theory of change.</a:t>
             </a:r>
-            <a:endParaRPr lang="en-US" sz="1250" dirty="0"/>
-          </a:p>
-        </p:txBody>
-      </p:sp>
-      <p:sp>
-        <p:nvSpPr>
-          <p:cNvPr id="14" name="Shape 12"/>
+            <a:endParaRPr lang="en-US" sz="1550" dirty="0"/>
+          </a:p>
+        </p:txBody>
+      </p:sp>
+      <p:sp>
+        <p:nvSpPr>
+          <p:cNvPr id="15" name="Shape 13"/>
           <p:cNvSpPr/>
           <p:nvPr/>
         </p:nvSpPr>
@@ -3916,14 +4019,14 @@
       </p:sp>
       <p:sp>
         <p:nvSpPr>
-          <p:cNvPr id="15" name="Text 13"/>
+          <p:cNvPr id="16" name="Text 14"/>
           <p:cNvSpPr/>
           <p:nvPr/>
         </p:nvSpPr>
         <p:spPr>
           <a:xfrm>
             <a:off x="8074152" y="3666744"/>
-            <a:ext cx="2825496" cy="201168"/>
+            <a:ext cx="2825496" cy="256032"/>
           </a:xfrm>
           <a:prstGeom prst="rect">
             <a:avLst/>
@@ -3939,7 +4042,7 @@
               <a:buNone/>
             </a:pPr>
             <a:r>
-              <a:rPr lang="en-US" sz="950" b="1" dirty="0">
+              <a:rPr lang="en-US" sz="1300" b="1" dirty="0">
                 <a:solidFill>
                   <a:srgbClr val="0068B7"/>
                 </a:solidFill>
@@ -3949,20 +4052,20 @@
               </a:rPr>
               <a:t>Use this for</a:t>
             </a:r>
-            <a:endParaRPr lang="en-US" sz="950" dirty="0"/>
-          </a:p>
-        </p:txBody>
-      </p:sp>
-      <p:sp>
-        <p:nvSpPr>
-          <p:cNvPr id="16" name="Text 14"/>
-          <p:cNvSpPr/>
-          <p:nvPr/>
-        </p:nvSpPr>
-        <p:spPr>
-          <a:xfrm>
-            <a:off x="8074152" y="3959352"/>
-            <a:ext cx="2825496" cy="1170432"/>
+            <a:endParaRPr lang="en-US" sz="1300" dirty="0"/>
+          </a:p>
+        </p:txBody>
+      </p:sp>
+      <p:sp>
+        <p:nvSpPr>
+          <p:cNvPr id="17" name="Text 15"/>
+          <p:cNvSpPr/>
+          <p:nvPr/>
+        </p:nvSpPr>
+        <p:spPr>
+          <a:xfrm>
+            <a:off x="8074152" y="4023360"/>
+            <a:ext cx="2825496" cy="1097280"/>
           </a:xfrm>
           <a:prstGeom prst="rect">
             <a:avLst/>
@@ -3980,7 +4083,7 @@
               <a:buNone/>
             </a:pPr>
             <a:r>
-              <a:rPr lang="en-US" sz="1250" dirty="0">
+              <a:rPr lang="en-US" sz="1550" dirty="0">
                 <a:solidFill>
                   <a:srgbClr val="17364A"/>
                 </a:solidFill>
@@ -3990,7 +4093,7 @@
               </a:rPr>
               <a:t>Connect the concept to public health decisions, safeguards, documentation, or implementation work.</a:t>
             </a:r>
-            <a:endParaRPr lang="en-US" sz="1250" dirty="0"/>
+            <a:endParaRPr lang="en-US" sz="1550" dirty="0"/>
           </a:p>
         </p:txBody>
       </p:sp>
@@ -4187,7 +4290,7 @@
                 <a:ea typeface="Aptos" pitchFamily="34" charset="-122"/>
                 <a:cs typeface="Aptos" pitchFamily="34" charset="-120"/>
               </a:rPr>
-              <a:t>© Paula Soper</a:t>
+              <a:t>Â© Paula Soper</a:t>
             </a:r>
             <a:endParaRPr lang="en-US" sz="800" dirty="0"/>
           </a:p>
@@ -4195,7 +4298,46 @@
       </p:sp>
       <p:sp>
         <p:nvSpPr>
-          <p:cNvPr id="7" name="Shape 5"/>
+          <p:cNvPr id="7" name="Text 5"/>
+          <p:cNvSpPr/>
+          <p:nvPr/>
+        </p:nvSpPr>
+        <p:spPr>
+          <a:xfrm>
+            <a:off x="11137392" y="6510528"/>
+            <a:ext cx="411480" cy="201168"/>
+          </a:xfrm>
+          <a:prstGeom prst="rect">
+            <a:avLst/>
+          </a:prstGeom>
+          <a:noFill/>
+          <a:ln/>
+        </p:spPr>
+        <p:txBody>
+          <a:bodyPr wrap="square" lIns="0" tIns="0" rIns="0" bIns="0" rtlCol="0" anchor="ctr"/>
+          <a:lstStyle/>
+          <a:p>
+            <a:pPr algn="r" indent="0" marL="0">
+              <a:buNone/>
+            </a:pPr>
+            <a:r>
+              <a:rPr lang="en-US" sz="900" dirty="0">
+                <a:solidFill>
+                  <a:srgbClr val="5F7181"/>
+                </a:solidFill>
+                <a:latin typeface="Aptos" pitchFamily="34" charset="0"/>
+                <a:ea typeface="Aptos" pitchFamily="34" charset="-122"/>
+                <a:cs typeface="Aptos" pitchFamily="34" charset="-120"/>
+              </a:rPr>
+              <a:t>12</a:t>
+            </a:r>
+            <a:endParaRPr lang="en-US" sz="900" dirty="0"/>
+          </a:p>
+        </p:txBody>
+      </p:sp>
+      <p:sp>
+        <p:nvSpPr>
+          <p:cNvPr id="8" name="Shape 6"/>
           <p:cNvSpPr/>
           <p:nvPr/>
         </p:nvSpPr>
@@ -4220,7 +4362,7 @@
       </p:sp>
       <p:sp>
         <p:nvSpPr>
-          <p:cNvPr id="8" name="Text 6"/>
+          <p:cNvPr id="9" name="Text 7"/>
           <p:cNvSpPr/>
           <p:nvPr/>
         </p:nvSpPr>
@@ -4259,14 +4401,14 @@
       </p:sp>
       <p:sp>
         <p:nvSpPr>
-          <p:cNvPr id="9" name="Text 7"/>
+          <p:cNvPr id="10" name="Text 8"/>
           <p:cNvSpPr/>
           <p:nvPr/>
         </p:nvSpPr>
         <p:spPr>
           <a:xfrm>
             <a:off x="640080" y="621792"/>
-            <a:ext cx="10881360" cy="566928"/>
+            <a:ext cx="10881360" cy="713232"/>
           </a:xfrm>
           <a:prstGeom prst="rect">
             <a:avLst/>
@@ -4284,7 +4426,7 @@
               <a:buNone/>
             </a:pPr>
             <a:r>
-              <a:rPr lang="en-US" sz="2700" b="1" dirty="0">
+              <a:rPr lang="en-US" sz="3400" b="1" dirty="0">
                 <a:solidFill>
                   <a:srgbClr val="003A63"/>
                 </a:solidFill>
@@ -4294,20 +4436,20 @@
               </a:rPr>
               <a:t>Risks, Failure Modes, and Guardrails</a:t>
             </a:r>
-            <a:endParaRPr lang="en-US" sz="2700" dirty="0"/>
-          </a:p>
-        </p:txBody>
-      </p:sp>
-      <p:sp>
-        <p:nvSpPr>
-          <p:cNvPr id="10" name="Text 8"/>
-          <p:cNvSpPr/>
-          <p:nvPr/>
-        </p:nvSpPr>
-        <p:spPr>
-          <a:xfrm>
-            <a:off x="868680" y="1417320"/>
-            <a:ext cx="6675120" cy="4434840"/>
+            <a:endParaRPr lang="en-US" sz="3400" dirty="0"/>
+          </a:p>
+        </p:txBody>
+      </p:sp>
+      <p:sp>
+        <p:nvSpPr>
+          <p:cNvPr id="11" name="Text 9"/>
+          <p:cNvSpPr/>
+          <p:nvPr/>
+        </p:nvSpPr>
+        <p:spPr>
+          <a:xfrm>
+            <a:off x="868680" y="1508760"/>
+            <a:ext cx="6537960" cy="4160520"/>
           </a:xfrm>
           <a:prstGeom prst="rect">
             <a:avLst/>
@@ -4322,7 +4464,7 @@
           <a:lstStyle/>
           <a:p>
             <a:r>
-              <a:rPr lang="en-US" sz="1700" dirty="0">
+              <a:rPr lang="en-US" sz="2100" dirty="0">
                 <a:solidFill>
                   <a:srgbClr val="17364A"/>
                 </a:solidFill>
@@ -4332,11 +4474,11 @@
               </a:rPr>
               <a:t>A common failure mode is treating the topic as a technical detail rather than a public health control.</a:t>
             </a:r>
-            <a:endParaRPr lang="en-US" sz="1700" dirty="0"/>
-          </a:p>
-          <a:p>
-            <a:r>
-              <a:rPr lang="en-US" sz="1700" dirty="0">
+            <a:endParaRPr lang="en-US" sz="2100" dirty="0"/>
+          </a:p>
+          <a:p>
+            <a:r>
+              <a:rPr lang="en-US" sz="2100" dirty="0">
                 <a:solidFill>
                   <a:srgbClr val="17364A"/>
                 </a:solidFill>
@@ -4344,13 +4486,13 @@
                 <a:ea typeface="Aptos" pitchFamily="34" charset="-122"/>
                 <a:cs typeface="Aptos" pitchFamily="34" charset="-120"/>
               </a:rPr>
-              <a:t>When staff do not connect technical decisions to authority, workflow, equity, privacy, security, and accountability, the.</a:t>
-            </a:r>
-            <a:endParaRPr lang="en-US" sz="1700" dirty="0"/>
-          </a:p>
-          <a:p>
-            <a:r>
-              <a:rPr lang="en-US" sz="1700" dirty="0">
+              <a:t>When staff do not connect technical decisions to authority, workflow, equity, privacy, security, and.</a:t>
+            </a:r>
+            <a:endParaRPr lang="en-US" sz="2100" dirty="0"/>
+          </a:p>
+          <a:p>
+            <a:r>
+              <a:rPr lang="en-US" sz="2100" dirty="0">
                 <a:solidFill>
                   <a:srgbClr val="17364A"/>
                 </a:solidFill>
@@ -4360,27 +4502,13 @@
               </a:rPr>
               <a:t>Another risk is relying on vendor claims without agency-defined evidence.</a:t>
             </a:r>
-            <a:endParaRPr lang="en-US" sz="1700" dirty="0"/>
-          </a:p>
-          <a:p>
-            <a:r>
-              <a:rPr lang="en-US" sz="1700" dirty="0">
-                <a:solidFill>
-                  <a:srgbClr val="17364A"/>
-                </a:solidFill>
-                <a:latin typeface="Aptos" pitchFamily="34" charset="0"/>
-                <a:ea typeface="Aptos" pitchFamily="34" charset="-122"/>
-                <a:cs typeface="Aptos" pitchFamily="34" charset="-120"/>
-              </a:rPr>
-              <a:t>Vendors may provide demonstrations, dashboards, or summary metrics that do not match the agency workflow or data environment.</a:t>
-            </a:r>
-            <a:endParaRPr lang="en-US" sz="1700" dirty="0"/>
-          </a:p>
-        </p:txBody>
-      </p:sp>
-      <p:sp>
-        <p:nvSpPr>
-          <p:cNvPr id="11" name="Shape 9"/>
+            <a:endParaRPr lang="en-US" sz="2100" dirty="0"/>
+          </a:p>
+        </p:txBody>
+      </p:sp>
+      <p:sp>
+        <p:nvSpPr>
+          <p:cNvPr id="12" name="Shape 10"/>
           <p:cNvSpPr/>
           <p:nvPr/>
         </p:nvSpPr>
@@ -4407,14 +4535,14 @@
       </p:sp>
       <p:sp>
         <p:nvSpPr>
-          <p:cNvPr id="12" name="Text 10"/>
+          <p:cNvPr id="13" name="Text 11"/>
           <p:cNvSpPr/>
           <p:nvPr/>
         </p:nvSpPr>
         <p:spPr>
           <a:xfrm>
             <a:off x="8074152" y="1563624"/>
-            <a:ext cx="2825496" cy="201168"/>
+            <a:ext cx="2825496" cy="256032"/>
           </a:xfrm>
           <a:prstGeom prst="rect">
             <a:avLst/>
@@ -4430,7 +4558,7 @@
               <a:buNone/>
             </a:pPr>
             <a:r>
-              <a:rPr lang="en-US" sz="950" b="1" dirty="0">
+              <a:rPr lang="en-US" sz="1300" b="1" dirty="0">
                 <a:solidFill>
                   <a:srgbClr val="0068B7"/>
                 </a:solidFill>
@@ -4440,20 +4568,20 @@
               </a:rPr>
               <a:t>Key idea</a:t>
             </a:r>
-            <a:endParaRPr lang="en-US" sz="950" dirty="0"/>
-          </a:p>
-        </p:txBody>
-      </p:sp>
-      <p:sp>
-        <p:nvSpPr>
-          <p:cNvPr id="13" name="Text 11"/>
-          <p:cNvSpPr/>
-          <p:nvPr/>
-        </p:nvSpPr>
-        <p:spPr>
-          <a:xfrm>
-            <a:off x="8074152" y="1856232"/>
-            <a:ext cx="2825496" cy="1261872"/>
+            <a:endParaRPr lang="en-US" sz="1300" dirty="0"/>
+          </a:p>
+        </p:txBody>
+      </p:sp>
+      <p:sp>
+        <p:nvSpPr>
+          <p:cNvPr id="14" name="Text 12"/>
+          <p:cNvSpPr/>
+          <p:nvPr/>
+        </p:nvSpPr>
+        <p:spPr>
+          <a:xfrm>
+            <a:off x="8074152" y="1920240"/>
+            <a:ext cx="2825496" cy="1188720"/>
           </a:xfrm>
           <a:prstGeom prst="rect">
             <a:avLst/>
@@ -4471,7 +4599,7 @@
               <a:buNone/>
             </a:pPr>
             <a:r>
-              <a:rPr lang="en-US" sz="1250" dirty="0">
+              <a:rPr lang="en-US" sz="1550" dirty="0">
                 <a:solidFill>
                   <a:srgbClr val="17364A"/>
                 </a:solidFill>
@@ -4481,13 +4609,13 @@
               </a:rPr>
               <a:t>A common failure mode is treating the topic as a technical detail rather than a public health control.</a:t>
             </a:r>
-            <a:endParaRPr lang="en-US" sz="1250" dirty="0"/>
-          </a:p>
-        </p:txBody>
-      </p:sp>
-      <p:sp>
-        <p:nvSpPr>
-          <p:cNvPr id="14" name="Shape 12"/>
+            <a:endParaRPr lang="en-US" sz="1550" dirty="0"/>
+          </a:p>
+        </p:txBody>
+      </p:sp>
+      <p:sp>
+        <p:nvSpPr>
+          <p:cNvPr id="15" name="Shape 13"/>
           <p:cNvSpPr/>
           <p:nvPr/>
         </p:nvSpPr>
@@ -4514,14 +4642,14 @@
       </p:sp>
       <p:sp>
         <p:nvSpPr>
-          <p:cNvPr id="15" name="Text 13"/>
+          <p:cNvPr id="16" name="Text 14"/>
           <p:cNvSpPr/>
           <p:nvPr/>
         </p:nvSpPr>
         <p:spPr>
           <a:xfrm>
             <a:off x="8074152" y="3666744"/>
-            <a:ext cx="2825496" cy="201168"/>
+            <a:ext cx="2825496" cy="256032"/>
           </a:xfrm>
           <a:prstGeom prst="rect">
             <a:avLst/>
@@ -4537,7 +4665,7 @@
               <a:buNone/>
             </a:pPr>
             <a:r>
-              <a:rPr lang="en-US" sz="950" b="1" dirty="0">
+              <a:rPr lang="en-US" sz="1300" b="1" dirty="0">
                 <a:solidFill>
                   <a:srgbClr val="0068B7"/>
                 </a:solidFill>
@@ -4547,20 +4675,20 @@
               </a:rPr>
               <a:t>Use this for</a:t>
             </a:r>
-            <a:endParaRPr lang="en-US" sz="950" dirty="0"/>
-          </a:p>
-        </p:txBody>
-      </p:sp>
-      <p:sp>
-        <p:nvSpPr>
-          <p:cNvPr id="16" name="Text 14"/>
-          <p:cNvSpPr/>
-          <p:nvPr/>
-        </p:nvSpPr>
-        <p:spPr>
-          <a:xfrm>
-            <a:off x="8074152" y="3959352"/>
-            <a:ext cx="2825496" cy="1170432"/>
+            <a:endParaRPr lang="en-US" sz="1300" dirty="0"/>
+          </a:p>
+        </p:txBody>
+      </p:sp>
+      <p:sp>
+        <p:nvSpPr>
+          <p:cNvPr id="17" name="Text 15"/>
+          <p:cNvSpPr/>
+          <p:nvPr/>
+        </p:nvSpPr>
+        <p:spPr>
+          <a:xfrm>
+            <a:off x="8074152" y="4023360"/>
+            <a:ext cx="2825496" cy="1097280"/>
           </a:xfrm>
           <a:prstGeom prst="rect">
             <a:avLst/>
@@ -4578,7 +4706,7 @@
               <a:buNone/>
             </a:pPr>
             <a:r>
-              <a:rPr lang="en-US" sz="1250" dirty="0">
+              <a:rPr lang="en-US" sz="1550" dirty="0">
                 <a:solidFill>
                   <a:srgbClr val="17364A"/>
                 </a:solidFill>
@@ -4588,7 +4716,7 @@
               </a:rPr>
               <a:t>Connect the concept to public health decisions, safeguards, documentation, or implementation work.</a:t>
             </a:r>
-            <a:endParaRPr lang="en-US" sz="1250" dirty="0"/>
+            <a:endParaRPr lang="en-US" sz="1550" dirty="0"/>
           </a:p>
         </p:txBody>
       </p:sp>
@@ -4785,7 +4913,7 @@
                 <a:ea typeface="Aptos" pitchFamily="34" charset="-122"/>
                 <a:cs typeface="Aptos" pitchFamily="34" charset="-120"/>
               </a:rPr>
-              <a:t>© Paula Soper</a:t>
+              <a:t>Â© Paula Soper</a:t>
             </a:r>
             <a:endParaRPr lang="en-US" sz="800" dirty="0"/>
           </a:p>
@@ -4793,7 +4921,46 @@
       </p:sp>
       <p:sp>
         <p:nvSpPr>
-          <p:cNvPr id="7" name="Shape 5"/>
+          <p:cNvPr id="7" name="Text 5"/>
+          <p:cNvSpPr/>
+          <p:nvPr/>
+        </p:nvSpPr>
+        <p:spPr>
+          <a:xfrm>
+            <a:off x="11137392" y="6510528"/>
+            <a:ext cx="411480" cy="201168"/>
+          </a:xfrm>
+          <a:prstGeom prst="rect">
+            <a:avLst/>
+          </a:prstGeom>
+          <a:noFill/>
+          <a:ln/>
+        </p:spPr>
+        <p:txBody>
+          <a:bodyPr wrap="square" lIns="0" tIns="0" rIns="0" bIns="0" rtlCol="0" anchor="ctr"/>
+          <a:lstStyle/>
+          <a:p>
+            <a:pPr algn="r" indent="0" marL="0">
+              <a:buNone/>
+            </a:pPr>
+            <a:r>
+              <a:rPr lang="en-US" sz="900" dirty="0">
+                <a:solidFill>
+                  <a:srgbClr val="5F7181"/>
+                </a:solidFill>
+                <a:latin typeface="Aptos" pitchFamily="34" charset="0"/>
+                <a:ea typeface="Aptos" pitchFamily="34" charset="-122"/>
+                <a:cs typeface="Aptos" pitchFamily="34" charset="-120"/>
+              </a:rPr>
+              <a:t>13</a:t>
+            </a:r>
+            <a:endParaRPr lang="en-US" sz="900" dirty="0"/>
+          </a:p>
+        </p:txBody>
+      </p:sp>
+      <p:sp>
+        <p:nvSpPr>
+          <p:cNvPr id="8" name="Shape 6"/>
           <p:cNvSpPr/>
           <p:nvPr/>
         </p:nvSpPr>
@@ -4818,7 +4985,7 @@
       </p:sp>
       <p:sp>
         <p:nvSpPr>
-          <p:cNvPr id="8" name="Text 6"/>
+          <p:cNvPr id="9" name="Text 7"/>
           <p:cNvSpPr/>
           <p:nvPr/>
         </p:nvSpPr>
@@ -4857,14 +5024,14 @@
       </p:sp>
       <p:sp>
         <p:nvSpPr>
-          <p:cNvPr id="9" name="Text 7"/>
+          <p:cNvPr id="10" name="Text 8"/>
           <p:cNvSpPr/>
           <p:nvPr/>
         </p:nvSpPr>
         <p:spPr>
           <a:xfrm>
             <a:off x="640080" y="621792"/>
-            <a:ext cx="10881360" cy="566928"/>
+            <a:ext cx="10881360" cy="713232"/>
           </a:xfrm>
           <a:prstGeom prst="rect">
             <a:avLst/>
@@ -4882,7 +5049,7 @@
               <a:buNone/>
             </a:pPr>
             <a:r>
-              <a:rPr lang="en-US" sz="2700" b="1" dirty="0">
+              <a:rPr lang="en-US" sz="3400" b="1" dirty="0">
                 <a:solidFill>
                   <a:srgbClr val="003A63"/>
                 </a:solidFill>
@@ -4892,20 +5059,20 @@
               </a:rPr>
               <a:t>Application to AI-Supported Workflows</a:t>
             </a:r>
-            <a:endParaRPr lang="en-US" sz="2700" dirty="0"/>
-          </a:p>
-        </p:txBody>
-      </p:sp>
-      <p:sp>
-        <p:nvSpPr>
-          <p:cNvPr id="10" name="Text 8"/>
-          <p:cNvSpPr/>
-          <p:nvPr/>
-        </p:nvSpPr>
-        <p:spPr>
-          <a:xfrm>
-            <a:off x="868680" y="1417320"/>
-            <a:ext cx="6675120" cy="4434840"/>
+            <a:endParaRPr lang="en-US" sz="3400" dirty="0"/>
+          </a:p>
+        </p:txBody>
+      </p:sp>
+      <p:sp>
+        <p:nvSpPr>
+          <p:cNvPr id="11" name="Text 9"/>
+          <p:cNvSpPr/>
+          <p:nvPr/>
+        </p:nvSpPr>
+        <p:spPr>
+          <a:xfrm>
+            <a:off x="868680" y="1508760"/>
+            <a:ext cx="6537960" cy="4160520"/>
           </a:xfrm>
           <a:prstGeom prst="rect">
             <a:avLst/>
@@ -4920,7 +5087,7 @@
           <a:lstStyle/>
           <a:p>
             <a:r>
-              <a:rPr lang="en-US" sz="1700" dirty="0">
+              <a:rPr lang="en-US" sz="2100" dirty="0">
                 <a:solidFill>
                   <a:srgbClr val="17364A"/>
                 </a:solidFill>
@@ -4928,13 +5095,13 @@
                 <a:ea typeface="Aptos" pitchFamily="34" charset="-122"/>
                 <a:cs typeface="Aptos" pitchFamily="34" charset="-120"/>
               </a:rPr>
-              <a:t>Generative AI, predictive analytics, RAG, automation, and agentic workflows all depend on the controls described in this.</a:t>
-            </a:r>
-            <a:endParaRPr lang="en-US" sz="1700" dirty="0"/>
-          </a:p>
-          <a:p>
-            <a:r>
-              <a:rPr lang="en-US" sz="1700" dirty="0">
+              <a:t>Generative AI, predictive analytics, RAG, automation, and agentic workflows all depend on the controls.</a:t>
+            </a:r>
+            <a:endParaRPr lang="en-US" sz="2100" dirty="0"/>
+          </a:p>
+          <a:p>
+            <a:r>
+              <a:rPr lang="en-US" sz="2100" dirty="0">
                 <a:solidFill>
                   <a:srgbClr val="17364A"/>
                 </a:solidFill>
@@ -4944,11 +5111,11 @@
               </a:rPr>
               <a:t>The controls should be scaled to the risk of the use case.</a:t>
             </a:r>
-            <a:endParaRPr lang="en-US" sz="1700" dirty="0"/>
-          </a:p>
-          <a:p>
-            <a:r>
-              <a:rPr lang="en-US" sz="1700" dirty="0">
+            <a:endParaRPr lang="en-US" sz="2100" dirty="0"/>
+          </a:p>
+          <a:p>
+            <a:r>
+              <a:rPr lang="en-US" sz="2100" dirty="0">
                 <a:solidFill>
                   <a:srgbClr val="17364A"/>
                 </a:solidFill>
@@ -4956,29 +5123,15 @@
                 <a:ea typeface="Aptos" pitchFamily="34" charset="-122"/>
                 <a:cs typeface="Aptos" pitchFamily="34" charset="-120"/>
               </a:rPr>
-              <a:t>A tool that drafts internal training text may require lighter review than a tool that updates case records, prioritizes.</a:t>
-            </a:r>
-            <a:endParaRPr lang="en-US" sz="1700" dirty="0"/>
-          </a:p>
-          <a:p>
-            <a:r>
-              <a:rPr lang="en-US" sz="1700" dirty="0">
-                <a:solidFill>
-                  <a:srgbClr val="17364A"/>
-                </a:solidFill>
-                <a:latin typeface="Aptos" pitchFamily="34" charset="0"/>
-                <a:ea typeface="Aptos" pitchFamily="34" charset="-122"/>
-                <a:cs typeface="Aptos" pitchFamily="34" charset="-120"/>
-              </a:rPr>
-              <a:t>The module should be applied during readiness assessment, procurement, implementation planning, pilot testing, and.</a:t>
-            </a:r>
-            <a:endParaRPr lang="en-US" sz="1700" dirty="0"/>
-          </a:p>
-        </p:txBody>
-      </p:sp>
-      <p:sp>
-        <p:nvSpPr>
-          <p:cNvPr id="11" name="Shape 9"/>
+              <a:t>A tool that drafts internal training text may require lighter review than a tool that updates case.</a:t>
+            </a:r>
+            <a:endParaRPr lang="en-US" sz="2100" dirty="0"/>
+          </a:p>
+        </p:txBody>
+      </p:sp>
+      <p:sp>
+        <p:nvSpPr>
+          <p:cNvPr id="12" name="Shape 10"/>
           <p:cNvSpPr/>
           <p:nvPr/>
         </p:nvSpPr>
@@ -5005,14 +5158,14 @@
       </p:sp>
       <p:sp>
         <p:nvSpPr>
-          <p:cNvPr id="12" name="Text 10"/>
+          <p:cNvPr id="13" name="Text 11"/>
           <p:cNvSpPr/>
           <p:nvPr/>
         </p:nvSpPr>
         <p:spPr>
           <a:xfrm>
             <a:off x="8074152" y="1563624"/>
-            <a:ext cx="2825496" cy="201168"/>
+            <a:ext cx="2825496" cy="256032"/>
           </a:xfrm>
           <a:prstGeom prst="rect">
             <a:avLst/>
@@ -5028,7 +5181,7 @@
               <a:buNone/>
             </a:pPr>
             <a:r>
-              <a:rPr lang="en-US" sz="950" b="1" dirty="0">
+              <a:rPr lang="en-US" sz="1300" b="1" dirty="0">
                 <a:solidFill>
                   <a:srgbClr val="0068B7"/>
                 </a:solidFill>
@@ -5038,20 +5191,20 @@
               </a:rPr>
               <a:t>Key idea</a:t>
             </a:r>
-            <a:endParaRPr lang="en-US" sz="950" dirty="0"/>
-          </a:p>
-        </p:txBody>
-      </p:sp>
-      <p:sp>
-        <p:nvSpPr>
-          <p:cNvPr id="13" name="Text 11"/>
-          <p:cNvSpPr/>
-          <p:nvPr/>
-        </p:nvSpPr>
-        <p:spPr>
-          <a:xfrm>
-            <a:off x="8074152" y="1856232"/>
-            <a:ext cx="2825496" cy="1261872"/>
+            <a:endParaRPr lang="en-US" sz="1300" dirty="0"/>
+          </a:p>
+        </p:txBody>
+      </p:sp>
+      <p:sp>
+        <p:nvSpPr>
+          <p:cNvPr id="14" name="Text 12"/>
+          <p:cNvSpPr/>
+          <p:nvPr/>
+        </p:nvSpPr>
+        <p:spPr>
+          <a:xfrm>
+            <a:off x="8074152" y="1920240"/>
+            <a:ext cx="2825496" cy="1188720"/>
           </a:xfrm>
           <a:prstGeom prst="rect">
             <a:avLst/>
@@ -5069,7 +5222,7 @@
               <a:buNone/>
             </a:pPr>
             <a:r>
-              <a:rPr lang="en-US" sz="1250" dirty="0">
+              <a:rPr lang="en-US" sz="1550" dirty="0">
                 <a:solidFill>
                   <a:srgbClr val="17364A"/>
                 </a:solidFill>
@@ -5077,15 +5230,15 @@
                 <a:ea typeface="Aptos" pitchFamily="34" charset="-122"/>
                 <a:cs typeface="Aptos" pitchFamily="34" charset="-120"/>
               </a:rPr>
-              <a:t>Generative AI, predictive analytics, RAG, automation, and agentic workflows all depend on the controls described in this.</a:t>
-            </a:r>
-            <a:endParaRPr lang="en-US" sz="1250" dirty="0"/>
-          </a:p>
-        </p:txBody>
-      </p:sp>
-      <p:sp>
-        <p:nvSpPr>
-          <p:cNvPr id="14" name="Shape 12"/>
+              <a:t>Generative AI, predictive analytics, RAG, automation, and agentic workflows all depend on the controls.</a:t>
+            </a:r>
+            <a:endParaRPr lang="en-US" sz="1550" dirty="0"/>
+          </a:p>
+        </p:txBody>
+      </p:sp>
+      <p:sp>
+        <p:nvSpPr>
+          <p:cNvPr id="15" name="Shape 13"/>
           <p:cNvSpPr/>
           <p:nvPr/>
         </p:nvSpPr>
@@ -5112,14 +5265,14 @@
       </p:sp>
       <p:sp>
         <p:nvSpPr>
-          <p:cNvPr id="15" name="Text 13"/>
+          <p:cNvPr id="16" name="Text 14"/>
           <p:cNvSpPr/>
           <p:nvPr/>
         </p:nvSpPr>
         <p:spPr>
           <a:xfrm>
             <a:off x="8074152" y="3666744"/>
-            <a:ext cx="2825496" cy="201168"/>
+            <a:ext cx="2825496" cy="256032"/>
           </a:xfrm>
           <a:prstGeom prst="rect">
             <a:avLst/>
@@ -5135,7 +5288,7 @@
               <a:buNone/>
             </a:pPr>
             <a:r>
-              <a:rPr lang="en-US" sz="950" b="1" dirty="0">
+              <a:rPr lang="en-US" sz="1300" b="1" dirty="0">
                 <a:solidFill>
                   <a:srgbClr val="0068B7"/>
                 </a:solidFill>
@@ -5145,20 +5298,20 @@
               </a:rPr>
               <a:t>Use this for</a:t>
             </a:r>
-            <a:endParaRPr lang="en-US" sz="950" dirty="0"/>
-          </a:p>
-        </p:txBody>
-      </p:sp>
-      <p:sp>
-        <p:nvSpPr>
-          <p:cNvPr id="16" name="Text 14"/>
-          <p:cNvSpPr/>
-          <p:nvPr/>
-        </p:nvSpPr>
-        <p:spPr>
-          <a:xfrm>
-            <a:off x="8074152" y="3959352"/>
-            <a:ext cx="2825496" cy="1170432"/>
+            <a:endParaRPr lang="en-US" sz="1300" dirty="0"/>
+          </a:p>
+        </p:txBody>
+      </p:sp>
+      <p:sp>
+        <p:nvSpPr>
+          <p:cNvPr id="17" name="Text 15"/>
+          <p:cNvSpPr/>
+          <p:nvPr/>
+        </p:nvSpPr>
+        <p:spPr>
+          <a:xfrm>
+            <a:off x="8074152" y="4023360"/>
+            <a:ext cx="2825496" cy="1097280"/>
           </a:xfrm>
           <a:prstGeom prst="rect">
             <a:avLst/>
@@ -5176,7 +5329,7 @@
               <a:buNone/>
             </a:pPr>
             <a:r>
-              <a:rPr lang="en-US" sz="1250" dirty="0">
+              <a:rPr lang="en-US" sz="1550" dirty="0">
                 <a:solidFill>
                   <a:srgbClr val="17364A"/>
                 </a:solidFill>
@@ -5186,7 +5339,7 @@
               </a:rPr>
               <a:t>Connect the concept to public health decisions, safeguards, documentation, or implementation work.</a:t>
             </a:r>
-            <a:endParaRPr lang="en-US" sz="1250" dirty="0"/>
+            <a:endParaRPr lang="en-US" sz="1550" dirty="0"/>
           </a:p>
         </p:txBody>
       </p:sp>
@@ -5383,7 +5536,7 @@
                 <a:ea typeface="Aptos" pitchFamily="34" charset="-122"/>
                 <a:cs typeface="Aptos" pitchFamily="34" charset="-120"/>
               </a:rPr>
-              <a:t>© Paula Soper</a:t>
+              <a:t>Â© Paula Soper</a:t>
             </a:r>
             <a:endParaRPr lang="en-US" sz="800" dirty="0"/>
           </a:p>
@@ -5391,7 +5544,46 @@
       </p:sp>
       <p:sp>
         <p:nvSpPr>
-          <p:cNvPr id="7" name="Shape 5"/>
+          <p:cNvPr id="7" name="Text 5"/>
+          <p:cNvSpPr/>
+          <p:nvPr/>
+        </p:nvSpPr>
+        <p:spPr>
+          <a:xfrm>
+            <a:off x="11137392" y="6510528"/>
+            <a:ext cx="411480" cy="201168"/>
+          </a:xfrm>
+          <a:prstGeom prst="rect">
+            <a:avLst/>
+          </a:prstGeom>
+          <a:noFill/>
+          <a:ln/>
+        </p:spPr>
+        <p:txBody>
+          <a:bodyPr wrap="square" lIns="0" tIns="0" rIns="0" bIns="0" rtlCol="0" anchor="ctr"/>
+          <a:lstStyle/>
+          <a:p>
+            <a:pPr algn="r" indent="0" marL="0">
+              <a:buNone/>
+            </a:pPr>
+            <a:r>
+              <a:rPr lang="en-US" sz="900" dirty="0">
+                <a:solidFill>
+                  <a:srgbClr val="5F7181"/>
+                </a:solidFill>
+                <a:latin typeface="Aptos" pitchFamily="34" charset="0"/>
+                <a:ea typeface="Aptos" pitchFamily="34" charset="-122"/>
+                <a:cs typeface="Aptos" pitchFamily="34" charset="-120"/>
+              </a:rPr>
+              <a:t>14</a:t>
+            </a:r>
+            <a:endParaRPr lang="en-US" sz="900" dirty="0"/>
+          </a:p>
+        </p:txBody>
+      </p:sp>
+      <p:sp>
+        <p:nvSpPr>
+          <p:cNvPr id="8" name="Shape 6"/>
           <p:cNvSpPr/>
           <p:nvPr/>
         </p:nvSpPr>
@@ -5416,7 +5608,7 @@
       </p:sp>
       <p:sp>
         <p:nvSpPr>
-          <p:cNvPr id="8" name="Text 6"/>
+          <p:cNvPr id="9" name="Text 7"/>
           <p:cNvSpPr/>
           <p:nvPr/>
         </p:nvSpPr>
@@ -5455,14 +5647,14 @@
       </p:sp>
       <p:sp>
         <p:nvSpPr>
-          <p:cNvPr id="9" name="Text 7"/>
+          <p:cNvPr id="10" name="Text 8"/>
           <p:cNvSpPr/>
           <p:nvPr/>
         </p:nvSpPr>
         <p:spPr>
           <a:xfrm>
             <a:off x="640080" y="621792"/>
-            <a:ext cx="10881360" cy="566928"/>
+            <a:ext cx="10881360" cy="713232"/>
           </a:xfrm>
           <a:prstGeom prst="rect">
             <a:avLst/>
@@ -5480,7 +5672,7 @@
               <a:buNone/>
             </a:pPr>
             <a:r>
-              <a:rPr lang="en-US" sz="2700" b="1" dirty="0">
+              <a:rPr lang="en-US" sz="3400" b="1" dirty="0">
                 <a:solidFill>
                   <a:srgbClr val="003A63"/>
                 </a:solidFill>
@@ -5490,20 +5682,20 @@
               </a:rPr>
               <a:t>Reflection Questions</a:t>
             </a:r>
-            <a:endParaRPr lang="en-US" sz="2700" dirty="0"/>
-          </a:p>
-        </p:txBody>
-      </p:sp>
-      <p:sp>
-        <p:nvSpPr>
-          <p:cNvPr id="10" name="Text 8"/>
-          <p:cNvSpPr/>
-          <p:nvPr/>
-        </p:nvSpPr>
-        <p:spPr>
-          <a:xfrm>
-            <a:off x="868680" y="1417320"/>
-            <a:ext cx="6675120" cy="4434840"/>
+            <a:endParaRPr lang="en-US" sz="3400" dirty="0"/>
+          </a:p>
+        </p:txBody>
+      </p:sp>
+      <p:sp>
+        <p:nvSpPr>
+          <p:cNvPr id="11" name="Text 9"/>
+          <p:cNvSpPr/>
+          <p:nvPr/>
+        </p:nvSpPr>
+        <p:spPr>
+          <a:xfrm>
+            <a:off x="868680" y="1508760"/>
+            <a:ext cx="6537960" cy="4160520"/>
           </a:xfrm>
           <a:prstGeom prst="rect">
             <a:avLst/>
@@ -5518,7 +5710,7 @@
           <a:lstStyle/>
           <a:p>
             <a:r>
-              <a:rPr lang="en-US" sz="1700" dirty="0">
+              <a:rPr lang="en-US" sz="2100" dirty="0">
                 <a:solidFill>
                   <a:srgbClr val="17364A"/>
                 </a:solidFill>
@@ -5528,11 +5720,11 @@
               </a:rPr>
               <a:t>Where does this topic appear in one current or proposed AI workflow in your agency?</a:t>
             </a:r>
-            <a:endParaRPr lang="en-US" sz="1700" dirty="0"/>
-          </a:p>
-          <a:p>
-            <a:r>
-              <a:rPr lang="en-US" sz="1700" dirty="0">
+            <a:endParaRPr lang="en-US" sz="2100" dirty="0"/>
+          </a:p>
+          <a:p>
+            <a:r>
+              <a:rPr lang="en-US" sz="2100" dirty="0">
                 <a:solidFill>
                   <a:srgbClr val="17364A"/>
                 </a:solidFill>
@@ -5542,11 +5734,11 @@
               </a:rPr>
               <a:t>What decisions, data sources, users, or partners would be affected if this area is poorly designed?</a:t>
             </a:r>
-            <a:endParaRPr lang="en-US" sz="1700" dirty="0"/>
-          </a:p>
-          <a:p>
-            <a:r>
-              <a:rPr lang="en-US" sz="1700" dirty="0">
+            <a:endParaRPr lang="en-US" sz="2100" dirty="0"/>
+          </a:p>
+          <a:p>
+            <a:r>
+              <a:rPr lang="en-US" sz="2100" dirty="0">
                 <a:solidFill>
                   <a:srgbClr val="17364A"/>
                 </a:solidFill>
@@ -5556,13 +5748,13 @@
               </a:rPr>
               <a:t>What evidence would governance reviewers need before approving the workflow?</a:t>
             </a:r>
-            <a:endParaRPr lang="en-US" sz="1700" dirty="0"/>
-          </a:p>
-        </p:txBody>
-      </p:sp>
-      <p:sp>
-        <p:nvSpPr>
-          <p:cNvPr id="11" name="Shape 9"/>
+            <a:endParaRPr lang="en-US" sz="2100" dirty="0"/>
+          </a:p>
+        </p:txBody>
+      </p:sp>
+      <p:sp>
+        <p:nvSpPr>
+          <p:cNvPr id="12" name="Shape 10"/>
           <p:cNvSpPr/>
           <p:nvPr/>
         </p:nvSpPr>
@@ -5589,14 +5781,14 @@
       </p:sp>
       <p:sp>
         <p:nvSpPr>
-          <p:cNvPr id="12" name="Text 10"/>
+          <p:cNvPr id="13" name="Text 11"/>
           <p:cNvSpPr/>
           <p:nvPr/>
         </p:nvSpPr>
         <p:spPr>
           <a:xfrm>
             <a:off x="8074152" y="1563624"/>
-            <a:ext cx="2825496" cy="201168"/>
+            <a:ext cx="2825496" cy="256032"/>
           </a:xfrm>
           <a:prstGeom prst="rect">
             <a:avLst/>
@@ -5612,7 +5804,7 @@
               <a:buNone/>
             </a:pPr>
             <a:r>
-              <a:rPr lang="en-US" sz="950" b="1" dirty="0">
+              <a:rPr lang="en-US" sz="1300" b="1" dirty="0">
                 <a:solidFill>
                   <a:srgbClr val="0068B7"/>
                 </a:solidFill>
@@ -5622,20 +5814,20 @@
               </a:rPr>
               <a:t>Key idea</a:t>
             </a:r>
-            <a:endParaRPr lang="en-US" sz="950" dirty="0"/>
-          </a:p>
-        </p:txBody>
-      </p:sp>
-      <p:sp>
-        <p:nvSpPr>
-          <p:cNvPr id="13" name="Text 11"/>
-          <p:cNvSpPr/>
-          <p:nvPr/>
-        </p:nvSpPr>
-        <p:spPr>
-          <a:xfrm>
-            <a:off x="8074152" y="1856232"/>
-            <a:ext cx="2825496" cy="1261872"/>
+            <a:endParaRPr lang="en-US" sz="1300" dirty="0"/>
+          </a:p>
+        </p:txBody>
+      </p:sp>
+      <p:sp>
+        <p:nvSpPr>
+          <p:cNvPr id="14" name="Text 12"/>
+          <p:cNvSpPr/>
+          <p:nvPr/>
+        </p:nvSpPr>
+        <p:spPr>
+          <a:xfrm>
+            <a:off x="8074152" y="1920240"/>
+            <a:ext cx="2825496" cy="1188720"/>
           </a:xfrm>
           <a:prstGeom prst="rect">
             <a:avLst/>
@@ -5653,7 +5845,7 @@
               <a:buNone/>
             </a:pPr>
             <a:r>
-              <a:rPr lang="en-US" sz="1250" dirty="0">
+              <a:rPr lang="en-US" sz="1550" dirty="0">
                 <a:solidFill>
                   <a:srgbClr val="17364A"/>
                 </a:solidFill>
@@ -5663,13 +5855,13 @@
               </a:rPr>
               <a:t>Where does this topic appear in one current or proposed AI workflow in your agency?</a:t>
             </a:r>
-            <a:endParaRPr lang="en-US" sz="1250" dirty="0"/>
-          </a:p>
-        </p:txBody>
-      </p:sp>
-      <p:sp>
-        <p:nvSpPr>
-          <p:cNvPr id="14" name="Shape 12"/>
+            <a:endParaRPr lang="en-US" sz="1550" dirty="0"/>
+          </a:p>
+        </p:txBody>
+      </p:sp>
+      <p:sp>
+        <p:nvSpPr>
+          <p:cNvPr id="15" name="Shape 13"/>
           <p:cNvSpPr/>
           <p:nvPr/>
         </p:nvSpPr>
@@ -5696,14 +5888,14 @@
       </p:sp>
       <p:sp>
         <p:nvSpPr>
-          <p:cNvPr id="15" name="Text 13"/>
+          <p:cNvPr id="16" name="Text 14"/>
           <p:cNvSpPr/>
           <p:nvPr/>
         </p:nvSpPr>
         <p:spPr>
           <a:xfrm>
             <a:off x="8074152" y="3666744"/>
-            <a:ext cx="2825496" cy="201168"/>
+            <a:ext cx="2825496" cy="256032"/>
           </a:xfrm>
           <a:prstGeom prst="rect">
             <a:avLst/>
@@ -5719,7 +5911,7 @@
               <a:buNone/>
             </a:pPr>
             <a:r>
-              <a:rPr lang="en-US" sz="950" b="1" dirty="0">
+              <a:rPr lang="en-US" sz="1300" b="1" dirty="0">
                 <a:solidFill>
                   <a:srgbClr val="0068B7"/>
                 </a:solidFill>
@@ -5729,20 +5921,20 @@
               </a:rPr>
               <a:t>Use this for</a:t>
             </a:r>
-            <a:endParaRPr lang="en-US" sz="950" dirty="0"/>
-          </a:p>
-        </p:txBody>
-      </p:sp>
-      <p:sp>
-        <p:nvSpPr>
-          <p:cNvPr id="16" name="Text 14"/>
-          <p:cNvSpPr/>
-          <p:nvPr/>
-        </p:nvSpPr>
-        <p:spPr>
-          <a:xfrm>
-            <a:off x="8074152" y="3959352"/>
-            <a:ext cx="2825496" cy="1170432"/>
+            <a:endParaRPr lang="en-US" sz="1300" dirty="0"/>
+          </a:p>
+        </p:txBody>
+      </p:sp>
+      <p:sp>
+        <p:nvSpPr>
+          <p:cNvPr id="17" name="Text 15"/>
+          <p:cNvSpPr/>
+          <p:nvPr/>
+        </p:nvSpPr>
+        <p:spPr>
+          <a:xfrm>
+            <a:off x="8074152" y="4023360"/>
+            <a:ext cx="2825496" cy="1097280"/>
           </a:xfrm>
           <a:prstGeom prst="rect">
             <a:avLst/>
@@ -5760,7 +5952,7 @@
               <a:buNone/>
             </a:pPr>
             <a:r>
-              <a:rPr lang="en-US" sz="1250" dirty="0">
+              <a:rPr lang="en-US" sz="1550" dirty="0">
                 <a:solidFill>
                   <a:srgbClr val="17364A"/>
                 </a:solidFill>
@@ -5770,7 +5962,7 @@
               </a:rPr>
               <a:t>Connect the concept to public health decisions, safeguards, documentation, or implementation work.</a:t>
             </a:r>
-            <a:endParaRPr lang="en-US" sz="1250" dirty="0"/>
+            <a:endParaRPr lang="en-US" sz="1550" dirty="0"/>
           </a:p>
         </p:txBody>
       </p:sp>
@@ -5967,7 +6159,7 @@
                 <a:ea typeface="Aptos" pitchFamily="34" charset="-122"/>
                 <a:cs typeface="Aptos" pitchFamily="34" charset="-120"/>
               </a:rPr>
-              <a:t>© Paula Soper</a:t>
+              <a:t>Â© Paula Soper</a:t>
             </a:r>
             <a:endParaRPr lang="en-US" sz="800" dirty="0"/>
           </a:p>
@@ -5981,8 +6173,47 @@
         </p:nvSpPr>
         <p:spPr>
           <a:xfrm>
+            <a:off x="11137392" y="6510528"/>
+            <a:ext cx="411480" cy="201168"/>
+          </a:xfrm>
+          <a:prstGeom prst="rect">
+            <a:avLst/>
+          </a:prstGeom>
+          <a:noFill/>
+          <a:ln/>
+        </p:spPr>
+        <p:txBody>
+          <a:bodyPr wrap="square" lIns="0" tIns="0" rIns="0" bIns="0" rtlCol="0" anchor="ctr"/>
+          <a:lstStyle/>
+          <a:p>
+            <a:pPr algn="r" indent="0" marL="0">
+              <a:buNone/>
+            </a:pPr>
+            <a:r>
+              <a:rPr lang="en-US" sz="900" dirty="0">
+                <a:solidFill>
+                  <a:srgbClr val="5F7181"/>
+                </a:solidFill>
+                <a:latin typeface="Aptos" pitchFamily="34" charset="0"/>
+                <a:ea typeface="Aptos" pitchFamily="34" charset="-122"/>
+                <a:cs typeface="Aptos" pitchFamily="34" charset="-120"/>
+              </a:rPr>
+              <a:t>15</a:t>
+            </a:r>
+            <a:endParaRPr lang="en-US" sz="900" dirty="0"/>
+          </a:p>
+        </p:txBody>
+      </p:sp>
+      <p:sp>
+        <p:nvSpPr>
+          <p:cNvPr id="8" name="Text 6"/>
+          <p:cNvSpPr/>
+          <p:nvPr/>
+        </p:nvSpPr>
+        <p:spPr>
+          <a:xfrm>
             <a:off x="640080" y="658368"/>
-            <a:ext cx="10881360" cy="566928"/>
+            <a:ext cx="10881360" cy="713232"/>
           </a:xfrm>
           <a:prstGeom prst="rect">
             <a:avLst/>
@@ -6000,7 +6231,7 @@
               <a:buNone/>
             </a:pPr>
             <a:r>
-              <a:rPr lang="en-US" sz="2700" b="1" dirty="0">
+              <a:rPr lang="en-US" sz="3400" b="1" dirty="0">
                 <a:solidFill>
                   <a:srgbClr val="003A63"/>
                 </a:solidFill>
@@ -6010,20 +6241,20 @@
               </a:rPr>
               <a:t>Reflection Questions Continued</a:t>
             </a:r>
-            <a:endParaRPr lang="en-US" sz="2700" dirty="0"/>
-          </a:p>
-        </p:txBody>
-      </p:sp>
-      <p:sp>
-        <p:nvSpPr>
-          <p:cNvPr id="8" name="Text 6"/>
-          <p:cNvSpPr/>
-          <p:nvPr/>
-        </p:nvSpPr>
-        <p:spPr>
-          <a:xfrm>
-            <a:off x="868680" y="1417320"/>
-            <a:ext cx="6675120" cy="4434840"/>
+            <a:endParaRPr lang="en-US" sz="3400" dirty="0"/>
+          </a:p>
+        </p:txBody>
+      </p:sp>
+      <p:sp>
+        <p:nvSpPr>
+          <p:cNvPr id="9" name="Text 7"/>
+          <p:cNvSpPr/>
+          <p:nvPr/>
+        </p:nvSpPr>
+        <p:spPr>
+          <a:xfrm>
+            <a:off x="868680" y="1508760"/>
+            <a:ext cx="6537960" cy="4160520"/>
           </a:xfrm>
           <a:prstGeom prst="rect">
             <a:avLst/>
@@ -6038,7 +6269,7 @@
           <a:lstStyle/>
           <a:p>
             <a:r>
-              <a:rPr lang="en-US" sz="1700" dirty="0">
+              <a:rPr lang="en-US" sz="2100" dirty="0">
                 <a:solidFill>
                   <a:srgbClr val="17364A"/>
                 </a:solidFill>
@@ -6048,11 +6279,11 @@
               </a:rPr>
               <a:t>Which safeguards should be required before pilot testing?</a:t>
             </a:r>
-            <a:endParaRPr lang="en-US" sz="1700" dirty="0"/>
-          </a:p>
-          <a:p>
-            <a:r>
-              <a:rPr lang="en-US" sz="1700" dirty="0">
+            <a:endParaRPr lang="en-US" sz="2100" dirty="0"/>
+          </a:p>
+          <a:p>
+            <a:r>
+              <a:rPr lang="en-US" sz="2100" dirty="0">
                 <a:solidFill>
                   <a:srgbClr val="17364A"/>
                 </a:solidFill>
@@ -6062,13 +6293,13 @@
               </a:rPr>
               <a:t>Who owns ongoing monitoring and review?</a:t>
             </a:r>
-            <a:endParaRPr lang="en-US" sz="1700" dirty="0"/>
-          </a:p>
-        </p:txBody>
-      </p:sp>
-      <p:sp>
-        <p:nvSpPr>
-          <p:cNvPr id="9" name="Shape 7"/>
+            <a:endParaRPr lang="en-US" sz="2100" dirty="0"/>
+          </a:p>
+        </p:txBody>
+      </p:sp>
+      <p:sp>
+        <p:nvSpPr>
+          <p:cNvPr id="10" name="Shape 8"/>
           <p:cNvSpPr/>
           <p:nvPr/>
         </p:nvSpPr>
@@ -6095,14 +6326,14 @@
       </p:sp>
       <p:sp>
         <p:nvSpPr>
-          <p:cNvPr id="10" name="Text 8"/>
+          <p:cNvPr id="11" name="Text 9"/>
           <p:cNvSpPr/>
           <p:nvPr/>
         </p:nvSpPr>
         <p:spPr>
           <a:xfrm>
             <a:off x="8074152" y="1563624"/>
-            <a:ext cx="2825496" cy="201168"/>
+            <a:ext cx="2825496" cy="256032"/>
           </a:xfrm>
           <a:prstGeom prst="rect">
             <a:avLst/>
@@ -6118,7 +6349,7 @@
               <a:buNone/>
             </a:pPr>
             <a:r>
-              <a:rPr lang="en-US" sz="950" b="1" dirty="0">
+              <a:rPr lang="en-US" sz="1300" b="1" dirty="0">
                 <a:solidFill>
                   <a:srgbClr val="0068B7"/>
                 </a:solidFill>
@@ -6128,20 +6359,20 @@
               </a:rPr>
               <a:t>Key idea</a:t>
             </a:r>
-            <a:endParaRPr lang="en-US" sz="950" dirty="0"/>
-          </a:p>
-        </p:txBody>
-      </p:sp>
-      <p:sp>
-        <p:nvSpPr>
-          <p:cNvPr id="11" name="Text 9"/>
-          <p:cNvSpPr/>
-          <p:nvPr/>
-        </p:nvSpPr>
-        <p:spPr>
-          <a:xfrm>
-            <a:off x="8074152" y="1856232"/>
-            <a:ext cx="2825496" cy="1261872"/>
+            <a:endParaRPr lang="en-US" sz="1300" dirty="0"/>
+          </a:p>
+        </p:txBody>
+      </p:sp>
+      <p:sp>
+        <p:nvSpPr>
+          <p:cNvPr id="12" name="Text 10"/>
+          <p:cNvSpPr/>
+          <p:nvPr/>
+        </p:nvSpPr>
+        <p:spPr>
+          <a:xfrm>
+            <a:off x="8074152" y="1920240"/>
+            <a:ext cx="2825496" cy="1188720"/>
           </a:xfrm>
           <a:prstGeom prst="rect">
             <a:avLst/>
@@ -6159,7 +6390,7 @@
               <a:buNone/>
             </a:pPr>
             <a:r>
-              <a:rPr lang="en-US" sz="1250" dirty="0">
+              <a:rPr lang="en-US" sz="1550" dirty="0">
                 <a:solidFill>
                   <a:srgbClr val="17364A"/>
                 </a:solidFill>
@@ -6169,13 +6400,13 @@
               </a:rPr>
               <a:t>Which safeguards should be required before pilot testing?</a:t>
             </a:r>
-            <a:endParaRPr lang="en-US" sz="1250" dirty="0"/>
-          </a:p>
-        </p:txBody>
-      </p:sp>
-      <p:sp>
-        <p:nvSpPr>
-          <p:cNvPr id="12" name="Shape 10"/>
+            <a:endParaRPr lang="en-US" sz="1550" dirty="0"/>
+          </a:p>
+        </p:txBody>
+      </p:sp>
+      <p:sp>
+        <p:nvSpPr>
+          <p:cNvPr id="13" name="Shape 11"/>
           <p:cNvSpPr/>
           <p:nvPr/>
         </p:nvSpPr>
@@ -6202,14 +6433,14 @@
       </p:sp>
       <p:sp>
         <p:nvSpPr>
-          <p:cNvPr id="13" name="Text 11"/>
+          <p:cNvPr id="14" name="Text 12"/>
           <p:cNvSpPr/>
           <p:nvPr/>
         </p:nvSpPr>
         <p:spPr>
           <a:xfrm>
             <a:off x="8074152" y="3666744"/>
-            <a:ext cx="2825496" cy="201168"/>
+            <a:ext cx="2825496" cy="256032"/>
           </a:xfrm>
           <a:prstGeom prst="rect">
             <a:avLst/>
@@ -6225,7 +6456,7 @@
               <a:buNone/>
             </a:pPr>
             <a:r>
-              <a:rPr lang="en-US" sz="950" b="1" dirty="0">
+              <a:rPr lang="en-US" sz="1300" b="1" dirty="0">
                 <a:solidFill>
                   <a:srgbClr val="0068B7"/>
                 </a:solidFill>
@@ -6235,20 +6466,20 @@
               </a:rPr>
               <a:t>Use this for</a:t>
             </a:r>
-            <a:endParaRPr lang="en-US" sz="950" dirty="0"/>
-          </a:p>
-        </p:txBody>
-      </p:sp>
-      <p:sp>
-        <p:nvSpPr>
-          <p:cNvPr id="14" name="Text 12"/>
-          <p:cNvSpPr/>
-          <p:nvPr/>
-        </p:nvSpPr>
-        <p:spPr>
-          <a:xfrm>
-            <a:off x="8074152" y="3959352"/>
-            <a:ext cx="2825496" cy="1170432"/>
+            <a:endParaRPr lang="en-US" sz="1300" dirty="0"/>
+          </a:p>
+        </p:txBody>
+      </p:sp>
+      <p:sp>
+        <p:nvSpPr>
+          <p:cNvPr id="15" name="Text 13"/>
+          <p:cNvSpPr/>
+          <p:nvPr/>
+        </p:nvSpPr>
+        <p:spPr>
+          <a:xfrm>
+            <a:off x="8074152" y="4023360"/>
+            <a:ext cx="2825496" cy="1097280"/>
           </a:xfrm>
           <a:prstGeom prst="rect">
             <a:avLst/>
@@ -6266,7 +6497,7 @@
               <a:buNone/>
             </a:pPr>
             <a:r>
-              <a:rPr lang="en-US" sz="1250" dirty="0">
+              <a:rPr lang="en-US" sz="1550" dirty="0">
                 <a:solidFill>
                   <a:srgbClr val="17364A"/>
                 </a:solidFill>
@@ -6276,7 +6507,7 @@
               </a:rPr>
               <a:t>Connect the concept to public health decisions, safeguards, documentation, or implementation work.</a:t>
             </a:r>
-            <a:endParaRPr lang="en-US" sz="1250" dirty="0"/>
+            <a:endParaRPr lang="en-US" sz="1550" dirty="0"/>
           </a:p>
         </p:txBody>
       </p:sp>
@@ -6473,7 +6704,7 @@
                 <a:ea typeface="Aptos" pitchFamily="34" charset="-122"/>
                 <a:cs typeface="Aptos" pitchFamily="34" charset="-120"/>
               </a:rPr>
-              <a:t>© Paula Soper</a:t>
+              <a:t>Â© Paula Soper</a:t>
             </a:r>
             <a:endParaRPr lang="en-US" sz="800" dirty="0"/>
           </a:p>
@@ -6481,7 +6712,46 @@
       </p:sp>
       <p:sp>
         <p:nvSpPr>
-          <p:cNvPr id="7" name="Shape 5"/>
+          <p:cNvPr id="7" name="Text 5"/>
+          <p:cNvSpPr/>
+          <p:nvPr/>
+        </p:nvSpPr>
+        <p:spPr>
+          <a:xfrm>
+            <a:off x="11137392" y="6510528"/>
+            <a:ext cx="411480" cy="201168"/>
+          </a:xfrm>
+          <a:prstGeom prst="rect">
+            <a:avLst/>
+          </a:prstGeom>
+          <a:noFill/>
+          <a:ln/>
+        </p:spPr>
+        <p:txBody>
+          <a:bodyPr wrap="square" lIns="0" tIns="0" rIns="0" bIns="0" rtlCol="0" anchor="ctr"/>
+          <a:lstStyle/>
+          <a:p>
+            <a:pPr algn="r" indent="0" marL="0">
+              <a:buNone/>
+            </a:pPr>
+            <a:r>
+              <a:rPr lang="en-US" sz="900" dirty="0">
+                <a:solidFill>
+                  <a:srgbClr val="5F7181"/>
+                </a:solidFill>
+                <a:latin typeface="Aptos" pitchFamily="34" charset="0"/>
+                <a:ea typeface="Aptos" pitchFamily="34" charset="-122"/>
+                <a:cs typeface="Aptos" pitchFamily="34" charset="-120"/>
+              </a:rPr>
+              <a:t>16</a:t>
+            </a:r>
+            <a:endParaRPr lang="en-US" sz="900" dirty="0"/>
+          </a:p>
+        </p:txBody>
+      </p:sp>
+      <p:sp>
+        <p:nvSpPr>
+          <p:cNvPr id="8" name="Shape 6"/>
           <p:cNvSpPr/>
           <p:nvPr/>
         </p:nvSpPr>
@@ -6506,7 +6776,7 @@
       </p:sp>
       <p:sp>
         <p:nvSpPr>
-          <p:cNvPr id="8" name="Text 6"/>
+          <p:cNvPr id="9" name="Text 7"/>
           <p:cNvSpPr/>
           <p:nvPr/>
         </p:nvSpPr>
@@ -6545,14 +6815,14 @@
       </p:sp>
       <p:sp>
         <p:nvSpPr>
-          <p:cNvPr id="9" name="Text 7"/>
+          <p:cNvPr id="10" name="Text 8"/>
           <p:cNvSpPr/>
           <p:nvPr/>
         </p:nvSpPr>
         <p:spPr>
           <a:xfrm>
             <a:off x="640080" y="621792"/>
-            <a:ext cx="10881360" cy="566928"/>
+            <a:ext cx="10881360" cy="713232"/>
           </a:xfrm>
           <a:prstGeom prst="rect">
             <a:avLst/>
@@ -6570,7 +6840,7 @@
               <a:buNone/>
             </a:pPr>
             <a:r>
-              <a:rPr lang="en-US" sz="2700" b="1" dirty="0">
+              <a:rPr lang="en-US" sz="3400" b="1" dirty="0">
                 <a:solidFill>
                   <a:srgbClr val="003A63"/>
                 </a:solidFill>
@@ -6580,20 +6850,20 @@
               </a:rPr>
               <a:t>Practical Exercise</a:t>
             </a:r>
-            <a:endParaRPr lang="en-US" sz="2700" dirty="0"/>
-          </a:p>
-        </p:txBody>
-      </p:sp>
-      <p:sp>
-        <p:nvSpPr>
-          <p:cNvPr id="10" name="Text 8"/>
-          <p:cNvSpPr/>
-          <p:nvPr/>
-        </p:nvSpPr>
-        <p:spPr>
-          <a:xfrm>
-            <a:off x="868680" y="1417320"/>
-            <a:ext cx="6675120" cy="4434840"/>
+            <a:endParaRPr lang="en-US" sz="3400" dirty="0"/>
+          </a:p>
+        </p:txBody>
+      </p:sp>
+      <p:sp>
+        <p:nvSpPr>
+          <p:cNvPr id="11" name="Text 9"/>
+          <p:cNvSpPr/>
+          <p:nvPr/>
+        </p:nvSpPr>
+        <p:spPr>
+          <a:xfrm>
+            <a:off x="868680" y="1508760"/>
+            <a:ext cx="6537960" cy="4160520"/>
           </a:xfrm>
           <a:prstGeom prst="rect">
             <a:avLst/>
@@ -6608,7 +6878,7 @@
           <a:lstStyle/>
           <a:p>
             <a:r>
-              <a:rPr lang="en-US" sz="1700" dirty="0">
+              <a:rPr lang="en-US" sz="2100" dirty="0">
                 <a:solidFill>
                   <a:srgbClr val="17364A"/>
                 </a:solidFill>
@@ -6618,11 +6888,11 @@
               </a:rPr>
               <a:t>Create a AI value and impact measurement plan for one real or realistic public health AI workflow.</a:t>
             </a:r>
-            <a:endParaRPr lang="en-US" sz="1700" dirty="0"/>
-          </a:p>
-          <a:p>
-            <a:r>
-              <a:rPr lang="en-US" sz="1700" dirty="0">
+            <a:endParaRPr lang="en-US" sz="2100" dirty="0"/>
+          </a:p>
+          <a:p>
+            <a:r>
+              <a:rPr lang="en-US" sz="2100" dirty="0">
                 <a:solidFill>
                   <a:srgbClr val="17364A"/>
                 </a:solidFill>
@@ -6630,13 +6900,13 @@
                 <a:ea typeface="Aptos" pitchFamily="34" charset="-122"/>
                 <a:cs typeface="Aptos" pitchFamily="34" charset="-120"/>
               </a:rPr>
-              <a:t>The artifact should describe the use case, affected users, data sources, system dependencies, risks, guardrails, review.</a:t>
-            </a:r>
-            <a:endParaRPr lang="en-US" sz="1700" dirty="0"/>
-          </a:p>
-          <a:p>
-            <a:r>
-              <a:rPr lang="en-US" sz="1700" dirty="0">
+              <a:t>The artifact should describe the use case, affected users, data sources, system dependencies, risks,.</a:t>
+            </a:r>
+            <a:endParaRPr lang="en-US" sz="2100" dirty="0"/>
+          </a:p>
+          <a:p>
+            <a:r>
+              <a:rPr lang="en-US" sz="2100" dirty="0">
                 <a:solidFill>
                   <a:srgbClr val="17364A"/>
                 </a:solidFill>
@@ -6644,29 +6914,15 @@
                 <a:ea typeface="Aptos" pitchFamily="34" charset="-122"/>
                 <a:cs typeface="Aptos" pitchFamily="34" charset="-120"/>
               </a:rPr>
-              <a:t>The exercise should produce a work product that could be used in a governance meeting, procurement review, implementation.</a:t>
-            </a:r>
-            <a:endParaRPr lang="en-US" sz="1700" dirty="0"/>
-          </a:p>
-          <a:p>
-            <a:r>
-              <a:rPr lang="en-US" sz="1700" dirty="0">
-                <a:solidFill>
-                  <a:srgbClr val="17364A"/>
-                </a:solidFill>
-                <a:latin typeface="Aptos" pitchFamily="34" charset="0"/>
-                <a:ea typeface="Aptos" pitchFamily="34" charset="-122"/>
-                <a:cs typeface="Aptos" pitchFamily="34" charset="-120"/>
-              </a:rPr>
-              <a:t>Learners should document assumptions and identify which staff or partners need to be consulted.</a:t>
-            </a:r>
-            <a:endParaRPr lang="en-US" sz="1700" dirty="0"/>
-          </a:p>
-        </p:txBody>
-      </p:sp>
-      <p:sp>
-        <p:nvSpPr>
-          <p:cNvPr id="11" name="Shape 9"/>
+              <a:t>The exercise should produce a work product that could be used in a governance meeting, procurement.</a:t>
+            </a:r>
+            <a:endParaRPr lang="en-US" sz="2100" dirty="0"/>
+          </a:p>
+        </p:txBody>
+      </p:sp>
+      <p:sp>
+        <p:nvSpPr>
+          <p:cNvPr id="12" name="Shape 10"/>
           <p:cNvSpPr/>
           <p:nvPr/>
         </p:nvSpPr>
@@ -6693,14 +6949,14 @@
       </p:sp>
       <p:sp>
         <p:nvSpPr>
-          <p:cNvPr id="12" name="Text 10"/>
+          <p:cNvPr id="13" name="Text 11"/>
           <p:cNvSpPr/>
           <p:nvPr/>
         </p:nvSpPr>
         <p:spPr>
           <a:xfrm>
             <a:off x="8074152" y="1563624"/>
-            <a:ext cx="2825496" cy="201168"/>
+            <a:ext cx="2825496" cy="256032"/>
           </a:xfrm>
           <a:prstGeom prst="rect">
             <a:avLst/>
@@ -6716,7 +6972,7 @@
               <a:buNone/>
             </a:pPr>
             <a:r>
-              <a:rPr lang="en-US" sz="950" b="1" dirty="0">
+              <a:rPr lang="en-US" sz="1300" b="1" dirty="0">
                 <a:solidFill>
                   <a:srgbClr val="0068B7"/>
                 </a:solidFill>
@@ -6726,20 +6982,20 @@
               </a:rPr>
               <a:t>Key idea</a:t>
             </a:r>
-            <a:endParaRPr lang="en-US" sz="950" dirty="0"/>
-          </a:p>
-        </p:txBody>
-      </p:sp>
-      <p:sp>
-        <p:nvSpPr>
-          <p:cNvPr id="13" name="Text 11"/>
-          <p:cNvSpPr/>
-          <p:nvPr/>
-        </p:nvSpPr>
-        <p:spPr>
-          <a:xfrm>
-            <a:off x="8074152" y="1856232"/>
-            <a:ext cx="2825496" cy="1261872"/>
+            <a:endParaRPr lang="en-US" sz="1300" dirty="0"/>
+          </a:p>
+        </p:txBody>
+      </p:sp>
+      <p:sp>
+        <p:nvSpPr>
+          <p:cNvPr id="14" name="Text 12"/>
+          <p:cNvSpPr/>
+          <p:nvPr/>
+        </p:nvSpPr>
+        <p:spPr>
+          <a:xfrm>
+            <a:off x="8074152" y="1920240"/>
+            <a:ext cx="2825496" cy="1188720"/>
           </a:xfrm>
           <a:prstGeom prst="rect">
             <a:avLst/>
@@ -6757,7 +7013,7 @@
               <a:buNone/>
             </a:pPr>
             <a:r>
-              <a:rPr lang="en-US" sz="1250" dirty="0">
+              <a:rPr lang="en-US" sz="1550" dirty="0">
                 <a:solidFill>
                   <a:srgbClr val="17364A"/>
                 </a:solidFill>
@@ -6767,13 +7023,13 @@
               </a:rPr>
               <a:t>Create a AI value and impact measurement plan for one real or realistic public health AI workflow.</a:t>
             </a:r>
-            <a:endParaRPr lang="en-US" sz="1250" dirty="0"/>
-          </a:p>
-        </p:txBody>
-      </p:sp>
-      <p:sp>
-        <p:nvSpPr>
-          <p:cNvPr id="14" name="Shape 12"/>
+            <a:endParaRPr lang="en-US" sz="1550" dirty="0"/>
+          </a:p>
+        </p:txBody>
+      </p:sp>
+      <p:sp>
+        <p:nvSpPr>
+          <p:cNvPr id="15" name="Shape 13"/>
           <p:cNvSpPr/>
           <p:nvPr/>
         </p:nvSpPr>
@@ -6800,14 +7056,14 @@
       </p:sp>
       <p:sp>
         <p:nvSpPr>
-          <p:cNvPr id="15" name="Text 13"/>
+          <p:cNvPr id="16" name="Text 14"/>
           <p:cNvSpPr/>
           <p:nvPr/>
         </p:nvSpPr>
         <p:spPr>
           <a:xfrm>
             <a:off x="8074152" y="3666744"/>
-            <a:ext cx="2825496" cy="201168"/>
+            <a:ext cx="2825496" cy="256032"/>
           </a:xfrm>
           <a:prstGeom prst="rect">
             <a:avLst/>
@@ -6823,7 +7079,7 @@
               <a:buNone/>
             </a:pPr>
             <a:r>
-              <a:rPr lang="en-US" sz="950" b="1" dirty="0">
+              <a:rPr lang="en-US" sz="1300" b="1" dirty="0">
                 <a:solidFill>
                   <a:srgbClr val="0068B7"/>
                 </a:solidFill>
@@ -6833,20 +7089,20 @@
               </a:rPr>
               <a:t>Use this for</a:t>
             </a:r>
-            <a:endParaRPr lang="en-US" sz="950" dirty="0"/>
-          </a:p>
-        </p:txBody>
-      </p:sp>
-      <p:sp>
-        <p:nvSpPr>
-          <p:cNvPr id="16" name="Text 14"/>
-          <p:cNvSpPr/>
-          <p:nvPr/>
-        </p:nvSpPr>
-        <p:spPr>
-          <a:xfrm>
-            <a:off x="8074152" y="3959352"/>
-            <a:ext cx="2825496" cy="1170432"/>
+            <a:endParaRPr lang="en-US" sz="1300" dirty="0"/>
+          </a:p>
+        </p:txBody>
+      </p:sp>
+      <p:sp>
+        <p:nvSpPr>
+          <p:cNvPr id="17" name="Text 15"/>
+          <p:cNvSpPr/>
+          <p:nvPr/>
+        </p:nvSpPr>
+        <p:spPr>
+          <a:xfrm>
+            <a:off x="8074152" y="4023360"/>
+            <a:ext cx="2825496" cy="1097280"/>
           </a:xfrm>
           <a:prstGeom prst="rect">
             <a:avLst/>
@@ -6864,7 +7120,7 @@
               <a:buNone/>
             </a:pPr>
             <a:r>
-              <a:rPr lang="en-US" sz="1250" dirty="0">
+              <a:rPr lang="en-US" sz="1550" dirty="0">
                 <a:solidFill>
                   <a:srgbClr val="17364A"/>
                 </a:solidFill>
@@ -6874,7 +7130,7 @@
               </a:rPr>
               <a:t>Connect the concept to public health decisions, safeguards, documentation, or implementation work.</a:t>
             </a:r>
-            <a:endParaRPr lang="en-US" sz="1250" dirty="0"/>
+            <a:endParaRPr lang="en-US" sz="1550" dirty="0"/>
           </a:p>
         </p:txBody>
       </p:sp>
@@ -7071,7 +7327,7 @@
                 <a:ea typeface="Aptos" pitchFamily="34" charset="-122"/>
                 <a:cs typeface="Aptos" pitchFamily="34" charset="-120"/>
               </a:rPr>
-              <a:t>© Paula Soper</a:t>
+              <a:t>Â© Paula Soper</a:t>
             </a:r>
             <a:endParaRPr lang="en-US" sz="800" dirty="0"/>
           </a:p>
@@ -7079,7 +7335,46 @@
       </p:sp>
       <p:sp>
         <p:nvSpPr>
-          <p:cNvPr id="7" name="Shape 5"/>
+          <p:cNvPr id="7" name="Text 5"/>
+          <p:cNvSpPr/>
+          <p:nvPr/>
+        </p:nvSpPr>
+        <p:spPr>
+          <a:xfrm>
+            <a:off x="11137392" y="6510528"/>
+            <a:ext cx="411480" cy="201168"/>
+          </a:xfrm>
+          <a:prstGeom prst="rect">
+            <a:avLst/>
+          </a:prstGeom>
+          <a:noFill/>
+          <a:ln/>
+        </p:spPr>
+        <p:txBody>
+          <a:bodyPr wrap="square" lIns="0" tIns="0" rIns="0" bIns="0" rtlCol="0" anchor="ctr"/>
+          <a:lstStyle/>
+          <a:p>
+            <a:pPr algn="r" indent="0" marL="0">
+              <a:buNone/>
+            </a:pPr>
+            <a:r>
+              <a:rPr lang="en-US" sz="900" dirty="0">
+                <a:solidFill>
+                  <a:srgbClr val="5F7181"/>
+                </a:solidFill>
+                <a:latin typeface="Aptos" pitchFamily="34" charset="0"/>
+                <a:ea typeface="Aptos" pitchFamily="34" charset="-122"/>
+                <a:cs typeface="Aptos" pitchFamily="34" charset="-120"/>
+              </a:rPr>
+              <a:t>17</a:t>
+            </a:r>
+            <a:endParaRPr lang="en-US" sz="900" dirty="0"/>
+          </a:p>
+        </p:txBody>
+      </p:sp>
+      <p:sp>
+        <p:nvSpPr>
+          <p:cNvPr id="8" name="Shape 6"/>
           <p:cNvSpPr/>
           <p:nvPr/>
         </p:nvSpPr>
@@ -7104,7 +7399,7 @@
       </p:sp>
       <p:sp>
         <p:nvSpPr>
-          <p:cNvPr id="8" name="Text 6"/>
+          <p:cNvPr id="9" name="Text 7"/>
           <p:cNvSpPr/>
           <p:nvPr/>
         </p:nvSpPr>
@@ -7143,14 +7438,14 @@
       </p:sp>
       <p:sp>
         <p:nvSpPr>
-          <p:cNvPr id="9" name="Text 7"/>
+          <p:cNvPr id="10" name="Text 8"/>
           <p:cNvSpPr/>
           <p:nvPr/>
         </p:nvSpPr>
         <p:spPr>
           <a:xfrm>
             <a:off x="640080" y="621792"/>
-            <a:ext cx="10881360" cy="566928"/>
+            <a:ext cx="10881360" cy="713232"/>
           </a:xfrm>
           <a:prstGeom prst="rect">
             <a:avLst/>
@@ -7168,7 +7463,7 @@
               <a:buNone/>
             </a:pPr>
             <a:r>
-              <a:rPr lang="en-US" sz="2700" b="1" dirty="0">
+              <a:rPr lang="en-US" sz="3400" b="1" dirty="0">
                 <a:solidFill>
                   <a:srgbClr val="003A63"/>
                 </a:solidFill>
@@ -7178,20 +7473,20 @@
               </a:rPr>
               <a:t>Expected Artifact or Evidence</a:t>
             </a:r>
-            <a:endParaRPr lang="en-US" sz="2700" dirty="0"/>
-          </a:p>
-        </p:txBody>
-      </p:sp>
-      <p:sp>
-        <p:nvSpPr>
-          <p:cNvPr id="10" name="Text 8"/>
-          <p:cNvSpPr/>
-          <p:nvPr/>
-        </p:nvSpPr>
-        <p:spPr>
-          <a:xfrm>
-            <a:off x="868680" y="1417320"/>
-            <a:ext cx="6675120" cy="4434840"/>
+            <a:endParaRPr lang="en-US" sz="3400" dirty="0"/>
+          </a:p>
+        </p:txBody>
+      </p:sp>
+      <p:sp>
+        <p:nvSpPr>
+          <p:cNvPr id="11" name="Text 9"/>
+          <p:cNvSpPr/>
+          <p:nvPr/>
+        </p:nvSpPr>
+        <p:spPr>
+          <a:xfrm>
+            <a:off x="868680" y="1508760"/>
+            <a:ext cx="6537960" cy="4160520"/>
           </a:xfrm>
           <a:prstGeom prst="rect">
             <a:avLst/>
@@ -7206,7 +7501,7 @@
           <a:lstStyle/>
           <a:p>
             <a:r>
-              <a:rPr lang="en-US" sz="1700" dirty="0">
+              <a:rPr lang="en-US" sz="2100" dirty="0">
                 <a:solidFill>
                   <a:srgbClr val="17364A"/>
                 </a:solidFill>
@@ -7216,11 +7511,11 @@
               </a:rPr>
               <a:t>The expected artifact is a completed AI value and impact measurement plan.</a:t>
             </a:r>
-            <a:endParaRPr lang="en-US" sz="1700" dirty="0"/>
-          </a:p>
-          <a:p>
-            <a:r>
-              <a:rPr lang="en-US" sz="1700" dirty="0">
+            <a:endParaRPr lang="en-US" sz="2100" dirty="0"/>
+          </a:p>
+          <a:p>
+            <a:r>
+              <a:rPr lang="en-US" sz="2100" dirty="0">
                 <a:solidFill>
                   <a:srgbClr val="17364A"/>
                 </a:solidFill>
@@ -7228,15 +7523,15 @@
                 <a:ea typeface="Aptos" pitchFamily="34" charset="-122"/>
                 <a:cs typeface="Aptos" pitchFamily="34" charset="-120"/>
               </a:rPr>
-              <a:t>It should be specific to a public health workflow and should include technical dependencies, governance questions, human.</a:t>
-            </a:r>
-            <a:endParaRPr lang="en-US" sz="1700" dirty="0"/>
-          </a:p>
-        </p:txBody>
-      </p:sp>
-      <p:sp>
-        <p:nvSpPr>
-          <p:cNvPr id="11" name="Shape 9"/>
+              <a:t>It should be specific to a public health workflow and should include technical dependencies, governance.</a:t>
+            </a:r>
+            <a:endParaRPr lang="en-US" sz="2100" dirty="0"/>
+          </a:p>
+        </p:txBody>
+      </p:sp>
+      <p:sp>
+        <p:nvSpPr>
+          <p:cNvPr id="12" name="Shape 10"/>
           <p:cNvSpPr/>
           <p:nvPr/>
         </p:nvSpPr>
@@ -7263,14 +7558,14 @@
       </p:sp>
       <p:sp>
         <p:nvSpPr>
-          <p:cNvPr id="12" name="Text 10"/>
+          <p:cNvPr id="13" name="Text 11"/>
           <p:cNvSpPr/>
           <p:nvPr/>
         </p:nvSpPr>
         <p:spPr>
           <a:xfrm>
             <a:off x="8074152" y="1563624"/>
-            <a:ext cx="2825496" cy="201168"/>
+            <a:ext cx="2825496" cy="256032"/>
           </a:xfrm>
           <a:prstGeom prst="rect">
             <a:avLst/>
@@ -7286,7 +7581,7 @@
               <a:buNone/>
             </a:pPr>
             <a:r>
-              <a:rPr lang="en-US" sz="950" b="1" dirty="0">
+              <a:rPr lang="en-US" sz="1300" b="1" dirty="0">
                 <a:solidFill>
                   <a:srgbClr val="0068B7"/>
                 </a:solidFill>
@@ -7296,20 +7591,20 @@
               </a:rPr>
               <a:t>Key idea</a:t>
             </a:r>
-            <a:endParaRPr lang="en-US" sz="950" dirty="0"/>
-          </a:p>
-        </p:txBody>
-      </p:sp>
-      <p:sp>
-        <p:nvSpPr>
-          <p:cNvPr id="13" name="Text 11"/>
-          <p:cNvSpPr/>
-          <p:nvPr/>
-        </p:nvSpPr>
-        <p:spPr>
-          <a:xfrm>
-            <a:off x="8074152" y="1856232"/>
-            <a:ext cx="2825496" cy="1261872"/>
+            <a:endParaRPr lang="en-US" sz="1300" dirty="0"/>
+          </a:p>
+        </p:txBody>
+      </p:sp>
+      <p:sp>
+        <p:nvSpPr>
+          <p:cNvPr id="14" name="Text 12"/>
+          <p:cNvSpPr/>
+          <p:nvPr/>
+        </p:nvSpPr>
+        <p:spPr>
+          <a:xfrm>
+            <a:off x="8074152" y="1920240"/>
+            <a:ext cx="2825496" cy="1188720"/>
           </a:xfrm>
           <a:prstGeom prst="rect">
             <a:avLst/>
@@ -7327,7 +7622,7 @@
               <a:buNone/>
             </a:pPr>
             <a:r>
-              <a:rPr lang="en-US" sz="1250" dirty="0">
+              <a:rPr lang="en-US" sz="1550" dirty="0">
                 <a:solidFill>
                   <a:srgbClr val="17364A"/>
                 </a:solidFill>
@@ -7337,13 +7632,13 @@
               </a:rPr>
               <a:t>The expected artifact is a completed AI value and impact measurement plan.</a:t>
             </a:r>
-            <a:endParaRPr lang="en-US" sz="1250" dirty="0"/>
-          </a:p>
-        </p:txBody>
-      </p:sp>
-      <p:sp>
-        <p:nvSpPr>
-          <p:cNvPr id="14" name="Shape 12"/>
+            <a:endParaRPr lang="en-US" sz="1550" dirty="0"/>
+          </a:p>
+        </p:txBody>
+      </p:sp>
+      <p:sp>
+        <p:nvSpPr>
+          <p:cNvPr id="15" name="Shape 13"/>
           <p:cNvSpPr/>
           <p:nvPr/>
         </p:nvSpPr>
@@ -7370,14 +7665,14 @@
       </p:sp>
       <p:sp>
         <p:nvSpPr>
-          <p:cNvPr id="15" name="Text 13"/>
+          <p:cNvPr id="16" name="Text 14"/>
           <p:cNvSpPr/>
           <p:nvPr/>
         </p:nvSpPr>
         <p:spPr>
           <a:xfrm>
             <a:off x="8074152" y="3666744"/>
-            <a:ext cx="2825496" cy="201168"/>
+            <a:ext cx="2825496" cy="256032"/>
           </a:xfrm>
           <a:prstGeom prst="rect">
             <a:avLst/>
@@ -7393,7 +7688,7 @@
               <a:buNone/>
             </a:pPr>
             <a:r>
-              <a:rPr lang="en-US" sz="950" b="1" dirty="0">
+              <a:rPr lang="en-US" sz="1300" b="1" dirty="0">
                 <a:solidFill>
                   <a:srgbClr val="0068B7"/>
                 </a:solidFill>
@@ -7403,20 +7698,20 @@
               </a:rPr>
               <a:t>Use this for</a:t>
             </a:r>
-            <a:endParaRPr lang="en-US" sz="950" dirty="0"/>
-          </a:p>
-        </p:txBody>
-      </p:sp>
-      <p:sp>
-        <p:nvSpPr>
-          <p:cNvPr id="16" name="Text 14"/>
-          <p:cNvSpPr/>
-          <p:nvPr/>
-        </p:nvSpPr>
-        <p:spPr>
-          <a:xfrm>
-            <a:off x="8074152" y="3959352"/>
-            <a:ext cx="2825496" cy="1170432"/>
+            <a:endParaRPr lang="en-US" sz="1300" dirty="0"/>
+          </a:p>
+        </p:txBody>
+      </p:sp>
+      <p:sp>
+        <p:nvSpPr>
+          <p:cNvPr id="17" name="Text 15"/>
+          <p:cNvSpPr/>
+          <p:nvPr/>
+        </p:nvSpPr>
+        <p:spPr>
+          <a:xfrm>
+            <a:off x="8074152" y="4023360"/>
+            <a:ext cx="2825496" cy="1097280"/>
           </a:xfrm>
           <a:prstGeom prst="rect">
             <a:avLst/>
@@ -7434,7 +7729,7 @@
               <a:buNone/>
             </a:pPr>
             <a:r>
-              <a:rPr lang="en-US" sz="1250" dirty="0">
+              <a:rPr lang="en-US" sz="1550" dirty="0">
                 <a:solidFill>
                   <a:srgbClr val="17364A"/>
                 </a:solidFill>
@@ -7444,7 +7739,7 @@
               </a:rPr>
               <a:t>Connect the concept to public health decisions, safeguards, documentation, or implementation work.</a:t>
             </a:r>
-            <a:endParaRPr lang="en-US" sz="1250" dirty="0"/>
+            <a:endParaRPr lang="en-US" sz="1550" dirty="0"/>
           </a:p>
         </p:txBody>
       </p:sp>
@@ -7641,7 +7936,7 @@
                 <a:ea typeface="Aptos" pitchFamily="34" charset="-122"/>
                 <a:cs typeface="Aptos" pitchFamily="34" charset="-120"/>
               </a:rPr>
-              <a:t>© Paula Soper</a:t>
+              <a:t>Â© Paula Soper</a:t>
             </a:r>
             <a:endParaRPr lang="en-US" sz="800" dirty="0"/>
           </a:p>
@@ -7649,7 +7944,46 @@
       </p:sp>
       <p:sp>
         <p:nvSpPr>
-          <p:cNvPr id="7" name="Shape 5"/>
+          <p:cNvPr id="7" name="Text 5"/>
+          <p:cNvSpPr/>
+          <p:nvPr/>
+        </p:nvSpPr>
+        <p:spPr>
+          <a:xfrm>
+            <a:off x="11137392" y="6510528"/>
+            <a:ext cx="411480" cy="201168"/>
+          </a:xfrm>
+          <a:prstGeom prst="rect">
+            <a:avLst/>
+          </a:prstGeom>
+          <a:noFill/>
+          <a:ln/>
+        </p:spPr>
+        <p:txBody>
+          <a:bodyPr wrap="square" lIns="0" tIns="0" rIns="0" bIns="0" rtlCol="0" anchor="ctr"/>
+          <a:lstStyle/>
+          <a:p>
+            <a:pPr algn="r" indent="0" marL="0">
+              <a:buNone/>
+            </a:pPr>
+            <a:r>
+              <a:rPr lang="en-US" sz="900" dirty="0">
+                <a:solidFill>
+                  <a:srgbClr val="5F7181"/>
+                </a:solidFill>
+                <a:latin typeface="Aptos" pitchFamily="34" charset="0"/>
+                <a:ea typeface="Aptos" pitchFamily="34" charset="-122"/>
+                <a:cs typeface="Aptos" pitchFamily="34" charset="-120"/>
+              </a:rPr>
+              <a:t>18</a:t>
+            </a:r>
+            <a:endParaRPr lang="en-US" sz="900" dirty="0"/>
+          </a:p>
+        </p:txBody>
+      </p:sp>
+      <p:sp>
+        <p:nvSpPr>
+          <p:cNvPr id="8" name="Shape 6"/>
           <p:cNvSpPr/>
           <p:nvPr/>
         </p:nvSpPr>
@@ -7674,7 +8008,7 @@
       </p:sp>
       <p:sp>
         <p:nvSpPr>
-          <p:cNvPr id="8" name="Text 6"/>
+          <p:cNvPr id="9" name="Text 7"/>
           <p:cNvSpPr/>
           <p:nvPr/>
         </p:nvSpPr>
@@ -7713,14 +8047,14 @@
       </p:sp>
       <p:sp>
         <p:nvSpPr>
-          <p:cNvPr id="9" name="Text 7"/>
+          <p:cNvPr id="10" name="Text 8"/>
           <p:cNvSpPr/>
           <p:nvPr/>
         </p:nvSpPr>
         <p:spPr>
           <a:xfrm>
             <a:off x="640080" y="621792"/>
-            <a:ext cx="10881360" cy="566928"/>
+            <a:ext cx="10881360" cy="713232"/>
           </a:xfrm>
           <a:prstGeom prst="rect">
             <a:avLst/>
@@ -7738,7 +8072,7 @@
               <a:buNone/>
             </a:pPr>
             <a:r>
-              <a:rPr lang="en-US" sz="2700" b="1" dirty="0">
+              <a:rPr lang="en-US" sz="3400" b="1" dirty="0">
                 <a:solidFill>
                   <a:srgbClr val="003A63"/>
                 </a:solidFill>
@@ -7748,20 +8082,20 @@
               </a:rPr>
               <a:t>Expected Assignment</a:t>
             </a:r>
-            <a:endParaRPr lang="en-US" sz="2700" dirty="0"/>
-          </a:p>
-        </p:txBody>
-      </p:sp>
-      <p:sp>
-        <p:nvSpPr>
-          <p:cNvPr id="10" name="Text 8"/>
-          <p:cNvSpPr/>
-          <p:nvPr/>
-        </p:nvSpPr>
-        <p:spPr>
-          <a:xfrm>
-            <a:off x="868680" y="1417320"/>
-            <a:ext cx="6675120" cy="4434840"/>
+            <a:endParaRPr lang="en-US" sz="3400" dirty="0"/>
+          </a:p>
+        </p:txBody>
+      </p:sp>
+      <p:sp>
+        <p:nvSpPr>
+          <p:cNvPr id="11" name="Text 9"/>
+          <p:cNvSpPr/>
+          <p:nvPr/>
+        </p:nvSpPr>
+        <p:spPr>
+          <a:xfrm>
+            <a:off x="868680" y="1508760"/>
+            <a:ext cx="6537960" cy="4160520"/>
           </a:xfrm>
           <a:prstGeom prst="rect">
             <a:avLst/>
@@ -7776,7 +8110,7 @@
           <a:lstStyle/>
           <a:p>
             <a:r>
-              <a:rPr lang="en-US" sz="1700" dirty="0">
+              <a:rPr lang="en-US" sz="2100" dirty="0">
                 <a:solidFill>
                   <a:srgbClr val="17364A"/>
                 </a:solidFill>
@@ -7784,15 +8118,15 @@
                 <a:ea typeface="Aptos" pitchFamily="34" charset="-122"/>
                 <a:cs typeface="Aptos" pitchFamily="34" charset="-120"/>
               </a:rPr>
-              <a:t>The expected artifact is a completed AI value and impact measurement plan. It should be specific to a public health workflow.</a:t>
-            </a:r>
-            <a:endParaRPr lang="en-US" sz="1700" dirty="0"/>
-          </a:p>
-        </p:txBody>
-      </p:sp>
-      <p:sp>
-        <p:nvSpPr>
-          <p:cNvPr id="11" name="Shape 9"/>
+              <a:t>The expected artifact is a completed AI value and impact measurement plan. It should be specific to a.</a:t>
+            </a:r>
+            <a:endParaRPr lang="en-US" sz="2100" dirty="0"/>
+          </a:p>
+        </p:txBody>
+      </p:sp>
+      <p:sp>
+        <p:nvSpPr>
+          <p:cNvPr id="12" name="Shape 10"/>
           <p:cNvSpPr/>
           <p:nvPr/>
         </p:nvSpPr>
@@ -7819,14 +8153,14 @@
       </p:sp>
       <p:sp>
         <p:nvSpPr>
-          <p:cNvPr id="12" name="Text 10"/>
+          <p:cNvPr id="13" name="Text 11"/>
           <p:cNvSpPr/>
           <p:nvPr/>
         </p:nvSpPr>
         <p:spPr>
           <a:xfrm>
             <a:off x="8074152" y="1563624"/>
-            <a:ext cx="2825496" cy="201168"/>
+            <a:ext cx="2825496" cy="256032"/>
           </a:xfrm>
           <a:prstGeom prst="rect">
             <a:avLst/>
@@ -7842,7 +8176,7 @@
               <a:buNone/>
             </a:pPr>
             <a:r>
-              <a:rPr lang="en-US" sz="950" b="1" dirty="0">
+              <a:rPr lang="en-US" sz="1300" b="1" dirty="0">
                 <a:solidFill>
                   <a:srgbClr val="0068B7"/>
                 </a:solidFill>
@@ -7852,20 +8186,20 @@
               </a:rPr>
               <a:t>Key idea</a:t>
             </a:r>
-            <a:endParaRPr lang="en-US" sz="950" dirty="0"/>
-          </a:p>
-        </p:txBody>
-      </p:sp>
-      <p:sp>
-        <p:nvSpPr>
-          <p:cNvPr id="13" name="Text 11"/>
-          <p:cNvSpPr/>
-          <p:nvPr/>
-        </p:nvSpPr>
-        <p:spPr>
-          <a:xfrm>
-            <a:off x="8074152" y="1856232"/>
-            <a:ext cx="2825496" cy="1261872"/>
+            <a:endParaRPr lang="en-US" sz="1300" dirty="0"/>
+          </a:p>
+        </p:txBody>
+      </p:sp>
+      <p:sp>
+        <p:nvSpPr>
+          <p:cNvPr id="14" name="Text 12"/>
+          <p:cNvSpPr/>
+          <p:nvPr/>
+        </p:nvSpPr>
+        <p:spPr>
+          <a:xfrm>
+            <a:off x="8074152" y="1920240"/>
+            <a:ext cx="2825496" cy="1188720"/>
           </a:xfrm>
           <a:prstGeom prst="rect">
             <a:avLst/>
@@ -7883,7 +8217,7 @@
               <a:buNone/>
             </a:pPr>
             <a:r>
-              <a:rPr lang="en-US" sz="1250" dirty="0">
+              <a:rPr lang="en-US" sz="1550" dirty="0">
                 <a:solidFill>
                   <a:srgbClr val="17364A"/>
                 </a:solidFill>
@@ -7891,15 +8225,15 @@
                 <a:ea typeface="Aptos" pitchFamily="34" charset="-122"/>
                 <a:cs typeface="Aptos" pitchFamily="34" charset="-120"/>
               </a:rPr>
-              <a:t>The expected artifact is a completed AI value and impact measurement plan. It should be specific to a public health workflow.</a:t>
-            </a:r>
-            <a:endParaRPr lang="en-US" sz="1250" dirty="0"/>
-          </a:p>
-        </p:txBody>
-      </p:sp>
-      <p:sp>
-        <p:nvSpPr>
-          <p:cNvPr id="14" name="Shape 12"/>
+              <a:t>The expected artifact is a completed AI value and impact measurement plan. It should be specific to a.</a:t>
+            </a:r>
+            <a:endParaRPr lang="en-US" sz="1550" dirty="0"/>
+          </a:p>
+        </p:txBody>
+      </p:sp>
+      <p:sp>
+        <p:nvSpPr>
+          <p:cNvPr id="15" name="Shape 13"/>
           <p:cNvSpPr/>
           <p:nvPr/>
         </p:nvSpPr>
@@ -7926,14 +8260,14 @@
       </p:sp>
       <p:sp>
         <p:nvSpPr>
-          <p:cNvPr id="15" name="Text 13"/>
+          <p:cNvPr id="16" name="Text 14"/>
           <p:cNvSpPr/>
           <p:nvPr/>
         </p:nvSpPr>
         <p:spPr>
           <a:xfrm>
             <a:off x="8074152" y="3666744"/>
-            <a:ext cx="2825496" cy="201168"/>
+            <a:ext cx="2825496" cy="256032"/>
           </a:xfrm>
           <a:prstGeom prst="rect">
             <a:avLst/>
@@ -7949,7 +8283,7 @@
               <a:buNone/>
             </a:pPr>
             <a:r>
-              <a:rPr lang="en-US" sz="950" b="1" dirty="0">
+              <a:rPr lang="en-US" sz="1300" b="1" dirty="0">
                 <a:solidFill>
                   <a:srgbClr val="0068B7"/>
                 </a:solidFill>
@@ -7959,20 +8293,20 @@
               </a:rPr>
               <a:t>Use this for</a:t>
             </a:r>
-            <a:endParaRPr lang="en-US" sz="950" dirty="0"/>
-          </a:p>
-        </p:txBody>
-      </p:sp>
-      <p:sp>
-        <p:nvSpPr>
-          <p:cNvPr id="16" name="Text 14"/>
-          <p:cNvSpPr/>
-          <p:nvPr/>
-        </p:nvSpPr>
-        <p:spPr>
-          <a:xfrm>
-            <a:off x="8074152" y="3959352"/>
-            <a:ext cx="2825496" cy="1170432"/>
+            <a:endParaRPr lang="en-US" sz="1300" dirty="0"/>
+          </a:p>
+        </p:txBody>
+      </p:sp>
+      <p:sp>
+        <p:nvSpPr>
+          <p:cNvPr id="17" name="Text 15"/>
+          <p:cNvSpPr/>
+          <p:nvPr/>
+        </p:nvSpPr>
+        <p:spPr>
+          <a:xfrm>
+            <a:off x="8074152" y="4023360"/>
+            <a:ext cx="2825496" cy="1097280"/>
           </a:xfrm>
           <a:prstGeom prst="rect">
             <a:avLst/>
@@ -7990,7 +8324,7 @@
               <a:buNone/>
             </a:pPr>
             <a:r>
-              <a:rPr lang="en-US" sz="1250" dirty="0">
+              <a:rPr lang="en-US" sz="1550" dirty="0">
                 <a:solidFill>
                   <a:srgbClr val="17364A"/>
                 </a:solidFill>
@@ -8000,7 +8334,7 @@
               </a:rPr>
               <a:t>Connect the concept to public health decisions, safeguards, documentation, or implementation work.</a:t>
             </a:r>
-            <a:endParaRPr lang="en-US" sz="1250" dirty="0"/>
+            <a:endParaRPr lang="en-US" sz="1550" dirty="0"/>
           </a:p>
         </p:txBody>
       </p:sp>
@@ -8197,7 +8531,7 @@
                 <a:ea typeface="Aptos" pitchFamily="34" charset="-122"/>
                 <a:cs typeface="Aptos" pitchFamily="34" charset="-120"/>
               </a:rPr>
-              <a:t>© Paula Soper</a:t>
+              <a:t>Â© Paula Soper</a:t>
             </a:r>
             <a:endParaRPr lang="en-US" sz="800" dirty="0"/>
           </a:p>
@@ -8205,7 +8539,46 @@
       </p:sp>
       <p:sp>
         <p:nvSpPr>
-          <p:cNvPr id="7" name="Shape 5"/>
+          <p:cNvPr id="7" name="Text 5"/>
+          <p:cNvSpPr/>
+          <p:nvPr/>
+        </p:nvSpPr>
+        <p:spPr>
+          <a:xfrm>
+            <a:off x="11137392" y="6510528"/>
+            <a:ext cx="411480" cy="201168"/>
+          </a:xfrm>
+          <a:prstGeom prst="rect">
+            <a:avLst/>
+          </a:prstGeom>
+          <a:noFill/>
+          <a:ln/>
+        </p:spPr>
+        <p:txBody>
+          <a:bodyPr wrap="square" lIns="0" tIns="0" rIns="0" bIns="0" rtlCol="0" anchor="ctr"/>
+          <a:lstStyle/>
+          <a:p>
+            <a:pPr algn="r" indent="0" marL="0">
+              <a:buNone/>
+            </a:pPr>
+            <a:r>
+              <a:rPr lang="en-US" sz="900" dirty="0">
+                <a:solidFill>
+                  <a:srgbClr val="5F7181"/>
+                </a:solidFill>
+                <a:latin typeface="Aptos" pitchFamily="34" charset="0"/>
+                <a:ea typeface="Aptos" pitchFamily="34" charset="-122"/>
+                <a:cs typeface="Aptos" pitchFamily="34" charset="-120"/>
+              </a:rPr>
+              <a:t>19</a:t>
+            </a:r>
+            <a:endParaRPr lang="en-US" sz="900" dirty="0"/>
+          </a:p>
+        </p:txBody>
+      </p:sp>
+      <p:sp>
+        <p:nvSpPr>
+          <p:cNvPr id="8" name="Shape 6"/>
           <p:cNvSpPr/>
           <p:nvPr/>
         </p:nvSpPr>
@@ -8230,7 +8603,7 @@
       </p:sp>
       <p:sp>
         <p:nvSpPr>
-          <p:cNvPr id="8" name="Text 6"/>
+          <p:cNvPr id="9" name="Text 7"/>
           <p:cNvSpPr/>
           <p:nvPr/>
         </p:nvSpPr>
@@ -8269,14 +8642,14 @@
       </p:sp>
       <p:sp>
         <p:nvSpPr>
-          <p:cNvPr id="9" name="Text 7"/>
+          <p:cNvPr id="10" name="Text 8"/>
           <p:cNvSpPr/>
           <p:nvPr/>
         </p:nvSpPr>
         <p:spPr>
           <a:xfrm>
             <a:off x="640080" y="621792"/>
-            <a:ext cx="10881360" cy="566928"/>
+            <a:ext cx="10881360" cy="713232"/>
           </a:xfrm>
           <a:prstGeom prst="rect">
             <a:avLst/>
@@ -8294,7 +8667,7 @@
               <a:buNone/>
             </a:pPr>
             <a:r>
-              <a:rPr lang="en-US" sz="2700" b="1" dirty="0">
+              <a:rPr lang="en-US" sz="3400" b="1" dirty="0">
                 <a:solidFill>
                   <a:srgbClr val="003A63"/>
                 </a:solidFill>
@@ -8304,20 +8677,20 @@
               </a:rPr>
               <a:t>Knowledge Check</a:t>
             </a:r>
-            <a:endParaRPr lang="en-US" sz="2700" dirty="0"/>
-          </a:p>
-        </p:txBody>
-      </p:sp>
-      <p:sp>
-        <p:nvSpPr>
-          <p:cNvPr id="10" name="Text 8"/>
-          <p:cNvSpPr/>
-          <p:nvPr/>
-        </p:nvSpPr>
-        <p:spPr>
-          <a:xfrm>
-            <a:off x="868680" y="1417320"/>
-            <a:ext cx="6675120" cy="4434840"/>
+            <a:endParaRPr lang="en-US" sz="3400" dirty="0"/>
+          </a:p>
+        </p:txBody>
+      </p:sp>
+      <p:sp>
+        <p:nvSpPr>
+          <p:cNvPr id="11" name="Text 9"/>
+          <p:cNvSpPr/>
+          <p:nvPr/>
+        </p:nvSpPr>
+        <p:spPr>
+          <a:xfrm>
+            <a:off x="868680" y="1508760"/>
+            <a:ext cx="6537960" cy="4160520"/>
           </a:xfrm>
           <a:prstGeom prst="rect">
             <a:avLst/>
@@ -8332,7 +8705,7 @@
           <a:lstStyle/>
           <a:p>
             <a:r>
-              <a:rPr lang="en-US" sz="1700" dirty="0">
+              <a:rPr lang="en-US" sz="2100" dirty="0">
                 <a:solidFill>
                   <a:srgbClr val="17364A"/>
                 </a:solidFill>
@@ -8340,13 +8713,13 @@
                 <a:ea typeface="Aptos" pitchFamily="34" charset="-122"/>
                 <a:cs typeface="Aptos" pitchFamily="34" charset="-120"/>
               </a:rPr>
-              <a:t>1. What is the best reason to address measuring ai value, performance, and operational impact before deployment?</a:t>
-            </a:r>
-            <a:endParaRPr lang="en-US" sz="1700" dirty="0"/>
-          </a:p>
-          <a:p>
-            <a:r>
-              <a:rPr lang="en-US" sz="1700" dirty="0">
+              <a:t>1. What is the best reason to address measuring ai value, performance, and operational impact before.</a:t>
+            </a:r>
+            <a:endParaRPr lang="en-US" sz="2100" dirty="0"/>
+          </a:p>
+          <a:p>
+            <a:r>
+              <a:rPr lang="en-US" sz="2100" dirty="0">
                 <a:solidFill>
                   <a:srgbClr val="17364A"/>
                 </a:solidFill>
@@ -8356,11 +8729,11 @@
               </a:rPr>
               <a:t>2. Which practice best supports responsible implementation?</a:t>
             </a:r>
-            <a:endParaRPr lang="en-US" sz="1700" dirty="0"/>
-          </a:p>
-          <a:p>
-            <a:r>
-              <a:rPr lang="en-US" sz="1700" dirty="0">
+            <a:endParaRPr lang="en-US" sz="2100" dirty="0"/>
+          </a:p>
+          <a:p>
+            <a:r>
+              <a:rPr lang="en-US" sz="2100" dirty="0">
                 <a:solidFill>
                   <a:srgbClr val="17364A"/>
                 </a:solidFill>
@@ -8370,27 +8743,13 @@
               </a:rPr>
               <a:t>3. Which statement best describes a common failure mode?</a:t>
             </a:r>
-            <a:endParaRPr lang="en-US" sz="1700" dirty="0"/>
-          </a:p>
-          <a:p>
-            <a:r>
-              <a:rPr lang="en-US" sz="1700" dirty="0">
-                <a:solidFill>
-                  <a:srgbClr val="17364A"/>
-                </a:solidFill>
-                <a:latin typeface="Aptos" pitchFamily="34" charset="0"/>
-                <a:ea typeface="Aptos" pitchFamily="34" charset="-122"/>
-                <a:cs typeface="Aptos" pitchFamily="34" charset="-120"/>
-              </a:rPr>
-              <a:t>4. What should be included in the practical artifact for this module?</a:t>
-            </a:r>
-            <a:endParaRPr lang="en-US" sz="1700" dirty="0"/>
-          </a:p>
-        </p:txBody>
-      </p:sp>
-      <p:sp>
-        <p:nvSpPr>
-          <p:cNvPr id="11" name="Shape 9"/>
+            <a:endParaRPr lang="en-US" sz="2100" dirty="0"/>
+          </a:p>
+        </p:txBody>
+      </p:sp>
+      <p:sp>
+        <p:nvSpPr>
+          <p:cNvPr id="12" name="Shape 10"/>
           <p:cNvSpPr/>
           <p:nvPr/>
         </p:nvSpPr>
@@ -8417,14 +8776,14 @@
       </p:sp>
       <p:sp>
         <p:nvSpPr>
-          <p:cNvPr id="12" name="Text 10"/>
+          <p:cNvPr id="13" name="Text 11"/>
           <p:cNvSpPr/>
           <p:nvPr/>
         </p:nvSpPr>
         <p:spPr>
           <a:xfrm>
             <a:off x="8074152" y="1563624"/>
-            <a:ext cx="2825496" cy="201168"/>
+            <a:ext cx="2825496" cy="256032"/>
           </a:xfrm>
           <a:prstGeom prst="rect">
             <a:avLst/>
@@ -8440,7 +8799,7 @@
               <a:buNone/>
             </a:pPr>
             <a:r>
-              <a:rPr lang="en-US" sz="950" b="1" dirty="0">
+              <a:rPr lang="en-US" sz="1300" b="1" dirty="0">
                 <a:solidFill>
                   <a:srgbClr val="0068B7"/>
                 </a:solidFill>
@@ -8450,20 +8809,20 @@
               </a:rPr>
               <a:t>Key idea</a:t>
             </a:r>
-            <a:endParaRPr lang="en-US" sz="950" dirty="0"/>
-          </a:p>
-        </p:txBody>
-      </p:sp>
-      <p:sp>
-        <p:nvSpPr>
-          <p:cNvPr id="13" name="Text 11"/>
-          <p:cNvSpPr/>
-          <p:nvPr/>
-        </p:nvSpPr>
-        <p:spPr>
-          <a:xfrm>
-            <a:off x="8074152" y="1856232"/>
-            <a:ext cx="2825496" cy="1261872"/>
+            <a:endParaRPr lang="en-US" sz="1300" dirty="0"/>
+          </a:p>
+        </p:txBody>
+      </p:sp>
+      <p:sp>
+        <p:nvSpPr>
+          <p:cNvPr id="14" name="Text 12"/>
+          <p:cNvSpPr/>
+          <p:nvPr/>
+        </p:nvSpPr>
+        <p:spPr>
+          <a:xfrm>
+            <a:off x="8074152" y="1920240"/>
+            <a:ext cx="2825496" cy="1188720"/>
           </a:xfrm>
           <a:prstGeom prst="rect">
             <a:avLst/>
@@ -8481,7 +8840,7 @@
               <a:buNone/>
             </a:pPr>
             <a:r>
-              <a:rPr lang="en-US" sz="1250" dirty="0">
+              <a:rPr lang="en-US" sz="1550" dirty="0">
                 <a:solidFill>
                   <a:srgbClr val="17364A"/>
                 </a:solidFill>
@@ -8489,15 +8848,15 @@
                 <a:ea typeface="Aptos" pitchFamily="34" charset="-122"/>
                 <a:cs typeface="Aptos" pitchFamily="34" charset="-120"/>
               </a:rPr>
-              <a:t>1. What is the best reason to address measuring ai value, performance, and operational impact before deployment?</a:t>
-            </a:r>
-            <a:endParaRPr lang="en-US" sz="1250" dirty="0"/>
-          </a:p>
-        </p:txBody>
-      </p:sp>
-      <p:sp>
-        <p:nvSpPr>
-          <p:cNvPr id="14" name="Shape 12"/>
+              <a:t>1. What is the best reason to address measuring ai value, performance, and operational impact before.</a:t>
+            </a:r>
+            <a:endParaRPr lang="en-US" sz="1550" dirty="0"/>
+          </a:p>
+        </p:txBody>
+      </p:sp>
+      <p:sp>
+        <p:nvSpPr>
+          <p:cNvPr id="15" name="Shape 13"/>
           <p:cNvSpPr/>
           <p:nvPr/>
         </p:nvSpPr>
@@ -8524,14 +8883,14 @@
       </p:sp>
       <p:sp>
         <p:nvSpPr>
-          <p:cNvPr id="15" name="Text 13"/>
+          <p:cNvPr id="16" name="Text 14"/>
           <p:cNvSpPr/>
           <p:nvPr/>
         </p:nvSpPr>
         <p:spPr>
           <a:xfrm>
             <a:off x="8074152" y="3666744"/>
-            <a:ext cx="2825496" cy="201168"/>
+            <a:ext cx="2825496" cy="256032"/>
           </a:xfrm>
           <a:prstGeom prst="rect">
             <a:avLst/>
@@ -8547,7 +8906,7 @@
               <a:buNone/>
             </a:pPr>
             <a:r>
-              <a:rPr lang="en-US" sz="950" b="1" dirty="0">
+              <a:rPr lang="en-US" sz="1300" b="1" dirty="0">
                 <a:solidFill>
                   <a:srgbClr val="0068B7"/>
                 </a:solidFill>
@@ -8557,20 +8916,20 @@
               </a:rPr>
               <a:t>Use this for</a:t>
             </a:r>
-            <a:endParaRPr lang="en-US" sz="950" dirty="0"/>
-          </a:p>
-        </p:txBody>
-      </p:sp>
-      <p:sp>
-        <p:nvSpPr>
-          <p:cNvPr id="16" name="Text 14"/>
-          <p:cNvSpPr/>
-          <p:nvPr/>
-        </p:nvSpPr>
-        <p:spPr>
-          <a:xfrm>
-            <a:off x="8074152" y="3959352"/>
-            <a:ext cx="2825496" cy="1170432"/>
+            <a:endParaRPr lang="en-US" sz="1300" dirty="0"/>
+          </a:p>
+        </p:txBody>
+      </p:sp>
+      <p:sp>
+        <p:nvSpPr>
+          <p:cNvPr id="17" name="Text 15"/>
+          <p:cNvSpPr/>
+          <p:nvPr/>
+        </p:nvSpPr>
+        <p:spPr>
+          <a:xfrm>
+            <a:off x="8074152" y="4023360"/>
+            <a:ext cx="2825496" cy="1097280"/>
           </a:xfrm>
           <a:prstGeom prst="rect">
             <a:avLst/>
@@ -8588,7 +8947,7 @@
               <a:buNone/>
             </a:pPr>
             <a:r>
-              <a:rPr lang="en-US" sz="1250" dirty="0">
+              <a:rPr lang="en-US" sz="1550" dirty="0">
                 <a:solidFill>
                   <a:srgbClr val="17364A"/>
                 </a:solidFill>
@@ -8598,7 +8957,7 @@
               </a:rPr>
               <a:t>Connect the concept to public health decisions, safeguards, documentation, or implementation work.</a:t>
             </a:r>
-            <a:endParaRPr lang="en-US" sz="1250" dirty="0"/>
+            <a:endParaRPr lang="en-US" sz="1550" dirty="0"/>
           </a:p>
         </p:txBody>
       </p:sp>
@@ -8795,7 +9154,7 @@
                 <a:ea typeface="Aptos" pitchFamily="34" charset="-122"/>
                 <a:cs typeface="Aptos" pitchFamily="34" charset="-120"/>
               </a:rPr>
-              <a:t>© Paula Soper</a:t>
+              <a:t>Â© Paula Soper</a:t>
             </a:r>
             <a:endParaRPr lang="en-US" sz="800" dirty="0"/>
           </a:p>
@@ -8809,8 +9168,47 @@
         </p:nvSpPr>
         <p:spPr>
           <a:xfrm>
+            <a:off x="11137392" y="6510528"/>
+            <a:ext cx="411480" cy="201168"/>
+          </a:xfrm>
+          <a:prstGeom prst="rect">
+            <a:avLst/>
+          </a:prstGeom>
+          <a:noFill/>
+          <a:ln/>
+        </p:spPr>
+        <p:txBody>
+          <a:bodyPr wrap="square" lIns="0" tIns="0" rIns="0" bIns="0" rtlCol="0" anchor="ctr"/>
+          <a:lstStyle/>
+          <a:p>
+            <a:pPr algn="r" indent="0" marL="0">
+              <a:buNone/>
+            </a:pPr>
+            <a:r>
+              <a:rPr lang="en-US" sz="900" dirty="0">
+                <a:solidFill>
+                  <a:srgbClr val="5F7181"/>
+                </a:solidFill>
+                <a:latin typeface="Aptos" pitchFamily="34" charset="0"/>
+                <a:ea typeface="Aptos" pitchFamily="34" charset="-122"/>
+                <a:cs typeface="Aptos" pitchFamily="34" charset="-120"/>
+              </a:rPr>
+              <a:t>2</a:t>
+            </a:r>
+            <a:endParaRPr lang="en-US" sz="900" dirty="0"/>
+          </a:p>
+        </p:txBody>
+      </p:sp>
+      <p:sp>
+        <p:nvSpPr>
+          <p:cNvPr id="8" name="Text 6"/>
+          <p:cNvSpPr/>
+          <p:nvPr/>
+        </p:nvSpPr>
+        <p:spPr>
+          <a:xfrm>
             <a:off x="640080" y="658368"/>
-            <a:ext cx="10881360" cy="566928"/>
+            <a:ext cx="10881360" cy="713232"/>
           </a:xfrm>
           <a:prstGeom prst="rect">
             <a:avLst/>
@@ -8828,7 +9226,7 @@
               <a:buNone/>
             </a:pPr>
             <a:r>
-              <a:rPr lang="en-US" sz="2700" b="1" dirty="0">
+              <a:rPr lang="en-US" sz="3400" b="1" dirty="0">
                 <a:solidFill>
                   <a:srgbClr val="003A63"/>
                 </a:solidFill>
@@ -8838,20 +9236,20 @@
               </a:rPr>
               <a:t>What this module helps you do</a:t>
             </a:r>
-            <a:endParaRPr lang="en-US" sz="2700" dirty="0"/>
-          </a:p>
-        </p:txBody>
-      </p:sp>
-      <p:sp>
-        <p:nvSpPr>
-          <p:cNvPr id="8" name="Text 6"/>
-          <p:cNvSpPr/>
-          <p:nvPr/>
-        </p:nvSpPr>
-        <p:spPr>
-          <a:xfrm>
-            <a:off x="868680" y="1417320"/>
-            <a:ext cx="6675120" cy="3291840"/>
+            <a:endParaRPr lang="en-US" sz="3400" dirty="0"/>
+          </a:p>
+        </p:txBody>
+      </p:sp>
+      <p:sp>
+        <p:nvSpPr>
+          <p:cNvPr id="9" name="Text 7"/>
+          <p:cNvSpPr/>
+          <p:nvPr/>
+        </p:nvSpPr>
+        <p:spPr>
+          <a:xfrm>
+            <a:off x="868680" y="1508760"/>
+            <a:ext cx="6446520" cy="2926080"/>
           </a:xfrm>
           <a:prstGeom prst="rect">
             <a:avLst/>
@@ -8866,7 +9264,7 @@
           <a:lstStyle/>
           <a:p>
             <a:r>
-              <a:rPr lang="en-US" sz="1700" dirty="0">
+              <a:rPr lang="en-US" sz="2100" dirty="0">
                 <a:solidFill>
                   <a:srgbClr val="17364A"/>
                 </a:solidFill>
@@ -8874,13 +9272,13 @@
                 <a:ea typeface="Aptos" pitchFamily="34" charset="-122"/>
                 <a:cs typeface="Aptos" pitchFamily="34" charset="-120"/>
               </a:rPr>
-              <a:t>AI tools should be evaluated not only by model accuracy, but also by whether they improve public health operations and outcomes.</a:t>
-            </a:r>
-            <a:endParaRPr lang="en-US" sz="1700" dirty="0"/>
-          </a:p>
-          <a:p>
-            <a:r>
-              <a:rPr lang="en-US" sz="1700" dirty="0">
+              <a:t>AI tools should be evaluated not only by model accuracy, but also by whether they improve public health.</a:t>
+            </a:r>
+            <a:endParaRPr lang="en-US" sz="2100" dirty="0"/>
+          </a:p>
+          <a:p>
+            <a:r>
+              <a:rPr lang="en-US" sz="2100" dirty="0">
                 <a:solidFill>
                   <a:srgbClr val="17364A"/>
                 </a:solidFill>
@@ -8888,13 +9286,13 @@
                 <a:ea typeface="Aptos" pitchFamily="34" charset="-122"/>
                 <a:cs typeface="Aptos" pitchFamily="34" charset="-120"/>
               </a:rPr>
-              <a:t>This module teaches learners to define measures for timeliness, quality, equity, staff burden, cost, user satisfaction, safety, trust, and.</a:t>
-            </a:r>
-            <a:endParaRPr lang="en-US" sz="1700" dirty="0"/>
-          </a:p>
-          <a:p>
-            <a:r>
-              <a:rPr lang="en-US" sz="1700" dirty="0">
+              <a:t>This module teaches learners to define measures for timeliness, quality, equity, staff burden, cost, user.</a:t>
+            </a:r>
+            <a:endParaRPr lang="en-US" sz="2100" dirty="0"/>
+          </a:p>
+          <a:p>
+            <a:r>
+              <a:rPr lang="en-US" sz="2100" dirty="0">
                 <a:solidFill>
                   <a:srgbClr val="17364A"/>
                 </a:solidFill>
@@ -8902,15 +9300,15 @@
                 <a:ea typeface="Aptos" pitchFamily="34" charset="-122"/>
                 <a:cs typeface="Aptos" pitchFamily="34" charset="-120"/>
               </a:rPr>
-              <a:t>It helps agencies avoid adopting AI because it is novel and instead assess whether it creates measurable public value.</a:t>
-            </a:r>
-            <a:endParaRPr lang="en-US" sz="1700" dirty="0"/>
-          </a:p>
-        </p:txBody>
-      </p:sp>
-      <p:sp>
-        <p:nvSpPr>
-          <p:cNvPr id="9" name="Shape 7"/>
+              <a:t>It helps agencies avoid adopting AI because it is novel and instead assess whether it creates measurable public.</a:t>
+            </a:r>
+            <a:endParaRPr lang="en-US" sz="2100" dirty="0"/>
+          </a:p>
+        </p:txBody>
+      </p:sp>
+      <p:sp>
+        <p:nvSpPr>
+          <p:cNvPr id="10" name="Shape 8"/>
           <p:cNvSpPr/>
           <p:nvPr/>
         </p:nvSpPr>
@@ -8937,14 +9335,14 @@
       </p:sp>
       <p:sp>
         <p:nvSpPr>
-          <p:cNvPr id="10" name="Text 8"/>
+          <p:cNvPr id="11" name="Text 9"/>
           <p:cNvSpPr/>
           <p:nvPr/>
         </p:nvSpPr>
         <p:spPr>
           <a:xfrm>
             <a:off x="8074152" y="1563624"/>
-            <a:ext cx="2825496" cy="201168"/>
+            <a:ext cx="2825496" cy="256032"/>
           </a:xfrm>
           <a:prstGeom prst="rect">
             <a:avLst/>
@@ -8960,7 +9358,7 @@
               <a:buNone/>
             </a:pPr>
             <a:r>
-              <a:rPr lang="en-US" sz="950" b="1" dirty="0">
+              <a:rPr lang="en-US" sz="1300" b="1" dirty="0">
                 <a:solidFill>
                   <a:srgbClr val="0068B7"/>
                 </a:solidFill>
@@ -8970,20 +9368,20 @@
               </a:rPr>
               <a:t>Module details</a:t>
             </a:r>
-            <a:endParaRPr lang="en-US" sz="950" dirty="0"/>
-          </a:p>
-        </p:txBody>
-      </p:sp>
-      <p:sp>
-        <p:nvSpPr>
-          <p:cNvPr id="11" name="Text 9"/>
-          <p:cNvSpPr/>
-          <p:nvPr/>
-        </p:nvSpPr>
-        <p:spPr>
-          <a:xfrm>
-            <a:off x="8074152" y="1856232"/>
-            <a:ext cx="2825496" cy="1353312"/>
+            <a:endParaRPr lang="en-US" sz="1300" dirty="0"/>
+          </a:p>
+        </p:txBody>
+      </p:sp>
+      <p:sp>
+        <p:nvSpPr>
+          <p:cNvPr id="12" name="Text 10"/>
+          <p:cNvSpPr/>
+          <p:nvPr/>
+        </p:nvSpPr>
+        <p:spPr>
+          <a:xfrm>
+            <a:off x="8074152" y="1920240"/>
+            <a:ext cx="2825496" cy="1280160"/>
           </a:xfrm>
           <a:prstGeom prst="rect">
             <a:avLst/>
@@ -9001,7 +9399,7 @@
               <a:buNone/>
             </a:pPr>
             <a:r>
-              <a:rPr lang="en-US" sz="1250" dirty="0">
+              <a:rPr lang="en-US" sz="1550" dirty="0">
                 <a:solidFill>
                   <a:srgbClr val="17364A"/>
                 </a:solidFill>
@@ -9011,14 +9409,14 @@
               </a:rPr>
               <a:t>Level: intermediate/practitioner</a:t>
             </a:r>
-            <a:endParaRPr lang="en-US" sz="1250" dirty="0"/>
+            <a:endParaRPr lang="en-US" sz="1550" dirty="0"/>
           </a:p>
           <a:p>
             <a:pPr indent="0" marL="0">
               <a:buNone/>
             </a:pPr>
             <a:r>
-              <a:rPr lang="en-US" sz="1250" dirty="0">
+              <a:rPr lang="en-US" sz="1550" dirty="0">
                 <a:solidFill>
                   <a:srgbClr val="17364A"/>
                 </a:solidFill>
@@ -9028,14 +9426,14 @@
               </a:rPr>
               <a:t>Primary track: Operations and Data Quality Track</a:t>
             </a:r>
-            <a:endParaRPr lang="en-US" sz="1250" dirty="0"/>
+            <a:endParaRPr lang="en-US" sz="1550" dirty="0"/>
           </a:p>
           <a:p>
             <a:pPr indent="0" marL="0">
               <a:buNone/>
             </a:pPr>
             <a:r>
-              <a:rPr lang="en-US" sz="1250" dirty="0">
+              <a:rPr lang="en-US" sz="1550" dirty="0">
                 <a:solidFill>
                   <a:srgbClr val="17364A"/>
                 </a:solidFill>
@@ -9045,32 +9443,32 @@
               </a:rPr>
               <a:t>Appears in tracks: operations-data-quality</a:t>
             </a:r>
-            <a:endParaRPr lang="en-US" sz="1250" dirty="0"/>
-          </a:p>
-        </p:txBody>
-      </p:sp>
-      <p:sp>
-        <p:nvSpPr>
-          <p:cNvPr id="12" name="Shape 10"/>
-          <p:cNvSpPr/>
-          <p:nvPr/>
-        </p:nvSpPr>
-        <p:spPr>
-          <a:xfrm>
-            <a:off x="7909560" y="3611880"/>
-            <a:ext cx="3154680" cy="1783080"/>
+            <a:endParaRPr lang="en-US" sz="1550" dirty="0"/>
+          </a:p>
+        </p:txBody>
+      </p:sp>
+      <p:sp>
+        <p:nvSpPr>
+          <p:cNvPr id="13" name="Shape 11"/>
+          <p:cNvSpPr/>
+          <p:nvPr/>
+        </p:nvSpPr>
+        <p:spPr>
+          <a:xfrm>
+            <a:off x="7635240" y="3730752"/>
+            <a:ext cx="1033272" cy="749808"/>
           </a:xfrm>
           <a:prstGeom prst="roundRect">
             <a:avLst>
-              <a:gd name="adj" fmla="val 6154"/>
+              <a:gd name="adj" fmla="val 14634"/>
             </a:avLst>
           </a:prstGeom>
           <a:solidFill>
-            <a:srgbClr val="EEF8ED"/>
+            <a:srgbClr val="0068B7"/>
           </a:solidFill>
           <a:ln w="12700">
             <a:solidFill>
-              <a:srgbClr val="B9D7E6"/>
+              <a:srgbClr val="0068B7"/>
             </a:solidFill>
             <a:prstDash val="solid"/>
           </a:ln>
@@ -9078,81 +9476,256 @@
       </p:sp>
       <p:sp>
         <p:nvSpPr>
-          <p:cNvPr id="13" name="Text 11"/>
-          <p:cNvSpPr/>
-          <p:nvPr/>
-        </p:nvSpPr>
-        <p:spPr>
-          <a:xfrm>
-            <a:off x="8074152" y="3758184"/>
-            <a:ext cx="2825496" cy="201168"/>
-          </a:xfrm>
-          <a:prstGeom prst="rect">
-            <a:avLst/>
-          </a:prstGeom>
-          <a:noFill/>
-          <a:ln/>
-        </p:spPr>
-        <p:txBody>
-          <a:bodyPr wrap="square" lIns="0" tIns="0" rIns="0" bIns="0" rtlCol="0" anchor="ctr"/>
-          <a:lstStyle/>
-          <a:p>
-            <a:pPr indent="0" marL="0">
-              <a:buNone/>
-            </a:pPr>
-            <a:r>
-              <a:rPr lang="en-US" sz="950" b="1" dirty="0">
-                <a:solidFill>
-                  <a:srgbClr val="0068B7"/>
-                </a:solidFill>
-                <a:latin typeface="Aptos" pitchFamily="34" charset="0"/>
-                <a:ea typeface="Aptos" pitchFamily="34" charset="-122"/>
-                <a:cs typeface="Aptos" pitchFamily="34" charset="-120"/>
-              </a:rPr>
-              <a:t>Learning approach</a:t>
-            </a:r>
-            <a:endParaRPr lang="en-US" sz="950" dirty="0"/>
-          </a:p>
-        </p:txBody>
-      </p:sp>
-      <p:sp>
-        <p:nvSpPr>
           <p:cNvPr id="14" name="Text 12"/>
           <p:cNvSpPr/>
           <p:nvPr/>
         </p:nvSpPr>
         <p:spPr>
           <a:xfrm>
-            <a:off x="8074152" y="4050792"/>
-            <a:ext cx="2825496" cy="1216152"/>
-          </a:xfrm>
-          <a:prstGeom prst="rect">
-            <a:avLst/>
-          </a:prstGeom>
-          <a:noFill/>
-          <a:ln/>
-        </p:spPr>
-        <p:txBody>
-          <a:bodyPr wrap="square" lIns="0" tIns="0" rIns="0" bIns="0" rtlCol="0" anchor="t">
+            <a:off x="7708392" y="3922776"/>
+            <a:ext cx="886968" cy="310896"/>
+          </a:xfrm>
+          <a:prstGeom prst="rect">
+            <a:avLst/>
+          </a:prstGeom>
+          <a:noFill/>
+          <a:ln/>
+        </p:spPr>
+        <p:txBody>
+          <a:bodyPr wrap="square" lIns="0" tIns="0" rIns="0" bIns="0" rtlCol="0" anchor="ctr">
             <a:normAutofit/>
           </a:bodyPr>
           <a:lstStyle/>
           <a:p>
-            <a:pPr indent="0" marL="0">
-              <a:buNone/>
-            </a:pPr>
-            <a:r>
-              <a:rPr lang="en-US" sz="1250" dirty="0">
-                <a:solidFill>
-                  <a:srgbClr val="17364A"/>
-                </a:solidFill>
-                <a:latin typeface="Aptos" pitchFamily="34" charset="0"/>
-                <a:ea typeface="Aptos" pitchFamily="34" charset="-122"/>
-                <a:cs typeface="Aptos" pitchFamily="34" charset="-120"/>
-              </a:rPr>
-              <a:t>Review the core ideas, complete the practical exercise, check your understanding, and use the related plays and tools to apply the lesson.</a:t>
-            </a:r>
-            <a:endParaRPr lang="en-US" sz="1250" dirty="0"/>
+            <a:pPr algn="ctr" indent="0" marL="0">
+              <a:buNone/>
+            </a:pPr>
+            <a:r>
+              <a:rPr lang="en-US" sz="1500" b="1" dirty="0">
+                <a:solidFill>
+                  <a:srgbClr val="FFFFFF"/>
+                </a:solidFill>
+                <a:latin typeface="Aptos" pitchFamily="34" charset="0"/>
+                <a:ea typeface="Aptos" pitchFamily="34" charset="-122"/>
+                <a:cs typeface="Aptos" pitchFamily="34" charset="-120"/>
+              </a:rPr>
+              <a:t>Learn</a:t>
+            </a:r>
+            <a:endParaRPr lang="en-US" sz="1500" dirty="0"/>
+          </a:p>
+        </p:txBody>
+      </p:sp>
+      <p:sp>
+        <p:nvSpPr>
+          <p:cNvPr id="15" name="Text 13"/>
+          <p:cNvSpPr/>
+          <p:nvPr/>
+        </p:nvSpPr>
+        <p:spPr>
+          <a:xfrm>
+            <a:off x="8695944" y="3941064"/>
+            <a:ext cx="201168" cy="256032"/>
+          </a:xfrm>
+          <a:prstGeom prst="rect">
+            <a:avLst/>
+          </a:prstGeom>
+          <a:noFill/>
+          <a:ln/>
+        </p:spPr>
+        <p:txBody>
+          <a:bodyPr wrap="square" lIns="0" tIns="0" rIns="0" bIns="0" rtlCol="0" anchor="ctr"/>
+          <a:lstStyle/>
+          <a:p>
+            <a:pPr algn="ctr" indent="0" marL="0">
+              <a:buNone/>
+            </a:pPr>
+            <a:r>
+              <a:rPr lang="en-US" sz="1800" b="1" dirty="0">
+                <a:solidFill>
+                  <a:srgbClr val="0068B7"/>
+                </a:solidFill>
+                <a:latin typeface="Aptos" pitchFamily="34" charset="0"/>
+                <a:ea typeface="Aptos" pitchFamily="34" charset="-122"/>
+                <a:cs typeface="Aptos" pitchFamily="34" charset="-120"/>
+              </a:rPr>
+              <a:t>â†’</a:t>
+            </a:r>
+            <a:endParaRPr lang="en-US" sz="1800" dirty="0"/>
+          </a:p>
+        </p:txBody>
+      </p:sp>
+      <p:sp>
+        <p:nvSpPr>
+          <p:cNvPr id="16" name="Shape 14"/>
+          <p:cNvSpPr/>
+          <p:nvPr/>
+        </p:nvSpPr>
+        <p:spPr>
+          <a:xfrm>
+            <a:off x="8924544" y="3730752"/>
+            <a:ext cx="1033272" cy="749808"/>
+          </a:xfrm>
+          <a:prstGeom prst="roundRect">
+            <a:avLst>
+              <a:gd name="adj" fmla="val 14634"/>
+            </a:avLst>
+          </a:prstGeom>
+          <a:solidFill>
+            <a:srgbClr val="2F8A28"/>
+          </a:solidFill>
+          <a:ln w="12700">
+            <a:solidFill>
+              <a:srgbClr val="2F8A28"/>
+            </a:solidFill>
+            <a:prstDash val="solid"/>
+          </a:ln>
+        </p:spPr>
+      </p:sp>
+      <p:sp>
+        <p:nvSpPr>
+          <p:cNvPr id="17" name="Text 15"/>
+          <p:cNvSpPr/>
+          <p:nvPr/>
+        </p:nvSpPr>
+        <p:spPr>
+          <a:xfrm>
+            <a:off x="8997696" y="3922776"/>
+            <a:ext cx="886968" cy="310896"/>
+          </a:xfrm>
+          <a:prstGeom prst="rect">
+            <a:avLst/>
+          </a:prstGeom>
+          <a:noFill/>
+          <a:ln/>
+        </p:spPr>
+        <p:txBody>
+          <a:bodyPr wrap="square" lIns="0" tIns="0" rIns="0" bIns="0" rtlCol="0" anchor="ctr">
+            <a:normAutofit/>
+          </a:bodyPr>
+          <a:lstStyle/>
+          <a:p>
+            <a:pPr algn="ctr" indent="0" marL="0">
+              <a:buNone/>
+            </a:pPr>
+            <a:r>
+              <a:rPr lang="en-US" sz="1500" b="1" dirty="0">
+                <a:solidFill>
+                  <a:srgbClr val="FFFFFF"/>
+                </a:solidFill>
+                <a:latin typeface="Aptos" pitchFamily="34" charset="0"/>
+                <a:ea typeface="Aptos" pitchFamily="34" charset="-122"/>
+                <a:cs typeface="Aptos" pitchFamily="34" charset="-120"/>
+              </a:rPr>
+              <a:t>Apply</a:t>
+            </a:r>
+            <a:endParaRPr lang="en-US" sz="1500" dirty="0"/>
+          </a:p>
+        </p:txBody>
+      </p:sp>
+      <p:sp>
+        <p:nvSpPr>
+          <p:cNvPr id="18" name="Text 16"/>
+          <p:cNvSpPr/>
+          <p:nvPr/>
+        </p:nvSpPr>
+        <p:spPr>
+          <a:xfrm>
+            <a:off x="9985248" y="3941064"/>
+            <a:ext cx="201168" cy="256032"/>
+          </a:xfrm>
+          <a:prstGeom prst="rect">
+            <a:avLst/>
+          </a:prstGeom>
+          <a:noFill/>
+          <a:ln/>
+        </p:spPr>
+        <p:txBody>
+          <a:bodyPr wrap="square" lIns="0" tIns="0" rIns="0" bIns="0" rtlCol="0" anchor="ctr"/>
+          <a:lstStyle/>
+          <a:p>
+            <a:pPr algn="ctr" indent="0" marL="0">
+              <a:buNone/>
+            </a:pPr>
+            <a:r>
+              <a:rPr lang="en-US" sz="1800" b="1" dirty="0">
+                <a:solidFill>
+                  <a:srgbClr val="0068B7"/>
+                </a:solidFill>
+                <a:latin typeface="Aptos" pitchFamily="34" charset="0"/>
+                <a:ea typeface="Aptos" pitchFamily="34" charset="-122"/>
+                <a:cs typeface="Aptos" pitchFamily="34" charset="-120"/>
+              </a:rPr>
+              <a:t>â†’</a:t>
+            </a:r>
+            <a:endParaRPr lang="en-US" sz="1800" dirty="0"/>
+          </a:p>
+        </p:txBody>
+      </p:sp>
+      <p:sp>
+        <p:nvSpPr>
+          <p:cNvPr id="19" name="Shape 17"/>
+          <p:cNvSpPr/>
+          <p:nvPr/>
+        </p:nvSpPr>
+        <p:spPr>
+          <a:xfrm>
+            <a:off x="10213848" y="3730752"/>
+            <a:ext cx="1033272" cy="749808"/>
+          </a:xfrm>
+          <a:prstGeom prst="roundRect">
+            <a:avLst>
+              <a:gd name="adj" fmla="val 14634"/>
+            </a:avLst>
+          </a:prstGeom>
+          <a:solidFill>
+            <a:srgbClr val="6A4CA3"/>
+          </a:solidFill>
+          <a:ln w="12700">
+            <a:solidFill>
+              <a:srgbClr val="6A4CA3"/>
+            </a:solidFill>
+            <a:prstDash val="solid"/>
+          </a:ln>
+        </p:spPr>
+      </p:sp>
+      <p:sp>
+        <p:nvSpPr>
+          <p:cNvPr id="20" name="Text 18"/>
+          <p:cNvSpPr/>
+          <p:nvPr/>
+        </p:nvSpPr>
+        <p:spPr>
+          <a:xfrm>
+            <a:off x="10287000" y="3922776"/>
+            <a:ext cx="886968" cy="310896"/>
+          </a:xfrm>
+          <a:prstGeom prst="rect">
+            <a:avLst/>
+          </a:prstGeom>
+          <a:noFill/>
+          <a:ln/>
+        </p:spPr>
+        <p:txBody>
+          <a:bodyPr wrap="square" lIns="0" tIns="0" rIns="0" bIns="0" rtlCol="0" anchor="ctr">
+            <a:normAutofit/>
+          </a:bodyPr>
+          <a:lstStyle/>
+          <a:p>
+            <a:pPr algn="ctr" indent="0" marL="0">
+              <a:buNone/>
+            </a:pPr>
+            <a:r>
+              <a:rPr lang="en-US" sz="1500" b="1" dirty="0">
+                <a:solidFill>
+                  <a:srgbClr val="FFFFFF"/>
+                </a:solidFill>
+                <a:latin typeface="Aptos" pitchFamily="34" charset="0"/>
+                <a:ea typeface="Aptos" pitchFamily="34" charset="-122"/>
+                <a:cs typeface="Aptos" pitchFamily="34" charset="-120"/>
+              </a:rPr>
+              <a:t>Document</a:t>
+            </a:r>
+            <a:endParaRPr lang="en-US" sz="1500" dirty="0"/>
           </a:p>
         </p:txBody>
       </p:sp>
@@ -9349,7 +9922,7 @@
                 <a:ea typeface="Aptos" pitchFamily="34" charset="-122"/>
                 <a:cs typeface="Aptos" pitchFamily="34" charset="-120"/>
               </a:rPr>
-              <a:t>© Paula Soper</a:t>
+              <a:t>Â© Paula Soper</a:t>
             </a:r>
             <a:endParaRPr lang="en-US" sz="800" dirty="0"/>
           </a:p>
@@ -9357,7 +9930,46 @@
       </p:sp>
       <p:sp>
         <p:nvSpPr>
-          <p:cNvPr id="7" name="Shape 5"/>
+          <p:cNvPr id="7" name="Text 5"/>
+          <p:cNvSpPr/>
+          <p:nvPr/>
+        </p:nvSpPr>
+        <p:spPr>
+          <a:xfrm>
+            <a:off x="11137392" y="6510528"/>
+            <a:ext cx="411480" cy="201168"/>
+          </a:xfrm>
+          <a:prstGeom prst="rect">
+            <a:avLst/>
+          </a:prstGeom>
+          <a:noFill/>
+          <a:ln/>
+        </p:spPr>
+        <p:txBody>
+          <a:bodyPr wrap="square" lIns="0" tIns="0" rIns="0" bIns="0" rtlCol="0" anchor="ctr"/>
+          <a:lstStyle/>
+          <a:p>
+            <a:pPr algn="r" indent="0" marL="0">
+              <a:buNone/>
+            </a:pPr>
+            <a:r>
+              <a:rPr lang="en-US" sz="900" dirty="0">
+                <a:solidFill>
+                  <a:srgbClr val="5F7181"/>
+                </a:solidFill>
+                <a:latin typeface="Aptos" pitchFamily="34" charset="0"/>
+                <a:ea typeface="Aptos" pitchFamily="34" charset="-122"/>
+                <a:cs typeface="Aptos" pitchFamily="34" charset="-120"/>
+              </a:rPr>
+              <a:t>20</a:t>
+            </a:r>
+            <a:endParaRPr lang="en-US" sz="900" dirty="0"/>
+          </a:p>
+        </p:txBody>
+      </p:sp>
+      <p:sp>
+        <p:nvSpPr>
+          <p:cNvPr id="8" name="Shape 6"/>
           <p:cNvSpPr/>
           <p:nvPr/>
         </p:nvSpPr>
@@ -9382,7 +9994,7 @@
       </p:sp>
       <p:sp>
         <p:nvSpPr>
-          <p:cNvPr id="8" name="Text 6"/>
+          <p:cNvPr id="9" name="Text 7"/>
           <p:cNvSpPr/>
           <p:nvPr/>
         </p:nvSpPr>
@@ -9421,14 +10033,14 @@
       </p:sp>
       <p:sp>
         <p:nvSpPr>
-          <p:cNvPr id="9" name="Text 7"/>
+          <p:cNvPr id="10" name="Text 8"/>
           <p:cNvSpPr/>
           <p:nvPr/>
         </p:nvSpPr>
         <p:spPr>
           <a:xfrm>
             <a:off x="640080" y="621792"/>
-            <a:ext cx="10881360" cy="566928"/>
+            <a:ext cx="10881360" cy="713232"/>
           </a:xfrm>
           <a:prstGeom prst="rect">
             <a:avLst/>
@@ -9446,7 +10058,7 @@
               <a:buNone/>
             </a:pPr>
             <a:r>
-              <a:rPr lang="en-US" sz="2700" b="1" dirty="0">
+              <a:rPr lang="en-US" sz="3400" b="1" dirty="0">
                 <a:solidFill>
                   <a:srgbClr val="003A63"/>
                 </a:solidFill>
@@ -9456,20 +10068,20 @@
               </a:rPr>
               <a:t>References and Resources</a:t>
             </a:r>
-            <a:endParaRPr lang="en-US" sz="2700" dirty="0"/>
-          </a:p>
-        </p:txBody>
-      </p:sp>
-      <p:sp>
-        <p:nvSpPr>
-          <p:cNvPr id="10" name="Text 8"/>
-          <p:cNvSpPr/>
-          <p:nvPr/>
-        </p:nvSpPr>
-        <p:spPr>
-          <a:xfrm>
-            <a:off x="868680" y="1417320"/>
-            <a:ext cx="6675120" cy="4434840"/>
+            <a:endParaRPr lang="en-US" sz="3400" dirty="0"/>
+          </a:p>
+        </p:txBody>
+      </p:sp>
+      <p:sp>
+        <p:nvSpPr>
+          <p:cNvPr id="11" name="Text 9"/>
+          <p:cNvSpPr/>
+          <p:nvPr/>
+        </p:nvSpPr>
+        <p:spPr>
+          <a:xfrm>
+            <a:off x="868680" y="1508760"/>
+            <a:ext cx="6537960" cy="4160520"/>
           </a:xfrm>
           <a:prstGeom prst="rect">
             <a:avLst/>
@@ -9484,7 +10096,7 @@
           <a:lstStyle/>
           <a:p>
             <a:r>
-              <a:rPr lang="en-US" sz="1700" dirty="0">
+              <a:rPr lang="en-US" sz="2100" dirty="0">
                 <a:solidFill>
                   <a:srgbClr val="17364A"/>
                 </a:solidFill>
@@ -9494,11 +10106,11 @@
               </a:rPr>
               <a:t>CDC Evaluation Framework: https://www.cdc.gov/evaluation/</a:t>
             </a:r>
-            <a:endParaRPr lang="en-US" sz="1700" dirty="0"/>
-          </a:p>
-          <a:p>
-            <a:r>
-              <a:rPr lang="en-US" sz="1700" dirty="0">
+            <a:endParaRPr lang="en-US" sz="2100" dirty="0"/>
+          </a:p>
+          <a:p>
+            <a:r>
+              <a:rPr lang="en-US" sz="2100" dirty="0">
                 <a:solidFill>
                   <a:srgbClr val="17364A"/>
                 </a:solidFill>
@@ -9508,11 +10120,11 @@
               </a:rPr>
               <a:t>CDC Public Health Data Strategy: https://www.cdc.gov/public-health-data-strategy/php/about/index.html</a:t>
             </a:r>
-            <a:endParaRPr lang="en-US" sz="1700" dirty="0"/>
-          </a:p>
-          <a:p>
-            <a:r>
-              <a:rPr lang="en-US" sz="1700" dirty="0">
+            <a:endParaRPr lang="en-US" sz="2100" dirty="0"/>
+          </a:p>
+          <a:p>
+            <a:r>
+              <a:rPr lang="en-US" sz="2100" dirty="0">
                 <a:solidFill>
                   <a:srgbClr val="17364A"/>
                 </a:solidFill>
@@ -9520,29 +10132,15 @@
                 <a:ea typeface="Aptos" pitchFamily="34" charset="-122"/>
                 <a:cs typeface="Aptos" pitchFamily="34" charset="-120"/>
               </a:rPr>
-              <a:t>NIST Artificial Intelligence Risk Management Framework: https://www.nist.gov/itl/ai-risk-management-framework</a:t>
-            </a:r>
-            <a:endParaRPr lang="en-US" sz="1700" dirty="0"/>
-          </a:p>
-          <a:p>
-            <a:r>
-              <a:rPr lang="en-US" sz="1700" dirty="0">
-                <a:solidFill>
-                  <a:srgbClr val="17364A"/>
-                </a:solidFill>
-                <a:latin typeface="Aptos" pitchFamily="34" charset="0"/>
-                <a:ea typeface="Aptos" pitchFamily="34" charset="-122"/>
-                <a:cs typeface="Aptos" pitchFamily="34" charset="-120"/>
-              </a:rPr>
-              <a:t>NIST AI RMF Generative AI Profile:.</a:t>
-            </a:r>
-            <a:endParaRPr lang="en-US" sz="1700" dirty="0"/>
-          </a:p>
-        </p:txBody>
-      </p:sp>
-      <p:sp>
-        <p:nvSpPr>
-          <p:cNvPr id="11" name="Shape 9"/>
+              <a:t>NIST Artificial Intelligence Risk Management Framework:.</a:t>
+            </a:r>
+            <a:endParaRPr lang="en-US" sz="2100" dirty="0"/>
+          </a:p>
+        </p:txBody>
+      </p:sp>
+      <p:sp>
+        <p:nvSpPr>
+          <p:cNvPr id="12" name="Shape 10"/>
           <p:cNvSpPr/>
           <p:nvPr/>
         </p:nvSpPr>
@@ -9569,14 +10167,14 @@
       </p:sp>
       <p:sp>
         <p:nvSpPr>
-          <p:cNvPr id="12" name="Text 10"/>
+          <p:cNvPr id="13" name="Text 11"/>
           <p:cNvSpPr/>
           <p:nvPr/>
         </p:nvSpPr>
         <p:spPr>
           <a:xfrm>
             <a:off x="8074152" y="1563624"/>
-            <a:ext cx="2825496" cy="201168"/>
+            <a:ext cx="2825496" cy="256032"/>
           </a:xfrm>
           <a:prstGeom prst="rect">
             <a:avLst/>
@@ -9592,7 +10190,7 @@
               <a:buNone/>
             </a:pPr>
             <a:r>
-              <a:rPr lang="en-US" sz="950" b="1" dirty="0">
+              <a:rPr lang="en-US" sz="1300" b="1" dirty="0">
                 <a:solidFill>
                   <a:srgbClr val="0068B7"/>
                 </a:solidFill>
@@ -9602,20 +10200,20 @@
               </a:rPr>
               <a:t>Key idea</a:t>
             </a:r>
-            <a:endParaRPr lang="en-US" sz="950" dirty="0"/>
-          </a:p>
-        </p:txBody>
-      </p:sp>
-      <p:sp>
-        <p:nvSpPr>
-          <p:cNvPr id="13" name="Text 11"/>
-          <p:cNvSpPr/>
-          <p:nvPr/>
-        </p:nvSpPr>
-        <p:spPr>
-          <a:xfrm>
-            <a:off x="8074152" y="1856232"/>
-            <a:ext cx="2825496" cy="1261872"/>
+            <a:endParaRPr lang="en-US" sz="1300" dirty="0"/>
+          </a:p>
+        </p:txBody>
+      </p:sp>
+      <p:sp>
+        <p:nvSpPr>
+          <p:cNvPr id="14" name="Text 12"/>
+          <p:cNvSpPr/>
+          <p:nvPr/>
+        </p:nvSpPr>
+        <p:spPr>
+          <a:xfrm>
+            <a:off x="8074152" y="1920240"/>
+            <a:ext cx="2825496" cy="1188720"/>
           </a:xfrm>
           <a:prstGeom prst="rect">
             <a:avLst/>
@@ -9633,7 +10231,7 @@
               <a:buNone/>
             </a:pPr>
             <a:r>
-              <a:rPr lang="en-US" sz="1250" dirty="0">
+              <a:rPr lang="en-US" sz="1550" dirty="0">
                 <a:solidFill>
                   <a:srgbClr val="17364A"/>
                 </a:solidFill>
@@ -9643,13 +10241,13 @@
               </a:rPr>
               <a:t>CDC Evaluation Framework: https://www.cdc.gov/evaluation/</a:t>
             </a:r>
-            <a:endParaRPr lang="en-US" sz="1250" dirty="0"/>
-          </a:p>
-        </p:txBody>
-      </p:sp>
-      <p:sp>
-        <p:nvSpPr>
-          <p:cNvPr id="14" name="Shape 12"/>
+            <a:endParaRPr lang="en-US" sz="1550" dirty="0"/>
+          </a:p>
+        </p:txBody>
+      </p:sp>
+      <p:sp>
+        <p:nvSpPr>
+          <p:cNvPr id="15" name="Shape 13"/>
           <p:cNvSpPr/>
           <p:nvPr/>
         </p:nvSpPr>
@@ -9676,14 +10274,14 @@
       </p:sp>
       <p:sp>
         <p:nvSpPr>
-          <p:cNvPr id="15" name="Text 13"/>
+          <p:cNvPr id="16" name="Text 14"/>
           <p:cNvSpPr/>
           <p:nvPr/>
         </p:nvSpPr>
         <p:spPr>
           <a:xfrm>
             <a:off x="8074152" y="3666744"/>
-            <a:ext cx="2825496" cy="201168"/>
+            <a:ext cx="2825496" cy="256032"/>
           </a:xfrm>
           <a:prstGeom prst="rect">
             <a:avLst/>
@@ -9699,7 +10297,7 @@
               <a:buNone/>
             </a:pPr>
             <a:r>
-              <a:rPr lang="en-US" sz="950" b="1" dirty="0">
+              <a:rPr lang="en-US" sz="1300" b="1" dirty="0">
                 <a:solidFill>
                   <a:srgbClr val="0068B7"/>
                 </a:solidFill>
@@ -9709,20 +10307,20 @@
               </a:rPr>
               <a:t>Use this for</a:t>
             </a:r>
-            <a:endParaRPr lang="en-US" sz="950" dirty="0"/>
-          </a:p>
-        </p:txBody>
-      </p:sp>
-      <p:sp>
-        <p:nvSpPr>
-          <p:cNvPr id="16" name="Text 14"/>
-          <p:cNvSpPr/>
-          <p:nvPr/>
-        </p:nvSpPr>
-        <p:spPr>
-          <a:xfrm>
-            <a:off x="8074152" y="3959352"/>
-            <a:ext cx="2825496" cy="1170432"/>
+            <a:endParaRPr lang="en-US" sz="1300" dirty="0"/>
+          </a:p>
+        </p:txBody>
+      </p:sp>
+      <p:sp>
+        <p:nvSpPr>
+          <p:cNvPr id="17" name="Text 15"/>
+          <p:cNvSpPr/>
+          <p:nvPr/>
+        </p:nvSpPr>
+        <p:spPr>
+          <a:xfrm>
+            <a:off x="8074152" y="4023360"/>
+            <a:ext cx="2825496" cy="1097280"/>
           </a:xfrm>
           <a:prstGeom prst="rect">
             <a:avLst/>
@@ -9740,7 +10338,7 @@
               <a:buNone/>
             </a:pPr>
             <a:r>
-              <a:rPr lang="en-US" sz="1250" dirty="0">
+              <a:rPr lang="en-US" sz="1550" dirty="0">
                 <a:solidFill>
                   <a:srgbClr val="17364A"/>
                 </a:solidFill>
@@ -9750,7 +10348,7 @@
               </a:rPr>
               <a:t>Connect the concept to public health decisions, safeguards, documentation, or implementation work.</a:t>
             </a:r>
-            <a:endParaRPr lang="en-US" sz="1250" dirty="0"/>
+            <a:endParaRPr lang="en-US" sz="1550" dirty="0"/>
           </a:p>
         </p:txBody>
       </p:sp>
@@ -9947,7 +10545,7 @@
                 <a:ea typeface="Aptos" pitchFamily="34" charset="-122"/>
                 <a:cs typeface="Aptos" pitchFamily="34" charset="-120"/>
               </a:rPr>
-              <a:t>© Paula Soper</a:t>
+              <a:t>Â© Paula Soper</a:t>
             </a:r>
             <a:endParaRPr lang="en-US" sz="800" dirty="0"/>
           </a:p>
@@ -9961,8 +10559,47 @@
         </p:nvSpPr>
         <p:spPr>
           <a:xfrm>
+            <a:off x="11137392" y="6510528"/>
+            <a:ext cx="411480" cy="201168"/>
+          </a:xfrm>
+          <a:prstGeom prst="rect">
+            <a:avLst/>
+          </a:prstGeom>
+          <a:noFill/>
+          <a:ln/>
+        </p:spPr>
+        <p:txBody>
+          <a:bodyPr wrap="square" lIns="0" tIns="0" rIns="0" bIns="0" rtlCol="0" anchor="ctr"/>
+          <a:lstStyle/>
+          <a:p>
+            <a:pPr algn="r" indent="0" marL="0">
+              <a:buNone/>
+            </a:pPr>
+            <a:r>
+              <a:rPr lang="en-US" sz="900" dirty="0">
+                <a:solidFill>
+                  <a:srgbClr val="5F7181"/>
+                </a:solidFill>
+                <a:latin typeface="Aptos" pitchFamily="34" charset="0"/>
+                <a:ea typeface="Aptos" pitchFamily="34" charset="-122"/>
+                <a:cs typeface="Aptos" pitchFamily="34" charset="-120"/>
+              </a:rPr>
+              <a:t>3</a:t>
+            </a:r>
+            <a:endParaRPr lang="en-US" sz="900" dirty="0"/>
+          </a:p>
+        </p:txBody>
+      </p:sp>
+      <p:sp>
+        <p:nvSpPr>
+          <p:cNvPr id="8" name="Text 6"/>
+          <p:cNvSpPr/>
+          <p:nvPr/>
+        </p:nvSpPr>
+        <p:spPr>
+          <a:xfrm>
             <a:off x="640080" y="658368"/>
-            <a:ext cx="10881360" cy="566928"/>
+            <a:ext cx="10881360" cy="713232"/>
           </a:xfrm>
           <a:prstGeom prst="rect">
             <a:avLst/>
@@ -9980,7 +10617,7 @@
               <a:buNone/>
             </a:pPr>
             <a:r>
-              <a:rPr lang="en-US" sz="2700" b="1" dirty="0">
+              <a:rPr lang="en-US" sz="3400" b="1" dirty="0">
                 <a:solidFill>
                   <a:srgbClr val="003A63"/>
                 </a:solidFill>
@@ -9990,20 +10627,20 @@
               </a:rPr>
               <a:t>How this module connects to the playbook</a:t>
             </a:r>
-            <a:endParaRPr lang="en-US" sz="2700" dirty="0"/>
-          </a:p>
-        </p:txBody>
-      </p:sp>
-      <p:sp>
-        <p:nvSpPr>
-          <p:cNvPr id="8" name="Text 6"/>
-          <p:cNvSpPr/>
-          <p:nvPr/>
-        </p:nvSpPr>
-        <p:spPr>
-          <a:xfrm>
-            <a:off x="868680" y="1417320"/>
-            <a:ext cx="6903720" cy="4480560"/>
+            <a:endParaRPr lang="en-US" sz="3400" dirty="0"/>
+          </a:p>
+        </p:txBody>
+      </p:sp>
+      <p:sp>
+        <p:nvSpPr>
+          <p:cNvPr id="9" name="Text 7"/>
+          <p:cNvSpPr/>
+          <p:nvPr/>
+        </p:nvSpPr>
+        <p:spPr>
+          <a:xfrm>
+            <a:off x="868680" y="1508760"/>
+            <a:ext cx="6812280" cy="3977640"/>
           </a:xfrm>
           <a:prstGeom prst="rect">
             <a:avLst/>
@@ -10018,7 +10655,7 @@
           <a:lstStyle/>
           <a:p>
             <a:r>
-              <a:rPr lang="en-US" sz="1540" dirty="0">
+              <a:rPr lang="en-US" sz="1900" dirty="0">
                 <a:solidFill>
                   <a:srgbClr val="17364A"/>
                 </a:solidFill>
@@ -10026,13 +10663,13 @@
                 <a:ea typeface="Aptos" pitchFamily="34" charset="-122"/>
                 <a:cs typeface="Aptos" pitchFamily="34" charset="-120"/>
               </a:rPr>
-              <a:t>Play 11: Build and Deploy AI Solutions - This lesson informs Play 11 by helping learners connect the lesson topic to build and deploy.</a:t>
-            </a:r>
-            <a:endParaRPr lang="en-US" sz="1540" dirty="0"/>
-          </a:p>
-          <a:p>
-            <a:r>
-              <a:rPr lang="en-US" sz="1540" dirty="0">
+              <a:t>Play 11: Build and Deploy AI Solutions - This lesson informs Play 11 by helping learners connect the lesson.</a:t>
+            </a:r>
+            <a:endParaRPr lang="en-US" sz="1900" dirty="0"/>
+          </a:p>
+          <a:p>
+            <a:r>
+              <a:rPr lang="en-US" sz="1900" dirty="0">
                 <a:solidFill>
                   <a:srgbClr val="17364A"/>
                 </a:solidFill>
@@ -10040,13 +10677,13 @@
                 <a:ea typeface="Aptos" pitchFamily="34" charset="-122"/>
                 <a:cs typeface="Aptos" pitchFamily="34" charset="-120"/>
               </a:rPr>
-              <a:t>Play 2: Readiness Assessment - This lesson informs Play 2 by helping learners connect the lesson topic to readiness assessment work.</a:t>
-            </a:r>
-            <a:endParaRPr lang="en-US" sz="1540" dirty="0"/>
-          </a:p>
-          <a:p>
-            <a:r>
-              <a:rPr lang="en-US" sz="1540" dirty="0">
+              <a:t>Play 2: Readiness Assessment - This lesson informs Play 2 by helping learners connect the lesson topic to.</a:t>
+            </a:r>
+            <a:endParaRPr lang="en-US" sz="1900" dirty="0"/>
+          </a:p>
+          <a:p>
+            <a:r>
+              <a:rPr lang="en-US" sz="1900" dirty="0">
                 <a:solidFill>
                   <a:srgbClr val="17364A"/>
                 </a:solidFill>
@@ -10054,13 +10691,13 @@
                 <a:ea typeface="Aptos" pitchFamily="34" charset="-122"/>
                 <a:cs typeface="Aptos" pitchFamily="34" charset="-120"/>
               </a:rPr>
-              <a:t>Play 7: Prioritize Use Cases - This lesson informs Play 7 by helping learners connect the lesson topic to prioritize use cases work.</a:t>
-            </a:r>
-            <a:endParaRPr lang="en-US" sz="1540" dirty="0"/>
-          </a:p>
-          <a:p>
-            <a:r>
-              <a:rPr lang="en-US" sz="1540" dirty="0">
+              <a:t>Play 7: Prioritize Use Cases - This lesson informs Play 7 by helping learners connect the lesson topic to.</a:t>
+            </a:r>
+            <a:endParaRPr lang="en-US" sz="1900" dirty="0"/>
+          </a:p>
+          <a:p>
+            <a:r>
+              <a:rPr lang="en-US" sz="1900" dirty="0">
                 <a:solidFill>
                   <a:srgbClr val="17364A"/>
                 </a:solidFill>
@@ -10068,15 +10705,15 @@
                 <a:ea typeface="Aptos" pitchFamily="34" charset="-122"/>
                 <a:cs typeface="Aptos" pitchFamily="34" charset="-120"/>
               </a:rPr>
-              <a:t>Play 13: Monitor and Evaluate AI Systems - This lesson informs Play 13 by helping learners connect the lesson topic to monitor and.</a:t>
-            </a:r>
-            <a:endParaRPr lang="en-US" sz="1540" dirty="0"/>
-          </a:p>
-        </p:txBody>
-      </p:sp>
-      <p:sp>
-        <p:nvSpPr>
-          <p:cNvPr id="9" name="Shape 7"/>
+              <a:t>Play 13: Monitor and Evaluate AI Systems - This lesson informs Play 13 by helping learners connect the.</a:t>
+            </a:r>
+            <a:endParaRPr lang="en-US" sz="1900" dirty="0"/>
+          </a:p>
+        </p:txBody>
+      </p:sp>
+      <p:sp>
+        <p:nvSpPr>
+          <p:cNvPr id="10" name="Shape 8"/>
           <p:cNvSpPr/>
           <p:nvPr/>
         </p:nvSpPr>
@@ -10103,14 +10740,14 @@
       </p:sp>
       <p:sp>
         <p:nvSpPr>
-          <p:cNvPr id="10" name="Text 8"/>
+          <p:cNvPr id="11" name="Text 9"/>
           <p:cNvSpPr/>
           <p:nvPr/>
         </p:nvSpPr>
         <p:spPr>
           <a:xfrm>
             <a:off x="8211312" y="1563624"/>
-            <a:ext cx="2734056" cy="201168"/>
+            <a:ext cx="2734056" cy="256032"/>
           </a:xfrm>
           <a:prstGeom prst="rect">
             <a:avLst/>
@@ -10126,7 +10763,7 @@
               <a:buNone/>
             </a:pPr>
             <a:r>
-              <a:rPr lang="en-US" sz="950" b="1" dirty="0">
+              <a:rPr lang="en-US" sz="1300" b="1" dirty="0">
                 <a:solidFill>
                   <a:srgbClr val="0068B7"/>
                 </a:solidFill>
@@ -10136,20 +10773,20 @@
               </a:rPr>
               <a:t>Apply the lesson</a:t>
             </a:r>
-            <a:endParaRPr lang="en-US" sz="950" dirty="0"/>
-          </a:p>
-        </p:txBody>
-      </p:sp>
-      <p:sp>
-        <p:nvSpPr>
-          <p:cNvPr id="11" name="Text 9"/>
-          <p:cNvSpPr/>
-          <p:nvPr/>
-        </p:nvSpPr>
-        <p:spPr>
-          <a:xfrm>
-            <a:off x="8211312" y="1856232"/>
-            <a:ext cx="2734056" cy="1536192"/>
+            <a:endParaRPr lang="en-US" sz="1300" dirty="0"/>
+          </a:p>
+        </p:txBody>
+      </p:sp>
+      <p:sp>
+        <p:nvSpPr>
+          <p:cNvPr id="12" name="Text 10"/>
+          <p:cNvSpPr/>
+          <p:nvPr/>
+        </p:nvSpPr>
+        <p:spPr>
+          <a:xfrm>
+            <a:off x="8211312" y="1920240"/>
+            <a:ext cx="2734056" cy="1463040"/>
           </a:xfrm>
           <a:prstGeom prst="rect">
             <a:avLst/>
@@ -10167,7 +10804,7 @@
               <a:buNone/>
             </a:pPr>
             <a:r>
-              <a:rPr lang="en-US" sz="1250" dirty="0">
+              <a:rPr lang="en-US" sz="1550" dirty="0">
                 <a:solidFill>
                   <a:srgbClr val="17364A"/>
                 </a:solidFill>
@@ -10177,32 +10814,32 @@
               </a:rPr>
               <a:t>Use the related plays to identify decisions, participants, timing, approvals, and documentation needed for responsible implementation.</a:t>
             </a:r>
-            <a:endParaRPr lang="en-US" sz="1250" dirty="0"/>
-          </a:p>
-        </p:txBody>
-      </p:sp>
-      <p:sp>
-        <p:nvSpPr>
-          <p:cNvPr id="12" name="Shape 10"/>
-          <p:cNvSpPr/>
-          <p:nvPr/>
-        </p:nvSpPr>
-        <p:spPr>
-          <a:xfrm>
-            <a:off x="8046720" y="3794760"/>
-            <a:ext cx="3063240" cy="1508760"/>
+            <a:endParaRPr lang="en-US" sz="1550" dirty="0"/>
+          </a:p>
+        </p:txBody>
+      </p:sp>
+      <p:sp>
+        <p:nvSpPr>
+          <p:cNvPr id="13" name="Shape 11"/>
+          <p:cNvSpPr/>
+          <p:nvPr/>
+        </p:nvSpPr>
+        <p:spPr>
+          <a:xfrm>
+            <a:off x="7818120" y="3977640"/>
+            <a:ext cx="972312" cy="749808"/>
           </a:xfrm>
           <a:prstGeom prst="roundRect">
             <a:avLst>
-              <a:gd name="adj" fmla="val 7273"/>
+              <a:gd name="adj" fmla="val 14634"/>
             </a:avLst>
           </a:prstGeom>
           <a:solidFill>
-            <a:srgbClr val="FFF4D9"/>
+            <a:srgbClr val="0068B7"/>
           </a:solidFill>
           <a:ln w="12700">
             <a:solidFill>
-              <a:srgbClr val="B9D7E6"/>
+              <a:srgbClr val="0068B7"/>
             </a:solidFill>
             <a:prstDash val="solid"/>
           </a:ln>
@@ -10210,81 +10847,256 @@
       </p:sp>
       <p:sp>
         <p:nvSpPr>
-          <p:cNvPr id="13" name="Text 11"/>
-          <p:cNvSpPr/>
-          <p:nvPr/>
-        </p:nvSpPr>
-        <p:spPr>
-          <a:xfrm>
-            <a:off x="8211312" y="3941064"/>
-            <a:ext cx="2734056" cy="201168"/>
-          </a:xfrm>
-          <a:prstGeom prst="rect">
-            <a:avLst/>
-          </a:prstGeom>
-          <a:noFill/>
-          <a:ln/>
-        </p:spPr>
-        <p:txBody>
-          <a:bodyPr wrap="square" lIns="0" tIns="0" rIns="0" bIns="0" rtlCol="0" anchor="ctr"/>
-          <a:lstStyle/>
-          <a:p>
-            <a:pPr indent="0" marL="0">
-              <a:buNone/>
-            </a:pPr>
-            <a:r>
-              <a:rPr lang="en-US" sz="950" b="1" dirty="0">
-                <a:solidFill>
-                  <a:srgbClr val="0068B7"/>
-                </a:solidFill>
-                <a:latin typeface="Aptos" pitchFamily="34" charset="0"/>
-                <a:ea typeface="Aptos" pitchFamily="34" charset="-122"/>
-                <a:cs typeface="Aptos" pitchFamily="34" charset="-120"/>
-              </a:rPr>
-              <a:t>Keep in mind</a:t>
-            </a:r>
-            <a:endParaRPr lang="en-US" sz="950" dirty="0"/>
-          </a:p>
-        </p:txBody>
-      </p:sp>
-      <p:sp>
-        <p:nvSpPr>
           <p:cNvPr id="14" name="Text 12"/>
           <p:cNvSpPr/>
           <p:nvPr/>
         </p:nvSpPr>
         <p:spPr>
           <a:xfrm>
-            <a:off x="8211312" y="4233672"/>
-            <a:ext cx="2734056" cy="941832"/>
-          </a:xfrm>
-          <a:prstGeom prst="rect">
-            <a:avLst/>
-          </a:prstGeom>
-          <a:noFill/>
-          <a:ln/>
-        </p:spPr>
-        <p:txBody>
-          <a:bodyPr wrap="square" lIns="0" tIns="0" rIns="0" bIns="0" rtlCol="0" anchor="t">
+            <a:off x="7891272" y="4169664"/>
+            <a:ext cx="826008" cy="310896"/>
+          </a:xfrm>
+          <a:prstGeom prst="rect">
+            <a:avLst/>
+          </a:prstGeom>
+          <a:noFill/>
+          <a:ln/>
+        </p:spPr>
+        <p:txBody>
+          <a:bodyPr wrap="square" lIns="0" tIns="0" rIns="0" bIns="0" rtlCol="0" anchor="ctr">
             <a:normAutofit/>
           </a:bodyPr>
           <a:lstStyle/>
           <a:p>
-            <a:pPr indent="0" marL="0">
-              <a:buNone/>
-            </a:pPr>
-            <a:r>
-              <a:rPr lang="en-US" sz="1250" dirty="0">
-                <a:solidFill>
-                  <a:srgbClr val="17364A"/>
-                </a:solidFill>
-                <a:latin typeface="Aptos" pitchFamily="34" charset="0"/>
-                <a:ea typeface="Aptos" pitchFamily="34" charset="-122"/>
-                <a:cs typeface="Aptos" pitchFamily="34" charset="-120"/>
-              </a:rPr>
-              <a:t>The playbook connection helps turn training into agency work, not just individual knowledge.</a:t>
-            </a:r>
-            <a:endParaRPr lang="en-US" sz="1250" dirty="0"/>
+            <a:pPr algn="ctr" indent="0" marL="0">
+              <a:buNone/>
+            </a:pPr>
+            <a:r>
+              <a:rPr lang="en-US" sz="1500" b="1" dirty="0">
+                <a:solidFill>
+                  <a:srgbClr val="FFFFFF"/>
+                </a:solidFill>
+                <a:latin typeface="Aptos" pitchFamily="34" charset="0"/>
+                <a:ea typeface="Aptos" pitchFamily="34" charset="-122"/>
+                <a:cs typeface="Aptos" pitchFamily="34" charset="-120"/>
+              </a:rPr>
+              <a:t>Lesson</a:t>
+            </a:r>
+            <a:endParaRPr lang="en-US" sz="1500" dirty="0"/>
+          </a:p>
+        </p:txBody>
+      </p:sp>
+      <p:sp>
+        <p:nvSpPr>
+          <p:cNvPr id="15" name="Text 13"/>
+          <p:cNvSpPr/>
+          <p:nvPr/>
+        </p:nvSpPr>
+        <p:spPr>
+          <a:xfrm>
+            <a:off x="8817864" y="4187952"/>
+            <a:ext cx="201168" cy="256032"/>
+          </a:xfrm>
+          <a:prstGeom prst="rect">
+            <a:avLst/>
+          </a:prstGeom>
+          <a:noFill/>
+          <a:ln/>
+        </p:spPr>
+        <p:txBody>
+          <a:bodyPr wrap="square" lIns="0" tIns="0" rIns="0" bIns="0" rtlCol="0" anchor="ctr"/>
+          <a:lstStyle/>
+          <a:p>
+            <a:pPr algn="ctr" indent="0" marL="0">
+              <a:buNone/>
+            </a:pPr>
+            <a:r>
+              <a:rPr lang="en-US" sz="1800" b="1" dirty="0">
+                <a:solidFill>
+                  <a:srgbClr val="0068B7"/>
+                </a:solidFill>
+                <a:latin typeface="Aptos" pitchFamily="34" charset="0"/>
+                <a:ea typeface="Aptos" pitchFamily="34" charset="-122"/>
+                <a:cs typeface="Aptos" pitchFamily="34" charset="-120"/>
+              </a:rPr>
+              <a:t>â†’</a:t>
+            </a:r>
+            <a:endParaRPr lang="en-US" sz="1800" dirty="0"/>
+          </a:p>
+        </p:txBody>
+      </p:sp>
+      <p:sp>
+        <p:nvSpPr>
+          <p:cNvPr id="16" name="Shape 14"/>
+          <p:cNvSpPr/>
+          <p:nvPr/>
+        </p:nvSpPr>
+        <p:spPr>
+          <a:xfrm>
+            <a:off x="9046464" y="3977640"/>
+            <a:ext cx="972312" cy="749808"/>
+          </a:xfrm>
+          <a:prstGeom prst="roundRect">
+            <a:avLst>
+              <a:gd name="adj" fmla="val 14634"/>
+            </a:avLst>
+          </a:prstGeom>
+          <a:solidFill>
+            <a:srgbClr val="2F8A28"/>
+          </a:solidFill>
+          <a:ln w="12700">
+            <a:solidFill>
+              <a:srgbClr val="2F8A28"/>
+            </a:solidFill>
+            <a:prstDash val="solid"/>
+          </a:ln>
+        </p:spPr>
+      </p:sp>
+      <p:sp>
+        <p:nvSpPr>
+          <p:cNvPr id="17" name="Text 15"/>
+          <p:cNvSpPr/>
+          <p:nvPr/>
+        </p:nvSpPr>
+        <p:spPr>
+          <a:xfrm>
+            <a:off x="9119616" y="4169664"/>
+            <a:ext cx="826008" cy="310896"/>
+          </a:xfrm>
+          <a:prstGeom prst="rect">
+            <a:avLst/>
+          </a:prstGeom>
+          <a:noFill/>
+          <a:ln/>
+        </p:spPr>
+        <p:txBody>
+          <a:bodyPr wrap="square" lIns="0" tIns="0" rIns="0" bIns="0" rtlCol="0" anchor="ctr">
+            <a:normAutofit/>
+          </a:bodyPr>
+          <a:lstStyle/>
+          <a:p>
+            <a:pPr algn="ctr" indent="0" marL="0">
+              <a:buNone/>
+            </a:pPr>
+            <a:r>
+              <a:rPr lang="en-US" sz="1500" b="1" dirty="0">
+                <a:solidFill>
+                  <a:srgbClr val="FFFFFF"/>
+                </a:solidFill>
+                <a:latin typeface="Aptos" pitchFamily="34" charset="0"/>
+                <a:ea typeface="Aptos" pitchFamily="34" charset="-122"/>
+                <a:cs typeface="Aptos" pitchFamily="34" charset="-120"/>
+              </a:rPr>
+              <a:t>Plays</a:t>
+            </a:r>
+            <a:endParaRPr lang="en-US" sz="1500" dirty="0"/>
+          </a:p>
+        </p:txBody>
+      </p:sp>
+      <p:sp>
+        <p:nvSpPr>
+          <p:cNvPr id="18" name="Text 16"/>
+          <p:cNvSpPr/>
+          <p:nvPr/>
+        </p:nvSpPr>
+        <p:spPr>
+          <a:xfrm>
+            <a:off x="10046208" y="4187952"/>
+            <a:ext cx="201168" cy="256032"/>
+          </a:xfrm>
+          <a:prstGeom prst="rect">
+            <a:avLst/>
+          </a:prstGeom>
+          <a:noFill/>
+          <a:ln/>
+        </p:spPr>
+        <p:txBody>
+          <a:bodyPr wrap="square" lIns="0" tIns="0" rIns="0" bIns="0" rtlCol="0" anchor="ctr"/>
+          <a:lstStyle/>
+          <a:p>
+            <a:pPr algn="ctr" indent="0" marL="0">
+              <a:buNone/>
+            </a:pPr>
+            <a:r>
+              <a:rPr lang="en-US" sz="1800" b="1" dirty="0">
+                <a:solidFill>
+                  <a:srgbClr val="0068B7"/>
+                </a:solidFill>
+                <a:latin typeface="Aptos" pitchFamily="34" charset="0"/>
+                <a:ea typeface="Aptos" pitchFamily="34" charset="-122"/>
+                <a:cs typeface="Aptos" pitchFamily="34" charset="-120"/>
+              </a:rPr>
+              <a:t>â†’</a:t>
+            </a:r>
+            <a:endParaRPr lang="en-US" sz="1800" dirty="0"/>
+          </a:p>
+        </p:txBody>
+      </p:sp>
+      <p:sp>
+        <p:nvSpPr>
+          <p:cNvPr id="19" name="Shape 17"/>
+          <p:cNvSpPr/>
+          <p:nvPr/>
+        </p:nvSpPr>
+        <p:spPr>
+          <a:xfrm>
+            <a:off x="10274808" y="3977640"/>
+            <a:ext cx="972312" cy="749808"/>
+          </a:xfrm>
+          <a:prstGeom prst="roundRect">
+            <a:avLst>
+              <a:gd name="adj" fmla="val 14634"/>
+            </a:avLst>
+          </a:prstGeom>
+          <a:solidFill>
+            <a:srgbClr val="6A4CA3"/>
+          </a:solidFill>
+          <a:ln w="12700">
+            <a:solidFill>
+              <a:srgbClr val="6A4CA3"/>
+            </a:solidFill>
+            <a:prstDash val="solid"/>
+          </a:ln>
+        </p:spPr>
+      </p:sp>
+      <p:sp>
+        <p:nvSpPr>
+          <p:cNvPr id="20" name="Text 18"/>
+          <p:cNvSpPr/>
+          <p:nvPr/>
+        </p:nvSpPr>
+        <p:spPr>
+          <a:xfrm>
+            <a:off x="10347960" y="4169664"/>
+            <a:ext cx="826008" cy="310896"/>
+          </a:xfrm>
+          <a:prstGeom prst="rect">
+            <a:avLst/>
+          </a:prstGeom>
+          <a:noFill/>
+          <a:ln/>
+        </p:spPr>
+        <p:txBody>
+          <a:bodyPr wrap="square" lIns="0" tIns="0" rIns="0" bIns="0" rtlCol="0" anchor="ctr">
+            <a:normAutofit/>
+          </a:bodyPr>
+          <a:lstStyle/>
+          <a:p>
+            <a:pPr algn="ctr" indent="0" marL="0">
+              <a:buNone/>
+            </a:pPr>
+            <a:r>
+              <a:rPr lang="en-US" sz="1500" b="1" dirty="0">
+                <a:solidFill>
+                  <a:srgbClr val="FFFFFF"/>
+                </a:solidFill>
+                <a:latin typeface="Aptos" pitchFamily="34" charset="0"/>
+                <a:ea typeface="Aptos" pitchFamily="34" charset="-122"/>
+                <a:cs typeface="Aptos" pitchFamily="34" charset="-120"/>
+              </a:rPr>
+              <a:t>Action</a:t>
+            </a:r>
+            <a:endParaRPr lang="en-US" sz="1500" dirty="0"/>
           </a:p>
         </p:txBody>
       </p:sp>
@@ -10481,7 +11293,7 @@
                 <a:ea typeface="Aptos" pitchFamily="34" charset="-122"/>
                 <a:cs typeface="Aptos" pitchFamily="34" charset="-120"/>
               </a:rPr>
-              <a:t>© Paula Soper</a:t>
+              <a:t>Â© Paula Soper</a:t>
             </a:r>
             <a:endParaRPr lang="en-US" sz="800" dirty="0"/>
           </a:p>
@@ -10495,8 +11307,47 @@
         </p:nvSpPr>
         <p:spPr>
           <a:xfrm>
+            <a:off x="11137392" y="6510528"/>
+            <a:ext cx="411480" cy="201168"/>
+          </a:xfrm>
+          <a:prstGeom prst="rect">
+            <a:avLst/>
+          </a:prstGeom>
+          <a:noFill/>
+          <a:ln/>
+        </p:spPr>
+        <p:txBody>
+          <a:bodyPr wrap="square" lIns="0" tIns="0" rIns="0" bIns="0" rtlCol="0" anchor="ctr"/>
+          <a:lstStyle/>
+          <a:p>
+            <a:pPr algn="r" indent="0" marL="0">
+              <a:buNone/>
+            </a:pPr>
+            <a:r>
+              <a:rPr lang="en-US" sz="900" dirty="0">
+                <a:solidFill>
+                  <a:srgbClr val="5F7181"/>
+                </a:solidFill>
+                <a:latin typeface="Aptos" pitchFamily="34" charset="0"/>
+                <a:ea typeface="Aptos" pitchFamily="34" charset="-122"/>
+                <a:cs typeface="Aptos" pitchFamily="34" charset="-120"/>
+              </a:rPr>
+              <a:t>4</a:t>
+            </a:r>
+            <a:endParaRPr lang="en-US" sz="900" dirty="0"/>
+          </a:p>
+        </p:txBody>
+      </p:sp>
+      <p:sp>
+        <p:nvSpPr>
+          <p:cNvPr id="8" name="Text 6"/>
+          <p:cNvSpPr/>
+          <p:nvPr/>
+        </p:nvSpPr>
+        <p:spPr>
+          <a:xfrm>
             <a:off x="640080" y="658368"/>
-            <a:ext cx="10881360" cy="566928"/>
+            <a:ext cx="10881360" cy="713232"/>
           </a:xfrm>
           <a:prstGeom prst="rect">
             <a:avLst/>
@@ -10514,7 +11365,7 @@
               <a:buNone/>
             </a:pPr>
             <a:r>
-              <a:rPr lang="en-US" sz="2700" b="1" dirty="0">
+              <a:rPr lang="en-US" sz="3400" b="1" dirty="0">
                 <a:solidFill>
                   <a:srgbClr val="003A63"/>
                 </a:solidFill>
@@ -10524,20 +11375,20 @@
               </a:rPr>
               <a:t>Related toolkit resources</a:t>
             </a:r>
-            <a:endParaRPr lang="en-US" sz="2700" dirty="0"/>
-          </a:p>
-        </p:txBody>
-      </p:sp>
-      <p:sp>
-        <p:nvSpPr>
-          <p:cNvPr id="8" name="Text 6"/>
-          <p:cNvSpPr/>
-          <p:nvPr/>
-        </p:nvSpPr>
-        <p:spPr>
-          <a:xfrm>
-            <a:off x="868680" y="1417320"/>
-            <a:ext cx="6903720" cy="4480560"/>
+            <a:endParaRPr lang="en-US" sz="3400" dirty="0"/>
+          </a:p>
+        </p:txBody>
+      </p:sp>
+      <p:sp>
+        <p:nvSpPr>
+          <p:cNvPr id="9" name="Text 7"/>
+          <p:cNvSpPr/>
+          <p:nvPr/>
+        </p:nvSpPr>
+        <p:spPr>
+          <a:xfrm>
+            <a:off x="868680" y="1508760"/>
+            <a:ext cx="6812280" cy="3977640"/>
           </a:xfrm>
           <a:prstGeom prst="rect">
             <a:avLst/>
@@ -10552,7 +11403,7 @@
           <a:lstStyle/>
           <a:p>
             <a:r>
-              <a:rPr lang="en-US" sz="1460" dirty="0">
+              <a:rPr lang="en-US" sz="1850" dirty="0">
                 <a:solidFill>
                   <a:srgbClr val="17364A"/>
                 </a:solidFill>
@@ -10560,13 +11411,13 @@
                 <a:ea typeface="Aptos" pitchFamily="34" charset="-122"/>
                 <a:cs typeface="Aptos" pitchFamily="34" charset="-120"/>
               </a:rPr>
-              <a:t>Tool 4: AI Policy Landscape Scan (Worksheet) - Use AI Policy Landscape Scan to translate this lesson into a documented public health.</a:t>
-            </a:r>
-            <a:endParaRPr lang="en-US" sz="1460" dirty="0"/>
-          </a:p>
-          <a:p>
-            <a:r>
-              <a:rPr lang="en-US" sz="1460" dirty="0">
+              <a:t>Tool 4: AI Policy Landscape Scan (Worksheet) - Use AI Policy Landscape Scan to translate this lesson into a.</a:t>
+            </a:r>
+            <a:endParaRPr lang="en-US" sz="1850" dirty="0"/>
+          </a:p>
+          <a:p>
+            <a:r>
+              <a:rPr lang="en-US" sz="1850" dirty="0">
                 <a:solidFill>
                   <a:srgbClr val="17364A"/>
                 </a:solidFill>
@@ -10574,13 +11425,13 @@
                 <a:ea typeface="Aptos" pitchFamily="34" charset="-122"/>
                 <a:cs typeface="Aptos" pitchFamily="34" charset="-120"/>
               </a:rPr>
-              <a:t>Tool 5: AI Environmental and Resource Impact Review (Checklist) - Use this tool to complete or strengthen the practical exercise for.</a:t>
-            </a:r>
-            <a:endParaRPr lang="en-US" sz="1460" dirty="0"/>
-          </a:p>
-          <a:p>
-            <a:r>
-              <a:rPr lang="en-US" sz="1460" dirty="0">
+              <a:t>Tool 5: AI Environmental and Resource Impact Review (Checklist) - Use this tool to complete or strengthen.</a:t>
+            </a:r>
+            <a:endParaRPr lang="en-US" sz="1850" dirty="0"/>
+          </a:p>
+          <a:p>
+            <a:r>
+              <a:rPr lang="en-US" sz="1850" dirty="0">
                 <a:solidFill>
                   <a:srgbClr val="17364A"/>
                 </a:solidFill>
@@ -10588,13 +11439,13 @@
                 <a:ea typeface="Aptos" pitchFamily="34" charset="-122"/>
                 <a:cs typeface="Aptos" pitchFamily="34" charset="-120"/>
               </a:rPr>
-              <a:t>Tool 6: Human-Centered AI Decision Rule Checklist (Checklist) - Use Human-Centered AI Decision Rule Checklist to translate this.</a:t>
-            </a:r>
-            <a:endParaRPr lang="en-US" sz="1460" dirty="0"/>
-          </a:p>
-          <a:p>
-            <a:r>
-              <a:rPr lang="en-US" sz="1460" dirty="0">
+              <a:t>Tool 6: Human-Centered AI Decision Rule Checklist (Checklist) - Use Human-Centered AI Decision Rule.</a:t>
+            </a:r>
+            <a:endParaRPr lang="en-US" sz="1850" dirty="0"/>
+          </a:p>
+          <a:p>
+            <a:r>
+              <a:rPr lang="en-US" sz="1850" dirty="0">
                 <a:solidFill>
                   <a:srgbClr val="17364A"/>
                 </a:solidFill>
@@ -10602,29 +11453,15 @@
                 <a:ea typeface="Aptos" pitchFamily="34" charset="-122"/>
                 <a:cs typeface="Aptos" pitchFamily="34" charset="-120"/>
               </a:rPr>
-              <a:t>Tool 8: AI Project Charter (Planning) - Use AI Project Charter to translate this lesson into a documented public health AI planning,.</a:t>
-            </a:r>
-            <a:endParaRPr lang="en-US" sz="1460" dirty="0"/>
-          </a:p>
-          <a:p>
-            <a:r>
-              <a:rPr lang="en-US" sz="1460" dirty="0">
-                <a:solidFill>
-                  <a:srgbClr val="17364A"/>
-                </a:solidFill>
-                <a:latin typeface="Aptos" pitchFamily="34" charset="0"/>
-                <a:ea typeface="Aptos" pitchFamily="34" charset="-122"/>
-                <a:cs typeface="Aptos" pitchFamily="34" charset="-120"/>
-              </a:rPr>
-              <a:t>Tool 9: Data Quality Assessment Checklist (Checklist) - Use this tool to complete or strengthen the practical exercise for the module.</a:t>
-            </a:r>
-            <a:endParaRPr lang="en-US" sz="1460" dirty="0"/>
-          </a:p>
-        </p:txBody>
-      </p:sp>
-      <p:sp>
-        <p:nvSpPr>
-          <p:cNvPr id="9" name="Shape 7"/>
+              <a:t>Tool 8: AI Project Charter (Planning) - Use AI Project Charter to translate this lesson into a documented.</a:t>
+            </a:r>
+            <a:endParaRPr lang="en-US" sz="1850" dirty="0"/>
+          </a:p>
+        </p:txBody>
+      </p:sp>
+      <p:sp>
+        <p:nvSpPr>
+          <p:cNvPr id="10" name="Shape 8"/>
           <p:cNvSpPr/>
           <p:nvPr/>
         </p:nvSpPr>
@@ -10651,14 +11488,14 @@
       </p:sp>
       <p:sp>
         <p:nvSpPr>
-          <p:cNvPr id="10" name="Text 8"/>
+          <p:cNvPr id="11" name="Text 9"/>
           <p:cNvSpPr/>
           <p:nvPr/>
         </p:nvSpPr>
         <p:spPr>
           <a:xfrm>
             <a:off x="8211312" y="1563624"/>
-            <a:ext cx="2734056" cy="201168"/>
+            <a:ext cx="2734056" cy="256032"/>
           </a:xfrm>
           <a:prstGeom prst="rect">
             <a:avLst/>
@@ -10674,7 +11511,7 @@
               <a:buNone/>
             </a:pPr>
             <a:r>
-              <a:rPr lang="en-US" sz="950" b="1" dirty="0">
+              <a:rPr lang="en-US" sz="1300" b="1" dirty="0">
                 <a:solidFill>
                   <a:srgbClr val="0068B7"/>
                 </a:solidFill>
@@ -10684,20 +11521,20 @@
               </a:rPr>
               <a:t>Use the tools</a:t>
             </a:r>
-            <a:endParaRPr lang="en-US" sz="950" dirty="0"/>
-          </a:p>
-        </p:txBody>
-      </p:sp>
-      <p:sp>
-        <p:nvSpPr>
-          <p:cNvPr id="11" name="Text 9"/>
-          <p:cNvSpPr/>
-          <p:nvPr/>
-        </p:nvSpPr>
-        <p:spPr>
-          <a:xfrm>
-            <a:off x="8211312" y="1856232"/>
-            <a:ext cx="2734056" cy="1536192"/>
+            <a:endParaRPr lang="en-US" sz="1300" dirty="0"/>
+          </a:p>
+        </p:txBody>
+      </p:sp>
+      <p:sp>
+        <p:nvSpPr>
+          <p:cNvPr id="12" name="Text 10"/>
+          <p:cNvSpPr/>
+          <p:nvPr/>
+        </p:nvSpPr>
+        <p:spPr>
+          <a:xfrm>
+            <a:off x="8211312" y="1920240"/>
+            <a:ext cx="2734056" cy="1463040"/>
           </a:xfrm>
           <a:prstGeom prst="rect">
             <a:avLst/>
@@ -10715,7 +11552,7 @@
               <a:buNone/>
             </a:pPr>
             <a:r>
-              <a:rPr lang="en-US" sz="1250" dirty="0">
+              <a:rPr lang="en-US" sz="1550" dirty="0">
                 <a:solidFill>
                   <a:srgbClr val="17364A"/>
                 </a:solidFill>
@@ -10725,32 +11562,32 @@
               </a:rPr>
               <a:t>Use linked tools when your department needs a structured worksheet, template, checklist, review process, or documentation artifact.</a:t>
             </a:r>
-            <a:endParaRPr lang="en-US" sz="1250" dirty="0"/>
-          </a:p>
-        </p:txBody>
-      </p:sp>
-      <p:sp>
-        <p:nvSpPr>
-          <p:cNvPr id="12" name="Shape 10"/>
-          <p:cNvSpPr/>
-          <p:nvPr/>
-        </p:nvSpPr>
-        <p:spPr>
-          <a:xfrm>
-            <a:off x="8046720" y="3794760"/>
-            <a:ext cx="3063240" cy="1508760"/>
+            <a:endParaRPr lang="en-US" sz="1550" dirty="0"/>
+          </a:p>
+        </p:txBody>
+      </p:sp>
+      <p:sp>
+        <p:nvSpPr>
+          <p:cNvPr id="13" name="Shape 11"/>
+          <p:cNvSpPr/>
+          <p:nvPr/>
+        </p:nvSpPr>
+        <p:spPr>
+          <a:xfrm>
+            <a:off x="7818120" y="3977640"/>
+            <a:ext cx="972312" cy="749808"/>
           </a:xfrm>
           <a:prstGeom prst="roundRect">
             <a:avLst>
-              <a:gd name="adj" fmla="val 7273"/>
+              <a:gd name="adj" fmla="val 14634"/>
             </a:avLst>
           </a:prstGeom>
           <a:solidFill>
-            <a:srgbClr val="EEF8ED"/>
+            <a:srgbClr val="0068B7"/>
           </a:solidFill>
           <a:ln w="12700">
             <a:solidFill>
-              <a:srgbClr val="B9D7E6"/>
+              <a:srgbClr val="0068B7"/>
             </a:solidFill>
             <a:prstDash val="solid"/>
           </a:ln>
@@ -10758,81 +11595,256 @@
       </p:sp>
       <p:sp>
         <p:nvSpPr>
-          <p:cNvPr id="13" name="Text 11"/>
-          <p:cNvSpPr/>
-          <p:nvPr/>
-        </p:nvSpPr>
-        <p:spPr>
-          <a:xfrm>
-            <a:off x="8211312" y="3941064"/>
-            <a:ext cx="2734056" cy="201168"/>
-          </a:xfrm>
-          <a:prstGeom prst="rect">
-            <a:avLst/>
-          </a:prstGeom>
-          <a:noFill/>
-          <a:ln/>
-        </p:spPr>
-        <p:txBody>
-          <a:bodyPr wrap="square" lIns="0" tIns="0" rIns="0" bIns="0" rtlCol="0" anchor="ctr"/>
-          <a:lstStyle/>
-          <a:p>
-            <a:pPr indent="0" marL="0">
-              <a:buNone/>
-            </a:pPr>
-            <a:r>
-              <a:rPr lang="en-US" sz="950" b="1" dirty="0">
-                <a:solidFill>
-                  <a:srgbClr val="0068B7"/>
-                </a:solidFill>
-                <a:latin typeface="Aptos" pitchFamily="34" charset="0"/>
-                <a:ea typeface="Aptos" pitchFamily="34" charset="-122"/>
-                <a:cs typeface="Aptos" pitchFamily="34" charset="-120"/>
-              </a:rPr>
-              <a:t>Avoid duplication</a:t>
-            </a:r>
-            <a:endParaRPr lang="en-US" sz="950" dirty="0"/>
-          </a:p>
-        </p:txBody>
-      </p:sp>
-      <p:sp>
-        <p:nvSpPr>
           <p:cNvPr id="14" name="Text 12"/>
           <p:cNvSpPr/>
           <p:nvPr/>
         </p:nvSpPr>
         <p:spPr>
           <a:xfrm>
-            <a:off x="8211312" y="4233672"/>
-            <a:ext cx="2734056" cy="941832"/>
-          </a:xfrm>
-          <a:prstGeom prst="rect">
-            <a:avLst/>
-          </a:prstGeom>
-          <a:noFill/>
-          <a:ln/>
-        </p:spPr>
-        <p:txBody>
-          <a:bodyPr wrap="square" lIns="0" tIns="0" rIns="0" bIns="0" rtlCol="0" anchor="t">
+            <a:off x="7891272" y="4169664"/>
+            <a:ext cx="826008" cy="310896"/>
+          </a:xfrm>
+          <a:prstGeom prst="rect">
+            <a:avLst/>
+          </a:prstGeom>
+          <a:noFill/>
+          <a:ln/>
+        </p:spPr>
+        <p:txBody>
+          <a:bodyPr wrap="square" lIns="0" tIns="0" rIns="0" bIns="0" rtlCol="0" anchor="ctr">
             <a:normAutofit/>
           </a:bodyPr>
           <a:lstStyle/>
           <a:p>
-            <a:pPr indent="0" marL="0">
-              <a:buNone/>
-            </a:pPr>
-            <a:r>
-              <a:rPr lang="en-US" sz="1250" dirty="0">
-                <a:solidFill>
-                  <a:srgbClr val="17364A"/>
-                </a:solidFill>
-                <a:latin typeface="Aptos" pitchFamily="34" charset="0"/>
-                <a:ea typeface="Aptos" pitchFamily="34" charset="-122"/>
-                <a:cs typeface="Aptos" pitchFamily="34" charset="-120"/>
-              </a:rPr>
-              <a:t>If your department already has a strong equivalent tool, adapt or use the existing process instead of recreating it.</a:t>
-            </a:r>
-            <a:endParaRPr lang="en-US" sz="1250" dirty="0"/>
+            <a:pPr algn="ctr" indent="0" marL="0">
+              <a:buNone/>
+            </a:pPr>
+            <a:r>
+              <a:rPr lang="en-US" sz="1500" b="1" dirty="0">
+                <a:solidFill>
+                  <a:srgbClr val="FFFFFF"/>
+                </a:solidFill>
+                <a:latin typeface="Aptos" pitchFamily="34" charset="0"/>
+                <a:ea typeface="Aptos" pitchFamily="34" charset="-122"/>
+                <a:cs typeface="Aptos" pitchFamily="34" charset="-120"/>
+              </a:rPr>
+              <a:t>Concept</a:t>
+            </a:r>
+            <a:endParaRPr lang="en-US" sz="1500" dirty="0"/>
+          </a:p>
+        </p:txBody>
+      </p:sp>
+      <p:sp>
+        <p:nvSpPr>
+          <p:cNvPr id="15" name="Text 13"/>
+          <p:cNvSpPr/>
+          <p:nvPr/>
+        </p:nvSpPr>
+        <p:spPr>
+          <a:xfrm>
+            <a:off x="8817864" y="4187952"/>
+            <a:ext cx="201168" cy="256032"/>
+          </a:xfrm>
+          <a:prstGeom prst="rect">
+            <a:avLst/>
+          </a:prstGeom>
+          <a:noFill/>
+          <a:ln/>
+        </p:spPr>
+        <p:txBody>
+          <a:bodyPr wrap="square" lIns="0" tIns="0" rIns="0" bIns="0" rtlCol="0" anchor="ctr"/>
+          <a:lstStyle/>
+          <a:p>
+            <a:pPr algn="ctr" indent="0" marL="0">
+              <a:buNone/>
+            </a:pPr>
+            <a:r>
+              <a:rPr lang="en-US" sz="1800" b="1" dirty="0">
+                <a:solidFill>
+                  <a:srgbClr val="0068B7"/>
+                </a:solidFill>
+                <a:latin typeface="Aptos" pitchFamily="34" charset="0"/>
+                <a:ea typeface="Aptos" pitchFamily="34" charset="-122"/>
+                <a:cs typeface="Aptos" pitchFamily="34" charset="-120"/>
+              </a:rPr>
+              <a:t>â†’</a:t>
+            </a:r>
+            <a:endParaRPr lang="en-US" sz="1800" dirty="0"/>
+          </a:p>
+        </p:txBody>
+      </p:sp>
+      <p:sp>
+        <p:nvSpPr>
+          <p:cNvPr id="16" name="Shape 14"/>
+          <p:cNvSpPr/>
+          <p:nvPr/>
+        </p:nvSpPr>
+        <p:spPr>
+          <a:xfrm>
+            <a:off x="9046464" y="3977640"/>
+            <a:ext cx="972312" cy="749808"/>
+          </a:xfrm>
+          <a:prstGeom prst="roundRect">
+            <a:avLst>
+              <a:gd name="adj" fmla="val 14634"/>
+            </a:avLst>
+          </a:prstGeom>
+          <a:solidFill>
+            <a:srgbClr val="2F8A28"/>
+          </a:solidFill>
+          <a:ln w="12700">
+            <a:solidFill>
+              <a:srgbClr val="2F8A28"/>
+            </a:solidFill>
+            <a:prstDash val="solid"/>
+          </a:ln>
+        </p:spPr>
+      </p:sp>
+      <p:sp>
+        <p:nvSpPr>
+          <p:cNvPr id="17" name="Text 15"/>
+          <p:cNvSpPr/>
+          <p:nvPr/>
+        </p:nvSpPr>
+        <p:spPr>
+          <a:xfrm>
+            <a:off x="9119616" y="4169664"/>
+            <a:ext cx="826008" cy="310896"/>
+          </a:xfrm>
+          <a:prstGeom prst="rect">
+            <a:avLst/>
+          </a:prstGeom>
+          <a:noFill/>
+          <a:ln/>
+        </p:spPr>
+        <p:txBody>
+          <a:bodyPr wrap="square" lIns="0" tIns="0" rIns="0" bIns="0" rtlCol="0" anchor="ctr">
+            <a:normAutofit/>
+          </a:bodyPr>
+          <a:lstStyle/>
+          <a:p>
+            <a:pPr algn="ctr" indent="0" marL="0">
+              <a:buNone/>
+            </a:pPr>
+            <a:r>
+              <a:rPr lang="en-US" sz="1500" b="1" dirty="0">
+                <a:solidFill>
+                  <a:srgbClr val="FFFFFF"/>
+                </a:solidFill>
+                <a:latin typeface="Aptos" pitchFamily="34" charset="0"/>
+                <a:ea typeface="Aptos" pitchFamily="34" charset="-122"/>
+                <a:cs typeface="Aptos" pitchFamily="34" charset="-120"/>
+              </a:rPr>
+              <a:t>Tool</a:t>
+            </a:r>
+            <a:endParaRPr lang="en-US" sz="1500" dirty="0"/>
+          </a:p>
+        </p:txBody>
+      </p:sp>
+      <p:sp>
+        <p:nvSpPr>
+          <p:cNvPr id="18" name="Text 16"/>
+          <p:cNvSpPr/>
+          <p:nvPr/>
+        </p:nvSpPr>
+        <p:spPr>
+          <a:xfrm>
+            <a:off x="10046208" y="4187952"/>
+            <a:ext cx="201168" cy="256032"/>
+          </a:xfrm>
+          <a:prstGeom prst="rect">
+            <a:avLst/>
+          </a:prstGeom>
+          <a:noFill/>
+          <a:ln/>
+        </p:spPr>
+        <p:txBody>
+          <a:bodyPr wrap="square" lIns="0" tIns="0" rIns="0" bIns="0" rtlCol="0" anchor="ctr"/>
+          <a:lstStyle/>
+          <a:p>
+            <a:pPr algn="ctr" indent="0" marL="0">
+              <a:buNone/>
+            </a:pPr>
+            <a:r>
+              <a:rPr lang="en-US" sz="1800" b="1" dirty="0">
+                <a:solidFill>
+                  <a:srgbClr val="0068B7"/>
+                </a:solidFill>
+                <a:latin typeface="Aptos" pitchFamily="34" charset="0"/>
+                <a:ea typeface="Aptos" pitchFamily="34" charset="-122"/>
+                <a:cs typeface="Aptos" pitchFamily="34" charset="-120"/>
+              </a:rPr>
+              <a:t>â†’</a:t>
+            </a:r>
+            <a:endParaRPr lang="en-US" sz="1800" dirty="0"/>
+          </a:p>
+        </p:txBody>
+      </p:sp>
+      <p:sp>
+        <p:nvSpPr>
+          <p:cNvPr id="19" name="Shape 17"/>
+          <p:cNvSpPr/>
+          <p:nvPr/>
+        </p:nvSpPr>
+        <p:spPr>
+          <a:xfrm>
+            <a:off x="10274808" y="3977640"/>
+            <a:ext cx="972312" cy="749808"/>
+          </a:xfrm>
+          <a:prstGeom prst="roundRect">
+            <a:avLst>
+              <a:gd name="adj" fmla="val 14634"/>
+            </a:avLst>
+          </a:prstGeom>
+          <a:solidFill>
+            <a:srgbClr val="D69A2D"/>
+          </a:solidFill>
+          <a:ln w="12700">
+            <a:solidFill>
+              <a:srgbClr val="D69A2D"/>
+            </a:solidFill>
+            <a:prstDash val="solid"/>
+          </a:ln>
+        </p:spPr>
+      </p:sp>
+      <p:sp>
+        <p:nvSpPr>
+          <p:cNvPr id="20" name="Text 18"/>
+          <p:cNvSpPr/>
+          <p:nvPr/>
+        </p:nvSpPr>
+        <p:spPr>
+          <a:xfrm>
+            <a:off x="10347960" y="4169664"/>
+            <a:ext cx="826008" cy="310896"/>
+          </a:xfrm>
+          <a:prstGeom prst="rect">
+            <a:avLst/>
+          </a:prstGeom>
+          <a:noFill/>
+          <a:ln/>
+        </p:spPr>
+        <p:txBody>
+          <a:bodyPr wrap="square" lIns="0" tIns="0" rIns="0" bIns="0" rtlCol="0" anchor="ctr">
+            <a:normAutofit/>
+          </a:bodyPr>
+          <a:lstStyle/>
+          <a:p>
+            <a:pPr algn="ctr" indent="0" marL="0">
+              <a:buNone/>
+            </a:pPr>
+            <a:r>
+              <a:rPr lang="en-US" sz="1500" b="1" dirty="0">
+                <a:solidFill>
+                  <a:srgbClr val="FFFFFF"/>
+                </a:solidFill>
+                <a:latin typeface="Aptos" pitchFamily="34" charset="0"/>
+                <a:ea typeface="Aptos" pitchFamily="34" charset="-122"/>
+                <a:cs typeface="Aptos" pitchFamily="34" charset="-120"/>
+              </a:rPr>
+              <a:t>Artifact</a:t>
+            </a:r>
+            <a:endParaRPr lang="en-US" sz="1500" dirty="0"/>
           </a:p>
         </p:txBody>
       </p:sp>
@@ -11029,7 +12041,7 @@
                 <a:ea typeface="Aptos" pitchFamily="34" charset="-122"/>
                 <a:cs typeface="Aptos" pitchFamily="34" charset="-120"/>
               </a:rPr>
-              <a:t>© Paula Soper</a:t>
+              <a:t>Â© Paula Soper</a:t>
             </a:r>
             <a:endParaRPr lang="en-US" sz="800" dirty="0"/>
           </a:p>
@@ -11037,7 +12049,46 @@
       </p:sp>
       <p:sp>
         <p:nvSpPr>
-          <p:cNvPr id="7" name="Shape 5"/>
+          <p:cNvPr id="7" name="Text 5"/>
+          <p:cNvSpPr/>
+          <p:nvPr/>
+        </p:nvSpPr>
+        <p:spPr>
+          <a:xfrm>
+            <a:off x="11137392" y="6510528"/>
+            <a:ext cx="411480" cy="201168"/>
+          </a:xfrm>
+          <a:prstGeom prst="rect">
+            <a:avLst/>
+          </a:prstGeom>
+          <a:noFill/>
+          <a:ln/>
+        </p:spPr>
+        <p:txBody>
+          <a:bodyPr wrap="square" lIns="0" tIns="0" rIns="0" bIns="0" rtlCol="0" anchor="ctr"/>
+          <a:lstStyle/>
+          <a:p>
+            <a:pPr algn="r" indent="0" marL="0">
+              <a:buNone/>
+            </a:pPr>
+            <a:r>
+              <a:rPr lang="en-US" sz="900" dirty="0">
+                <a:solidFill>
+                  <a:srgbClr val="5F7181"/>
+                </a:solidFill>
+                <a:latin typeface="Aptos" pitchFamily="34" charset="0"/>
+                <a:ea typeface="Aptos" pitchFamily="34" charset="-122"/>
+                <a:cs typeface="Aptos" pitchFamily="34" charset="-120"/>
+              </a:rPr>
+              <a:t>5</a:t>
+            </a:r>
+            <a:endParaRPr lang="en-US" sz="900" dirty="0"/>
+          </a:p>
+        </p:txBody>
+      </p:sp>
+      <p:sp>
+        <p:nvSpPr>
+          <p:cNvPr id="8" name="Shape 6"/>
           <p:cNvSpPr/>
           <p:nvPr/>
         </p:nvSpPr>
@@ -11062,7 +12113,7 @@
       </p:sp>
       <p:sp>
         <p:nvSpPr>
-          <p:cNvPr id="8" name="Text 6"/>
+          <p:cNvPr id="9" name="Text 7"/>
           <p:cNvSpPr/>
           <p:nvPr/>
         </p:nvSpPr>
@@ -11101,14 +12152,14 @@
       </p:sp>
       <p:sp>
         <p:nvSpPr>
-          <p:cNvPr id="9" name="Text 7"/>
+          <p:cNvPr id="10" name="Text 8"/>
           <p:cNvSpPr/>
           <p:nvPr/>
         </p:nvSpPr>
         <p:spPr>
           <a:xfrm>
             <a:off x="640080" y="621792"/>
-            <a:ext cx="10881360" cy="566928"/>
+            <a:ext cx="10881360" cy="713232"/>
           </a:xfrm>
           <a:prstGeom prst="rect">
             <a:avLst/>
@@ -11126,7 +12177,7 @@
               <a:buNone/>
             </a:pPr>
             <a:r>
-              <a:rPr lang="en-US" sz="2700" b="1" dirty="0">
+              <a:rPr lang="en-US" sz="3400" b="1" dirty="0">
                 <a:solidFill>
                   <a:srgbClr val="003A63"/>
                 </a:solidFill>
@@ -11136,20 +12187,20 @@
               </a:rPr>
               <a:t>Learning Objectives</a:t>
             </a:r>
-            <a:endParaRPr lang="en-US" sz="2700" dirty="0"/>
-          </a:p>
-        </p:txBody>
-      </p:sp>
-      <p:sp>
-        <p:nvSpPr>
-          <p:cNvPr id="10" name="Text 8"/>
-          <p:cNvSpPr/>
-          <p:nvPr/>
-        </p:nvSpPr>
-        <p:spPr>
-          <a:xfrm>
-            <a:off x="868680" y="1417320"/>
-            <a:ext cx="6675120" cy="4434840"/>
+            <a:endParaRPr lang="en-US" sz="3400" dirty="0"/>
+          </a:p>
+        </p:txBody>
+      </p:sp>
+      <p:sp>
+        <p:nvSpPr>
+          <p:cNvPr id="11" name="Text 9"/>
+          <p:cNvSpPr/>
+          <p:nvPr/>
+        </p:nvSpPr>
+        <p:spPr>
+          <a:xfrm>
+            <a:off x="868680" y="1508760"/>
+            <a:ext cx="6537960" cy="4160520"/>
           </a:xfrm>
           <a:prstGeom prst="rect">
             <a:avLst/>
@@ -11164,7 +12215,7 @@
           <a:lstStyle/>
           <a:p>
             <a:r>
-              <a:rPr lang="en-US" sz="1700" dirty="0">
+              <a:rPr lang="en-US" sz="2100" dirty="0">
                 <a:solidFill>
                   <a:srgbClr val="17364A"/>
                 </a:solidFill>
@@ -11174,11 +12225,11 @@
               </a:rPr>
               <a:t>Explain the purpose of measuring ai value, performance, and operational impact in public health AI work.</a:t>
             </a:r>
-            <a:endParaRPr lang="en-US" sz="1700" dirty="0"/>
-          </a:p>
-          <a:p>
-            <a:r>
-              <a:rPr lang="en-US" sz="1700" dirty="0">
+            <a:endParaRPr lang="en-US" sz="2100" dirty="0"/>
+          </a:p>
+          <a:p>
+            <a:r>
+              <a:rPr lang="en-US" sz="2100" dirty="0">
                 <a:solidFill>
                   <a:srgbClr val="17364A"/>
                 </a:solidFill>
@@ -11186,13 +12237,13 @@
                 <a:ea typeface="Aptos" pitchFamily="34" charset="-122"/>
                 <a:cs typeface="Aptos" pitchFamily="34" charset="-120"/>
               </a:rPr>
-              <a:t>Identify the technical, operational, privacy, security, equity, and governance issues associated with the topic.</a:t>
-            </a:r>
-            <a:endParaRPr lang="en-US" sz="1700" dirty="0"/>
-          </a:p>
-          <a:p>
-            <a:r>
-              <a:rPr lang="en-US" sz="1700" dirty="0">
+              <a:t>Identify the technical, operational, privacy, security, equity, and governance issues associated with.</a:t>
+            </a:r>
+            <a:endParaRPr lang="en-US" sz="2100" dirty="0"/>
+          </a:p>
+          <a:p>
+            <a:r>
+              <a:rPr lang="en-US" sz="2100" dirty="0">
                 <a:solidFill>
                   <a:srgbClr val="17364A"/>
                 </a:solidFill>
@@ -11202,27 +12253,13 @@
               </a:rPr>
               <a:t>Apply the topic to a real or realistic public health workflow, system, or implementation scenario.</a:t>
             </a:r>
-            <a:endParaRPr lang="en-US" sz="1700" dirty="0"/>
-          </a:p>
-          <a:p>
-            <a:r>
-              <a:rPr lang="en-US" sz="1700" dirty="0">
-                <a:solidFill>
-                  <a:srgbClr val="17364A"/>
-                </a:solidFill>
-                <a:latin typeface="Aptos" pitchFamily="34" charset="0"/>
-                <a:ea typeface="Aptos" pitchFamily="34" charset="-122"/>
-                <a:cs typeface="Aptos" pitchFamily="34" charset="-120"/>
-              </a:rPr>
-              <a:t>Recognize common failure modes that can affect safety, accuracy, trust, workflow fit, or sustainability.</a:t>
-            </a:r>
-            <a:endParaRPr lang="en-US" sz="1700" dirty="0"/>
-          </a:p>
-        </p:txBody>
-      </p:sp>
-      <p:sp>
-        <p:nvSpPr>
-          <p:cNvPr id="11" name="Shape 9"/>
+            <a:endParaRPr lang="en-US" sz="2100" dirty="0"/>
+          </a:p>
+        </p:txBody>
+      </p:sp>
+      <p:sp>
+        <p:nvSpPr>
+          <p:cNvPr id="12" name="Shape 10"/>
           <p:cNvSpPr/>
           <p:nvPr/>
         </p:nvSpPr>
@@ -11249,14 +12286,14 @@
       </p:sp>
       <p:sp>
         <p:nvSpPr>
-          <p:cNvPr id="12" name="Text 10"/>
+          <p:cNvPr id="13" name="Text 11"/>
           <p:cNvSpPr/>
           <p:nvPr/>
         </p:nvSpPr>
         <p:spPr>
           <a:xfrm>
             <a:off x="8074152" y="1563624"/>
-            <a:ext cx="2825496" cy="201168"/>
+            <a:ext cx="2825496" cy="256032"/>
           </a:xfrm>
           <a:prstGeom prst="rect">
             <a:avLst/>
@@ -11272,7 +12309,7 @@
               <a:buNone/>
             </a:pPr>
             <a:r>
-              <a:rPr lang="en-US" sz="950" b="1" dirty="0">
+              <a:rPr lang="en-US" sz="1300" b="1" dirty="0">
                 <a:solidFill>
                   <a:srgbClr val="0068B7"/>
                 </a:solidFill>
@@ -11282,20 +12319,20 @@
               </a:rPr>
               <a:t>Key idea</a:t>
             </a:r>
-            <a:endParaRPr lang="en-US" sz="950" dirty="0"/>
-          </a:p>
-        </p:txBody>
-      </p:sp>
-      <p:sp>
-        <p:nvSpPr>
-          <p:cNvPr id="13" name="Text 11"/>
-          <p:cNvSpPr/>
-          <p:nvPr/>
-        </p:nvSpPr>
-        <p:spPr>
-          <a:xfrm>
-            <a:off x="8074152" y="1856232"/>
-            <a:ext cx="2825496" cy="1261872"/>
+            <a:endParaRPr lang="en-US" sz="1300" dirty="0"/>
+          </a:p>
+        </p:txBody>
+      </p:sp>
+      <p:sp>
+        <p:nvSpPr>
+          <p:cNvPr id="14" name="Text 12"/>
+          <p:cNvSpPr/>
+          <p:nvPr/>
+        </p:nvSpPr>
+        <p:spPr>
+          <a:xfrm>
+            <a:off x="8074152" y="1920240"/>
+            <a:ext cx="2825496" cy="1188720"/>
           </a:xfrm>
           <a:prstGeom prst="rect">
             <a:avLst/>
@@ -11313,7 +12350,7 @@
               <a:buNone/>
             </a:pPr>
             <a:r>
-              <a:rPr lang="en-US" sz="1250" dirty="0">
+              <a:rPr lang="en-US" sz="1550" dirty="0">
                 <a:solidFill>
                   <a:srgbClr val="17364A"/>
                 </a:solidFill>
@@ -11323,13 +12360,13 @@
               </a:rPr>
               <a:t>Explain the purpose of measuring ai value, performance, and operational impact in public health AI work.</a:t>
             </a:r>
-            <a:endParaRPr lang="en-US" sz="1250" dirty="0"/>
-          </a:p>
-        </p:txBody>
-      </p:sp>
-      <p:sp>
-        <p:nvSpPr>
-          <p:cNvPr id="14" name="Shape 12"/>
+            <a:endParaRPr lang="en-US" sz="1550" dirty="0"/>
+          </a:p>
+        </p:txBody>
+      </p:sp>
+      <p:sp>
+        <p:nvSpPr>
+          <p:cNvPr id="15" name="Shape 13"/>
           <p:cNvSpPr/>
           <p:nvPr/>
         </p:nvSpPr>
@@ -11356,14 +12393,14 @@
       </p:sp>
       <p:sp>
         <p:nvSpPr>
-          <p:cNvPr id="15" name="Text 13"/>
+          <p:cNvPr id="16" name="Text 14"/>
           <p:cNvSpPr/>
           <p:nvPr/>
         </p:nvSpPr>
         <p:spPr>
           <a:xfrm>
             <a:off x="8074152" y="3666744"/>
-            <a:ext cx="2825496" cy="201168"/>
+            <a:ext cx="2825496" cy="256032"/>
           </a:xfrm>
           <a:prstGeom prst="rect">
             <a:avLst/>
@@ -11379,7 +12416,7 @@
               <a:buNone/>
             </a:pPr>
             <a:r>
-              <a:rPr lang="en-US" sz="950" b="1" dirty="0">
+              <a:rPr lang="en-US" sz="1300" b="1" dirty="0">
                 <a:solidFill>
                   <a:srgbClr val="0068B7"/>
                 </a:solidFill>
@@ -11389,20 +12426,20 @@
               </a:rPr>
               <a:t>Use this for</a:t>
             </a:r>
-            <a:endParaRPr lang="en-US" sz="950" dirty="0"/>
-          </a:p>
-        </p:txBody>
-      </p:sp>
-      <p:sp>
-        <p:nvSpPr>
-          <p:cNvPr id="16" name="Text 14"/>
-          <p:cNvSpPr/>
-          <p:nvPr/>
-        </p:nvSpPr>
-        <p:spPr>
-          <a:xfrm>
-            <a:off x="8074152" y="3959352"/>
-            <a:ext cx="2825496" cy="1170432"/>
+            <a:endParaRPr lang="en-US" sz="1300" dirty="0"/>
+          </a:p>
+        </p:txBody>
+      </p:sp>
+      <p:sp>
+        <p:nvSpPr>
+          <p:cNvPr id="17" name="Text 15"/>
+          <p:cNvSpPr/>
+          <p:nvPr/>
+        </p:nvSpPr>
+        <p:spPr>
+          <a:xfrm>
+            <a:off x="8074152" y="4023360"/>
+            <a:ext cx="2825496" cy="1097280"/>
           </a:xfrm>
           <a:prstGeom prst="rect">
             <a:avLst/>
@@ -11420,7 +12457,7 @@
               <a:buNone/>
             </a:pPr>
             <a:r>
-              <a:rPr lang="en-US" sz="1250" dirty="0">
+              <a:rPr lang="en-US" sz="1550" dirty="0">
                 <a:solidFill>
                   <a:srgbClr val="17364A"/>
                 </a:solidFill>
@@ -11430,7 +12467,7 @@
               </a:rPr>
               <a:t>Connect the concept to public health decisions, safeguards, documentation, or implementation work.</a:t>
             </a:r>
-            <a:endParaRPr lang="en-US" sz="1250" dirty="0"/>
+            <a:endParaRPr lang="en-US" sz="1550" dirty="0"/>
           </a:p>
         </p:txBody>
       </p:sp>
@@ -11627,7 +12664,7 @@
                 <a:ea typeface="Aptos" pitchFamily="34" charset="-122"/>
                 <a:cs typeface="Aptos" pitchFamily="34" charset="-120"/>
               </a:rPr>
-              <a:t>© Paula Soper</a:t>
+              <a:t>Â© Paula Soper</a:t>
             </a:r>
             <a:endParaRPr lang="en-US" sz="800" dirty="0"/>
           </a:p>
@@ -11641,8 +12678,47 @@
         </p:nvSpPr>
         <p:spPr>
           <a:xfrm>
+            <a:off x="11137392" y="6510528"/>
+            <a:ext cx="411480" cy="201168"/>
+          </a:xfrm>
+          <a:prstGeom prst="rect">
+            <a:avLst/>
+          </a:prstGeom>
+          <a:noFill/>
+          <a:ln/>
+        </p:spPr>
+        <p:txBody>
+          <a:bodyPr wrap="square" lIns="0" tIns="0" rIns="0" bIns="0" rtlCol="0" anchor="ctr"/>
+          <a:lstStyle/>
+          <a:p>
+            <a:pPr algn="r" indent="0" marL="0">
+              <a:buNone/>
+            </a:pPr>
+            <a:r>
+              <a:rPr lang="en-US" sz="900" dirty="0">
+                <a:solidFill>
+                  <a:srgbClr val="5F7181"/>
+                </a:solidFill>
+                <a:latin typeface="Aptos" pitchFamily="34" charset="0"/>
+                <a:ea typeface="Aptos" pitchFamily="34" charset="-122"/>
+                <a:cs typeface="Aptos" pitchFamily="34" charset="-120"/>
+              </a:rPr>
+              <a:t>6</a:t>
+            </a:r>
+            <a:endParaRPr lang="en-US" sz="900" dirty="0"/>
+          </a:p>
+        </p:txBody>
+      </p:sp>
+      <p:sp>
+        <p:nvSpPr>
+          <p:cNvPr id="8" name="Text 6"/>
+          <p:cNvSpPr/>
+          <p:nvPr/>
+        </p:nvSpPr>
+        <p:spPr>
+          <a:xfrm>
             <a:off x="640080" y="658368"/>
-            <a:ext cx="10881360" cy="566928"/>
+            <a:ext cx="10881360" cy="713232"/>
           </a:xfrm>
           <a:prstGeom prst="rect">
             <a:avLst/>
@@ -11660,7 +12736,7 @@
               <a:buNone/>
             </a:pPr>
             <a:r>
-              <a:rPr lang="en-US" sz="2700" b="1" dirty="0">
+              <a:rPr lang="en-US" sz="3400" b="1" dirty="0">
                 <a:solidFill>
                   <a:srgbClr val="003A63"/>
                 </a:solidFill>
@@ -11670,20 +12746,20 @@
               </a:rPr>
               <a:t>Learning Objectives Continued</a:t>
             </a:r>
-            <a:endParaRPr lang="en-US" sz="2700" dirty="0"/>
-          </a:p>
-        </p:txBody>
-      </p:sp>
-      <p:sp>
-        <p:nvSpPr>
-          <p:cNvPr id="8" name="Text 6"/>
-          <p:cNvSpPr/>
-          <p:nvPr/>
-        </p:nvSpPr>
-        <p:spPr>
-          <a:xfrm>
-            <a:off x="868680" y="1417320"/>
-            <a:ext cx="6675120" cy="4434840"/>
+            <a:endParaRPr lang="en-US" sz="3400" dirty="0"/>
+          </a:p>
+        </p:txBody>
+      </p:sp>
+      <p:sp>
+        <p:nvSpPr>
+          <p:cNvPr id="9" name="Text 7"/>
+          <p:cNvSpPr/>
+          <p:nvPr/>
+        </p:nvSpPr>
+        <p:spPr>
+          <a:xfrm>
+            <a:off x="868680" y="1508760"/>
+            <a:ext cx="6537960" cy="4160520"/>
           </a:xfrm>
           <a:prstGeom prst="rect">
             <a:avLst/>
@@ -11698,7 +12774,7 @@
           <a:lstStyle/>
           <a:p>
             <a:r>
-              <a:rPr lang="en-US" sz="1700" dirty="0">
+              <a:rPr lang="en-US" sz="2100" dirty="0">
                 <a:solidFill>
                   <a:srgbClr val="17364A"/>
                 </a:solidFill>
@@ -11706,15 +12782,15 @@
                 <a:ea typeface="Aptos" pitchFamily="34" charset="-122"/>
                 <a:cs typeface="Aptos" pitchFamily="34" charset="-120"/>
               </a:rPr>
-              <a:t>Produce a AI value and impact measurement plan that can support readiness assessment, governance review, procurement,.</a:t>
-            </a:r>
-            <a:endParaRPr lang="en-US" sz="1700" dirty="0"/>
-          </a:p>
-        </p:txBody>
-      </p:sp>
-      <p:sp>
-        <p:nvSpPr>
-          <p:cNvPr id="9" name="Shape 7"/>
+              <a:t>Produce a AI value and impact measurement plan that can support readiness assessment, governance.</a:t>
+            </a:r>
+            <a:endParaRPr lang="en-US" sz="2100" dirty="0"/>
+          </a:p>
+        </p:txBody>
+      </p:sp>
+      <p:sp>
+        <p:nvSpPr>
+          <p:cNvPr id="10" name="Shape 8"/>
           <p:cNvSpPr/>
           <p:nvPr/>
         </p:nvSpPr>
@@ -11741,14 +12817,14 @@
       </p:sp>
       <p:sp>
         <p:nvSpPr>
-          <p:cNvPr id="10" name="Text 8"/>
+          <p:cNvPr id="11" name="Text 9"/>
           <p:cNvSpPr/>
           <p:nvPr/>
         </p:nvSpPr>
         <p:spPr>
           <a:xfrm>
             <a:off x="8074152" y="1563624"/>
-            <a:ext cx="2825496" cy="201168"/>
+            <a:ext cx="2825496" cy="256032"/>
           </a:xfrm>
           <a:prstGeom prst="rect">
             <a:avLst/>
@@ -11764,7 +12840,7 @@
               <a:buNone/>
             </a:pPr>
             <a:r>
-              <a:rPr lang="en-US" sz="950" b="1" dirty="0">
+              <a:rPr lang="en-US" sz="1300" b="1" dirty="0">
                 <a:solidFill>
                   <a:srgbClr val="0068B7"/>
                 </a:solidFill>
@@ -11774,20 +12850,20 @@
               </a:rPr>
               <a:t>Key idea</a:t>
             </a:r>
-            <a:endParaRPr lang="en-US" sz="950" dirty="0"/>
-          </a:p>
-        </p:txBody>
-      </p:sp>
-      <p:sp>
-        <p:nvSpPr>
-          <p:cNvPr id="11" name="Text 9"/>
-          <p:cNvSpPr/>
-          <p:nvPr/>
-        </p:nvSpPr>
-        <p:spPr>
-          <a:xfrm>
-            <a:off x="8074152" y="1856232"/>
-            <a:ext cx="2825496" cy="1261872"/>
+            <a:endParaRPr lang="en-US" sz="1300" dirty="0"/>
+          </a:p>
+        </p:txBody>
+      </p:sp>
+      <p:sp>
+        <p:nvSpPr>
+          <p:cNvPr id="12" name="Text 10"/>
+          <p:cNvSpPr/>
+          <p:nvPr/>
+        </p:nvSpPr>
+        <p:spPr>
+          <a:xfrm>
+            <a:off x="8074152" y="1920240"/>
+            <a:ext cx="2825496" cy="1188720"/>
           </a:xfrm>
           <a:prstGeom prst="rect">
             <a:avLst/>
@@ -11805,7 +12881,7 @@
               <a:buNone/>
             </a:pPr>
             <a:r>
-              <a:rPr lang="en-US" sz="1250" dirty="0">
+              <a:rPr lang="en-US" sz="1550" dirty="0">
                 <a:solidFill>
                   <a:srgbClr val="17364A"/>
                 </a:solidFill>
@@ -11813,15 +12889,15 @@
                 <a:ea typeface="Aptos" pitchFamily="34" charset="-122"/>
                 <a:cs typeface="Aptos" pitchFamily="34" charset="-120"/>
               </a:rPr>
-              <a:t>Produce a AI value and impact measurement plan that can support readiness assessment, governance review, procurement,.</a:t>
-            </a:r>
-            <a:endParaRPr lang="en-US" sz="1250" dirty="0"/>
-          </a:p>
-        </p:txBody>
-      </p:sp>
-      <p:sp>
-        <p:nvSpPr>
-          <p:cNvPr id="12" name="Shape 10"/>
+              <a:t>Produce a AI value and impact measurement plan that can support readiness assessment, governance.</a:t>
+            </a:r>
+            <a:endParaRPr lang="en-US" sz="1550" dirty="0"/>
+          </a:p>
+        </p:txBody>
+      </p:sp>
+      <p:sp>
+        <p:nvSpPr>
+          <p:cNvPr id="13" name="Shape 11"/>
           <p:cNvSpPr/>
           <p:nvPr/>
         </p:nvSpPr>
@@ -11848,14 +12924,14 @@
       </p:sp>
       <p:sp>
         <p:nvSpPr>
-          <p:cNvPr id="13" name="Text 11"/>
+          <p:cNvPr id="14" name="Text 12"/>
           <p:cNvSpPr/>
           <p:nvPr/>
         </p:nvSpPr>
         <p:spPr>
           <a:xfrm>
             <a:off x="8074152" y="3666744"/>
-            <a:ext cx="2825496" cy="201168"/>
+            <a:ext cx="2825496" cy="256032"/>
           </a:xfrm>
           <a:prstGeom prst="rect">
             <a:avLst/>
@@ -11871,7 +12947,7 @@
               <a:buNone/>
             </a:pPr>
             <a:r>
-              <a:rPr lang="en-US" sz="950" b="1" dirty="0">
+              <a:rPr lang="en-US" sz="1300" b="1" dirty="0">
                 <a:solidFill>
                   <a:srgbClr val="0068B7"/>
                 </a:solidFill>
@@ -11881,20 +12957,20 @@
               </a:rPr>
               <a:t>Use this for</a:t>
             </a:r>
-            <a:endParaRPr lang="en-US" sz="950" dirty="0"/>
-          </a:p>
-        </p:txBody>
-      </p:sp>
-      <p:sp>
-        <p:nvSpPr>
-          <p:cNvPr id="14" name="Text 12"/>
-          <p:cNvSpPr/>
-          <p:nvPr/>
-        </p:nvSpPr>
-        <p:spPr>
-          <a:xfrm>
-            <a:off x="8074152" y="3959352"/>
-            <a:ext cx="2825496" cy="1170432"/>
+            <a:endParaRPr lang="en-US" sz="1300" dirty="0"/>
+          </a:p>
+        </p:txBody>
+      </p:sp>
+      <p:sp>
+        <p:nvSpPr>
+          <p:cNvPr id="15" name="Text 13"/>
+          <p:cNvSpPr/>
+          <p:nvPr/>
+        </p:nvSpPr>
+        <p:spPr>
+          <a:xfrm>
+            <a:off x="8074152" y="4023360"/>
+            <a:ext cx="2825496" cy="1097280"/>
           </a:xfrm>
           <a:prstGeom prst="rect">
             <a:avLst/>
@@ -11912,7 +12988,7 @@
               <a:buNone/>
             </a:pPr>
             <a:r>
-              <a:rPr lang="en-US" sz="1250" dirty="0">
+              <a:rPr lang="en-US" sz="1550" dirty="0">
                 <a:solidFill>
                   <a:srgbClr val="17364A"/>
                 </a:solidFill>
@@ -11922,7 +12998,7 @@
               </a:rPr>
               <a:t>Connect the concept to public health decisions, safeguards, documentation, or implementation work.</a:t>
             </a:r>
-            <a:endParaRPr lang="en-US" sz="1250" dirty="0"/>
+            <a:endParaRPr lang="en-US" sz="1550" dirty="0"/>
           </a:p>
         </p:txBody>
       </p:sp>
@@ -12119,7 +13195,7 @@
                 <a:ea typeface="Aptos" pitchFamily="34" charset="-122"/>
                 <a:cs typeface="Aptos" pitchFamily="34" charset="-120"/>
               </a:rPr>
-              <a:t>© Paula Soper</a:t>
+              <a:t>Â© Paula Soper</a:t>
             </a:r>
             <a:endParaRPr lang="en-US" sz="800" dirty="0"/>
           </a:p>
@@ -12127,7 +13203,46 @@
       </p:sp>
       <p:sp>
         <p:nvSpPr>
-          <p:cNvPr id="7" name="Shape 5"/>
+          <p:cNvPr id="7" name="Text 5"/>
+          <p:cNvSpPr/>
+          <p:nvPr/>
+        </p:nvSpPr>
+        <p:spPr>
+          <a:xfrm>
+            <a:off x="11137392" y="6510528"/>
+            <a:ext cx="411480" cy="201168"/>
+          </a:xfrm>
+          <a:prstGeom prst="rect">
+            <a:avLst/>
+          </a:prstGeom>
+          <a:noFill/>
+          <a:ln/>
+        </p:spPr>
+        <p:txBody>
+          <a:bodyPr wrap="square" lIns="0" tIns="0" rIns="0" bIns="0" rtlCol="0" anchor="ctr"/>
+          <a:lstStyle/>
+          <a:p>
+            <a:pPr algn="r" indent="0" marL="0">
+              <a:buNone/>
+            </a:pPr>
+            <a:r>
+              <a:rPr lang="en-US" sz="900" dirty="0">
+                <a:solidFill>
+                  <a:srgbClr val="5F7181"/>
+                </a:solidFill>
+                <a:latin typeface="Aptos" pitchFamily="34" charset="0"/>
+                <a:ea typeface="Aptos" pitchFamily="34" charset="-122"/>
+                <a:cs typeface="Aptos" pitchFamily="34" charset="-120"/>
+              </a:rPr>
+              <a:t>7</a:t>
+            </a:r>
+            <a:endParaRPr lang="en-US" sz="900" dirty="0"/>
+          </a:p>
+        </p:txBody>
+      </p:sp>
+      <p:sp>
+        <p:nvSpPr>
+          <p:cNvPr id="8" name="Shape 6"/>
           <p:cNvSpPr/>
           <p:nvPr/>
         </p:nvSpPr>
@@ -12152,7 +13267,7 @@
       </p:sp>
       <p:sp>
         <p:nvSpPr>
-          <p:cNvPr id="8" name="Text 6"/>
+          <p:cNvPr id="9" name="Text 7"/>
           <p:cNvSpPr/>
           <p:nvPr/>
         </p:nvSpPr>
@@ -12191,14 +13306,14 @@
       </p:sp>
       <p:sp>
         <p:nvSpPr>
-          <p:cNvPr id="9" name="Text 7"/>
+          <p:cNvPr id="10" name="Text 8"/>
           <p:cNvSpPr/>
           <p:nvPr/>
         </p:nvSpPr>
         <p:spPr>
           <a:xfrm>
             <a:off x="640080" y="621792"/>
-            <a:ext cx="10881360" cy="566928"/>
+            <a:ext cx="10881360" cy="713232"/>
           </a:xfrm>
           <a:prstGeom prst="rect">
             <a:avLst/>
@@ -12216,7 +13331,7 @@
               <a:buNone/>
             </a:pPr>
             <a:r>
-              <a:rPr lang="en-US" sz="2700" b="1" dirty="0">
+              <a:rPr lang="en-US" sz="3400" b="1" dirty="0">
                 <a:solidFill>
                   <a:srgbClr val="003A63"/>
                 </a:solidFill>
@@ -12226,20 +13341,20 @@
               </a:rPr>
               <a:t>Module Overview</a:t>
             </a:r>
-            <a:endParaRPr lang="en-US" sz="2700" dirty="0"/>
-          </a:p>
-        </p:txBody>
-      </p:sp>
-      <p:sp>
-        <p:nvSpPr>
-          <p:cNvPr id="10" name="Text 8"/>
-          <p:cNvSpPr/>
-          <p:nvPr/>
-        </p:nvSpPr>
-        <p:spPr>
-          <a:xfrm>
-            <a:off x="868680" y="1417320"/>
-            <a:ext cx="6675120" cy="4434840"/>
+            <a:endParaRPr lang="en-US" sz="3400" dirty="0"/>
+          </a:p>
+        </p:txBody>
+      </p:sp>
+      <p:sp>
+        <p:nvSpPr>
+          <p:cNvPr id="11" name="Text 9"/>
+          <p:cNvSpPr/>
+          <p:nvPr/>
+        </p:nvSpPr>
+        <p:spPr>
+          <a:xfrm>
+            <a:off x="868680" y="1508760"/>
+            <a:ext cx="6537960" cy="4160520"/>
           </a:xfrm>
           <a:prstGeom prst="rect">
             <a:avLst/>
@@ -12254,7 +13369,7 @@
           <a:lstStyle/>
           <a:p>
             <a:r>
-              <a:rPr lang="en-US" sz="1700" dirty="0">
+              <a:rPr lang="en-US" sz="2100" dirty="0">
                 <a:solidFill>
                   <a:srgbClr val="17364A"/>
                 </a:solidFill>
@@ -12262,13 +13377,13 @@
                 <a:ea typeface="Aptos" pitchFamily="34" charset="-122"/>
                 <a:cs typeface="Aptos" pitchFamily="34" charset="-120"/>
               </a:rPr>
-              <a:t>AI tools should be evaluated not only by model accuracy, but also by whether they improve public health operations and.</a:t>
-            </a:r>
-            <a:endParaRPr lang="en-US" sz="1700" dirty="0"/>
-          </a:p>
-          <a:p>
-            <a:r>
-              <a:rPr lang="en-US" sz="1700" dirty="0">
+              <a:t>AI tools should be evaluated not only by model accuracy, but also by whether they improve public health.</a:t>
+            </a:r>
+            <a:endParaRPr lang="en-US" sz="2100" dirty="0"/>
+          </a:p>
+          <a:p>
+            <a:r>
+              <a:rPr lang="en-US" sz="2100" dirty="0">
                 <a:solidFill>
                   <a:srgbClr val="17364A"/>
                 </a:solidFill>
@@ -12276,13 +13391,13 @@
                 <a:ea typeface="Aptos" pitchFamily="34" charset="-122"/>
                 <a:cs typeface="Aptos" pitchFamily="34" charset="-120"/>
               </a:rPr>
-              <a:t>This module teaches learners to define measures for timeliness, quality, equity, staff burden, cost, user satisfaction,.</a:t>
-            </a:r>
-            <a:endParaRPr lang="en-US" sz="1700" dirty="0"/>
-          </a:p>
-          <a:p>
-            <a:r>
-              <a:rPr lang="en-US" sz="1700" dirty="0">
+              <a:t>This module teaches learners to define measures for timeliness, quality, equity, staff burden, cost,.</a:t>
+            </a:r>
+            <a:endParaRPr lang="en-US" sz="2100" dirty="0"/>
+          </a:p>
+          <a:p>
+            <a:r>
+              <a:rPr lang="en-US" sz="2100" dirty="0">
                 <a:solidFill>
                   <a:srgbClr val="17364A"/>
                 </a:solidFill>
@@ -12290,15 +13405,15 @@
                 <a:ea typeface="Aptos" pitchFamily="34" charset="-122"/>
                 <a:cs typeface="Aptos" pitchFamily="34" charset="-120"/>
               </a:rPr>
-              <a:t>It helps agencies avoid adopting AI because it is novel and instead assess whether it creates measurable public value.</a:t>
-            </a:r>
-            <a:endParaRPr lang="en-US" sz="1700" dirty="0"/>
-          </a:p>
-        </p:txBody>
-      </p:sp>
-      <p:sp>
-        <p:nvSpPr>
-          <p:cNvPr id="11" name="Shape 9"/>
+              <a:t>It helps agencies avoid adopting AI because it is novel and instead assess whether it creates.</a:t>
+            </a:r>
+            <a:endParaRPr lang="en-US" sz="2100" dirty="0"/>
+          </a:p>
+        </p:txBody>
+      </p:sp>
+      <p:sp>
+        <p:nvSpPr>
+          <p:cNvPr id="12" name="Shape 10"/>
           <p:cNvSpPr/>
           <p:nvPr/>
         </p:nvSpPr>
@@ -12325,14 +13440,14 @@
       </p:sp>
       <p:sp>
         <p:nvSpPr>
-          <p:cNvPr id="12" name="Text 10"/>
+          <p:cNvPr id="13" name="Text 11"/>
           <p:cNvSpPr/>
           <p:nvPr/>
         </p:nvSpPr>
         <p:spPr>
           <a:xfrm>
             <a:off x="8074152" y="1563624"/>
-            <a:ext cx="2825496" cy="201168"/>
+            <a:ext cx="2825496" cy="256032"/>
           </a:xfrm>
           <a:prstGeom prst="rect">
             <a:avLst/>
@@ -12348,7 +13463,7 @@
               <a:buNone/>
             </a:pPr>
             <a:r>
-              <a:rPr lang="en-US" sz="950" b="1" dirty="0">
+              <a:rPr lang="en-US" sz="1300" b="1" dirty="0">
                 <a:solidFill>
                   <a:srgbClr val="0068B7"/>
                 </a:solidFill>
@@ -12358,20 +13473,20 @@
               </a:rPr>
               <a:t>Key idea</a:t>
             </a:r>
-            <a:endParaRPr lang="en-US" sz="950" dirty="0"/>
-          </a:p>
-        </p:txBody>
-      </p:sp>
-      <p:sp>
-        <p:nvSpPr>
-          <p:cNvPr id="13" name="Text 11"/>
-          <p:cNvSpPr/>
-          <p:nvPr/>
-        </p:nvSpPr>
-        <p:spPr>
-          <a:xfrm>
-            <a:off x="8074152" y="1856232"/>
-            <a:ext cx="2825496" cy="1261872"/>
+            <a:endParaRPr lang="en-US" sz="1300" dirty="0"/>
+          </a:p>
+        </p:txBody>
+      </p:sp>
+      <p:sp>
+        <p:nvSpPr>
+          <p:cNvPr id="14" name="Text 12"/>
+          <p:cNvSpPr/>
+          <p:nvPr/>
+        </p:nvSpPr>
+        <p:spPr>
+          <a:xfrm>
+            <a:off x="8074152" y="1920240"/>
+            <a:ext cx="2825496" cy="1188720"/>
           </a:xfrm>
           <a:prstGeom prst="rect">
             <a:avLst/>
@@ -12389,7 +13504,7 @@
               <a:buNone/>
             </a:pPr>
             <a:r>
-              <a:rPr lang="en-US" sz="1250" dirty="0">
+              <a:rPr lang="en-US" sz="1550" dirty="0">
                 <a:solidFill>
                   <a:srgbClr val="17364A"/>
                 </a:solidFill>
@@ -12397,15 +13512,15 @@
                 <a:ea typeface="Aptos" pitchFamily="34" charset="-122"/>
                 <a:cs typeface="Aptos" pitchFamily="34" charset="-120"/>
               </a:rPr>
-              <a:t>AI tools should be evaluated not only by model accuracy, but also by whether they improve public health operations and.</a:t>
-            </a:r>
-            <a:endParaRPr lang="en-US" sz="1250" dirty="0"/>
-          </a:p>
-        </p:txBody>
-      </p:sp>
-      <p:sp>
-        <p:nvSpPr>
-          <p:cNvPr id="14" name="Shape 12"/>
+              <a:t>AI tools should be evaluated not only by model accuracy, but also by whether they improve public health.</a:t>
+            </a:r>
+            <a:endParaRPr lang="en-US" sz="1550" dirty="0"/>
+          </a:p>
+        </p:txBody>
+      </p:sp>
+      <p:sp>
+        <p:nvSpPr>
+          <p:cNvPr id="15" name="Shape 13"/>
           <p:cNvSpPr/>
           <p:nvPr/>
         </p:nvSpPr>
@@ -12432,14 +13547,14 @@
       </p:sp>
       <p:sp>
         <p:nvSpPr>
-          <p:cNvPr id="15" name="Text 13"/>
+          <p:cNvPr id="16" name="Text 14"/>
           <p:cNvSpPr/>
           <p:nvPr/>
         </p:nvSpPr>
         <p:spPr>
           <a:xfrm>
             <a:off x="8074152" y="3666744"/>
-            <a:ext cx="2825496" cy="201168"/>
+            <a:ext cx="2825496" cy="256032"/>
           </a:xfrm>
           <a:prstGeom prst="rect">
             <a:avLst/>
@@ -12455,7 +13570,7 @@
               <a:buNone/>
             </a:pPr>
             <a:r>
-              <a:rPr lang="en-US" sz="950" b="1" dirty="0">
+              <a:rPr lang="en-US" sz="1300" b="1" dirty="0">
                 <a:solidFill>
                   <a:srgbClr val="0068B7"/>
                 </a:solidFill>
@@ -12465,20 +13580,20 @@
               </a:rPr>
               <a:t>Use this for</a:t>
             </a:r>
-            <a:endParaRPr lang="en-US" sz="950" dirty="0"/>
-          </a:p>
-        </p:txBody>
-      </p:sp>
-      <p:sp>
-        <p:nvSpPr>
-          <p:cNvPr id="16" name="Text 14"/>
-          <p:cNvSpPr/>
-          <p:nvPr/>
-        </p:nvSpPr>
-        <p:spPr>
-          <a:xfrm>
-            <a:off x="8074152" y="3959352"/>
-            <a:ext cx="2825496" cy="1170432"/>
+            <a:endParaRPr lang="en-US" sz="1300" dirty="0"/>
+          </a:p>
+        </p:txBody>
+      </p:sp>
+      <p:sp>
+        <p:nvSpPr>
+          <p:cNvPr id="17" name="Text 15"/>
+          <p:cNvSpPr/>
+          <p:nvPr/>
+        </p:nvSpPr>
+        <p:spPr>
+          <a:xfrm>
+            <a:off x="8074152" y="4023360"/>
+            <a:ext cx="2825496" cy="1097280"/>
           </a:xfrm>
           <a:prstGeom prst="rect">
             <a:avLst/>
@@ -12496,7 +13611,7 @@
               <a:buNone/>
             </a:pPr>
             <a:r>
-              <a:rPr lang="en-US" sz="1250" dirty="0">
+              <a:rPr lang="en-US" sz="1550" dirty="0">
                 <a:solidFill>
                   <a:srgbClr val="17364A"/>
                 </a:solidFill>
@@ -12506,7 +13621,7 @@
               </a:rPr>
               <a:t>Connect the concept to public health decisions, safeguards, documentation, or implementation work.</a:t>
             </a:r>
-            <a:endParaRPr lang="en-US" sz="1250" dirty="0"/>
+            <a:endParaRPr lang="en-US" sz="1550" dirty="0"/>
           </a:p>
         </p:txBody>
       </p:sp>
@@ -12703,7 +13818,7 @@
                 <a:ea typeface="Aptos" pitchFamily="34" charset="-122"/>
                 <a:cs typeface="Aptos" pitchFamily="34" charset="-120"/>
               </a:rPr>
-              <a:t>© Paula Soper</a:t>
+              <a:t>Â© Paula Soper</a:t>
             </a:r>
             <a:endParaRPr lang="en-US" sz="800" dirty="0"/>
           </a:p>
@@ -12711,7 +13826,46 @@
       </p:sp>
       <p:sp>
         <p:nvSpPr>
-          <p:cNvPr id="7" name="Shape 5"/>
+          <p:cNvPr id="7" name="Text 5"/>
+          <p:cNvSpPr/>
+          <p:nvPr/>
+        </p:nvSpPr>
+        <p:spPr>
+          <a:xfrm>
+            <a:off x="11137392" y="6510528"/>
+            <a:ext cx="411480" cy="201168"/>
+          </a:xfrm>
+          <a:prstGeom prst="rect">
+            <a:avLst/>
+          </a:prstGeom>
+          <a:noFill/>
+          <a:ln/>
+        </p:spPr>
+        <p:txBody>
+          <a:bodyPr wrap="square" lIns="0" tIns="0" rIns="0" bIns="0" rtlCol="0" anchor="ctr"/>
+          <a:lstStyle/>
+          <a:p>
+            <a:pPr algn="r" indent="0" marL="0">
+              <a:buNone/>
+            </a:pPr>
+            <a:r>
+              <a:rPr lang="en-US" sz="900" dirty="0">
+                <a:solidFill>
+                  <a:srgbClr val="5F7181"/>
+                </a:solidFill>
+                <a:latin typeface="Aptos" pitchFamily="34" charset="0"/>
+                <a:ea typeface="Aptos" pitchFamily="34" charset="-122"/>
+                <a:cs typeface="Aptos" pitchFamily="34" charset="-120"/>
+              </a:rPr>
+              <a:t>8</a:t>
+            </a:r>
+            <a:endParaRPr lang="en-US" sz="900" dirty="0"/>
+          </a:p>
+        </p:txBody>
+      </p:sp>
+      <p:sp>
+        <p:nvSpPr>
+          <p:cNvPr id="8" name="Shape 6"/>
           <p:cNvSpPr/>
           <p:nvPr/>
         </p:nvSpPr>
@@ -12736,7 +13890,7 @@
       </p:sp>
       <p:sp>
         <p:nvSpPr>
-          <p:cNvPr id="8" name="Text 6"/>
+          <p:cNvPr id="9" name="Text 7"/>
           <p:cNvSpPr/>
           <p:nvPr/>
         </p:nvSpPr>
@@ -12775,14 +13929,14 @@
       </p:sp>
       <p:sp>
         <p:nvSpPr>
-          <p:cNvPr id="9" name="Text 7"/>
+          <p:cNvPr id="10" name="Text 8"/>
           <p:cNvSpPr/>
           <p:nvPr/>
         </p:nvSpPr>
         <p:spPr>
           <a:xfrm>
             <a:off x="640080" y="621792"/>
-            <a:ext cx="10881360" cy="566928"/>
+            <a:ext cx="10881360" cy="713232"/>
           </a:xfrm>
           <a:prstGeom prst="rect">
             <a:avLst/>
@@ -12800,7 +13954,7 @@
               <a:buNone/>
             </a:pPr>
             <a:r>
-              <a:rPr lang="en-US" sz="2700" b="1" dirty="0">
+              <a:rPr lang="en-US" sz="3400" b="1" dirty="0">
                 <a:solidFill>
                   <a:srgbClr val="003A63"/>
                 </a:solidFill>
@@ -12810,20 +13964,20 @@
               </a:rPr>
               <a:t>Why This Topic Matters for Public Health AI</a:t>
             </a:r>
-            <a:endParaRPr lang="en-US" sz="2700" dirty="0"/>
-          </a:p>
-        </p:txBody>
-      </p:sp>
-      <p:sp>
-        <p:nvSpPr>
-          <p:cNvPr id="10" name="Text 8"/>
-          <p:cNvSpPr/>
-          <p:nvPr/>
-        </p:nvSpPr>
-        <p:spPr>
-          <a:xfrm>
-            <a:off x="868680" y="1417320"/>
-            <a:ext cx="6675120" cy="4434840"/>
+            <a:endParaRPr lang="en-US" sz="3400" dirty="0"/>
+          </a:p>
+        </p:txBody>
+      </p:sp>
+      <p:sp>
+        <p:nvSpPr>
+          <p:cNvPr id="11" name="Text 9"/>
+          <p:cNvSpPr/>
+          <p:nvPr/>
+        </p:nvSpPr>
+        <p:spPr>
+          <a:xfrm>
+            <a:off x="868680" y="1508760"/>
+            <a:ext cx="6537960" cy="4160520"/>
           </a:xfrm>
           <a:prstGeom prst="rect">
             <a:avLst/>
@@ -12838,7 +13992,7 @@
           <a:lstStyle/>
           <a:p>
             <a:r>
-              <a:rPr lang="en-US" sz="1700" dirty="0">
+              <a:rPr lang="en-US" sz="2100" dirty="0">
                 <a:solidFill>
                   <a:srgbClr val="17364A"/>
                 </a:solidFill>
@@ -12846,13 +14000,13 @@
                 <a:ea typeface="Aptos" pitchFamily="34" charset="-122"/>
                 <a:cs typeface="Aptos" pitchFamily="34" charset="-120"/>
               </a:rPr>
-              <a:t>Measuring AI Value, Performance, and Operational Impact matters because AI systems are embedded in public health programs,.</a:t>
-            </a:r>
-            <a:endParaRPr lang="en-US" sz="1700" dirty="0"/>
-          </a:p>
-          <a:p>
-            <a:r>
-              <a:rPr lang="en-US" sz="1700" dirty="0">
+              <a:t>Measuring AI Value, Performance, and Operational Impact matters because AI systems are embedded in.</a:t>
+            </a:r>
+            <a:endParaRPr lang="en-US" sz="2100" dirty="0"/>
+          </a:p>
+          <a:p>
+            <a:r>
+              <a:rPr lang="en-US" sz="2100" dirty="0">
                 <a:solidFill>
                   <a:srgbClr val="17364A"/>
                 </a:solidFill>
@@ -12862,11 +14016,11 @@
               </a:rPr>
               <a:t>The topic affects whether AI outputs are accurate, explainable, safe, equitable, secure, and sustainable.</a:t>
             </a:r>
-            <a:endParaRPr lang="en-US" sz="1700" dirty="0"/>
-          </a:p>
-          <a:p>
-            <a:r>
-              <a:rPr lang="en-US" sz="1700" dirty="0">
+            <a:endParaRPr lang="en-US" sz="2100" dirty="0"/>
+          </a:p>
+          <a:p>
+            <a:r>
+              <a:rPr lang="en-US" sz="2100" dirty="0">
                 <a:solidFill>
                   <a:srgbClr val="17364A"/>
                 </a:solidFill>
@@ -12876,27 +14030,13 @@
               </a:rPr>
               <a:t>Agencies that ignore this area may create tools that work in a demonstration but fail in actual practice.</a:t>
             </a:r>
-            <a:endParaRPr lang="en-US" sz="1700" dirty="0"/>
-          </a:p>
-          <a:p>
-            <a:r>
-              <a:rPr lang="en-US" sz="1700" dirty="0">
-                <a:solidFill>
-                  <a:srgbClr val="17364A"/>
-                </a:solidFill>
-                <a:latin typeface="Aptos" pitchFamily="34" charset="0"/>
-                <a:ea typeface="Aptos" pitchFamily="34" charset="-122"/>
-                <a:cs typeface="Aptos" pitchFamily="34" charset="-120"/>
-              </a:rPr>
-              <a:t>The topic also affects accountability.</a:t>
-            </a:r>
-            <a:endParaRPr lang="en-US" sz="1700" dirty="0"/>
-          </a:p>
-        </p:txBody>
-      </p:sp>
-      <p:sp>
-        <p:nvSpPr>
-          <p:cNvPr id="11" name="Shape 9"/>
+            <a:endParaRPr lang="en-US" sz="2100" dirty="0"/>
+          </a:p>
+        </p:txBody>
+      </p:sp>
+      <p:sp>
+        <p:nvSpPr>
+          <p:cNvPr id="12" name="Shape 10"/>
           <p:cNvSpPr/>
           <p:nvPr/>
         </p:nvSpPr>
@@ -12923,14 +14063,14 @@
       </p:sp>
       <p:sp>
         <p:nvSpPr>
-          <p:cNvPr id="12" name="Text 10"/>
+          <p:cNvPr id="13" name="Text 11"/>
           <p:cNvSpPr/>
           <p:nvPr/>
         </p:nvSpPr>
         <p:spPr>
           <a:xfrm>
             <a:off x="8074152" y="1563624"/>
-            <a:ext cx="2825496" cy="201168"/>
+            <a:ext cx="2825496" cy="256032"/>
           </a:xfrm>
           <a:prstGeom prst="rect">
             <a:avLst/>
@@ -12946,7 +14086,7 @@
               <a:buNone/>
             </a:pPr>
             <a:r>
-              <a:rPr lang="en-US" sz="950" b="1" dirty="0">
+              <a:rPr lang="en-US" sz="1300" b="1" dirty="0">
                 <a:solidFill>
                   <a:srgbClr val="0068B7"/>
                 </a:solidFill>
@@ -12956,20 +14096,20 @@
               </a:rPr>
               <a:t>Key idea</a:t>
             </a:r>
-            <a:endParaRPr lang="en-US" sz="950" dirty="0"/>
-          </a:p>
-        </p:txBody>
-      </p:sp>
-      <p:sp>
-        <p:nvSpPr>
-          <p:cNvPr id="13" name="Text 11"/>
-          <p:cNvSpPr/>
-          <p:nvPr/>
-        </p:nvSpPr>
-        <p:spPr>
-          <a:xfrm>
-            <a:off x="8074152" y="1856232"/>
-            <a:ext cx="2825496" cy="1261872"/>
+            <a:endParaRPr lang="en-US" sz="1300" dirty="0"/>
+          </a:p>
+        </p:txBody>
+      </p:sp>
+      <p:sp>
+        <p:nvSpPr>
+          <p:cNvPr id="14" name="Text 12"/>
+          <p:cNvSpPr/>
+          <p:nvPr/>
+        </p:nvSpPr>
+        <p:spPr>
+          <a:xfrm>
+            <a:off x="8074152" y="1920240"/>
+            <a:ext cx="2825496" cy="1188720"/>
           </a:xfrm>
           <a:prstGeom prst="rect">
             <a:avLst/>
@@ -12987,7 +14127,7 @@
               <a:buNone/>
             </a:pPr>
             <a:r>
-              <a:rPr lang="en-US" sz="1250" dirty="0">
+              <a:rPr lang="en-US" sz="1550" dirty="0">
                 <a:solidFill>
                   <a:srgbClr val="17364A"/>
                 </a:solidFill>
@@ -12995,15 +14135,15 @@
                 <a:ea typeface="Aptos" pitchFamily="34" charset="-122"/>
                 <a:cs typeface="Aptos" pitchFamily="34" charset="-120"/>
               </a:rPr>
-              <a:t>Measuring AI Value, Performance, and Operational Impact matters because AI systems are embedded in public health programs,.</a:t>
-            </a:r>
-            <a:endParaRPr lang="en-US" sz="1250" dirty="0"/>
-          </a:p>
-        </p:txBody>
-      </p:sp>
-      <p:sp>
-        <p:nvSpPr>
-          <p:cNvPr id="14" name="Shape 12"/>
+              <a:t>Measuring AI Value, Performance, and Operational Impact matters because AI systems are embedded in.</a:t>
+            </a:r>
+            <a:endParaRPr lang="en-US" sz="1550" dirty="0"/>
+          </a:p>
+        </p:txBody>
+      </p:sp>
+      <p:sp>
+        <p:nvSpPr>
+          <p:cNvPr id="15" name="Shape 13"/>
           <p:cNvSpPr/>
           <p:nvPr/>
         </p:nvSpPr>
@@ -13030,14 +14170,14 @@
       </p:sp>
       <p:sp>
         <p:nvSpPr>
-          <p:cNvPr id="15" name="Text 13"/>
+          <p:cNvPr id="16" name="Text 14"/>
           <p:cNvSpPr/>
           <p:nvPr/>
         </p:nvSpPr>
         <p:spPr>
           <a:xfrm>
             <a:off x="8074152" y="3666744"/>
-            <a:ext cx="2825496" cy="201168"/>
+            <a:ext cx="2825496" cy="256032"/>
           </a:xfrm>
           <a:prstGeom prst="rect">
             <a:avLst/>
@@ -13053,7 +14193,7 @@
               <a:buNone/>
             </a:pPr>
             <a:r>
-              <a:rPr lang="en-US" sz="950" b="1" dirty="0">
+              <a:rPr lang="en-US" sz="1300" b="1" dirty="0">
                 <a:solidFill>
                   <a:srgbClr val="0068B7"/>
                 </a:solidFill>
@@ -13063,20 +14203,20 @@
               </a:rPr>
               <a:t>Use this for</a:t>
             </a:r>
-            <a:endParaRPr lang="en-US" sz="950" dirty="0"/>
-          </a:p>
-        </p:txBody>
-      </p:sp>
-      <p:sp>
-        <p:nvSpPr>
-          <p:cNvPr id="16" name="Text 14"/>
-          <p:cNvSpPr/>
-          <p:nvPr/>
-        </p:nvSpPr>
-        <p:spPr>
-          <a:xfrm>
-            <a:off x="8074152" y="3959352"/>
-            <a:ext cx="2825496" cy="1170432"/>
+            <a:endParaRPr lang="en-US" sz="1300" dirty="0"/>
+          </a:p>
+        </p:txBody>
+      </p:sp>
+      <p:sp>
+        <p:nvSpPr>
+          <p:cNvPr id="17" name="Text 15"/>
+          <p:cNvSpPr/>
+          <p:nvPr/>
+        </p:nvSpPr>
+        <p:spPr>
+          <a:xfrm>
+            <a:off x="8074152" y="4023360"/>
+            <a:ext cx="2825496" cy="1097280"/>
           </a:xfrm>
           <a:prstGeom prst="rect">
             <a:avLst/>
@@ -13094,7 +14234,7 @@
               <a:buNone/>
             </a:pPr>
             <a:r>
-              <a:rPr lang="en-US" sz="1250" dirty="0">
+              <a:rPr lang="en-US" sz="1550" dirty="0">
                 <a:solidFill>
                   <a:srgbClr val="17364A"/>
                 </a:solidFill>
@@ -13104,7 +14244,7 @@
               </a:rPr>
               <a:t>Connect the concept to public health decisions, safeguards, documentation, or implementation work.</a:t>
             </a:r>
-            <a:endParaRPr lang="en-US" sz="1250" dirty="0"/>
+            <a:endParaRPr lang="en-US" sz="1550" dirty="0"/>
           </a:p>
         </p:txBody>
       </p:sp>
@@ -13301,7 +14441,7 @@
                 <a:ea typeface="Aptos" pitchFamily="34" charset="-122"/>
                 <a:cs typeface="Aptos" pitchFamily="34" charset="-120"/>
               </a:rPr>
-              <a:t>© Paula Soper</a:t>
+              <a:t>Â© Paula Soper</a:t>
             </a:r>
             <a:endParaRPr lang="en-US" sz="800" dirty="0"/>
           </a:p>
@@ -13309,7 +14449,46 @@
       </p:sp>
       <p:sp>
         <p:nvSpPr>
-          <p:cNvPr id="7" name="Shape 5"/>
+          <p:cNvPr id="7" name="Text 5"/>
+          <p:cNvSpPr/>
+          <p:nvPr/>
+        </p:nvSpPr>
+        <p:spPr>
+          <a:xfrm>
+            <a:off x="11137392" y="6510528"/>
+            <a:ext cx="411480" cy="201168"/>
+          </a:xfrm>
+          <a:prstGeom prst="rect">
+            <a:avLst/>
+          </a:prstGeom>
+          <a:noFill/>
+          <a:ln/>
+        </p:spPr>
+        <p:txBody>
+          <a:bodyPr wrap="square" lIns="0" tIns="0" rIns="0" bIns="0" rtlCol="0" anchor="ctr"/>
+          <a:lstStyle/>
+          <a:p>
+            <a:pPr algn="r" indent="0" marL="0">
+              <a:buNone/>
+            </a:pPr>
+            <a:r>
+              <a:rPr lang="en-US" sz="900" dirty="0">
+                <a:solidFill>
+                  <a:srgbClr val="5F7181"/>
+                </a:solidFill>
+                <a:latin typeface="Aptos" pitchFamily="34" charset="0"/>
+                <a:ea typeface="Aptos" pitchFamily="34" charset="-122"/>
+                <a:cs typeface="Aptos" pitchFamily="34" charset="-120"/>
+              </a:rPr>
+              <a:t>9</a:t>
+            </a:r>
+            <a:endParaRPr lang="en-US" sz="900" dirty="0"/>
+          </a:p>
+        </p:txBody>
+      </p:sp>
+      <p:sp>
+        <p:nvSpPr>
+          <p:cNvPr id="8" name="Shape 6"/>
           <p:cNvSpPr/>
           <p:nvPr/>
         </p:nvSpPr>
@@ -13334,7 +14513,7 @@
       </p:sp>
       <p:sp>
         <p:nvSpPr>
-          <p:cNvPr id="8" name="Text 6"/>
+          <p:cNvPr id="9" name="Text 7"/>
           <p:cNvSpPr/>
           <p:nvPr/>
         </p:nvSpPr>
@@ -13373,14 +14552,14 @@
       </p:sp>
       <p:sp>
         <p:nvSpPr>
-          <p:cNvPr id="9" name="Text 7"/>
+          <p:cNvPr id="10" name="Text 8"/>
           <p:cNvSpPr/>
           <p:nvPr/>
         </p:nvSpPr>
         <p:spPr>
           <a:xfrm>
             <a:off x="640080" y="621792"/>
-            <a:ext cx="10881360" cy="566928"/>
+            <a:ext cx="10881360" cy="713232"/>
           </a:xfrm>
           <a:prstGeom prst="rect">
             <a:avLst/>
@@ -13398,7 +14577,7 @@
               <a:buNone/>
             </a:pPr>
             <a:r>
-              <a:rPr lang="en-US" sz="2700" b="1" dirty="0">
+              <a:rPr lang="en-US" sz="3400" b="1" dirty="0">
                 <a:solidFill>
                   <a:srgbClr val="003A63"/>
                 </a:solidFill>
@@ -13408,20 +14587,20 @@
               </a:rPr>
               <a:t>Core Concepts</a:t>
             </a:r>
-            <a:endParaRPr lang="en-US" sz="2700" dirty="0"/>
-          </a:p>
-        </p:txBody>
-      </p:sp>
-      <p:sp>
-        <p:nvSpPr>
-          <p:cNvPr id="10" name="Text 8"/>
-          <p:cNvSpPr/>
-          <p:nvPr/>
-        </p:nvSpPr>
-        <p:spPr>
-          <a:xfrm>
-            <a:off x="868680" y="1417320"/>
-            <a:ext cx="6675120" cy="4434840"/>
+            <a:endParaRPr lang="en-US" sz="3400" dirty="0"/>
+          </a:p>
+        </p:txBody>
+      </p:sp>
+      <p:sp>
+        <p:nvSpPr>
+          <p:cNvPr id="11" name="Text 9"/>
+          <p:cNvSpPr/>
+          <p:nvPr/>
+        </p:nvSpPr>
+        <p:spPr>
+          <a:xfrm>
+            <a:off x="868680" y="1508760"/>
+            <a:ext cx="6537960" cy="4160520"/>
           </a:xfrm>
           <a:prstGeom prst="rect">
             <a:avLst/>
@@ -13436,7 +14615,7 @@
           <a:lstStyle/>
           <a:p>
             <a:r>
-              <a:rPr lang="en-US" sz="1700" dirty="0">
+              <a:rPr lang="en-US" sz="2100" dirty="0">
                 <a:solidFill>
                   <a:srgbClr val="17364A"/>
                 </a:solidFill>
@@ -13444,13 +14623,13 @@
                 <a:ea typeface="Aptos" pitchFamily="34" charset="-122"/>
                 <a:cs typeface="Aptos" pitchFamily="34" charset="-120"/>
               </a:rPr>
-              <a:t>AI value is the benefit created by an AI-supported workflow relative to its costs, risks, and alternatives.</a:t>
-            </a:r>
-            <a:endParaRPr lang="en-US" sz="1700" dirty="0"/>
-          </a:p>
-          <a:p>
-            <a:r>
-              <a:rPr lang="en-US" sz="1700" dirty="0">
+              <a:t>AI value is the benefit created by an AI-supported workflow relative to its costs, risks, and.</a:t>
+            </a:r>
+            <a:endParaRPr lang="en-US" sz="2100" dirty="0"/>
+          </a:p>
+          <a:p>
+            <a:r>
+              <a:rPr lang="en-US" sz="2100" dirty="0">
                 <a:solidFill>
                   <a:srgbClr val="17364A"/>
                 </a:solidFill>
@@ -13458,13 +14637,13 @@
                 <a:ea typeface="Aptos" pitchFamily="34" charset="-122"/>
                 <a:cs typeface="Aptos" pitchFamily="34" charset="-120"/>
               </a:rPr>
-              <a:t>Value may include faster response, improved quality, reduced burden, better access, stronger equity, improved.</a:t>
-            </a:r>
-            <a:endParaRPr lang="en-US" sz="1700" dirty="0"/>
-          </a:p>
-          <a:p>
-            <a:r>
-              <a:rPr lang="en-US" sz="1700" dirty="0">
+              <a:t>Value may include faster response, improved quality, reduced burden, better access, stronger equity,.</a:t>
+            </a:r>
+            <a:endParaRPr lang="en-US" sz="2100" dirty="0"/>
+          </a:p>
+          <a:p>
+            <a:r>
+              <a:rPr lang="en-US" sz="2100" dirty="0">
                 <a:solidFill>
                   <a:srgbClr val="17364A"/>
                 </a:solidFill>
@@ -13474,27 +14653,13 @@
               </a:rPr>
               <a:t>Model performance measures how well the AI system performs a technical task.</a:t>
             </a:r>
-            <a:endParaRPr lang="en-US" sz="1700" dirty="0"/>
-          </a:p>
-          <a:p>
-            <a:r>
-              <a:rPr lang="en-US" sz="1700" dirty="0">
-                <a:solidFill>
-                  <a:srgbClr val="17364A"/>
-                </a:solidFill>
-                <a:latin typeface="Aptos" pitchFamily="34" charset="0"/>
-                <a:ea typeface="Aptos" pitchFamily="34" charset="-122"/>
-                <a:cs typeface="Aptos" pitchFamily="34" charset="-120"/>
-              </a:rPr>
-              <a:t>Operational impact measures whether the workflow actually improves public health practice.</a:t>
-            </a:r>
-            <a:endParaRPr lang="en-US" sz="1700" dirty="0"/>
-          </a:p>
-        </p:txBody>
-      </p:sp>
-      <p:sp>
-        <p:nvSpPr>
-          <p:cNvPr id="11" name="Shape 9"/>
+            <a:endParaRPr lang="en-US" sz="2100" dirty="0"/>
+          </a:p>
+        </p:txBody>
+      </p:sp>
+      <p:sp>
+        <p:nvSpPr>
+          <p:cNvPr id="12" name="Shape 10"/>
           <p:cNvSpPr/>
           <p:nvPr/>
         </p:nvSpPr>
@@ -13521,14 +14686,14 @@
       </p:sp>
       <p:sp>
         <p:nvSpPr>
-          <p:cNvPr id="12" name="Text 10"/>
+          <p:cNvPr id="13" name="Text 11"/>
           <p:cNvSpPr/>
           <p:nvPr/>
         </p:nvSpPr>
         <p:spPr>
           <a:xfrm>
             <a:off x="8074152" y="1563624"/>
-            <a:ext cx="2825496" cy="201168"/>
+            <a:ext cx="2825496" cy="256032"/>
           </a:xfrm>
           <a:prstGeom prst="rect">
             <a:avLst/>
@@ -13544,7 +14709,7 @@
               <a:buNone/>
             </a:pPr>
             <a:r>
-              <a:rPr lang="en-US" sz="950" b="1" dirty="0">
+              <a:rPr lang="en-US" sz="1300" b="1" dirty="0">
                 <a:solidFill>
                   <a:srgbClr val="0068B7"/>
                 </a:solidFill>
@@ -13554,20 +14719,20 @@
               </a:rPr>
               <a:t>Key idea</a:t>
             </a:r>
-            <a:endParaRPr lang="en-US" sz="950" dirty="0"/>
-          </a:p>
-        </p:txBody>
-      </p:sp>
-      <p:sp>
-        <p:nvSpPr>
-          <p:cNvPr id="13" name="Text 11"/>
-          <p:cNvSpPr/>
-          <p:nvPr/>
-        </p:nvSpPr>
-        <p:spPr>
-          <a:xfrm>
-            <a:off x="8074152" y="1856232"/>
-            <a:ext cx="2825496" cy="1261872"/>
+            <a:endParaRPr lang="en-US" sz="1300" dirty="0"/>
+          </a:p>
+        </p:txBody>
+      </p:sp>
+      <p:sp>
+        <p:nvSpPr>
+          <p:cNvPr id="14" name="Text 12"/>
+          <p:cNvSpPr/>
+          <p:nvPr/>
+        </p:nvSpPr>
+        <p:spPr>
+          <a:xfrm>
+            <a:off x="8074152" y="1920240"/>
+            <a:ext cx="2825496" cy="1188720"/>
           </a:xfrm>
           <a:prstGeom prst="rect">
             <a:avLst/>
@@ -13585,7 +14750,7 @@
               <a:buNone/>
             </a:pPr>
             <a:r>
-              <a:rPr lang="en-US" sz="1250" dirty="0">
+              <a:rPr lang="en-US" sz="1550" dirty="0">
                 <a:solidFill>
                   <a:srgbClr val="17364A"/>
                 </a:solidFill>
@@ -13593,15 +14758,15 @@
                 <a:ea typeface="Aptos" pitchFamily="34" charset="-122"/>
                 <a:cs typeface="Aptos" pitchFamily="34" charset="-120"/>
               </a:rPr>
-              <a:t>AI value is the benefit created by an AI-supported workflow relative to its costs, risks, and alternatives.</a:t>
-            </a:r>
-            <a:endParaRPr lang="en-US" sz="1250" dirty="0"/>
-          </a:p>
-        </p:txBody>
-      </p:sp>
-      <p:sp>
-        <p:nvSpPr>
-          <p:cNvPr id="14" name="Shape 12"/>
+              <a:t>AI value is the benefit created by an AI-supported workflow relative to its costs, risks, and.</a:t>
+            </a:r>
+            <a:endParaRPr lang="en-US" sz="1550" dirty="0"/>
+          </a:p>
+        </p:txBody>
+      </p:sp>
+      <p:sp>
+        <p:nvSpPr>
+          <p:cNvPr id="15" name="Shape 13"/>
           <p:cNvSpPr/>
           <p:nvPr/>
         </p:nvSpPr>
@@ -13628,14 +14793,14 @@
       </p:sp>
       <p:sp>
         <p:nvSpPr>
-          <p:cNvPr id="15" name="Text 13"/>
+          <p:cNvPr id="16" name="Text 14"/>
           <p:cNvSpPr/>
           <p:nvPr/>
         </p:nvSpPr>
         <p:spPr>
           <a:xfrm>
             <a:off x="8074152" y="3666744"/>
-            <a:ext cx="2825496" cy="201168"/>
+            <a:ext cx="2825496" cy="256032"/>
           </a:xfrm>
           <a:prstGeom prst="rect">
             <a:avLst/>
@@ -13651,7 +14816,7 @@
               <a:buNone/>
             </a:pPr>
             <a:r>
-              <a:rPr lang="en-US" sz="950" b="1" dirty="0">
+              <a:rPr lang="en-US" sz="1300" b="1" dirty="0">
                 <a:solidFill>
                   <a:srgbClr val="0068B7"/>
                 </a:solidFill>
@@ -13661,20 +14826,20 @@
               </a:rPr>
               <a:t>Use this for</a:t>
             </a:r>
-            <a:endParaRPr lang="en-US" sz="950" dirty="0"/>
-          </a:p>
-        </p:txBody>
-      </p:sp>
-      <p:sp>
-        <p:nvSpPr>
-          <p:cNvPr id="16" name="Text 14"/>
-          <p:cNvSpPr/>
-          <p:nvPr/>
-        </p:nvSpPr>
-        <p:spPr>
-          <a:xfrm>
-            <a:off x="8074152" y="3959352"/>
-            <a:ext cx="2825496" cy="1170432"/>
+            <a:endParaRPr lang="en-US" sz="1300" dirty="0"/>
+          </a:p>
+        </p:txBody>
+      </p:sp>
+      <p:sp>
+        <p:nvSpPr>
+          <p:cNvPr id="17" name="Text 15"/>
+          <p:cNvSpPr/>
+          <p:nvPr/>
+        </p:nvSpPr>
+        <p:spPr>
+          <a:xfrm>
+            <a:off x="8074152" y="4023360"/>
+            <a:ext cx="2825496" cy="1097280"/>
           </a:xfrm>
           <a:prstGeom prst="rect">
             <a:avLst/>
@@ -13692,7 +14857,7 @@
               <a:buNone/>
             </a:pPr>
             <a:r>
-              <a:rPr lang="en-US" sz="1250" dirty="0">
+              <a:rPr lang="en-US" sz="1550" dirty="0">
                 <a:solidFill>
                   <a:srgbClr val="17364A"/>
                 </a:solidFill>
@@ -13702,7 +14867,7 @@
               </a:rPr>
               <a:t>Connect the concept to public health decisions, safeguards, documentation, or implementation work.</a:t>
             </a:r>
-            <a:endParaRPr lang="en-US" sz="1250" dirty="0"/>
+            <a:endParaRPr lang="en-US" sz="1550" dirty="0"/>
           </a:p>
         </p:txBody>
       </p:sp>
